--- a/documents/명함제작/[2026 우리가치(WeValue) QI 활동 프로젝트 명함 14층(앞).pptx
+++ b/documents/명함제작/[2026 우리가치(WeValue) QI 활동 프로젝트 명함 14층(앞).pptx
@@ -2,20 +2,20 @@
 <file path=ppt/presentation.xml><?xml version="1.0" encoding="utf-8"?>
 <p:presentation xmlns:a="http://schemas.openxmlformats.org/drawingml/2006/main" xmlns:r="http://schemas.openxmlformats.org/officeDocument/2006/relationships" xmlns:p="http://schemas.openxmlformats.org/presentationml/2006/main" saveSubsetFonts="1">
   <p:sldMasterIdLst>
-    <p:sldMasterId id="2147483896" r:id="rId1"/>
+    <p:sldMasterId id="2147483909" r:id="rId1"/>
   </p:sldMasterIdLst>
   <p:notesMasterIdLst>
     <p:notesMasterId r:id="rId8"/>
   </p:notesMasterIdLst>
   <p:sldIdLst>
-    <p:sldId id="262" r:id="rId2"/>
-    <p:sldId id="263" r:id="rId3"/>
-    <p:sldId id="264" r:id="rId4"/>
-    <p:sldId id="265" r:id="rId5"/>
-    <p:sldId id="266" r:id="rId6"/>
-    <p:sldId id="267" r:id="rId7"/>
+    <p:sldId id="268" r:id="rId2"/>
+    <p:sldId id="269" r:id="rId3"/>
+    <p:sldId id="270" r:id="rId4"/>
+    <p:sldId id="271" r:id="rId5"/>
+    <p:sldId id="272" r:id="rId6"/>
+    <p:sldId id="273" r:id="rId7"/>
   </p:sldIdLst>
-  <p:sldSz cx="9144000" cy="5143500" type="screen16x9"/>
+  <p:sldSz cx="9180513" cy="5143500"/>
   <p:notesSz cx="6858000" cy="9945688"/>
   <p:defaultTextStyle>
     <a:defPPr>
@@ -130,17 +130,17 @@
             <a:srgbClr val="A4A3A4"/>
           </p15:clr>
         </p15:guide>
-        <p15:guide id="8" pos="2880" userDrawn="1">
+        <p15:guide id="8" pos="2892" userDrawn="1">
           <p15:clr>
             <a:srgbClr val="A4A3A4"/>
           </p15:clr>
         </p15:guide>
-        <p15:guide id="9" pos="371" userDrawn="1">
+        <p15:guide id="9" pos="372" userDrawn="1">
           <p15:clr>
             <a:srgbClr val="A4A3A4"/>
           </p15:clr>
         </p15:guide>
-        <p15:guide id="10" pos="5389" userDrawn="1">
+        <p15:guide id="10" pos="5411" userDrawn="1">
           <p15:clr>
             <a:srgbClr val="A4A3A4"/>
           </p15:clr>
@@ -233,7 +233,7 @@
           <a:p>
             <a:fld id="{F929F65E-AEE7-45C5-814B-4468CAF1E537}" type="datetimeFigureOut">
               <a:rPr lang="ko-KR" altLang="en-US" smtClean="0"/>
-              <a:t>2026-03-11</a:t>
+              <a:t>2026-04-09</a:t>
             </a:fld>
             <a:endParaRPr lang="ko-KR" altLang="en-US"/>
           </a:p>
@@ -251,8 +251,8 @@
         </p:nvSpPr>
         <p:spPr>
           <a:xfrm>
-            <a:off x="444500" y="1241425"/>
-            <a:ext cx="5969000" cy="3359150"/>
+            <a:off x="431800" y="1241425"/>
+            <a:ext cx="5994400" cy="3359150"/>
           </a:xfrm>
           <a:prstGeom prst="rect">
             <a:avLst/>
@@ -529,8 +529,8 @@
         </p:nvSpPr>
         <p:spPr>
           <a:xfrm>
-            <a:off x="1143000" y="841772"/>
-            <a:ext cx="6858000" cy="1790700"/>
+            <a:off x="1147564" y="841772"/>
+            <a:ext cx="6885385" cy="1790700"/>
           </a:xfrm>
         </p:spPr>
         <p:txBody>
@@ -561,8 +561,8 @@
         </p:nvSpPr>
         <p:spPr>
           <a:xfrm>
-            <a:off x="1143000" y="2701528"/>
-            <a:ext cx="6858000" cy="1241822"/>
+            <a:off x="1147564" y="2701528"/>
+            <a:ext cx="6885385" cy="1241822"/>
           </a:xfrm>
         </p:spPr>
         <p:txBody>
@@ -631,7 +631,7 @@
           <a:p>
             <a:fld id="{149F34B4-7175-41BD-B98B-2E7021201D7D}" type="datetimeFigureOut">
               <a:rPr lang="ko-KR" altLang="en-US" smtClean="0"/>
-              <a:t>2026-03-11</a:t>
+              <a:t>2026-04-09</a:t>
             </a:fld>
             <a:endParaRPr lang="ko-KR" altLang="en-US"/>
           </a:p>
@@ -682,7 +682,7 @@
     </p:spTree>
     <p:extLst>
       <p:ext uri="{BB962C8B-B14F-4D97-AF65-F5344CB8AC3E}">
-        <p14:creationId xmlns:p14="http://schemas.microsoft.com/office/powerpoint/2010/main" val="3817921025"/>
+        <p14:creationId xmlns:p14="http://schemas.microsoft.com/office/powerpoint/2010/main" val="3717411595"/>
       </p:ext>
     </p:extLst>
   </p:cSld>
@@ -750,35 +750,35 @@
             <a:pPr lvl="0"/>
             <a:r>
               <a:rPr lang="ko-KR" altLang="en-US"/>
-              <a:t>마스터 텍스트 스타일 편집</a:t>
+              <a:t>마스터 텍스트 스타일을 편집하려면 클릭</a:t>
             </a:r>
           </a:p>
           <a:p>
             <a:pPr lvl="1"/>
             <a:r>
               <a:rPr lang="ko-KR" altLang="en-US"/>
-              <a:t>둘째 수준</a:t>
+              <a:t>두 번째 수준</a:t>
             </a:r>
           </a:p>
           <a:p>
             <a:pPr lvl="2"/>
             <a:r>
               <a:rPr lang="ko-KR" altLang="en-US"/>
-              <a:t>셋째 수준</a:t>
+              <a:t>세 번째 수준</a:t>
             </a:r>
           </a:p>
           <a:p>
             <a:pPr lvl="3"/>
             <a:r>
               <a:rPr lang="ko-KR" altLang="en-US"/>
-              <a:t>넷째 수준</a:t>
+              <a:t>네 번째 수준</a:t>
             </a:r>
           </a:p>
           <a:p>
             <a:pPr lvl="4"/>
             <a:r>
               <a:rPr lang="ko-KR" altLang="en-US"/>
-              <a:t>다섯째 수준</a:t>
+              <a:t>다섯 번째 수준</a:t>
             </a:r>
             <a:endParaRPr lang="en-US" dirty="0"/>
           </a:p>
@@ -801,7 +801,7 @@
           <a:p>
             <a:fld id="{149F34B4-7175-41BD-B98B-2E7021201D7D}" type="datetimeFigureOut">
               <a:rPr lang="ko-KR" altLang="en-US" smtClean="0"/>
-              <a:t>2026-03-11</a:t>
+              <a:t>2026-04-09</a:t>
             </a:fld>
             <a:endParaRPr lang="ko-KR" altLang="en-US"/>
           </a:p>
@@ -852,7 +852,7 @@
     </p:spTree>
     <p:extLst>
       <p:ext uri="{BB962C8B-B14F-4D97-AF65-F5344CB8AC3E}">
-        <p14:creationId xmlns:p14="http://schemas.microsoft.com/office/powerpoint/2010/main" val="1322735655"/>
+        <p14:creationId xmlns:p14="http://schemas.microsoft.com/office/powerpoint/2010/main" val="941987249"/>
       </p:ext>
     </p:extLst>
   </p:cSld>
@@ -891,8 +891,8 @@
         </p:nvSpPr>
         <p:spPr>
           <a:xfrm>
-            <a:off x="6543675" y="273844"/>
-            <a:ext cx="1971675" cy="4358879"/>
+            <a:off x="6569805" y="273844"/>
+            <a:ext cx="1979548" cy="4358879"/>
           </a:xfrm>
         </p:spPr>
         <p:txBody>
@@ -919,8 +919,8 @@
         </p:nvSpPr>
         <p:spPr>
           <a:xfrm>
-            <a:off x="628650" y="273844"/>
-            <a:ext cx="5800725" cy="4358879"/>
+            <a:off x="631160" y="273844"/>
+            <a:ext cx="5823888" cy="4358879"/>
           </a:xfrm>
         </p:spPr>
         <p:txBody>
@@ -930,35 +930,35 @@
             <a:pPr lvl="0"/>
             <a:r>
               <a:rPr lang="ko-KR" altLang="en-US"/>
-              <a:t>마스터 텍스트 스타일 편집</a:t>
+              <a:t>마스터 텍스트 스타일을 편집하려면 클릭</a:t>
             </a:r>
           </a:p>
           <a:p>
             <a:pPr lvl="1"/>
             <a:r>
               <a:rPr lang="ko-KR" altLang="en-US"/>
-              <a:t>둘째 수준</a:t>
+              <a:t>두 번째 수준</a:t>
             </a:r>
           </a:p>
           <a:p>
             <a:pPr lvl="2"/>
             <a:r>
               <a:rPr lang="ko-KR" altLang="en-US"/>
-              <a:t>셋째 수준</a:t>
+              <a:t>세 번째 수준</a:t>
             </a:r>
           </a:p>
           <a:p>
             <a:pPr lvl="3"/>
             <a:r>
               <a:rPr lang="ko-KR" altLang="en-US"/>
-              <a:t>넷째 수준</a:t>
+              <a:t>네 번째 수준</a:t>
             </a:r>
           </a:p>
           <a:p>
             <a:pPr lvl="4"/>
             <a:r>
               <a:rPr lang="ko-KR" altLang="en-US"/>
-              <a:t>다섯째 수준</a:t>
+              <a:t>다섯 번째 수준</a:t>
             </a:r>
             <a:endParaRPr lang="en-US" dirty="0"/>
           </a:p>
@@ -981,7 +981,7 @@
           <a:p>
             <a:fld id="{149F34B4-7175-41BD-B98B-2E7021201D7D}" type="datetimeFigureOut">
               <a:rPr lang="ko-KR" altLang="en-US" smtClean="0"/>
-              <a:t>2026-03-11</a:t>
+              <a:t>2026-04-09</a:t>
             </a:fld>
             <a:endParaRPr lang="ko-KR" altLang="en-US"/>
           </a:p>
@@ -1032,7 +1032,7 @@
     </p:spTree>
     <p:extLst>
       <p:ext uri="{BB962C8B-B14F-4D97-AF65-F5344CB8AC3E}">
-        <p14:creationId xmlns:p14="http://schemas.microsoft.com/office/powerpoint/2010/main" val="2691571253"/>
+        <p14:creationId xmlns:p14="http://schemas.microsoft.com/office/powerpoint/2010/main" val="3104011220"/>
       </p:ext>
     </p:extLst>
   </p:cSld>
@@ -1073,8 +1073,8 @@
         </p:nvSpPr>
         <p:spPr>
           <a:xfrm>
-            <a:off x="6" y="4"/>
-            <a:ext cx="9163051" cy="5143500"/>
+            <a:off x="7" y="4"/>
+            <a:ext cx="9199640" cy="5143500"/>
           </a:xfrm>
           <a:prstGeom prst="rect">
             <a:avLst/>
@@ -1109,7 +1109,7 @@
           <a:lstStyle/>
           <a:p>
             <a:pPr algn="ctr"/>
-            <a:endParaRPr lang="ko-KR" altLang="en-US" sz="337" dirty="0"/>
+            <a:endParaRPr lang="ko-KR" altLang="en-US" sz="338" dirty="0"/>
           </a:p>
         </p:txBody>
       </p:sp>
@@ -1127,8 +1127,8 @@
         </p:nvSpPr>
         <p:spPr>
           <a:xfrm>
-            <a:off x="84410" y="87096"/>
-            <a:ext cx="8980814" cy="4938477"/>
+            <a:off x="84747" y="87097"/>
+            <a:ext cx="9016675" cy="4938477"/>
           </a:xfrm>
           <a:prstGeom prst="rect">
             <a:avLst/>
@@ -1161,7 +1161,7 @@
           <a:lstStyle/>
           <a:p>
             <a:pPr algn="ctr"/>
-            <a:endParaRPr lang="ko-KR" altLang="en-US" sz="337"/>
+            <a:endParaRPr lang="ko-KR" altLang="en-US" sz="338"/>
           </a:p>
         </p:txBody>
       </p:sp>
@@ -1187,8 +1187,8 @@
         </p:blipFill>
         <p:spPr>
           <a:xfrm>
-            <a:off x="7876114" y="233109"/>
-            <a:ext cx="1024897" cy="580120"/>
+            <a:off x="7907564" y="233109"/>
+            <a:ext cx="1028990" cy="580120"/>
           </a:xfrm>
           <a:prstGeom prst="rect">
             <a:avLst/>
@@ -1214,8 +1214,8 @@
         </p:nvSpPr>
         <p:spPr>
           <a:xfrm>
-            <a:off x="5921635" y="4485446"/>
-            <a:ext cx="3222369" cy="309444"/>
+            <a:off x="5945281" y="4485446"/>
+            <a:ext cx="3235236" cy="309444"/>
           </a:xfrm>
           <a:prstGeom prst="rect">
             <a:avLst/>
@@ -1230,7 +1230,7 @@
           <a:p>
             <a:pPr algn="r"/>
             <a:r>
-              <a:rPr lang="ko-KR" altLang="en-US" sz="1411" b="1" dirty="0">
+              <a:rPr lang="ko-KR" altLang="en-US" sz="1417" b="1" dirty="0">
                 <a:solidFill>
                   <a:srgbClr val="4472C4"/>
                 </a:solidFill>
@@ -1239,7 +1239,7 @@
               </a:rPr>
               <a:t>진료지원간호팀</a:t>
             </a:r>
-            <a:endParaRPr lang="ko-KR" altLang="en-US" sz="1694" b="1" dirty="0">
+            <a:endParaRPr lang="ko-KR" altLang="en-US" sz="1701" b="1" dirty="0">
               <a:solidFill>
                 <a:srgbClr val="4472C4"/>
               </a:solidFill>
@@ -1252,14 +1252,14 @@
     </p:spTree>
     <p:extLst>
       <p:ext uri="{BB962C8B-B14F-4D97-AF65-F5344CB8AC3E}">
-        <p14:creationId xmlns:p14="http://schemas.microsoft.com/office/powerpoint/2010/main" val="1940942826"/>
+        <p14:creationId xmlns:p14="http://schemas.microsoft.com/office/powerpoint/2010/main" val="1415762976"/>
       </p:ext>
     </p:extLst>
   </p:cSld>
   <p:clrMapOvr>
     <a:masterClrMapping/>
   </p:clrMapOvr>
-  <p:extLst mod="1">
+  <p:extLst>
     <p:ext uri="{DCECCB84-F9BA-43D5-87BE-67443E8EF086}">
       <p15:sldGuideLst xmlns:p15="http://schemas.microsoft.com/office/powerpoint/2012/main">
         <p15:guide id="1" orient="horz" pos="1620">
@@ -1267,7 +1267,7 @@
             <a:srgbClr val="FBAE40"/>
           </p15:clr>
         </p15:guide>
-        <p15:guide id="2" pos="2880">
+        <p15:guide id="2" pos="2892">
           <p15:clr>
             <a:srgbClr val="FBAE40"/>
           </p15:clr>
@@ -1309,8 +1309,8 @@
         </p:nvSpPr>
         <p:spPr>
           <a:xfrm>
-            <a:off x="6" y="4"/>
-            <a:ext cx="9163051" cy="5143500"/>
+            <a:off x="7" y="4"/>
+            <a:ext cx="9199640" cy="5143500"/>
           </a:xfrm>
           <a:prstGeom prst="rect">
             <a:avLst/>
@@ -1345,7 +1345,7 @@
           <a:lstStyle/>
           <a:p>
             <a:pPr algn="ctr"/>
-            <a:endParaRPr lang="ko-KR" altLang="en-US" sz="337" dirty="0"/>
+            <a:endParaRPr lang="ko-KR" altLang="en-US" sz="338" dirty="0"/>
           </a:p>
         </p:txBody>
       </p:sp>
@@ -1363,8 +1363,8 @@
         </p:nvSpPr>
         <p:spPr>
           <a:xfrm>
-            <a:off x="128346" y="49983"/>
-            <a:ext cx="8901360" cy="5041463"/>
+            <a:off x="128859" y="49984"/>
+            <a:ext cx="8936904" cy="5041463"/>
           </a:xfrm>
           <a:prstGeom prst="rect">
             <a:avLst/>
@@ -1397,7 +1397,7 @@
           <a:lstStyle/>
           <a:p>
             <a:pPr algn="ctr"/>
-            <a:endParaRPr lang="ko-KR" altLang="en-US" sz="337"/>
+            <a:endParaRPr lang="ko-KR" altLang="en-US" sz="338"/>
           </a:p>
         </p:txBody>
       </p:sp>
@@ -1423,8 +1423,8 @@
         </p:blipFill>
         <p:spPr>
           <a:xfrm>
-            <a:off x="7985259" y="83528"/>
-            <a:ext cx="915751" cy="216029"/>
+            <a:off x="8017145" y="83529"/>
+            <a:ext cx="919408" cy="216029"/>
           </a:xfrm>
           <a:prstGeom prst="rect">
             <a:avLst/>
@@ -1450,8 +1450,8 @@
         </p:nvSpPr>
         <p:spPr>
           <a:xfrm>
-            <a:off x="8458259" y="4819774"/>
-            <a:ext cx="442750" cy="180306"/>
+            <a:off x="8525832" y="4819774"/>
+            <a:ext cx="410720" cy="180690"/>
           </a:xfrm>
           <a:prstGeom prst="rect">
             <a:avLst/>
@@ -1466,7 +1466,7 @@
           <a:p>
             <a:pPr algn="r"/>
             <a:r>
-              <a:rPr lang="ko-KR" altLang="en-US" sz="286" b="1" dirty="0">
+              <a:rPr lang="ko-KR" altLang="en-US" sz="287" b="1" dirty="0">
                 <a:solidFill>
                   <a:srgbClr val="4472C4"/>
                 </a:solidFill>
@@ -1475,7 +1475,7 @@
               </a:rPr>
               <a:t>진료지원간호팀</a:t>
             </a:r>
-            <a:endParaRPr lang="en-US" altLang="ko-KR" sz="286" b="1" dirty="0">
+            <a:endParaRPr lang="en-US" altLang="ko-KR" sz="287" b="1" dirty="0">
               <a:solidFill>
                 <a:srgbClr val="4472C4"/>
               </a:solidFill>
@@ -1486,7 +1486,7 @@
           <a:p>
             <a:pPr algn="r"/>
             <a:r>
-              <a:rPr lang="ko-KR" altLang="en-US" sz="286" b="1" dirty="0">
+              <a:rPr lang="ko-KR" altLang="en-US" sz="287" b="1" dirty="0">
                 <a:solidFill>
                   <a:srgbClr val="4472C4"/>
                 </a:solidFill>
@@ -1508,7 +1508,7 @@
   <p:clrMapOvr>
     <a:masterClrMapping/>
   </p:clrMapOvr>
-  <p:extLst mod="1">
+  <p:extLst>
     <p:ext uri="{DCECCB84-F9BA-43D5-87BE-67443E8EF086}">
       <p15:sldGuideLst xmlns:p15="http://schemas.microsoft.com/office/powerpoint/2012/main">
         <p15:guide id="1" orient="horz" pos="1620" userDrawn="1">
@@ -1516,7 +1516,7 @@
             <a:srgbClr val="FBAE40"/>
           </p15:clr>
         </p15:guide>
-        <p15:guide id="2" pos="2880" userDrawn="1">
+        <p15:guide id="2" pos="2892" userDrawn="1">
           <p15:clr>
             <a:srgbClr val="FBAE40"/>
           </p15:clr>
@@ -1558,8 +1558,8 @@
         </p:nvSpPr>
         <p:spPr>
           <a:xfrm>
-            <a:off x="6" y="4"/>
-            <a:ext cx="9163051" cy="5143500"/>
+            <a:off x="7" y="4"/>
+            <a:ext cx="9199640" cy="5143500"/>
           </a:xfrm>
           <a:prstGeom prst="rect">
             <a:avLst/>
@@ -1594,7 +1594,7 @@
           <a:lstStyle/>
           <a:p>
             <a:pPr algn="ctr"/>
-            <a:endParaRPr lang="ko-KR" altLang="en-US" sz="337" dirty="0"/>
+            <a:endParaRPr lang="ko-KR" altLang="en-US" sz="338" dirty="0"/>
           </a:p>
         </p:txBody>
       </p:sp>
@@ -1612,8 +1612,8 @@
         </p:nvSpPr>
         <p:spPr>
           <a:xfrm>
-            <a:off x="128346" y="49983"/>
-            <a:ext cx="8901360" cy="5041463"/>
+            <a:off x="128859" y="49984"/>
+            <a:ext cx="8936904" cy="5041463"/>
           </a:xfrm>
           <a:prstGeom prst="rect">
             <a:avLst/>
@@ -1646,7 +1646,7 @@
           <a:lstStyle/>
           <a:p>
             <a:pPr algn="ctr"/>
-            <a:endParaRPr lang="ko-KR" altLang="en-US" sz="337" dirty="0"/>
+            <a:endParaRPr lang="ko-KR" altLang="en-US" sz="338" dirty="0"/>
           </a:p>
         </p:txBody>
       </p:sp>
@@ -1672,8 +1672,8 @@
         </p:blipFill>
         <p:spPr>
           <a:xfrm>
-            <a:off x="7980813" y="83528"/>
-            <a:ext cx="915751" cy="216029"/>
+            <a:off x="8012682" y="83529"/>
+            <a:ext cx="919408" cy="216029"/>
           </a:xfrm>
           <a:prstGeom prst="rect">
             <a:avLst/>
@@ -1699,8 +1699,8 @@
         </p:nvSpPr>
         <p:spPr>
           <a:xfrm>
-            <a:off x="8382921" y="4877770"/>
-            <a:ext cx="518091" cy="136319"/>
+            <a:off x="8451803" y="4877770"/>
+            <a:ext cx="484752" cy="136512"/>
           </a:xfrm>
           <a:prstGeom prst="rect">
             <a:avLst/>
@@ -1715,7 +1715,7 @@
           <a:p>
             <a:pPr algn="r"/>
             <a:r>
-              <a:rPr lang="ko-KR" altLang="en-US" sz="286" b="1" dirty="0">
+              <a:rPr lang="ko-KR" altLang="en-US" sz="287" b="1" dirty="0">
                 <a:solidFill>
                   <a:srgbClr val="4472C4"/>
                 </a:solidFill>
@@ -1725,7 +1725,7 @@
               <a:t>이비인후과 </a:t>
             </a:r>
             <a:r>
-              <a:rPr lang="en-US" altLang="ko-KR" sz="286" b="1" dirty="0">
+              <a:rPr lang="en-US" altLang="ko-KR" sz="287" b="1" dirty="0">
                 <a:solidFill>
                   <a:srgbClr val="4472C4"/>
                 </a:solidFill>
@@ -1735,7 +1735,7 @@
               <a:t>131</a:t>
             </a:r>
             <a:r>
-              <a:rPr lang="ko-KR" altLang="en-US" sz="286" b="1" dirty="0">
+              <a:rPr lang="ko-KR" altLang="en-US" sz="287" b="1" dirty="0">
                 <a:solidFill>
                   <a:srgbClr val="4472C4"/>
                 </a:solidFill>
@@ -1757,7 +1757,7 @@
   <p:clrMapOvr>
     <a:masterClrMapping/>
   </p:clrMapOvr>
-  <p:extLst mod="1">
+  <p:extLst>
     <p:ext uri="{DCECCB84-F9BA-43D5-87BE-67443E8EF086}">
       <p15:sldGuideLst xmlns:p15="http://schemas.microsoft.com/office/powerpoint/2012/main">
         <p15:guide id="1" orient="horz" pos="1620" userDrawn="1">
@@ -1765,7 +1765,7 @@
             <a:srgbClr val="FBAE40"/>
           </p15:clr>
         </p15:guide>
-        <p15:guide id="2" pos="2880" userDrawn="1">
+        <p15:guide id="2" pos="2892" userDrawn="1">
           <p15:clr>
             <a:srgbClr val="FBAE40"/>
           </p15:clr>
@@ -1839,35 +1839,35 @@
             <a:pPr lvl="0"/>
             <a:r>
               <a:rPr lang="ko-KR" altLang="en-US"/>
-              <a:t>마스터 텍스트 스타일 편집</a:t>
+              <a:t>마스터 텍스트 스타일을 편집하려면 클릭</a:t>
             </a:r>
           </a:p>
           <a:p>
             <a:pPr lvl="1"/>
             <a:r>
               <a:rPr lang="ko-KR" altLang="en-US"/>
-              <a:t>둘째 수준</a:t>
+              <a:t>두 번째 수준</a:t>
             </a:r>
           </a:p>
           <a:p>
             <a:pPr lvl="2"/>
             <a:r>
               <a:rPr lang="ko-KR" altLang="en-US"/>
-              <a:t>셋째 수준</a:t>
+              <a:t>세 번째 수준</a:t>
             </a:r>
           </a:p>
           <a:p>
             <a:pPr lvl="3"/>
             <a:r>
               <a:rPr lang="ko-KR" altLang="en-US"/>
-              <a:t>넷째 수준</a:t>
+              <a:t>네 번째 수준</a:t>
             </a:r>
           </a:p>
           <a:p>
             <a:pPr lvl="4"/>
             <a:r>
               <a:rPr lang="ko-KR" altLang="en-US"/>
-              <a:t>다섯째 수준</a:t>
+              <a:t>다섯 번째 수준</a:t>
             </a:r>
             <a:endParaRPr lang="en-US" dirty="0"/>
           </a:p>
@@ -1890,7 +1890,7 @@
           <a:p>
             <a:fld id="{149F34B4-7175-41BD-B98B-2E7021201D7D}" type="datetimeFigureOut">
               <a:rPr lang="ko-KR" altLang="en-US" smtClean="0"/>
-              <a:t>2026-03-11</a:t>
+              <a:t>2026-04-09</a:t>
             </a:fld>
             <a:endParaRPr lang="ko-KR" altLang="en-US"/>
           </a:p>
@@ -1941,7 +1941,7 @@
     </p:spTree>
     <p:extLst>
       <p:ext uri="{BB962C8B-B14F-4D97-AF65-F5344CB8AC3E}">
-        <p14:creationId xmlns:p14="http://schemas.microsoft.com/office/powerpoint/2010/main" val="2543197775"/>
+        <p14:creationId xmlns:p14="http://schemas.microsoft.com/office/powerpoint/2010/main" val="1763752698"/>
       </p:ext>
     </p:extLst>
   </p:cSld>
@@ -1980,8 +1980,8 @@
         </p:nvSpPr>
         <p:spPr>
           <a:xfrm>
-            <a:off x="623888" y="1282304"/>
-            <a:ext cx="7886700" cy="2139553"/>
+            <a:off x="626379" y="1282304"/>
+            <a:ext cx="7918192" cy="2139553"/>
           </a:xfrm>
         </p:spPr>
         <p:txBody>
@@ -2012,8 +2012,8 @@
         </p:nvSpPr>
         <p:spPr>
           <a:xfrm>
-            <a:off x="623888" y="3442098"/>
-            <a:ext cx="7886700" cy="1125140"/>
+            <a:off x="626379" y="3442098"/>
+            <a:ext cx="7918192" cy="1125140"/>
           </a:xfrm>
         </p:spPr>
         <p:txBody>
@@ -2114,7 +2114,7 @@
             <a:pPr lvl="0"/>
             <a:r>
               <a:rPr lang="ko-KR" altLang="en-US"/>
-              <a:t>마스터 텍스트 스타일 편집</a:t>
+              <a:t>마스터 텍스트 스타일을 편집하려면 클릭</a:t>
             </a:r>
           </a:p>
         </p:txBody>
@@ -2136,7 +2136,7 @@
           <a:p>
             <a:fld id="{149F34B4-7175-41BD-B98B-2E7021201D7D}" type="datetimeFigureOut">
               <a:rPr lang="ko-KR" altLang="en-US" smtClean="0"/>
-              <a:t>2026-03-11</a:t>
+              <a:t>2026-04-09</a:t>
             </a:fld>
             <a:endParaRPr lang="ko-KR" altLang="en-US"/>
           </a:p>
@@ -2187,7 +2187,7 @@
     </p:spTree>
     <p:extLst>
       <p:ext uri="{BB962C8B-B14F-4D97-AF65-F5344CB8AC3E}">
-        <p14:creationId xmlns:p14="http://schemas.microsoft.com/office/powerpoint/2010/main" val="2171182419"/>
+        <p14:creationId xmlns:p14="http://schemas.microsoft.com/office/powerpoint/2010/main" val="2591837592"/>
       </p:ext>
     </p:extLst>
   </p:cSld>
@@ -2249,8 +2249,8 @@
         </p:nvSpPr>
         <p:spPr>
           <a:xfrm>
-            <a:off x="628650" y="1369219"/>
-            <a:ext cx="3886200" cy="3263504"/>
+            <a:off x="631160" y="1369219"/>
+            <a:ext cx="3901718" cy="3263504"/>
           </a:xfrm>
         </p:spPr>
         <p:txBody>
@@ -2260,35 +2260,35 @@
             <a:pPr lvl="0"/>
             <a:r>
               <a:rPr lang="ko-KR" altLang="en-US"/>
-              <a:t>마스터 텍스트 스타일 편집</a:t>
+              <a:t>마스터 텍스트 스타일을 편집하려면 클릭</a:t>
             </a:r>
           </a:p>
           <a:p>
             <a:pPr lvl="1"/>
             <a:r>
               <a:rPr lang="ko-KR" altLang="en-US"/>
-              <a:t>둘째 수준</a:t>
+              <a:t>두 번째 수준</a:t>
             </a:r>
           </a:p>
           <a:p>
             <a:pPr lvl="2"/>
             <a:r>
               <a:rPr lang="ko-KR" altLang="en-US"/>
-              <a:t>셋째 수준</a:t>
+              <a:t>세 번째 수준</a:t>
             </a:r>
           </a:p>
           <a:p>
             <a:pPr lvl="3"/>
             <a:r>
               <a:rPr lang="ko-KR" altLang="en-US"/>
-              <a:t>넷째 수준</a:t>
+              <a:t>네 번째 수준</a:t>
             </a:r>
           </a:p>
           <a:p>
             <a:pPr lvl="4"/>
             <a:r>
               <a:rPr lang="ko-KR" altLang="en-US"/>
-              <a:t>다섯째 수준</a:t>
+              <a:t>다섯 번째 수준</a:t>
             </a:r>
             <a:endParaRPr lang="en-US" dirty="0"/>
           </a:p>
@@ -2306,8 +2306,8 @@
         </p:nvSpPr>
         <p:spPr>
           <a:xfrm>
-            <a:off x="4629150" y="1369219"/>
-            <a:ext cx="3886200" cy="3263504"/>
+            <a:off x="4647635" y="1369219"/>
+            <a:ext cx="3901718" cy="3263504"/>
           </a:xfrm>
         </p:spPr>
         <p:txBody>
@@ -2317,35 +2317,35 @@
             <a:pPr lvl="0"/>
             <a:r>
               <a:rPr lang="ko-KR" altLang="en-US"/>
-              <a:t>마스터 텍스트 스타일 편집</a:t>
+              <a:t>마스터 텍스트 스타일을 편집하려면 클릭</a:t>
             </a:r>
           </a:p>
           <a:p>
             <a:pPr lvl="1"/>
             <a:r>
               <a:rPr lang="ko-KR" altLang="en-US"/>
-              <a:t>둘째 수준</a:t>
+              <a:t>두 번째 수준</a:t>
             </a:r>
           </a:p>
           <a:p>
             <a:pPr lvl="2"/>
             <a:r>
               <a:rPr lang="ko-KR" altLang="en-US"/>
-              <a:t>셋째 수준</a:t>
+              <a:t>세 번째 수준</a:t>
             </a:r>
           </a:p>
           <a:p>
             <a:pPr lvl="3"/>
             <a:r>
               <a:rPr lang="ko-KR" altLang="en-US"/>
-              <a:t>넷째 수준</a:t>
+              <a:t>네 번째 수준</a:t>
             </a:r>
           </a:p>
           <a:p>
             <a:pPr lvl="4"/>
             <a:r>
               <a:rPr lang="ko-KR" altLang="en-US"/>
-              <a:t>다섯째 수준</a:t>
+              <a:t>다섯 번째 수준</a:t>
             </a:r>
             <a:endParaRPr lang="en-US" dirty="0"/>
           </a:p>
@@ -2368,7 +2368,7 @@
           <a:p>
             <a:fld id="{149F34B4-7175-41BD-B98B-2E7021201D7D}" type="datetimeFigureOut">
               <a:rPr lang="ko-KR" altLang="en-US" smtClean="0"/>
-              <a:t>2026-03-11</a:t>
+              <a:t>2026-04-09</a:t>
             </a:fld>
             <a:endParaRPr lang="ko-KR" altLang="en-US"/>
           </a:p>
@@ -2419,7 +2419,7 @@
     </p:spTree>
     <p:extLst>
       <p:ext uri="{BB962C8B-B14F-4D97-AF65-F5344CB8AC3E}">
-        <p14:creationId xmlns:p14="http://schemas.microsoft.com/office/powerpoint/2010/main" val="1407302658"/>
+        <p14:creationId xmlns:p14="http://schemas.microsoft.com/office/powerpoint/2010/main" val="3654072267"/>
       </p:ext>
     </p:extLst>
   </p:cSld>
@@ -2458,8 +2458,8 @@
         </p:nvSpPr>
         <p:spPr>
           <a:xfrm>
-            <a:off x="629841" y="273844"/>
-            <a:ext cx="7886700" cy="994172"/>
+            <a:off x="632356" y="273844"/>
+            <a:ext cx="7918192" cy="994172"/>
           </a:xfrm>
         </p:spPr>
         <p:txBody>
@@ -2486,8 +2486,8 @@
         </p:nvSpPr>
         <p:spPr>
           <a:xfrm>
-            <a:off x="629842" y="1260872"/>
-            <a:ext cx="3868340" cy="617934"/>
+            <a:off x="632356" y="1260872"/>
+            <a:ext cx="3883787" cy="617934"/>
           </a:xfrm>
         </p:spPr>
         <p:txBody>
@@ -2534,7 +2534,7 @@
             <a:pPr lvl="0"/>
             <a:r>
               <a:rPr lang="ko-KR" altLang="en-US"/>
-              <a:t>마스터 텍스트 스타일 편집</a:t>
+              <a:t>마스터 텍스트 스타일을 편집하려면 클릭</a:t>
             </a:r>
           </a:p>
         </p:txBody>
@@ -2551,8 +2551,8 @@
         </p:nvSpPr>
         <p:spPr>
           <a:xfrm>
-            <a:off x="629842" y="1878806"/>
-            <a:ext cx="3868340" cy="2763441"/>
+            <a:off x="632356" y="1878806"/>
+            <a:ext cx="3883787" cy="2763441"/>
           </a:xfrm>
         </p:spPr>
         <p:txBody>
@@ -2562,35 +2562,35 @@
             <a:pPr lvl="0"/>
             <a:r>
               <a:rPr lang="ko-KR" altLang="en-US"/>
-              <a:t>마스터 텍스트 스타일 편집</a:t>
+              <a:t>마스터 텍스트 스타일을 편집하려면 클릭</a:t>
             </a:r>
           </a:p>
           <a:p>
             <a:pPr lvl="1"/>
             <a:r>
               <a:rPr lang="ko-KR" altLang="en-US"/>
-              <a:t>둘째 수준</a:t>
+              <a:t>두 번째 수준</a:t>
             </a:r>
           </a:p>
           <a:p>
             <a:pPr lvl="2"/>
             <a:r>
               <a:rPr lang="ko-KR" altLang="en-US"/>
-              <a:t>셋째 수준</a:t>
+              <a:t>세 번째 수준</a:t>
             </a:r>
           </a:p>
           <a:p>
             <a:pPr lvl="3"/>
             <a:r>
               <a:rPr lang="ko-KR" altLang="en-US"/>
-              <a:t>넷째 수준</a:t>
+              <a:t>네 번째 수준</a:t>
             </a:r>
           </a:p>
           <a:p>
             <a:pPr lvl="4"/>
             <a:r>
               <a:rPr lang="ko-KR" altLang="en-US"/>
-              <a:t>다섯째 수준</a:t>
+              <a:t>다섯 번째 수준</a:t>
             </a:r>
             <a:endParaRPr lang="en-US" dirty="0"/>
           </a:p>
@@ -2608,8 +2608,8 @@
         </p:nvSpPr>
         <p:spPr>
           <a:xfrm>
-            <a:off x="4629150" y="1260872"/>
-            <a:ext cx="3887391" cy="617934"/>
+            <a:off x="4647635" y="1260872"/>
+            <a:ext cx="3902914" cy="617934"/>
           </a:xfrm>
         </p:spPr>
         <p:txBody>
@@ -2656,7 +2656,7 @@
             <a:pPr lvl="0"/>
             <a:r>
               <a:rPr lang="ko-KR" altLang="en-US"/>
-              <a:t>마스터 텍스트 스타일 편집</a:t>
+              <a:t>마스터 텍스트 스타일을 편집하려면 클릭</a:t>
             </a:r>
           </a:p>
         </p:txBody>
@@ -2673,8 +2673,8 @@
         </p:nvSpPr>
         <p:spPr>
           <a:xfrm>
-            <a:off x="4629150" y="1878806"/>
-            <a:ext cx="3887391" cy="2763441"/>
+            <a:off x="4647635" y="1878806"/>
+            <a:ext cx="3902914" cy="2763441"/>
           </a:xfrm>
         </p:spPr>
         <p:txBody>
@@ -2684,35 +2684,35 @@
             <a:pPr lvl="0"/>
             <a:r>
               <a:rPr lang="ko-KR" altLang="en-US"/>
-              <a:t>마스터 텍스트 스타일 편집</a:t>
+              <a:t>마스터 텍스트 스타일을 편집하려면 클릭</a:t>
             </a:r>
           </a:p>
           <a:p>
             <a:pPr lvl="1"/>
             <a:r>
               <a:rPr lang="ko-KR" altLang="en-US"/>
-              <a:t>둘째 수준</a:t>
+              <a:t>두 번째 수준</a:t>
             </a:r>
           </a:p>
           <a:p>
             <a:pPr lvl="2"/>
             <a:r>
               <a:rPr lang="ko-KR" altLang="en-US"/>
-              <a:t>셋째 수준</a:t>
+              <a:t>세 번째 수준</a:t>
             </a:r>
           </a:p>
           <a:p>
             <a:pPr lvl="3"/>
             <a:r>
               <a:rPr lang="ko-KR" altLang="en-US"/>
-              <a:t>넷째 수준</a:t>
+              <a:t>네 번째 수준</a:t>
             </a:r>
           </a:p>
           <a:p>
             <a:pPr lvl="4"/>
             <a:r>
               <a:rPr lang="ko-KR" altLang="en-US"/>
-              <a:t>다섯째 수준</a:t>
+              <a:t>다섯 번째 수준</a:t>
             </a:r>
             <a:endParaRPr lang="en-US" dirty="0"/>
           </a:p>
@@ -2735,7 +2735,7 @@
           <a:p>
             <a:fld id="{149F34B4-7175-41BD-B98B-2E7021201D7D}" type="datetimeFigureOut">
               <a:rPr lang="ko-KR" altLang="en-US" smtClean="0"/>
-              <a:t>2026-03-11</a:t>
+              <a:t>2026-04-09</a:t>
             </a:fld>
             <a:endParaRPr lang="ko-KR" altLang="en-US"/>
           </a:p>
@@ -2786,7 +2786,7 @@
     </p:spTree>
     <p:extLst>
       <p:ext uri="{BB962C8B-B14F-4D97-AF65-F5344CB8AC3E}">
-        <p14:creationId xmlns:p14="http://schemas.microsoft.com/office/powerpoint/2010/main" val="2545284568"/>
+        <p14:creationId xmlns:p14="http://schemas.microsoft.com/office/powerpoint/2010/main" val="2229758423"/>
       </p:ext>
     </p:extLst>
   </p:cSld>
@@ -2853,7 +2853,7 @@
           <a:p>
             <a:fld id="{149F34B4-7175-41BD-B98B-2E7021201D7D}" type="datetimeFigureOut">
               <a:rPr lang="ko-KR" altLang="en-US" smtClean="0"/>
-              <a:t>2026-03-11</a:t>
+              <a:t>2026-04-09</a:t>
             </a:fld>
             <a:endParaRPr lang="ko-KR" altLang="en-US"/>
           </a:p>
@@ -2904,7 +2904,7 @@
     </p:spTree>
     <p:extLst>
       <p:ext uri="{BB962C8B-B14F-4D97-AF65-F5344CB8AC3E}">
-        <p14:creationId xmlns:p14="http://schemas.microsoft.com/office/powerpoint/2010/main" val="1074750191"/>
+        <p14:creationId xmlns:p14="http://schemas.microsoft.com/office/powerpoint/2010/main" val="3198969045"/>
       </p:ext>
     </p:extLst>
   </p:cSld>
@@ -2948,7 +2948,7 @@
           <a:p>
             <a:fld id="{149F34B4-7175-41BD-B98B-2E7021201D7D}" type="datetimeFigureOut">
               <a:rPr lang="ko-KR" altLang="en-US" smtClean="0"/>
-              <a:t>2026-03-11</a:t>
+              <a:t>2026-04-09</a:t>
             </a:fld>
             <a:endParaRPr lang="ko-KR" altLang="en-US"/>
           </a:p>
@@ -2999,7 +2999,7 @@
     </p:spTree>
     <p:extLst>
       <p:ext uri="{BB962C8B-B14F-4D97-AF65-F5344CB8AC3E}">
-        <p14:creationId xmlns:p14="http://schemas.microsoft.com/office/powerpoint/2010/main" val="1351818583"/>
+        <p14:creationId xmlns:p14="http://schemas.microsoft.com/office/powerpoint/2010/main" val="378760637"/>
       </p:ext>
     </p:extLst>
   </p:cSld>
@@ -3038,8 +3038,8 @@
         </p:nvSpPr>
         <p:spPr>
           <a:xfrm>
-            <a:off x="629841" y="342900"/>
-            <a:ext cx="2949178" cy="1200150"/>
+            <a:off x="632356" y="342900"/>
+            <a:ext cx="2960954" cy="1200150"/>
           </a:xfrm>
         </p:spPr>
         <p:txBody>
@@ -3070,8 +3070,8 @@
         </p:nvSpPr>
         <p:spPr>
           <a:xfrm>
-            <a:off x="3887391" y="740569"/>
-            <a:ext cx="4629150" cy="3655219"/>
+            <a:off x="3902914" y="740569"/>
+            <a:ext cx="4647635" cy="3655219"/>
           </a:xfrm>
         </p:spPr>
         <p:txBody>
@@ -3109,35 +3109,35 @@
             <a:pPr lvl="0"/>
             <a:r>
               <a:rPr lang="ko-KR" altLang="en-US"/>
-              <a:t>마스터 텍스트 스타일 편집</a:t>
+              <a:t>마스터 텍스트 스타일을 편집하려면 클릭</a:t>
             </a:r>
           </a:p>
           <a:p>
             <a:pPr lvl="1"/>
             <a:r>
               <a:rPr lang="ko-KR" altLang="en-US"/>
-              <a:t>둘째 수준</a:t>
+              <a:t>두 번째 수준</a:t>
             </a:r>
           </a:p>
           <a:p>
             <a:pPr lvl="2"/>
             <a:r>
               <a:rPr lang="ko-KR" altLang="en-US"/>
-              <a:t>셋째 수준</a:t>
+              <a:t>세 번째 수준</a:t>
             </a:r>
           </a:p>
           <a:p>
             <a:pPr lvl="3"/>
             <a:r>
               <a:rPr lang="ko-KR" altLang="en-US"/>
-              <a:t>넷째 수준</a:t>
+              <a:t>네 번째 수준</a:t>
             </a:r>
           </a:p>
           <a:p>
             <a:pPr lvl="4"/>
             <a:r>
               <a:rPr lang="ko-KR" altLang="en-US"/>
-              <a:t>다섯째 수준</a:t>
+              <a:t>다섯 번째 수준</a:t>
             </a:r>
             <a:endParaRPr lang="en-US" dirty="0"/>
           </a:p>
@@ -3155,8 +3155,8 @@
         </p:nvSpPr>
         <p:spPr>
           <a:xfrm>
-            <a:off x="629841" y="1543050"/>
-            <a:ext cx="2949178" cy="2858691"/>
+            <a:off x="632356" y="1543050"/>
+            <a:ext cx="2960954" cy="2858691"/>
           </a:xfrm>
         </p:spPr>
         <p:txBody>
@@ -3203,7 +3203,7 @@
             <a:pPr lvl="0"/>
             <a:r>
               <a:rPr lang="ko-KR" altLang="en-US"/>
-              <a:t>마스터 텍스트 스타일 편집</a:t>
+              <a:t>마스터 텍스트 스타일을 편집하려면 클릭</a:t>
             </a:r>
           </a:p>
         </p:txBody>
@@ -3225,7 +3225,7 @@
           <a:p>
             <a:fld id="{149F34B4-7175-41BD-B98B-2E7021201D7D}" type="datetimeFigureOut">
               <a:rPr lang="ko-KR" altLang="en-US" smtClean="0"/>
-              <a:t>2026-03-11</a:t>
+              <a:t>2026-04-09</a:t>
             </a:fld>
             <a:endParaRPr lang="ko-KR" altLang="en-US"/>
           </a:p>
@@ -3276,7 +3276,7 @@
     </p:spTree>
     <p:extLst>
       <p:ext uri="{BB962C8B-B14F-4D97-AF65-F5344CB8AC3E}">
-        <p14:creationId xmlns:p14="http://schemas.microsoft.com/office/powerpoint/2010/main" val="2838059814"/>
+        <p14:creationId xmlns:p14="http://schemas.microsoft.com/office/powerpoint/2010/main" val="3555144398"/>
       </p:ext>
     </p:extLst>
   </p:cSld>
@@ -3315,8 +3315,8 @@
         </p:nvSpPr>
         <p:spPr>
           <a:xfrm>
-            <a:off x="629841" y="342900"/>
-            <a:ext cx="2949178" cy="1200150"/>
+            <a:off x="632356" y="342900"/>
+            <a:ext cx="2960954" cy="1200150"/>
           </a:xfrm>
         </p:spPr>
         <p:txBody>
@@ -3347,8 +3347,8 @@
         </p:nvSpPr>
         <p:spPr>
           <a:xfrm>
-            <a:off x="3887391" y="740569"/>
-            <a:ext cx="4629150" cy="3655219"/>
+            <a:off x="3902914" y="740569"/>
+            <a:ext cx="4647635" cy="3655219"/>
           </a:xfrm>
         </p:spPr>
         <p:txBody>
@@ -3412,8 +3412,8 @@
         </p:nvSpPr>
         <p:spPr>
           <a:xfrm>
-            <a:off x="629841" y="1543050"/>
-            <a:ext cx="2949178" cy="2858691"/>
+            <a:off x="632356" y="1543050"/>
+            <a:ext cx="2960954" cy="2858691"/>
           </a:xfrm>
         </p:spPr>
         <p:txBody>
@@ -3460,7 +3460,7 @@
             <a:pPr lvl="0"/>
             <a:r>
               <a:rPr lang="ko-KR" altLang="en-US"/>
-              <a:t>마스터 텍스트 스타일 편집</a:t>
+              <a:t>마스터 텍스트 스타일을 편집하려면 클릭</a:t>
             </a:r>
           </a:p>
         </p:txBody>
@@ -3482,7 +3482,7 @@
           <a:p>
             <a:fld id="{149F34B4-7175-41BD-B98B-2E7021201D7D}" type="datetimeFigureOut">
               <a:rPr lang="ko-KR" altLang="en-US" smtClean="0"/>
-              <a:t>2026-03-11</a:t>
+              <a:t>2026-04-09</a:t>
             </a:fld>
             <a:endParaRPr lang="ko-KR" altLang="en-US"/>
           </a:p>
@@ -3533,7 +3533,7 @@
     </p:spTree>
     <p:extLst>
       <p:ext uri="{BB962C8B-B14F-4D97-AF65-F5344CB8AC3E}">
-        <p14:creationId xmlns:p14="http://schemas.microsoft.com/office/powerpoint/2010/main" val="2245766710"/>
+        <p14:creationId xmlns:p14="http://schemas.microsoft.com/office/powerpoint/2010/main" val="2377952102"/>
       </p:ext>
     </p:extLst>
   </p:cSld>
@@ -3577,8 +3577,8 @@
         </p:nvSpPr>
         <p:spPr>
           <a:xfrm>
-            <a:off x="628650" y="273844"/>
-            <a:ext cx="7886700" cy="994172"/>
+            <a:off x="631161" y="273844"/>
+            <a:ext cx="7918192" cy="994172"/>
           </a:xfrm>
           <a:prstGeom prst="rect">
             <a:avLst/>
@@ -3610,8 +3610,8 @@
         </p:nvSpPr>
         <p:spPr>
           <a:xfrm>
-            <a:off x="628650" y="1369219"/>
-            <a:ext cx="7886700" cy="3263504"/>
+            <a:off x="631161" y="1369219"/>
+            <a:ext cx="7918192" cy="3263504"/>
           </a:xfrm>
           <a:prstGeom prst="rect">
             <a:avLst/>
@@ -3626,35 +3626,35 @@
             <a:pPr lvl="0"/>
             <a:r>
               <a:rPr lang="ko-KR" altLang="en-US"/>
-              <a:t>마스터 텍스트 스타일 편집</a:t>
+              <a:t>마스터 텍스트 스타일을 편집하려면 클릭</a:t>
             </a:r>
           </a:p>
           <a:p>
             <a:pPr lvl="1"/>
             <a:r>
               <a:rPr lang="ko-KR" altLang="en-US"/>
-              <a:t>둘째 수준</a:t>
+              <a:t>두 번째 수준</a:t>
             </a:r>
           </a:p>
           <a:p>
             <a:pPr lvl="2"/>
             <a:r>
               <a:rPr lang="ko-KR" altLang="en-US"/>
-              <a:t>셋째 수준</a:t>
+              <a:t>세 번째 수준</a:t>
             </a:r>
           </a:p>
           <a:p>
             <a:pPr lvl="3"/>
             <a:r>
               <a:rPr lang="ko-KR" altLang="en-US"/>
-              <a:t>넷째 수준</a:t>
+              <a:t>네 번째 수준</a:t>
             </a:r>
           </a:p>
           <a:p>
             <a:pPr lvl="4"/>
             <a:r>
               <a:rPr lang="ko-KR" altLang="en-US"/>
-              <a:t>다섯째 수준</a:t>
+              <a:t>다섯 번째 수준</a:t>
             </a:r>
             <a:endParaRPr lang="en-US" dirty="0"/>
           </a:p>
@@ -3672,8 +3672,8 @@
         </p:nvSpPr>
         <p:spPr>
           <a:xfrm>
-            <a:off x="628650" y="4767263"/>
-            <a:ext cx="2057400" cy="273844"/>
+            <a:off x="631160" y="4767263"/>
+            <a:ext cx="2065615" cy="273844"/>
           </a:xfrm>
           <a:prstGeom prst="rect">
             <a:avLst/>
@@ -3695,7 +3695,7 @@
           <a:p>
             <a:fld id="{149F34B4-7175-41BD-B98B-2E7021201D7D}" type="datetimeFigureOut">
               <a:rPr lang="ko-KR" altLang="en-US" smtClean="0"/>
-              <a:t>2026-03-11</a:t>
+              <a:t>2026-04-09</a:t>
             </a:fld>
             <a:endParaRPr lang="ko-KR" altLang="en-US"/>
           </a:p>
@@ -3713,8 +3713,8 @@
         </p:nvSpPr>
         <p:spPr>
           <a:xfrm>
-            <a:off x="3028950" y="4767263"/>
-            <a:ext cx="3086100" cy="273844"/>
+            <a:off x="3041045" y="4767263"/>
+            <a:ext cx="3098423" cy="273844"/>
           </a:xfrm>
           <a:prstGeom prst="rect">
             <a:avLst/>
@@ -3750,8 +3750,8 @@
         </p:nvSpPr>
         <p:spPr>
           <a:xfrm>
-            <a:off x="6457950" y="4767263"/>
-            <a:ext cx="2057400" cy="273844"/>
+            <a:off x="6483738" y="4767263"/>
+            <a:ext cx="2065615" cy="273844"/>
           </a:xfrm>
           <a:prstGeom prst="rect">
             <a:avLst/>
@@ -3782,24 +3782,24 @@
     </p:spTree>
     <p:extLst>
       <p:ext uri="{BB962C8B-B14F-4D97-AF65-F5344CB8AC3E}">
-        <p14:creationId xmlns:p14="http://schemas.microsoft.com/office/powerpoint/2010/main" val="3087452718"/>
+        <p14:creationId xmlns:p14="http://schemas.microsoft.com/office/powerpoint/2010/main" val="2694110107"/>
       </p:ext>
     </p:extLst>
   </p:cSld>
   <p:clrMap bg1="lt1" tx1="dk1" bg2="lt2" tx2="dk2" accent1="accent1" accent2="accent2" accent3="accent3" accent4="accent4" accent5="accent5" accent6="accent6" hlink="hlink" folHlink="folHlink"/>
   <p:sldLayoutIdLst>
-    <p:sldLayoutId id="2147483897" r:id="rId1"/>
-    <p:sldLayoutId id="2147483898" r:id="rId2"/>
-    <p:sldLayoutId id="2147483899" r:id="rId3"/>
-    <p:sldLayoutId id="2147483900" r:id="rId4"/>
-    <p:sldLayoutId id="2147483901" r:id="rId5"/>
-    <p:sldLayoutId id="2147483902" r:id="rId6"/>
-    <p:sldLayoutId id="2147483903" r:id="rId7"/>
-    <p:sldLayoutId id="2147483904" r:id="rId8"/>
-    <p:sldLayoutId id="2147483905" r:id="rId9"/>
-    <p:sldLayoutId id="2147483906" r:id="rId10"/>
-    <p:sldLayoutId id="2147483907" r:id="rId11"/>
-    <p:sldLayoutId id="2147483908" r:id="rId12"/>
+    <p:sldLayoutId id="2147483910" r:id="rId1"/>
+    <p:sldLayoutId id="2147483911" r:id="rId2"/>
+    <p:sldLayoutId id="2147483912" r:id="rId3"/>
+    <p:sldLayoutId id="2147483913" r:id="rId4"/>
+    <p:sldLayoutId id="2147483914" r:id="rId5"/>
+    <p:sldLayoutId id="2147483915" r:id="rId6"/>
+    <p:sldLayoutId id="2147483916" r:id="rId7"/>
+    <p:sldLayoutId id="2147483917" r:id="rId8"/>
+    <p:sldLayoutId id="2147483918" r:id="rId9"/>
+    <p:sldLayoutId id="2147483919" r:id="rId10"/>
+    <p:sldLayoutId id="2147483920" r:id="rId11"/>
+    <p:sldLayoutId id="2147483921" r:id="rId12"/>
     <p:sldLayoutId id="2147483790" r:id="rId13"/>
     <p:sldLayoutId id="2147483789" r:id="rId14"/>
   </p:sldLayoutIdLst>
@@ -4091,7 +4091,7 @@
             <a:srgbClr val="F26B43"/>
           </p15:clr>
         </p15:guide>
-        <p15:guide id="2" pos="2880" userDrawn="1">
+        <p15:guide id="2" pos="2892" userDrawn="1">
           <p15:clr>
             <a:srgbClr val="F26B43"/>
           </p15:clr>
@@ -4110,7 +4110,7 @@
         <p:cNvPr id="1" name="">
           <a:extLst>
             <a:ext uri="{FF2B5EF4-FFF2-40B4-BE49-F238E27FC236}">
-              <a16:creationId xmlns:a16="http://schemas.microsoft.com/office/drawing/2014/main" id="{DFA44891-DB0B-9038-5B25-629A4C227FFF}"/>
+              <a16:creationId xmlns:a16="http://schemas.microsoft.com/office/drawing/2014/main" id="{CD5286FF-D976-B25C-7272-66BE144BD1F4}"/>
             </a:ext>
           </a:extLst>
         </p:cNvPr>
@@ -4130,7 +4130,7 @@
           <p:cNvPr id="3" name="TextBox 2">
             <a:extLst>
               <a:ext uri="{FF2B5EF4-FFF2-40B4-BE49-F238E27FC236}">
-                <a16:creationId xmlns:a16="http://schemas.microsoft.com/office/drawing/2014/main" id="{CEABBF7A-4383-D72B-A05E-B56FEE94992E}"/>
+                <a16:creationId xmlns:a16="http://schemas.microsoft.com/office/drawing/2014/main" id="{362AB2CC-D9DE-F02D-B752-6717069904EF}"/>
               </a:ext>
             </a:extLst>
           </p:cNvPr>
@@ -4139,8 +4139,8 @@
         </p:nvSpPr>
         <p:spPr>
           <a:xfrm>
-            <a:off x="101992" y="184592"/>
-            <a:ext cx="3494648" cy="309444"/>
+            <a:off x="102399" y="175060"/>
+            <a:ext cx="3508602" cy="310680"/>
           </a:xfrm>
           <a:prstGeom prst="rect">
             <a:avLst/>
@@ -4154,21 +4154,21 @@
           <a:lstStyle/>
           <a:p>
             <a:r>
-              <a:rPr lang="ko-KR" altLang="en-US" sz="1411" spc="-31" dirty="0">
+              <a:rPr lang="ko-KR" altLang="en-US" sz="1417" b="1" spc="-31" dirty="0">
                 <a:latin typeface="KoPub돋움체 Light" panose="02020603020101020101" pitchFamily="18" charset="-127"/>
                 <a:ea typeface="KoPub돋움체 Light" panose="02020603020101020101"/>
               </a:rPr>
               <a:t>순천향대학교 천안병원 </a:t>
             </a:r>
             <a:r>
-              <a:rPr lang="en-US" altLang="ko-KR" sz="1411" spc="-31" dirty="0">
+              <a:rPr lang="en-US" altLang="ko-KR" sz="1417" b="1" spc="-31" dirty="0">
                 <a:latin typeface="KoPub돋움체 Light" panose="02020603020101020101" pitchFamily="18" charset="-127"/>
                 <a:ea typeface="KoPub돋움체 Light" panose="02020603020101020101"/>
               </a:rPr>
               <a:t>| </a:t>
             </a:r>
             <a:r>
-              <a:rPr lang="ko-KR" altLang="en-US" sz="1411" spc="-31" dirty="0">
+              <a:rPr lang="ko-KR" altLang="en-US" sz="1417" b="1" spc="-31" dirty="0">
                 <a:latin typeface="KoPub돋움체 Light" panose="02020603020101020101" pitchFamily="18" charset="-127"/>
                 <a:ea typeface="KoPub돋움체 Light" panose="02020603020101020101"/>
               </a:rPr>
@@ -4182,7 +4182,7 @@
           <p:cNvPr id="6" name="사각형: 둥근 모서리 5">
             <a:extLst>
               <a:ext uri="{FF2B5EF4-FFF2-40B4-BE49-F238E27FC236}">
-                <a16:creationId xmlns:a16="http://schemas.microsoft.com/office/drawing/2014/main" id="{CE2932C1-2A00-0758-2BBA-833E022443FD}"/>
+                <a16:creationId xmlns:a16="http://schemas.microsoft.com/office/drawing/2014/main" id="{82587194-E54B-EAC4-B2D9-E56C0E4F4C0A}"/>
               </a:ext>
             </a:extLst>
           </p:cNvPr>
@@ -4191,8 +4191,8 @@
         </p:nvSpPr>
         <p:spPr>
           <a:xfrm>
-            <a:off x="3050989" y="1198923"/>
-            <a:ext cx="5779400" cy="651443"/>
+            <a:off x="3063172" y="844256"/>
+            <a:ext cx="5802477" cy="826102"/>
           </a:xfrm>
           <a:prstGeom prst="roundRect">
             <a:avLst>
@@ -4229,9 +4229,9 @@
           <a:lstStyle/>
           <a:p>
             <a:pPr algn="ctr"/>
-            <a:endParaRPr lang="ko-KR" altLang="en-US" sz="5080">
-              <a:latin typeface="KoPub돋움체 Medium" panose="02020603020101020101" pitchFamily="18" charset="-127"/>
-              <a:ea typeface="KoPub돋움체 Light" panose="02020603020101020101"/>
+            <a:endParaRPr lang="ko-KR" altLang="en-US" sz="5400">
+              <a:latin typeface="KoPub돋움체 Bold" panose="02020603020101020101" pitchFamily="18" charset="-127"/>
+              <a:ea typeface="KoPub돋움체 Bold" panose="02020603020101020101" pitchFamily="18" charset="-127"/>
             </a:endParaRPr>
           </a:p>
         </p:txBody>
@@ -4241,7 +4241,7 @@
           <p:cNvPr id="8" name="사각형: 둥근 모서리 7">
             <a:extLst>
               <a:ext uri="{FF2B5EF4-FFF2-40B4-BE49-F238E27FC236}">
-                <a16:creationId xmlns:a16="http://schemas.microsoft.com/office/drawing/2014/main" id="{1548A1BD-8723-9A88-C7D3-66F55BF5E173}"/>
+                <a16:creationId xmlns:a16="http://schemas.microsoft.com/office/drawing/2014/main" id="{B51E537E-473B-6CDA-CD4D-0084217D91D0}"/>
               </a:ext>
             </a:extLst>
           </p:cNvPr>
@@ -4250,8 +4250,8 @@
         </p:nvSpPr>
         <p:spPr>
           <a:xfrm>
-            <a:off x="208326" y="1198923"/>
-            <a:ext cx="2788897" cy="651443"/>
+            <a:off x="209158" y="844256"/>
+            <a:ext cx="2800033" cy="826102"/>
           </a:xfrm>
           <a:prstGeom prst="roundRect">
             <a:avLst>
@@ -4286,9 +4286,9 @@
           <a:lstStyle/>
           <a:p>
             <a:pPr algn="ctr"/>
-            <a:endParaRPr lang="ko-KR" altLang="en-US" sz="5080">
-              <a:latin typeface="KoPub돋움체 Medium" panose="02020603020101020101" pitchFamily="18" charset="-127"/>
-              <a:ea typeface="KoPub돋움체 Light" panose="02020603020101020101"/>
+            <a:endParaRPr lang="ko-KR" altLang="en-US" sz="5400">
+              <a:latin typeface="KoPub돋움체 Bold" panose="02020603020101020101" pitchFamily="18" charset="-127"/>
+              <a:ea typeface="KoPub돋움체 Bold" panose="02020603020101020101" pitchFamily="18" charset="-127"/>
             </a:endParaRPr>
           </a:p>
         </p:txBody>
@@ -4298,7 +4298,7 @@
           <p:cNvPr id="9" name="TextBox 8">
             <a:extLst>
               <a:ext uri="{FF2B5EF4-FFF2-40B4-BE49-F238E27FC236}">
-                <a16:creationId xmlns:a16="http://schemas.microsoft.com/office/drawing/2014/main" id="{790F75E6-5F6B-E96E-73A6-26A5843998CD}"/>
+                <a16:creationId xmlns:a16="http://schemas.microsoft.com/office/drawing/2014/main" id="{2A03EDF5-7B52-9621-B5A4-F09C8C830061}"/>
               </a:ext>
             </a:extLst>
           </p:cNvPr>
@@ -4307,8 +4307,8 @@
         </p:nvSpPr>
         <p:spPr>
           <a:xfrm>
-            <a:off x="3161347" y="1339978"/>
-            <a:ext cx="5119836" cy="369332"/>
+            <a:off x="3173970" y="1057251"/>
+            <a:ext cx="5140280" cy="400110"/>
           </a:xfrm>
           <a:prstGeom prst="rect">
             <a:avLst/>
@@ -4322,157 +4322,157 @@
           <a:lstStyle/>
           <a:p>
             <a:r>
-              <a:rPr lang="en-US" altLang="ko-KR" dirty="0">
-                <a:solidFill>
-                  <a:schemeClr val="tx2">
-                    <a:lumMod val="50000"/>
-                  </a:schemeClr>
-                </a:solidFill>
-                <a:latin typeface="KoPub돋움체 Medium" panose="02020603020101020101" pitchFamily="18" charset="-127"/>
-                <a:ea typeface="KoPub돋움체 Light" panose="02020603020101020101"/>
+              <a:rPr lang="en-US" altLang="ko-KR" sz="2000" dirty="0">
+                <a:solidFill>
+                  <a:schemeClr val="tx2">
+                    <a:lumMod val="50000"/>
+                  </a:schemeClr>
+                </a:solidFill>
+                <a:latin typeface="KoPub돋움체 Bold" panose="02020603020101020101" pitchFamily="18" charset="-127"/>
+                <a:ea typeface="KoPub돋움체 Bold" panose="02020603020101020101" pitchFamily="18" charset="-127"/>
               </a:rPr>
               <a:t>Case ID : </a:t>
             </a:r>
             <a:r>
-              <a:rPr lang="ko-KR" altLang="en-US" dirty="0">
-                <a:solidFill>
-                  <a:schemeClr val="tx2">
-                    <a:lumMod val="50000"/>
-                  </a:schemeClr>
-                </a:solidFill>
-                <a:latin typeface="KoPub돋움체 Medium" panose="02020603020101020101" pitchFamily="18" charset="-127"/>
-                <a:ea typeface="KoPub돋움체 Light" panose="02020603020101020101"/>
+              <a:rPr lang="ko-KR" altLang="en-US" sz="2000" dirty="0">
+                <a:solidFill>
+                  <a:schemeClr val="tx2">
+                    <a:lumMod val="50000"/>
+                  </a:schemeClr>
+                </a:solidFill>
+                <a:latin typeface="KoPub돋움체 Bold" panose="02020603020101020101" pitchFamily="18" charset="-127"/>
+                <a:ea typeface="KoPub돋움체 Bold" panose="02020603020101020101" pitchFamily="18" charset="-127"/>
               </a:rPr>
               <a:t>병실</a:t>
             </a:r>
             <a:r>
-              <a:rPr lang="en-US" altLang="ko-KR" dirty="0">
-                <a:solidFill>
-                  <a:schemeClr val="tx2">
-                    <a:lumMod val="50000"/>
-                  </a:schemeClr>
-                </a:solidFill>
-                <a:latin typeface="KoPub돋움체 Medium" panose="02020603020101020101" pitchFamily="18" charset="-127"/>
-                <a:ea typeface="KoPub돋움체 Light" panose="02020603020101020101"/>
+              <a:rPr lang="en-US" altLang="ko-KR" sz="2000" dirty="0">
+                <a:solidFill>
+                  <a:schemeClr val="tx2">
+                    <a:lumMod val="50000"/>
+                  </a:schemeClr>
+                </a:solidFill>
+                <a:latin typeface="KoPub돋움체 Bold" panose="02020603020101020101" pitchFamily="18" charset="-127"/>
+                <a:ea typeface="KoPub돋움체 Bold" panose="02020603020101020101" pitchFamily="18" charset="-127"/>
               </a:rPr>
               <a:t>-</a:t>
             </a:r>
             <a:r>
-              <a:rPr lang="ko-KR" altLang="en-US" dirty="0">
-                <a:solidFill>
-                  <a:schemeClr val="tx2">
-                    <a:lumMod val="50000"/>
-                  </a:schemeClr>
-                </a:solidFill>
-                <a:latin typeface="KoPub돋움체 Medium" panose="02020603020101020101" pitchFamily="18" charset="-127"/>
-                <a:ea typeface="KoPub돋움체 Light" panose="02020603020101020101"/>
+              <a:rPr lang="ko-KR" altLang="en-US" sz="2000" dirty="0">
+                <a:solidFill>
+                  <a:schemeClr val="tx2">
+                    <a:lumMod val="50000"/>
+                  </a:schemeClr>
+                </a:solidFill>
+                <a:latin typeface="KoPub돋움체 Bold" panose="02020603020101020101" pitchFamily="18" charset="-127"/>
+                <a:ea typeface="KoPub돋움체 Bold" panose="02020603020101020101" pitchFamily="18" charset="-127"/>
               </a:rPr>
               <a:t>등록</a:t>
             </a:r>
             <a:r>
-              <a:rPr lang="en-US" altLang="ko-KR" dirty="0">
-                <a:solidFill>
-                  <a:schemeClr val="tx2">
-                    <a:lumMod val="50000"/>
-                  </a:schemeClr>
-                </a:solidFill>
-                <a:latin typeface="KoPub돋움체 Medium" panose="02020603020101020101" pitchFamily="18" charset="-127"/>
-                <a:ea typeface="KoPub돋움체 Light" panose="02020603020101020101"/>
+              <a:rPr lang="en-US" altLang="ko-KR" sz="2000" dirty="0">
+                <a:solidFill>
+                  <a:schemeClr val="tx2">
+                    <a:lumMod val="50000"/>
+                  </a:schemeClr>
+                </a:solidFill>
+                <a:latin typeface="KoPub돋움체 Bold" panose="02020603020101020101" pitchFamily="18" charset="-127"/>
+                <a:ea typeface="KoPub돋움체 Bold" panose="02020603020101020101" pitchFamily="18" charset="-127"/>
               </a:rPr>
               <a:t>-</a:t>
             </a:r>
             <a:r>
-              <a:rPr lang="ko-KR" altLang="en-US" dirty="0">
-                <a:solidFill>
-                  <a:schemeClr val="tx2">
-                    <a:lumMod val="50000"/>
-                  </a:schemeClr>
-                </a:solidFill>
-                <a:latin typeface="KoPub돋움체 Medium" panose="02020603020101020101" pitchFamily="18" charset="-127"/>
-                <a:ea typeface="KoPub돋움체 Light" panose="02020603020101020101"/>
+              <a:rPr lang="ko-KR" altLang="en-US" sz="2000" dirty="0">
+                <a:solidFill>
+                  <a:schemeClr val="tx2">
+                    <a:lumMod val="50000"/>
+                  </a:schemeClr>
+                </a:solidFill>
+                <a:latin typeface="KoPub돋움체 Bold" panose="02020603020101020101" pitchFamily="18" charset="-127"/>
+                <a:ea typeface="KoPub돋움체 Bold" panose="02020603020101020101" pitchFamily="18" charset="-127"/>
               </a:rPr>
               <a:t>성함</a:t>
             </a:r>
             <a:r>
-              <a:rPr lang="en-US" altLang="ko-KR" dirty="0">
-                <a:solidFill>
-                  <a:schemeClr val="tx2">
-                    <a:lumMod val="50000"/>
-                  </a:schemeClr>
-                </a:solidFill>
-                <a:latin typeface="KoPub돋움체 Medium" panose="02020603020101020101" pitchFamily="18" charset="-127"/>
-                <a:ea typeface="KoPub돋움체 Light" panose="02020603020101020101"/>
+              <a:rPr lang="en-US" altLang="ko-KR" sz="2000" dirty="0">
+                <a:solidFill>
+                  <a:schemeClr val="tx2">
+                    <a:lumMod val="50000"/>
+                  </a:schemeClr>
+                </a:solidFill>
+                <a:latin typeface="KoPub돋움체 Bold" panose="02020603020101020101" pitchFamily="18" charset="-127"/>
+                <a:ea typeface="KoPub돋움체 Bold" panose="02020603020101020101" pitchFamily="18" charset="-127"/>
               </a:rPr>
               <a:t>-</a:t>
             </a:r>
             <a:r>
-              <a:rPr lang="ko-KR" altLang="en-US" dirty="0">
-                <a:solidFill>
-                  <a:schemeClr val="tx2">
-                    <a:lumMod val="50000"/>
-                  </a:schemeClr>
-                </a:solidFill>
-                <a:latin typeface="KoPub돋움체 Medium" panose="02020603020101020101" pitchFamily="18" charset="-127"/>
-                <a:ea typeface="KoPub돋움체 Light" panose="02020603020101020101"/>
+              <a:rPr lang="ko-KR" altLang="en-US" sz="2000" dirty="0">
+                <a:solidFill>
+                  <a:schemeClr val="tx2">
+                    <a:lumMod val="50000"/>
+                  </a:schemeClr>
+                </a:solidFill>
+                <a:latin typeface="KoPub돋움체 Bold" panose="02020603020101020101" pitchFamily="18" charset="-127"/>
+                <a:ea typeface="KoPub돋움체 Bold" panose="02020603020101020101" pitchFamily="18" charset="-127"/>
               </a:rPr>
               <a:t>교수</a:t>
             </a:r>
             <a:r>
-              <a:rPr lang="en-US" altLang="ko-KR" dirty="0">
-                <a:solidFill>
-                  <a:schemeClr val="tx2">
-                    <a:lumMod val="50000"/>
-                  </a:schemeClr>
-                </a:solidFill>
-                <a:latin typeface="KoPub돋움체 Medium" panose="02020603020101020101" pitchFamily="18" charset="-127"/>
-                <a:ea typeface="KoPub돋움체 Light" panose="02020603020101020101"/>
+              <a:rPr lang="en-US" altLang="ko-KR" sz="2000" dirty="0">
+                <a:solidFill>
+                  <a:schemeClr val="tx2">
+                    <a:lumMod val="50000"/>
+                  </a:schemeClr>
+                </a:solidFill>
+                <a:latin typeface="KoPub돋움체 Bold" panose="02020603020101020101" pitchFamily="18" charset="-127"/>
+                <a:ea typeface="KoPub돋움체 Bold" panose="02020603020101020101" pitchFamily="18" charset="-127"/>
               </a:rPr>
               <a:t>-</a:t>
             </a:r>
             <a:r>
-              <a:rPr lang="ko-KR" altLang="en-US" dirty="0">
-                <a:solidFill>
-                  <a:schemeClr val="tx2">
-                    <a:lumMod val="50000"/>
-                  </a:schemeClr>
-                </a:solidFill>
-                <a:latin typeface="KoPub돋움체 Medium" panose="02020603020101020101" pitchFamily="18" charset="-127"/>
-                <a:ea typeface="KoPub돋움체 Light" panose="02020603020101020101"/>
+              <a:rPr lang="ko-KR" altLang="en-US" sz="2000" dirty="0">
+                <a:solidFill>
+                  <a:schemeClr val="tx2">
+                    <a:lumMod val="50000"/>
+                  </a:schemeClr>
+                </a:solidFill>
+                <a:latin typeface="KoPub돋움체 Bold" panose="02020603020101020101" pitchFamily="18" charset="-127"/>
+                <a:ea typeface="KoPub돋움체 Bold" panose="02020603020101020101" pitchFamily="18" charset="-127"/>
               </a:rPr>
               <a:t>월일</a:t>
             </a:r>
             <a:r>
-              <a:rPr lang="en-US" altLang="ko-KR" dirty="0">
-                <a:solidFill>
-                  <a:schemeClr val="tx2">
-                    <a:lumMod val="50000"/>
-                  </a:schemeClr>
-                </a:solidFill>
-                <a:latin typeface="KoPub돋움체 Medium" panose="02020603020101020101" pitchFamily="18" charset="-127"/>
-                <a:ea typeface="KoPub돋움체 Light" panose="02020603020101020101"/>
+              <a:rPr lang="en-US" altLang="ko-KR" sz="2000" dirty="0">
+                <a:solidFill>
+                  <a:schemeClr val="tx2">
+                    <a:lumMod val="50000"/>
+                  </a:schemeClr>
+                </a:solidFill>
+                <a:latin typeface="KoPub돋움체 Bold" panose="02020603020101020101" pitchFamily="18" charset="-127"/>
+                <a:ea typeface="KoPub돋움체 Bold" panose="02020603020101020101" pitchFamily="18" charset="-127"/>
               </a:rPr>
               <a:t>-</a:t>
             </a:r>
             <a:r>
-              <a:rPr lang="ko-KR" altLang="en-US" dirty="0">
-                <a:solidFill>
-                  <a:schemeClr val="tx2">
-                    <a:lumMod val="50000"/>
-                  </a:schemeClr>
-                </a:solidFill>
-                <a:latin typeface="KoPub돋움체 Medium" panose="02020603020101020101" pitchFamily="18" charset="-127"/>
-                <a:ea typeface="KoPub돋움체 Light" panose="02020603020101020101"/>
+              <a:rPr lang="ko-KR" altLang="en-US" sz="2000" dirty="0">
+                <a:solidFill>
+                  <a:schemeClr val="tx2">
+                    <a:lumMod val="50000"/>
+                  </a:schemeClr>
+                </a:solidFill>
+                <a:latin typeface="KoPub돋움체 Bold" panose="02020603020101020101" pitchFamily="18" charset="-127"/>
+                <a:ea typeface="KoPub돋움체 Bold" panose="02020603020101020101" pitchFamily="18" charset="-127"/>
               </a:rPr>
               <a:t>시간</a:t>
             </a:r>
-            <a:endParaRPr lang="en-US" altLang="ko-KR" dirty="0">
+            <a:endParaRPr lang="en-US" altLang="ko-KR" sz="2000" dirty="0">
               <a:solidFill>
                 <a:schemeClr val="tx2">
                   <a:lumMod val="50000"/>
                 </a:schemeClr>
               </a:solidFill>
-              <a:latin typeface="KoPub돋움체 Medium" panose="02020603020101020101" pitchFamily="18" charset="-127"/>
-              <a:ea typeface="KoPub돋움체 Light" panose="02020603020101020101"/>
+              <a:latin typeface="KoPub돋움체 Bold" panose="02020603020101020101" pitchFamily="18" charset="-127"/>
+              <a:ea typeface="KoPub돋움체 Bold" panose="02020603020101020101" pitchFamily="18" charset="-127"/>
             </a:endParaRPr>
           </a:p>
         </p:txBody>
@@ -4482,7 +4482,7 @@
           <p:cNvPr id="12" name="TextBox 11">
             <a:extLst>
               <a:ext uri="{FF2B5EF4-FFF2-40B4-BE49-F238E27FC236}">
-                <a16:creationId xmlns:a16="http://schemas.microsoft.com/office/drawing/2014/main" id="{8FA07B63-4519-67D4-9E1C-D241B9FC298D}"/>
+                <a16:creationId xmlns:a16="http://schemas.microsoft.com/office/drawing/2014/main" id="{62502C7A-7A03-D91C-871D-68296A9EA056}"/>
               </a:ext>
             </a:extLst>
           </p:cNvPr>
@@ -4491,8 +4491,8 @@
         </p:nvSpPr>
         <p:spPr>
           <a:xfrm>
-            <a:off x="310149" y="1339978"/>
-            <a:ext cx="2052165" cy="369332"/>
+            <a:off x="292242" y="1071903"/>
+            <a:ext cx="2098651" cy="400110"/>
           </a:xfrm>
           <a:prstGeom prst="rect">
             <a:avLst/>
@@ -4507,22 +4507,22 @@
           <a:p>
             <a:pPr algn="ctr"/>
             <a:r>
-              <a:rPr lang="en-US" altLang="ko-KR" b="1" dirty="0">
+              <a:rPr lang="en-US" altLang="ko-KR" sz="2000" b="1" dirty="0">
                 <a:solidFill>
                   <a:srgbClr val="000000"/>
                 </a:solidFill>
-                <a:latin typeface="KoPub돋움체 Medium" panose="02020603020101020101" pitchFamily="18" charset="-127"/>
-                <a:ea typeface="KoPub돋움체 Light" panose="02020603020101020101"/>
+                <a:latin typeface="KoPub돋움체 Bold" panose="02020603020101020101" pitchFamily="18" charset="-127"/>
+                <a:ea typeface="KoPub돋움체 Bold" panose="02020603020101020101" pitchFamily="18" charset="-127"/>
               </a:rPr>
               <a:t>[ID] Case ID </a:t>
             </a:r>
             <a:r>
-              <a:rPr lang="ko-KR" altLang="en-US" b="1" dirty="0">
+              <a:rPr lang="ko-KR" altLang="en-US" sz="2000" b="1" dirty="0">
                 <a:solidFill>
                   <a:srgbClr val="000000"/>
                 </a:solidFill>
-                <a:latin typeface="KoPub돋움체 Medium" panose="02020603020101020101" pitchFamily="18" charset="-127"/>
-                <a:ea typeface="KoPub돋움체 Light" panose="02020603020101020101"/>
+                <a:latin typeface="KoPub돋움체 Bold" panose="02020603020101020101" pitchFamily="18" charset="-127"/>
+                <a:ea typeface="KoPub돋움체 Bold" panose="02020603020101020101" pitchFamily="18" charset="-127"/>
               </a:rPr>
               <a:t>표준</a:t>
             </a:r>
@@ -4534,7 +4534,7 @@
           <p:cNvPr id="13" name="사각형: 둥근 모서리 12">
             <a:extLst>
               <a:ext uri="{FF2B5EF4-FFF2-40B4-BE49-F238E27FC236}">
-                <a16:creationId xmlns:a16="http://schemas.microsoft.com/office/drawing/2014/main" id="{C32F48BA-C495-9A9B-C63F-E8A7AEFC92D4}"/>
+                <a16:creationId xmlns:a16="http://schemas.microsoft.com/office/drawing/2014/main" id="{1665DD89-E46F-5DF2-6E34-8AC48676D669}"/>
               </a:ext>
             </a:extLst>
           </p:cNvPr>
@@ -4543,8 +4543,8 @@
         </p:nvSpPr>
         <p:spPr>
           <a:xfrm>
-            <a:off x="3050989" y="1961982"/>
-            <a:ext cx="5779400" cy="1115349"/>
+            <a:off x="3063172" y="1777571"/>
+            <a:ext cx="5802477" cy="1388063"/>
           </a:xfrm>
           <a:prstGeom prst="roundRect">
             <a:avLst>
@@ -4581,9 +4581,9 @@
           <a:lstStyle/>
           <a:p>
             <a:pPr algn="ctr"/>
-            <a:endParaRPr lang="ko-KR" altLang="en-US" sz="5080">
-              <a:latin typeface="KoPub돋움체 Medium" panose="02020603020101020101" pitchFamily="18" charset="-127"/>
-              <a:ea typeface="KoPub돋움체 Light" panose="02020603020101020101"/>
+            <a:endParaRPr lang="ko-KR" altLang="en-US" sz="5400">
+              <a:latin typeface="KoPub돋움체 Bold" panose="02020603020101020101" pitchFamily="18" charset="-127"/>
+              <a:ea typeface="KoPub돋움체 Bold" panose="02020603020101020101" pitchFamily="18" charset="-127"/>
             </a:endParaRPr>
           </a:p>
         </p:txBody>
@@ -4593,7 +4593,7 @@
           <p:cNvPr id="15" name="사각형: 둥근 모서리 14">
             <a:extLst>
               <a:ext uri="{FF2B5EF4-FFF2-40B4-BE49-F238E27FC236}">
-                <a16:creationId xmlns:a16="http://schemas.microsoft.com/office/drawing/2014/main" id="{6B78A99E-9E40-784B-95AB-E8BEFD430BA4}"/>
+                <a16:creationId xmlns:a16="http://schemas.microsoft.com/office/drawing/2014/main" id="{B42D9E7E-0AFC-E233-C327-1A7A7127E99D}"/>
               </a:ext>
             </a:extLst>
           </p:cNvPr>
@@ -4602,8 +4602,8 @@
         </p:nvSpPr>
         <p:spPr>
           <a:xfrm>
-            <a:off x="208326" y="1961983"/>
-            <a:ext cx="2788897" cy="1115349"/>
+            <a:off x="209158" y="1777572"/>
+            <a:ext cx="2800033" cy="1388063"/>
           </a:xfrm>
           <a:prstGeom prst="roundRect">
             <a:avLst>
@@ -4638,9 +4638,9 @@
           <a:lstStyle/>
           <a:p>
             <a:pPr algn="ctr"/>
-            <a:endParaRPr lang="ko-KR" altLang="en-US" sz="5080">
-              <a:latin typeface="KoPub돋움체 Medium" panose="02020603020101020101" pitchFamily="18" charset="-127"/>
-              <a:ea typeface="KoPub돋움체 Light" panose="02020603020101020101"/>
+            <a:endParaRPr lang="ko-KR" altLang="en-US" sz="5400">
+              <a:latin typeface="KoPub돋움체 Bold" panose="02020603020101020101" pitchFamily="18" charset="-127"/>
+              <a:ea typeface="KoPub돋움체 Bold" panose="02020603020101020101" pitchFamily="18" charset="-127"/>
             </a:endParaRPr>
           </a:p>
         </p:txBody>
@@ -4650,7 +4650,7 @@
           <p:cNvPr id="20" name="TextBox 19">
             <a:extLst>
               <a:ext uri="{FF2B5EF4-FFF2-40B4-BE49-F238E27FC236}">
-                <a16:creationId xmlns:a16="http://schemas.microsoft.com/office/drawing/2014/main" id="{7905CC26-D0D7-0E58-1BF6-6BB32A2663D4}"/>
+                <a16:creationId xmlns:a16="http://schemas.microsoft.com/office/drawing/2014/main" id="{B4884F74-D3B2-FF25-0405-680C37EF2575}"/>
               </a:ext>
             </a:extLst>
           </p:cNvPr>
@@ -4659,8 +4659,8 @@
         </p:nvSpPr>
         <p:spPr>
           <a:xfrm>
-            <a:off x="3161347" y="2057991"/>
-            <a:ext cx="5119836" cy="923330"/>
+            <a:off x="3173970" y="1963771"/>
+            <a:ext cx="5678063" cy="1015663"/>
           </a:xfrm>
           <a:prstGeom prst="rect">
             <a:avLst/>
@@ -4674,270 +4674,270 @@
           <a:lstStyle/>
           <a:p>
             <a:r>
-              <a:rPr lang="en-US" altLang="ko-KR" dirty="0">
-                <a:solidFill>
-                  <a:schemeClr val="tx2">
-                    <a:lumMod val="50000"/>
-                  </a:schemeClr>
-                </a:solidFill>
-                <a:latin typeface="KoPub돋움체 Medium" panose="02020603020101020101" pitchFamily="18" charset="-127"/>
-                <a:ea typeface="KoPub돋움체 Light" panose="02020603020101020101"/>
+              <a:rPr lang="en-US" altLang="ko-KR" sz="2000" dirty="0">
+                <a:solidFill>
+                  <a:schemeClr val="tx2">
+                    <a:lumMod val="50000"/>
+                  </a:schemeClr>
+                </a:solidFill>
+                <a:latin typeface="KoPub돋움체 Bold" panose="02020603020101020101" pitchFamily="18" charset="-127"/>
+                <a:ea typeface="KoPub돋움체 Bold" panose="02020603020101020101" pitchFamily="18" charset="-127"/>
               </a:rPr>
               <a:t>[A] </a:t>
             </a:r>
             <a:r>
-              <a:rPr lang="ko-KR" altLang="en-US" dirty="0">
-                <a:solidFill>
-                  <a:schemeClr val="tx2">
-                    <a:lumMod val="50000"/>
-                  </a:schemeClr>
-                </a:solidFill>
-                <a:latin typeface="KoPub돋움체 Medium" panose="02020603020101020101" pitchFamily="18" charset="-127"/>
-                <a:ea typeface="KoPub돋움체 Light" panose="02020603020101020101"/>
+              <a:rPr lang="ko-KR" altLang="en-US" sz="2000" dirty="0">
+                <a:solidFill>
+                  <a:schemeClr val="tx2">
+                    <a:lumMod val="50000"/>
+                  </a:schemeClr>
+                </a:solidFill>
+                <a:latin typeface="KoPub돋움체 Bold" panose="02020603020101020101" pitchFamily="18" charset="-127"/>
+                <a:ea typeface="KoPub돋움체 Bold" panose="02020603020101020101" pitchFamily="18" charset="-127"/>
               </a:rPr>
               <a:t>보고</a:t>
             </a:r>
             <a:r>
-              <a:rPr lang="en-US" altLang="ko-KR" dirty="0">
-                <a:solidFill>
-                  <a:schemeClr val="tx2">
-                    <a:lumMod val="50000"/>
-                  </a:schemeClr>
-                </a:solidFill>
-                <a:latin typeface="KoPub돋움체 Medium" panose="02020603020101020101" pitchFamily="18" charset="-127"/>
-                <a:ea typeface="KoPub돋움체 Light" panose="02020603020101020101"/>
+              <a:rPr lang="en-US" altLang="ko-KR" sz="2000" dirty="0">
+                <a:solidFill>
+                  <a:schemeClr val="tx2">
+                    <a:lumMod val="50000"/>
+                  </a:schemeClr>
+                </a:solidFill>
+                <a:latin typeface="KoPub돋움체 Bold" panose="02020603020101020101" pitchFamily="18" charset="-127"/>
+                <a:ea typeface="KoPub돋움체 Bold" panose="02020603020101020101" pitchFamily="18" charset="-127"/>
               </a:rPr>
               <a:t>: </a:t>
             </a:r>
             <a:r>
-              <a:rPr lang="ko-KR" altLang="en-US" dirty="0">
-                <a:solidFill>
-                  <a:schemeClr val="tx2">
-                    <a:lumMod val="50000"/>
-                  </a:schemeClr>
-                </a:solidFill>
-                <a:latin typeface="KoPub돋움체 Medium" panose="02020603020101020101" pitchFamily="18" charset="-127"/>
-                <a:ea typeface="KoPub돋움체 Light" panose="02020603020101020101"/>
+              <a:rPr lang="ko-KR" altLang="en-US" sz="2000" dirty="0">
+                <a:solidFill>
+                  <a:schemeClr val="tx2">
+                    <a:lumMod val="50000"/>
+                  </a:schemeClr>
+                </a:solidFill>
+                <a:latin typeface="KoPub돋움체 Bold" panose="02020603020101020101" pitchFamily="18" charset="-127"/>
+                <a:ea typeface="KoPub돋움체 Bold" panose="02020603020101020101" pitchFamily="18" charset="-127"/>
               </a:rPr>
               <a:t>지금 상태 </a:t>
             </a:r>
             <a:r>
-              <a:rPr lang="en-US" altLang="ko-KR" dirty="0">
-                <a:solidFill>
-                  <a:schemeClr val="tx2">
-                    <a:lumMod val="50000"/>
-                  </a:schemeClr>
-                </a:solidFill>
-                <a:latin typeface="KoPub돋움체 Medium" panose="02020603020101020101" pitchFamily="18" charset="-127"/>
-                <a:ea typeface="KoPub돋움체 Light" panose="02020603020101020101"/>
+              <a:rPr lang="en-US" altLang="ko-KR" sz="2000" dirty="0">
+                <a:solidFill>
+                  <a:schemeClr val="tx2">
+                    <a:lumMod val="50000"/>
+                  </a:schemeClr>
+                </a:solidFill>
+                <a:latin typeface="KoPub돋움체 Bold" panose="02020603020101020101" pitchFamily="18" charset="-127"/>
+                <a:ea typeface="KoPub돋움체 Bold" panose="02020603020101020101" pitchFamily="18" charset="-127"/>
               </a:rPr>
               <a:t>/ </a:t>
             </a:r>
             <a:r>
-              <a:rPr lang="ko-KR" altLang="en-US" dirty="0">
-                <a:solidFill>
-                  <a:schemeClr val="tx2">
-                    <a:lumMod val="50000"/>
-                  </a:schemeClr>
-                </a:solidFill>
-                <a:latin typeface="KoPub돋움체 Medium" panose="02020603020101020101" pitchFamily="18" charset="-127"/>
-                <a:ea typeface="KoPub돋움체 Light" panose="02020603020101020101"/>
+              <a:rPr lang="ko-KR" altLang="en-US" sz="2000" dirty="0">
+                <a:solidFill>
+                  <a:schemeClr val="tx2">
+                    <a:lumMod val="50000"/>
+                  </a:schemeClr>
+                </a:solidFill>
+                <a:latin typeface="KoPub돋움체 Bold" panose="02020603020101020101" pitchFamily="18" charset="-127"/>
+                <a:ea typeface="KoPub돋움체 Bold" panose="02020603020101020101" pitchFamily="18" charset="-127"/>
               </a:rPr>
               <a:t>근거 </a:t>
             </a:r>
             <a:r>
-              <a:rPr lang="en-US" altLang="ko-KR" dirty="0">
-                <a:solidFill>
-                  <a:schemeClr val="tx2">
-                    <a:lumMod val="50000"/>
-                  </a:schemeClr>
-                </a:solidFill>
-                <a:latin typeface="KoPub돋움체 Medium" panose="02020603020101020101" pitchFamily="18" charset="-127"/>
-                <a:ea typeface="KoPub돋움체 Light" panose="02020603020101020101"/>
+              <a:rPr lang="en-US" altLang="ko-KR" sz="2000" dirty="0">
+                <a:solidFill>
+                  <a:schemeClr val="tx2">
+                    <a:lumMod val="50000"/>
+                  </a:schemeClr>
+                </a:solidFill>
+                <a:latin typeface="KoPub돋움체 Bold" panose="02020603020101020101" pitchFamily="18" charset="-127"/>
+                <a:ea typeface="KoPub돋움체 Bold" panose="02020603020101020101" pitchFamily="18" charset="-127"/>
               </a:rPr>
               <a:t>/ </a:t>
             </a:r>
             <a:r>
-              <a:rPr lang="ko-KR" altLang="en-US" dirty="0">
-                <a:solidFill>
-                  <a:schemeClr val="tx2">
-                    <a:lumMod val="50000"/>
-                  </a:schemeClr>
-                </a:solidFill>
-                <a:latin typeface="KoPub돋움체 Medium" panose="02020603020101020101" pitchFamily="18" charset="-127"/>
-                <a:ea typeface="KoPub돋움체 Light" panose="02020603020101020101"/>
+              <a:rPr lang="ko-KR" altLang="en-US" sz="2000" dirty="0">
+                <a:solidFill>
+                  <a:schemeClr val="tx2">
+                    <a:lumMod val="50000"/>
+                  </a:schemeClr>
+                </a:solidFill>
+                <a:latin typeface="KoPub돋움체 Bold" panose="02020603020101020101" pitchFamily="18" charset="-127"/>
+                <a:ea typeface="KoPub돋움체 Bold" panose="02020603020101020101" pitchFamily="18" charset="-127"/>
               </a:rPr>
               <a:t>요청사항 </a:t>
             </a:r>
             <a:r>
-              <a:rPr lang="en-US" altLang="ko-KR" dirty="0">
-                <a:solidFill>
-                  <a:schemeClr val="tx2">
-                    <a:lumMod val="50000"/>
-                  </a:schemeClr>
-                </a:solidFill>
-                <a:latin typeface="KoPub돋움체 Medium" panose="02020603020101020101" pitchFamily="18" charset="-127"/>
-                <a:ea typeface="KoPub돋움체 Light" panose="02020603020101020101"/>
+              <a:rPr lang="en-US" altLang="ko-KR" sz="2000" dirty="0">
+                <a:solidFill>
+                  <a:schemeClr val="tx2">
+                    <a:lumMod val="50000"/>
+                  </a:schemeClr>
+                </a:solidFill>
+                <a:latin typeface="KoPub돋움체 Bold" panose="02020603020101020101" pitchFamily="18" charset="-127"/>
+                <a:ea typeface="KoPub돋움체 Bold" panose="02020603020101020101" pitchFamily="18" charset="-127"/>
               </a:rPr>
               <a:t>+ 10·4·12 </a:t>
             </a:r>
           </a:p>
           <a:p>
             <a:r>
-              <a:rPr lang="en-US" altLang="ko-KR" dirty="0">
-                <a:solidFill>
-                  <a:schemeClr val="tx2">
-                    <a:lumMod val="50000"/>
-                  </a:schemeClr>
-                </a:solidFill>
-                <a:latin typeface="KoPub돋움체 Medium" panose="02020603020101020101" pitchFamily="18" charset="-127"/>
-                <a:ea typeface="KoPub돋움체 Light" panose="02020603020101020101"/>
+              <a:rPr lang="en-US" altLang="ko-KR" sz="2000" dirty="0">
+                <a:solidFill>
+                  <a:schemeClr val="tx2">
+                    <a:lumMod val="50000"/>
+                  </a:schemeClr>
+                </a:solidFill>
+                <a:latin typeface="KoPub돋움체 Bold" panose="02020603020101020101" pitchFamily="18" charset="-127"/>
+                <a:ea typeface="KoPub돋움체 Bold" panose="02020603020101020101" pitchFamily="18" charset="-127"/>
               </a:rPr>
               <a:t>[C] </a:t>
             </a:r>
             <a:r>
-              <a:rPr lang="ko-KR" altLang="en-US" dirty="0">
-                <a:solidFill>
-                  <a:schemeClr val="tx2">
-                    <a:lumMod val="50000"/>
-                  </a:schemeClr>
-                </a:solidFill>
-                <a:latin typeface="KoPub돋움체 Medium" panose="02020603020101020101" pitchFamily="18" charset="-127"/>
-                <a:ea typeface="KoPub돋움체 Light" panose="02020603020101020101"/>
+              <a:rPr lang="ko-KR" altLang="en-US" sz="2000" dirty="0">
+                <a:solidFill>
+                  <a:schemeClr val="tx2">
+                    <a:lumMod val="50000"/>
+                  </a:schemeClr>
+                </a:solidFill>
+                <a:latin typeface="KoPub돋움체 Bold" panose="02020603020101020101" pitchFamily="18" charset="-127"/>
+                <a:ea typeface="KoPub돋움체 Bold" panose="02020603020101020101" pitchFamily="18" charset="-127"/>
               </a:rPr>
               <a:t>상황</a:t>
             </a:r>
             <a:r>
-              <a:rPr lang="en-US" altLang="ko-KR" dirty="0">
-                <a:solidFill>
-                  <a:schemeClr val="tx2">
-                    <a:lumMod val="50000"/>
-                  </a:schemeClr>
-                </a:solidFill>
-                <a:latin typeface="KoPub돋움체 Medium" panose="02020603020101020101" pitchFamily="18" charset="-127"/>
-                <a:ea typeface="KoPub돋움체 Light" panose="02020603020101020101"/>
+              <a:rPr lang="en-US" altLang="ko-KR" sz="2000" dirty="0">
+                <a:solidFill>
+                  <a:schemeClr val="tx2">
+                    <a:lumMod val="50000"/>
+                  </a:schemeClr>
+                </a:solidFill>
+                <a:latin typeface="KoPub돋움체 Bold" panose="02020603020101020101" pitchFamily="18" charset="-127"/>
+                <a:ea typeface="KoPub돋움체 Bold" panose="02020603020101020101" pitchFamily="18" charset="-127"/>
               </a:rPr>
               <a:t>: PA </a:t>
             </a:r>
             <a:r>
-              <a:rPr lang="ko-KR" altLang="en-US" dirty="0">
-                <a:solidFill>
-                  <a:schemeClr val="tx2">
-                    <a:lumMod val="50000"/>
-                  </a:schemeClr>
-                </a:solidFill>
-                <a:latin typeface="KoPub돋움체 Medium" panose="02020603020101020101" pitchFamily="18" charset="-127"/>
-                <a:ea typeface="KoPub돋움체 Light" panose="02020603020101020101"/>
+              <a:rPr lang="ko-KR" altLang="en-US" sz="2000" dirty="0">
+                <a:solidFill>
+                  <a:schemeClr val="tx2">
+                    <a:lumMod val="50000"/>
+                  </a:schemeClr>
+                </a:solidFill>
+                <a:latin typeface="KoPub돋움체 Bold" panose="02020603020101020101" pitchFamily="18" charset="-127"/>
+                <a:ea typeface="KoPub돋움체 Bold" panose="02020603020101020101" pitchFamily="18" charset="-127"/>
               </a:rPr>
               <a:t>조치 예정 사유 및 시간 공유 </a:t>
             </a:r>
           </a:p>
           <a:p>
             <a:r>
-              <a:rPr lang="en-US" altLang="ko-KR" dirty="0">
-                <a:solidFill>
-                  <a:schemeClr val="tx2">
-                    <a:lumMod val="50000"/>
-                  </a:schemeClr>
-                </a:solidFill>
-                <a:latin typeface="KoPub돋움체 Medium" panose="02020603020101020101" pitchFamily="18" charset="-127"/>
-                <a:ea typeface="KoPub돋움체 Light" panose="02020603020101020101"/>
+              <a:rPr lang="en-US" altLang="ko-KR" sz="2000" dirty="0">
+                <a:solidFill>
+                  <a:schemeClr val="tx2">
+                    <a:lumMod val="50000"/>
+                  </a:schemeClr>
+                </a:solidFill>
+                <a:latin typeface="KoPub돋움체 Bold" panose="02020603020101020101" pitchFamily="18" charset="-127"/>
+                <a:ea typeface="KoPub돋움체 Bold" panose="02020603020101020101" pitchFamily="18" charset="-127"/>
               </a:rPr>
               <a:t>[D] </a:t>
             </a:r>
             <a:r>
-              <a:rPr lang="ko-KR" altLang="en-US" dirty="0">
-                <a:solidFill>
-                  <a:schemeClr val="tx2">
-                    <a:lumMod val="50000"/>
-                  </a:schemeClr>
-                </a:solidFill>
-                <a:latin typeface="KoPub돋움체 Medium" panose="02020603020101020101" pitchFamily="18" charset="-127"/>
-                <a:ea typeface="KoPub돋움체 Light" panose="02020603020101020101"/>
+              <a:rPr lang="ko-KR" altLang="en-US" sz="2000" dirty="0">
+                <a:solidFill>
+                  <a:schemeClr val="tx2">
+                    <a:lumMod val="50000"/>
+                  </a:schemeClr>
+                </a:solidFill>
+                <a:latin typeface="KoPub돋움체 Bold" panose="02020603020101020101" pitchFamily="18" charset="-127"/>
+                <a:ea typeface="KoPub돋움체 Bold" panose="02020603020101020101" pitchFamily="18" charset="-127"/>
               </a:rPr>
               <a:t>완료</a:t>
             </a:r>
             <a:r>
-              <a:rPr lang="en-US" altLang="ko-KR" dirty="0">
-                <a:solidFill>
-                  <a:schemeClr val="tx2">
-                    <a:lumMod val="50000"/>
-                  </a:schemeClr>
-                </a:solidFill>
-                <a:latin typeface="KoPub돋움체 Medium" panose="02020603020101020101" pitchFamily="18" charset="-127"/>
-                <a:ea typeface="KoPub돋움체 Light" panose="02020603020101020101"/>
+              <a:rPr lang="en-US" altLang="ko-KR" sz="2000" dirty="0">
+                <a:solidFill>
+                  <a:schemeClr val="tx2">
+                    <a:lumMod val="50000"/>
+                  </a:schemeClr>
+                </a:solidFill>
+                <a:latin typeface="KoPub돋움체 Bold" panose="02020603020101020101" pitchFamily="18" charset="-127"/>
+                <a:ea typeface="KoPub돋움체 Bold" panose="02020603020101020101" pitchFamily="18" charset="-127"/>
               </a:rPr>
               <a:t>: </a:t>
             </a:r>
             <a:r>
-              <a:rPr lang="ko-KR" altLang="en-US" dirty="0">
-                <a:solidFill>
-                  <a:schemeClr val="tx2">
-                    <a:lumMod val="50000"/>
-                  </a:schemeClr>
-                </a:solidFill>
-                <a:latin typeface="KoPub돋움체 Medium" panose="02020603020101020101" pitchFamily="18" charset="-127"/>
-                <a:ea typeface="KoPub돋움체 Light" panose="02020603020101020101"/>
+              <a:rPr lang="ko-KR" altLang="en-US" sz="2000" dirty="0">
+                <a:solidFill>
+                  <a:schemeClr val="tx2">
+                    <a:lumMod val="50000"/>
+                  </a:schemeClr>
+                </a:solidFill>
+                <a:latin typeface="KoPub돋움체 Bold" panose="02020603020101020101" pitchFamily="18" charset="-127"/>
+                <a:ea typeface="KoPub돋움체 Bold" panose="02020603020101020101" pitchFamily="18" charset="-127"/>
               </a:rPr>
               <a:t>결과 </a:t>
             </a:r>
             <a:r>
-              <a:rPr lang="en-US" altLang="ko-KR" dirty="0">
-                <a:solidFill>
-                  <a:schemeClr val="tx2">
-                    <a:lumMod val="50000"/>
-                  </a:schemeClr>
-                </a:solidFill>
-                <a:latin typeface="KoPub돋움체 Medium" panose="02020603020101020101" pitchFamily="18" charset="-127"/>
-                <a:ea typeface="KoPub돋움체 Light" panose="02020603020101020101"/>
+              <a:rPr lang="en-US" altLang="ko-KR" sz="2000" dirty="0">
+                <a:solidFill>
+                  <a:schemeClr val="tx2">
+                    <a:lumMod val="50000"/>
+                  </a:schemeClr>
+                </a:solidFill>
+                <a:latin typeface="KoPub돋움체 Bold" panose="02020603020101020101" pitchFamily="18" charset="-127"/>
+                <a:ea typeface="KoPub돋움체 Bold" panose="02020603020101020101" pitchFamily="18" charset="-127"/>
               </a:rPr>
               <a:t>/ </a:t>
             </a:r>
             <a:r>
-              <a:rPr lang="ko-KR" altLang="en-US" dirty="0">
-                <a:solidFill>
-                  <a:schemeClr val="tx2">
-                    <a:lumMod val="50000"/>
-                  </a:schemeClr>
-                </a:solidFill>
-                <a:latin typeface="KoPub돋움체 Medium" panose="02020603020101020101" pitchFamily="18" charset="-127"/>
-                <a:ea typeface="KoPub돋움체 Light" panose="02020603020101020101"/>
+              <a:rPr lang="ko-KR" altLang="en-US" sz="2000" dirty="0">
+                <a:solidFill>
+                  <a:schemeClr val="tx2">
+                    <a:lumMod val="50000"/>
+                  </a:schemeClr>
+                </a:solidFill>
+                <a:latin typeface="KoPub돋움체 Bold" panose="02020603020101020101" pitchFamily="18" charset="-127"/>
+                <a:ea typeface="KoPub돋움체 Bold" panose="02020603020101020101" pitchFamily="18" charset="-127"/>
               </a:rPr>
               <a:t>현재 상태 </a:t>
             </a:r>
             <a:r>
-              <a:rPr lang="en-US" altLang="ko-KR" dirty="0">
-                <a:solidFill>
-                  <a:schemeClr val="tx2">
-                    <a:lumMod val="50000"/>
-                  </a:schemeClr>
-                </a:solidFill>
-                <a:latin typeface="KoPub돋움체 Medium" panose="02020603020101020101" pitchFamily="18" charset="-127"/>
-                <a:ea typeface="KoPub돋움체 Light" panose="02020603020101020101"/>
+              <a:rPr lang="en-US" altLang="ko-KR" sz="2000" dirty="0">
+                <a:solidFill>
+                  <a:schemeClr val="tx2">
+                    <a:lumMod val="50000"/>
+                  </a:schemeClr>
+                </a:solidFill>
+                <a:latin typeface="KoPub돋움체 Bold" panose="02020603020101020101" pitchFamily="18" charset="-127"/>
+                <a:ea typeface="KoPub돋움체 Bold" panose="02020603020101020101" pitchFamily="18" charset="-127"/>
               </a:rPr>
               <a:t>/ </a:t>
             </a:r>
             <a:r>
-              <a:rPr lang="ko-KR" altLang="en-US" dirty="0">
-                <a:solidFill>
-                  <a:schemeClr val="tx2">
-                    <a:lumMod val="50000"/>
-                  </a:schemeClr>
-                </a:solidFill>
-                <a:latin typeface="KoPub돋움체 Medium" panose="02020603020101020101" pitchFamily="18" charset="-127"/>
-                <a:ea typeface="KoPub돋움체 Light" panose="02020603020101020101"/>
+              <a:rPr lang="ko-KR" altLang="en-US" sz="2000" dirty="0">
+                <a:solidFill>
+                  <a:schemeClr val="tx2">
+                    <a:lumMod val="50000"/>
+                  </a:schemeClr>
+                </a:solidFill>
+                <a:latin typeface="KoPub돋움체 Bold" panose="02020603020101020101" pitchFamily="18" charset="-127"/>
+                <a:ea typeface="KoPub돋움체 Bold" panose="02020603020101020101" pitchFamily="18" charset="-127"/>
               </a:rPr>
               <a:t>추후 계획</a:t>
             </a:r>
             <a:r>
-              <a:rPr lang="en-US" altLang="ko-KR" dirty="0">
-                <a:solidFill>
-                  <a:schemeClr val="tx2">
-                    <a:lumMod val="50000"/>
-                  </a:schemeClr>
-                </a:solidFill>
-                <a:latin typeface="KoPub돋움체 Medium" panose="02020603020101020101" pitchFamily="18" charset="-127"/>
-                <a:ea typeface="KoPub돋움체 Light" panose="02020603020101020101"/>
+              <a:rPr lang="en-US" altLang="ko-KR" sz="2000" dirty="0">
+                <a:solidFill>
+                  <a:schemeClr val="tx2">
+                    <a:lumMod val="50000"/>
+                  </a:schemeClr>
+                </a:solidFill>
+                <a:latin typeface="KoPub돋움체 Bold" panose="02020603020101020101" pitchFamily="18" charset="-127"/>
+                <a:ea typeface="KoPub돋움체 Bold" panose="02020603020101020101" pitchFamily="18" charset="-127"/>
               </a:rPr>
               <a:t>(F/U) </a:t>
             </a:r>
@@ -4949,7 +4949,7 @@
           <p:cNvPr id="22" name="TextBox 21">
             <a:extLst>
               <a:ext uri="{FF2B5EF4-FFF2-40B4-BE49-F238E27FC236}">
-                <a16:creationId xmlns:a16="http://schemas.microsoft.com/office/drawing/2014/main" id="{BC57D6DD-C910-2054-C4EB-9D7E67088B09}"/>
+                <a16:creationId xmlns:a16="http://schemas.microsoft.com/office/drawing/2014/main" id="{00E2B3FE-C947-6796-1503-F6067667A086}"/>
               </a:ext>
             </a:extLst>
           </p:cNvPr>
@@ -4958,8 +4958,8 @@
         </p:nvSpPr>
         <p:spPr>
           <a:xfrm>
-            <a:off x="310149" y="2334991"/>
-            <a:ext cx="2458815" cy="369332"/>
+            <a:off x="333321" y="2286199"/>
+            <a:ext cx="2424766" cy="400110"/>
           </a:xfrm>
           <a:prstGeom prst="rect">
             <a:avLst/>
@@ -4974,61 +4974,61 @@
           <a:p>
             <a:pPr algn="ctr"/>
             <a:r>
-              <a:rPr lang="en-US" altLang="ko-KR" b="1" dirty="0">
+              <a:rPr lang="en-US" altLang="ko-KR" sz="2000" b="1" dirty="0">
                 <a:solidFill>
                   <a:srgbClr val="000000"/>
                 </a:solidFill>
-                <a:latin typeface="KoPub돋움체 Medium" panose="02020603020101020101" pitchFamily="18" charset="-127"/>
-                <a:ea typeface="KoPub돋움체 Light" panose="02020603020101020101"/>
+                <a:latin typeface="KoPub돋움체 Bold" panose="02020603020101020101" pitchFamily="18" charset="-127"/>
+                <a:ea typeface="KoPub돋움체 Bold" panose="02020603020101020101" pitchFamily="18" charset="-127"/>
               </a:rPr>
               <a:t>ACD </a:t>
             </a:r>
             <a:r>
-              <a:rPr lang="ko-KR" altLang="en-US" b="1" dirty="0">
+              <a:rPr lang="ko-KR" altLang="en-US" sz="2000" b="1" dirty="0">
                 <a:solidFill>
                   <a:srgbClr val="000000"/>
                 </a:solidFill>
-                <a:latin typeface="KoPub돋움체 Medium" panose="02020603020101020101" pitchFamily="18" charset="-127"/>
-                <a:ea typeface="KoPub돋움체 Light" panose="02020603020101020101"/>
+                <a:latin typeface="KoPub돋움체 Bold" panose="02020603020101020101" pitchFamily="18" charset="-127"/>
+                <a:ea typeface="KoPub돋움체 Bold" panose="02020603020101020101" pitchFamily="18" charset="-127"/>
               </a:rPr>
               <a:t>루프 </a:t>
             </a:r>
             <a:r>
-              <a:rPr lang="en-US" altLang="ko-KR" b="1" dirty="0">
+              <a:rPr lang="en-US" altLang="ko-KR" sz="2000" b="1" dirty="0">
                 <a:solidFill>
                   <a:srgbClr val="000000"/>
                 </a:solidFill>
-                <a:latin typeface="KoPub돋움체 Medium" panose="02020603020101020101" pitchFamily="18" charset="-127"/>
-                <a:ea typeface="KoPub돋움체 Light" panose="02020603020101020101"/>
+                <a:latin typeface="KoPub돋움체 Bold" panose="02020603020101020101" pitchFamily="18" charset="-127"/>
+                <a:ea typeface="KoPub돋움체 Bold" panose="02020603020101020101" pitchFamily="18" charset="-127"/>
               </a:rPr>
               <a:t>(</a:t>
             </a:r>
             <a:r>
-              <a:rPr lang="ko-KR" altLang="en-US" b="1" dirty="0">
+              <a:rPr lang="ko-KR" altLang="en-US" sz="2000" b="1" dirty="0">
                 <a:solidFill>
                   <a:srgbClr val="000000"/>
                 </a:solidFill>
-                <a:latin typeface="KoPub돋움체 Medium" panose="02020603020101020101" pitchFamily="18" charset="-127"/>
-                <a:ea typeface="KoPub돋움체 Light" panose="02020603020101020101"/>
+                <a:latin typeface="KoPub돋움체 Bold" panose="02020603020101020101" pitchFamily="18" charset="-127"/>
+                <a:ea typeface="KoPub돋움체 Bold" panose="02020603020101020101" pitchFamily="18" charset="-127"/>
               </a:rPr>
               <a:t>소통 공식</a:t>
             </a:r>
             <a:r>
-              <a:rPr lang="en-US" altLang="ko-KR" b="1" dirty="0">
+              <a:rPr lang="en-US" altLang="ko-KR" sz="2000" b="1" dirty="0">
                 <a:solidFill>
                   <a:srgbClr val="000000"/>
                 </a:solidFill>
-                <a:latin typeface="KoPub돋움체 Medium" panose="02020603020101020101" pitchFamily="18" charset="-127"/>
-                <a:ea typeface="KoPub돋움체 Light" panose="02020603020101020101"/>
+                <a:latin typeface="KoPub돋움체 Bold" panose="02020603020101020101" pitchFamily="18" charset="-127"/>
+                <a:ea typeface="KoPub돋움체 Bold" panose="02020603020101020101" pitchFamily="18" charset="-127"/>
               </a:rPr>
               <a:t>)</a:t>
             </a:r>
-            <a:endParaRPr lang="ko-KR" altLang="en-US" b="1" dirty="0">
+            <a:endParaRPr lang="ko-KR" altLang="en-US" sz="2000" b="1" dirty="0">
               <a:solidFill>
                 <a:srgbClr val="000000"/>
               </a:solidFill>
-              <a:latin typeface="KoPub돋움체 Medium" panose="02020603020101020101" pitchFamily="18" charset="-127"/>
-              <a:ea typeface="KoPub돋움체 Light" panose="02020603020101020101"/>
+              <a:latin typeface="KoPub돋움체 Bold" panose="02020603020101020101" pitchFamily="18" charset="-127"/>
+              <a:ea typeface="KoPub돋움체 Bold" panose="02020603020101020101" pitchFamily="18" charset="-127"/>
             </a:endParaRPr>
           </a:p>
         </p:txBody>
@@ -5038,7 +5038,7 @@
           <p:cNvPr id="11" name="사각형: 둥근 모서리 10">
             <a:extLst>
               <a:ext uri="{FF2B5EF4-FFF2-40B4-BE49-F238E27FC236}">
-                <a16:creationId xmlns:a16="http://schemas.microsoft.com/office/drawing/2014/main" id="{82DFC436-1063-4EC0-8D98-BDC4799C2F86}"/>
+                <a16:creationId xmlns:a16="http://schemas.microsoft.com/office/drawing/2014/main" id="{1BE02509-2FD9-5A1B-6E5B-EBB20C911892}"/>
               </a:ext>
             </a:extLst>
           </p:cNvPr>
@@ -5047,8 +5047,8 @@
         </p:nvSpPr>
         <p:spPr>
           <a:xfrm>
-            <a:off x="3050989" y="3188946"/>
-            <a:ext cx="5779400" cy="1115349"/>
+            <a:off x="3063172" y="3272851"/>
+            <a:ext cx="5802477" cy="1119803"/>
           </a:xfrm>
           <a:prstGeom prst="roundRect">
             <a:avLst>
@@ -5085,9 +5085,9 @@
           <a:lstStyle/>
           <a:p>
             <a:pPr algn="ctr"/>
-            <a:endParaRPr lang="ko-KR" altLang="en-US" sz="5080">
-              <a:latin typeface="KoPub돋움체 Medium" panose="02020603020101020101" pitchFamily="18" charset="-127"/>
-              <a:ea typeface="KoPub돋움체 Light" panose="02020603020101020101"/>
+            <a:endParaRPr lang="ko-KR" altLang="en-US" sz="5400">
+              <a:latin typeface="KoPub돋움체 Bold" panose="02020603020101020101" pitchFamily="18" charset="-127"/>
+              <a:ea typeface="KoPub돋움체 Bold" panose="02020603020101020101" pitchFamily="18" charset="-127"/>
             </a:endParaRPr>
           </a:p>
         </p:txBody>
@@ -5097,7 +5097,7 @@
           <p:cNvPr id="14" name="사각형: 둥근 모서리 13">
             <a:extLst>
               <a:ext uri="{FF2B5EF4-FFF2-40B4-BE49-F238E27FC236}">
-                <a16:creationId xmlns:a16="http://schemas.microsoft.com/office/drawing/2014/main" id="{8D3E48C3-10D6-461B-92DA-40EFC6B4C91E}"/>
+                <a16:creationId xmlns:a16="http://schemas.microsoft.com/office/drawing/2014/main" id="{57676CC5-093B-C19F-BA8C-2E22BD0BD65D}"/>
               </a:ext>
             </a:extLst>
           </p:cNvPr>
@@ -5106,8 +5106,8 @@
         </p:nvSpPr>
         <p:spPr>
           <a:xfrm>
-            <a:off x="208326" y="3188946"/>
-            <a:ext cx="2788897" cy="1115349"/>
+            <a:off x="209158" y="3272851"/>
+            <a:ext cx="2800033" cy="1119803"/>
           </a:xfrm>
           <a:prstGeom prst="roundRect">
             <a:avLst>
@@ -5142,9 +5142,9 @@
           <a:lstStyle/>
           <a:p>
             <a:pPr algn="ctr"/>
-            <a:endParaRPr lang="ko-KR" altLang="en-US" sz="5080">
-              <a:latin typeface="KoPub돋움체 Medium" panose="02020603020101020101" pitchFamily="18" charset="-127"/>
-              <a:ea typeface="KoPub돋움체 Light" panose="02020603020101020101"/>
+            <a:endParaRPr lang="ko-KR" altLang="en-US" sz="5400">
+              <a:latin typeface="KoPub돋움체 Bold" panose="02020603020101020101" pitchFamily="18" charset="-127"/>
+              <a:ea typeface="KoPub돋움체 Bold" panose="02020603020101020101" pitchFamily="18" charset="-127"/>
             </a:endParaRPr>
           </a:p>
         </p:txBody>
@@ -5154,7 +5154,7 @@
           <p:cNvPr id="16" name="TextBox 15">
             <a:extLst>
               <a:ext uri="{FF2B5EF4-FFF2-40B4-BE49-F238E27FC236}">
-                <a16:creationId xmlns:a16="http://schemas.microsoft.com/office/drawing/2014/main" id="{17C117C8-2C5F-42B0-8015-D651D05B1BD8}"/>
+                <a16:creationId xmlns:a16="http://schemas.microsoft.com/office/drawing/2014/main" id="{1DE14D2F-0E11-6946-C09A-E0ECF40D4383}"/>
               </a:ext>
             </a:extLst>
           </p:cNvPr>
@@ -5163,8 +5163,8 @@
         </p:nvSpPr>
         <p:spPr>
           <a:xfrm>
-            <a:off x="310149" y="3561954"/>
-            <a:ext cx="2361544" cy="369332"/>
+            <a:off x="389840" y="3647348"/>
+            <a:ext cx="2214068" cy="400110"/>
           </a:xfrm>
           <a:prstGeom prst="rect">
             <a:avLst/>
@@ -5179,51 +5179,51 @@
           <a:p>
             <a:pPr algn="ctr"/>
             <a:r>
-              <a:rPr lang="ko-KR" altLang="en-US" b="1" dirty="0">
+              <a:rPr lang="ko-KR" altLang="en-US" sz="2000" b="1" dirty="0">
                 <a:solidFill>
                   <a:srgbClr val="000000"/>
                 </a:solidFill>
-                <a:latin typeface="KoPub돋움체 Medium" panose="02020603020101020101" pitchFamily="18" charset="-127"/>
-                <a:ea typeface="KoPub돋움체 Light" panose="02020603020101020101"/>
+                <a:latin typeface="KoPub돋움체 Bold" panose="02020603020101020101" pitchFamily="18" charset="-127"/>
+                <a:ea typeface="KoPub돋움체 Bold" panose="02020603020101020101" pitchFamily="18" charset="-127"/>
               </a:rPr>
               <a:t>트리아제 </a:t>
             </a:r>
             <a:r>
-              <a:rPr lang="en-US" altLang="ko-KR" b="1" dirty="0">
+              <a:rPr lang="en-US" altLang="ko-KR" sz="2000" b="1" dirty="0">
                 <a:solidFill>
                   <a:srgbClr val="000000"/>
                 </a:solidFill>
-                <a:latin typeface="KoPub돋움체 Medium" panose="02020603020101020101" pitchFamily="18" charset="-127"/>
-                <a:ea typeface="KoPub돋움체 Light" panose="02020603020101020101"/>
+                <a:latin typeface="KoPub돋움체 Bold" panose="02020603020101020101" pitchFamily="18" charset="-127"/>
+                <a:ea typeface="KoPub돋움체 Bold" panose="02020603020101020101" pitchFamily="18" charset="-127"/>
               </a:rPr>
               <a:t>(</a:t>
             </a:r>
             <a:r>
-              <a:rPr lang="ko-KR" altLang="en-US" b="1" dirty="0" err="1">
+              <a:rPr lang="ko-KR" altLang="en-US" sz="2000" b="1" dirty="0" err="1">
                 <a:solidFill>
                   <a:srgbClr val="000000"/>
                 </a:solidFill>
-                <a:latin typeface="KoPub돋움체 Medium" panose="02020603020101020101" pitchFamily="18" charset="-127"/>
-                <a:ea typeface="KoPub돋움체 Light" panose="02020603020101020101"/>
+                <a:latin typeface="KoPub돋움체 Bold" panose="02020603020101020101" pitchFamily="18" charset="-127"/>
+                <a:ea typeface="KoPub돋움체 Bold" panose="02020603020101020101" pitchFamily="18" charset="-127"/>
               </a:rPr>
               <a:t>골든타임</a:t>
             </a:r>
             <a:r>
-              <a:rPr lang="en-US" altLang="ko-KR" b="1" dirty="0">
+              <a:rPr lang="en-US" altLang="ko-KR" sz="2000" b="1" dirty="0">
                 <a:solidFill>
                   <a:srgbClr val="000000"/>
                 </a:solidFill>
-                <a:latin typeface="KoPub돋움체 Medium" panose="02020603020101020101" pitchFamily="18" charset="-127"/>
-                <a:ea typeface="KoPub돋움체 Light" panose="02020603020101020101"/>
+                <a:latin typeface="KoPub돋움체 Bold" panose="02020603020101020101" pitchFamily="18" charset="-127"/>
+                <a:ea typeface="KoPub돋움체 Bold" panose="02020603020101020101" pitchFamily="18" charset="-127"/>
               </a:rPr>
               <a:t>)</a:t>
             </a:r>
-            <a:endParaRPr lang="ko-KR" altLang="en-US" b="1" dirty="0">
+            <a:endParaRPr lang="ko-KR" altLang="en-US" sz="2000" b="1" dirty="0">
               <a:solidFill>
                 <a:srgbClr val="000000"/>
               </a:solidFill>
-              <a:latin typeface="KoPub돋움체 Medium" panose="02020603020101020101" pitchFamily="18" charset="-127"/>
-              <a:ea typeface="KoPub돋움체 Light" panose="02020603020101020101"/>
+              <a:latin typeface="KoPub돋움체 Bold" panose="02020603020101020101" pitchFamily="18" charset="-127"/>
+              <a:ea typeface="KoPub돋움체 Bold" panose="02020603020101020101" pitchFamily="18" charset="-127"/>
             </a:endParaRPr>
           </a:p>
         </p:txBody>
@@ -5233,7 +5233,7 @@
           <p:cNvPr id="2" name="직사각형 1">
             <a:extLst>
               <a:ext uri="{FF2B5EF4-FFF2-40B4-BE49-F238E27FC236}">
-                <a16:creationId xmlns:a16="http://schemas.microsoft.com/office/drawing/2014/main" id="{CF6CD54F-7897-4496-8903-172CACA01316}"/>
+                <a16:creationId xmlns:a16="http://schemas.microsoft.com/office/drawing/2014/main" id="{84F32BA8-2612-C472-477B-DA46869D2454}"/>
               </a:ext>
             </a:extLst>
           </p:cNvPr>
@@ -5242,8 +5242,8 @@
         </p:nvSpPr>
         <p:spPr>
           <a:xfrm>
-            <a:off x="3161346" y="3284955"/>
-            <a:ext cx="5468122" cy="923330"/>
+            <a:off x="3173969" y="3324921"/>
+            <a:ext cx="5489957" cy="1015663"/>
           </a:xfrm>
           <a:prstGeom prst="rect">
             <a:avLst/>
@@ -5256,24 +5256,27 @@
           <a:lstStyle/>
           <a:p>
             <a:r>
-              <a:rPr lang="ko-KR" altLang="en-US" dirty="0">
-                <a:ea typeface="KoPub돋움체 Light" panose="02020603020101020101"/>
+              <a:rPr lang="ko-KR" altLang="en-US" sz="2000" dirty="0">
+                <a:latin typeface="KoPub돋움체 Bold" panose="02020603020101020101" pitchFamily="18" charset="-127"/>
+                <a:ea typeface="KoPub돋움체 Bold" panose="02020603020101020101" pitchFamily="18" charset="-127"/>
               </a:rPr>
               <a:t>빨강 10분(응급): 환자 안전 직결 (유선 병행)</a:t>
             </a:r>
           </a:p>
           <a:p>
             <a:r>
-              <a:rPr lang="ko-KR" altLang="en-US" dirty="0">
-                <a:ea typeface="KoPub돋움체 Light" panose="02020603020101020101"/>
+              <a:rPr lang="ko-KR" altLang="en-US" sz="2000" dirty="0">
+                <a:latin typeface="KoPub돋움체 Bold" panose="02020603020101020101" pitchFamily="18" charset="-127"/>
+                <a:ea typeface="KoPub돋움체 Bold" panose="02020603020101020101" pitchFamily="18" charset="-127"/>
               </a:rPr>
               <a:t>초록 4시간(우선): 당일 내 우선 처리 필요</a:t>
             </a:r>
           </a:p>
           <a:p>
             <a:r>
-              <a:rPr lang="ko-KR" altLang="en-US" dirty="0">
-                <a:ea typeface="KoPub돋움체 Light" panose="02020603020101020101"/>
+              <a:rPr lang="ko-KR" altLang="en-US" sz="2000" dirty="0">
+                <a:latin typeface="KoPub돋움체 Bold" panose="02020603020101020101" pitchFamily="18" charset="-127"/>
+                <a:ea typeface="KoPub돋움체 Bold" panose="02020603020101020101" pitchFamily="18" charset="-127"/>
               </a:rPr>
               <a:t>노랑 12시간(루틴): 근무 흐름 내 안정적 처리</a:t>
             </a:r>
@@ -5283,7 +5286,7 @@
     </p:spTree>
     <p:extLst>
       <p:ext uri="{BB962C8B-B14F-4D97-AF65-F5344CB8AC3E}">
-        <p14:creationId xmlns:p14="http://schemas.microsoft.com/office/powerpoint/2010/main" val="3834611056"/>
+        <p14:creationId xmlns:p14="http://schemas.microsoft.com/office/powerpoint/2010/main" val="444567582"/>
       </p:ext>
     </p:extLst>
   </p:cSld>
@@ -5301,7 +5304,7 @@
         <p:cNvPr id="1" name="">
           <a:extLst>
             <a:ext uri="{FF2B5EF4-FFF2-40B4-BE49-F238E27FC236}">
-              <a16:creationId xmlns:a16="http://schemas.microsoft.com/office/drawing/2014/main" id="{DFA44891-DB0B-9038-5B25-629A4C227FFF}"/>
+              <a16:creationId xmlns:a16="http://schemas.microsoft.com/office/drawing/2014/main" id="{226C52D5-BBA6-8DA1-601D-D29E9B4B2E5B}"/>
             </a:ext>
           </a:extLst>
         </p:cNvPr>
@@ -5321,7 +5324,7 @@
           <p:cNvPr id="3" name="TextBox 2">
             <a:extLst>
               <a:ext uri="{FF2B5EF4-FFF2-40B4-BE49-F238E27FC236}">
-                <a16:creationId xmlns:a16="http://schemas.microsoft.com/office/drawing/2014/main" id="{CEABBF7A-4383-D72B-A05E-B56FEE94992E}"/>
+                <a16:creationId xmlns:a16="http://schemas.microsoft.com/office/drawing/2014/main" id="{C5E27D63-1F4E-F0FA-6A4A-8CE3548B3678}"/>
               </a:ext>
             </a:extLst>
           </p:cNvPr>
@@ -5330,8 +5333,8 @@
         </p:nvSpPr>
         <p:spPr>
           <a:xfrm>
-            <a:off x="101992" y="184592"/>
-            <a:ext cx="3494648" cy="309444"/>
+            <a:off x="102399" y="175060"/>
+            <a:ext cx="3508602" cy="310680"/>
           </a:xfrm>
           <a:prstGeom prst="rect">
             <a:avLst/>
@@ -5345,21 +5348,21 @@
           <a:lstStyle/>
           <a:p>
             <a:r>
-              <a:rPr lang="ko-KR" altLang="en-US" sz="1411" spc="-31" dirty="0">
+              <a:rPr lang="ko-KR" altLang="en-US" sz="1417" b="1" spc="-31" dirty="0">
                 <a:latin typeface="KoPub돋움체 Light" panose="02020603020101020101" pitchFamily="18" charset="-127"/>
                 <a:ea typeface="KoPub돋움체 Light" panose="02020603020101020101"/>
               </a:rPr>
               <a:t>순천향대학교 천안병원 </a:t>
             </a:r>
             <a:r>
-              <a:rPr lang="en-US" altLang="ko-KR" sz="1411" spc="-31" dirty="0">
+              <a:rPr lang="en-US" altLang="ko-KR" sz="1417" b="1" spc="-31" dirty="0">
                 <a:latin typeface="KoPub돋움체 Light" panose="02020603020101020101" pitchFamily="18" charset="-127"/>
                 <a:ea typeface="KoPub돋움체 Light" panose="02020603020101020101"/>
               </a:rPr>
               <a:t>| </a:t>
             </a:r>
             <a:r>
-              <a:rPr lang="ko-KR" altLang="en-US" sz="1411" spc="-31" dirty="0">
+              <a:rPr lang="ko-KR" altLang="en-US" sz="1417" b="1" spc="-31" dirty="0">
                 <a:latin typeface="KoPub돋움체 Light" panose="02020603020101020101" pitchFamily="18" charset="-127"/>
                 <a:ea typeface="KoPub돋움체 Light" panose="02020603020101020101"/>
               </a:rPr>
@@ -5373,7 +5376,7 @@
           <p:cNvPr id="6" name="사각형: 둥근 모서리 5">
             <a:extLst>
               <a:ext uri="{FF2B5EF4-FFF2-40B4-BE49-F238E27FC236}">
-                <a16:creationId xmlns:a16="http://schemas.microsoft.com/office/drawing/2014/main" id="{CE2932C1-2A00-0758-2BBA-833E022443FD}"/>
+                <a16:creationId xmlns:a16="http://schemas.microsoft.com/office/drawing/2014/main" id="{9FDA5180-8B48-9964-C220-CF52CE1AD668}"/>
               </a:ext>
             </a:extLst>
           </p:cNvPr>
@@ -5382,8 +5385,8 @@
         </p:nvSpPr>
         <p:spPr>
           <a:xfrm>
-            <a:off x="3050989" y="1198923"/>
-            <a:ext cx="5779400" cy="651443"/>
+            <a:off x="3063172" y="844256"/>
+            <a:ext cx="5802477" cy="826102"/>
           </a:xfrm>
           <a:prstGeom prst="roundRect">
             <a:avLst>
@@ -5420,9 +5423,9 @@
           <a:lstStyle/>
           <a:p>
             <a:pPr algn="ctr"/>
-            <a:endParaRPr lang="ko-KR" altLang="en-US" sz="5080">
-              <a:latin typeface="KoPub돋움체 Medium" panose="02020603020101020101" pitchFamily="18" charset="-127"/>
-              <a:ea typeface="KoPub돋움체 Light" panose="02020603020101020101"/>
+            <a:endParaRPr lang="ko-KR" altLang="en-US" sz="5422">
+              <a:latin typeface="KoPub돋움체 Bold" panose="02020603020101020101" pitchFamily="18" charset="-127"/>
+              <a:ea typeface="KoPub돋움체 Bold" panose="02020603020101020101" pitchFamily="18" charset="-127"/>
             </a:endParaRPr>
           </a:p>
         </p:txBody>
@@ -5432,7 +5435,7 @@
           <p:cNvPr id="8" name="사각형: 둥근 모서리 7">
             <a:extLst>
               <a:ext uri="{FF2B5EF4-FFF2-40B4-BE49-F238E27FC236}">
-                <a16:creationId xmlns:a16="http://schemas.microsoft.com/office/drawing/2014/main" id="{1548A1BD-8723-9A88-C7D3-66F55BF5E173}"/>
+                <a16:creationId xmlns:a16="http://schemas.microsoft.com/office/drawing/2014/main" id="{C6427951-E402-AE54-72DC-4E84141B60F5}"/>
               </a:ext>
             </a:extLst>
           </p:cNvPr>
@@ -5441,8 +5444,8 @@
         </p:nvSpPr>
         <p:spPr>
           <a:xfrm>
-            <a:off x="208326" y="1198923"/>
-            <a:ext cx="2788897" cy="651443"/>
+            <a:off x="209158" y="844256"/>
+            <a:ext cx="2800033" cy="826102"/>
           </a:xfrm>
           <a:prstGeom prst="roundRect">
             <a:avLst>
@@ -5477,9 +5480,9 @@
           <a:lstStyle/>
           <a:p>
             <a:pPr algn="ctr"/>
-            <a:endParaRPr lang="ko-KR" altLang="en-US" sz="5080">
-              <a:latin typeface="KoPub돋움체 Medium" panose="02020603020101020101" pitchFamily="18" charset="-127"/>
-              <a:ea typeface="KoPub돋움체 Light" panose="02020603020101020101"/>
+            <a:endParaRPr lang="ko-KR" altLang="en-US" sz="5422">
+              <a:latin typeface="KoPub돋움체 Bold" panose="02020603020101020101" pitchFamily="18" charset="-127"/>
+              <a:ea typeface="KoPub돋움체 Bold" panose="02020603020101020101" pitchFamily="18" charset="-127"/>
             </a:endParaRPr>
           </a:p>
         </p:txBody>
@@ -5489,7 +5492,7 @@
           <p:cNvPr id="9" name="TextBox 8">
             <a:extLst>
               <a:ext uri="{FF2B5EF4-FFF2-40B4-BE49-F238E27FC236}">
-                <a16:creationId xmlns:a16="http://schemas.microsoft.com/office/drawing/2014/main" id="{790F75E6-5F6B-E96E-73A6-26A5843998CD}"/>
+                <a16:creationId xmlns:a16="http://schemas.microsoft.com/office/drawing/2014/main" id="{581EF3F0-2B91-938C-2169-0832CEFA8B95}"/>
               </a:ext>
             </a:extLst>
           </p:cNvPr>
@@ -5498,8 +5501,8 @@
         </p:nvSpPr>
         <p:spPr>
           <a:xfrm>
-            <a:off x="3161347" y="1339978"/>
-            <a:ext cx="5119836" cy="369332"/>
+            <a:off x="3173970" y="1056452"/>
+            <a:ext cx="5140280" cy="401708"/>
           </a:xfrm>
           <a:prstGeom prst="rect">
             <a:avLst/>
@@ -5513,157 +5516,157 @@
           <a:lstStyle/>
           <a:p>
             <a:r>
-              <a:rPr lang="en-US" altLang="ko-KR" dirty="0">
-                <a:solidFill>
-                  <a:schemeClr val="tx2">
-                    <a:lumMod val="50000"/>
-                  </a:schemeClr>
-                </a:solidFill>
-                <a:latin typeface="KoPub돋움체 Medium" panose="02020603020101020101" pitchFamily="18" charset="-127"/>
-                <a:ea typeface="KoPub돋움체 Light" panose="02020603020101020101"/>
+              <a:rPr lang="en-US" altLang="ko-KR" sz="2008" dirty="0">
+                <a:solidFill>
+                  <a:schemeClr val="tx2">
+                    <a:lumMod val="50000"/>
+                  </a:schemeClr>
+                </a:solidFill>
+                <a:latin typeface="KoPub돋움체 Bold" panose="02020603020101020101" pitchFamily="18" charset="-127"/>
+                <a:ea typeface="KoPub돋움체 Bold" panose="02020603020101020101" pitchFamily="18" charset="-127"/>
               </a:rPr>
               <a:t>Case ID : </a:t>
             </a:r>
             <a:r>
-              <a:rPr lang="ko-KR" altLang="en-US" dirty="0">
-                <a:solidFill>
-                  <a:schemeClr val="tx2">
-                    <a:lumMod val="50000"/>
-                  </a:schemeClr>
-                </a:solidFill>
-                <a:latin typeface="KoPub돋움체 Medium" panose="02020603020101020101" pitchFamily="18" charset="-127"/>
-                <a:ea typeface="KoPub돋움체 Light" panose="02020603020101020101"/>
+              <a:rPr lang="ko-KR" altLang="en-US" sz="2008" dirty="0">
+                <a:solidFill>
+                  <a:schemeClr val="tx2">
+                    <a:lumMod val="50000"/>
+                  </a:schemeClr>
+                </a:solidFill>
+                <a:latin typeface="KoPub돋움체 Bold" panose="02020603020101020101" pitchFamily="18" charset="-127"/>
+                <a:ea typeface="KoPub돋움체 Bold" panose="02020603020101020101" pitchFamily="18" charset="-127"/>
               </a:rPr>
               <a:t>병실</a:t>
             </a:r>
             <a:r>
-              <a:rPr lang="en-US" altLang="ko-KR" dirty="0">
-                <a:solidFill>
-                  <a:schemeClr val="tx2">
-                    <a:lumMod val="50000"/>
-                  </a:schemeClr>
-                </a:solidFill>
-                <a:latin typeface="KoPub돋움체 Medium" panose="02020603020101020101" pitchFamily="18" charset="-127"/>
-                <a:ea typeface="KoPub돋움체 Light" panose="02020603020101020101"/>
+              <a:rPr lang="en-US" altLang="ko-KR" sz="2008" dirty="0">
+                <a:solidFill>
+                  <a:schemeClr val="tx2">
+                    <a:lumMod val="50000"/>
+                  </a:schemeClr>
+                </a:solidFill>
+                <a:latin typeface="KoPub돋움체 Bold" panose="02020603020101020101" pitchFamily="18" charset="-127"/>
+                <a:ea typeface="KoPub돋움체 Bold" panose="02020603020101020101" pitchFamily="18" charset="-127"/>
               </a:rPr>
               <a:t>-</a:t>
             </a:r>
             <a:r>
-              <a:rPr lang="ko-KR" altLang="en-US" dirty="0">
-                <a:solidFill>
-                  <a:schemeClr val="tx2">
-                    <a:lumMod val="50000"/>
-                  </a:schemeClr>
-                </a:solidFill>
-                <a:latin typeface="KoPub돋움체 Medium" panose="02020603020101020101" pitchFamily="18" charset="-127"/>
-                <a:ea typeface="KoPub돋움체 Light" panose="02020603020101020101"/>
+              <a:rPr lang="ko-KR" altLang="en-US" sz="2008" dirty="0">
+                <a:solidFill>
+                  <a:schemeClr val="tx2">
+                    <a:lumMod val="50000"/>
+                  </a:schemeClr>
+                </a:solidFill>
+                <a:latin typeface="KoPub돋움체 Bold" panose="02020603020101020101" pitchFamily="18" charset="-127"/>
+                <a:ea typeface="KoPub돋움체 Bold" panose="02020603020101020101" pitchFamily="18" charset="-127"/>
               </a:rPr>
               <a:t>등록</a:t>
             </a:r>
             <a:r>
-              <a:rPr lang="en-US" altLang="ko-KR" dirty="0">
-                <a:solidFill>
-                  <a:schemeClr val="tx2">
-                    <a:lumMod val="50000"/>
-                  </a:schemeClr>
-                </a:solidFill>
-                <a:latin typeface="KoPub돋움체 Medium" panose="02020603020101020101" pitchFamily="18" charset="-127"/>
-                <a:ea typeface="KoPub돋움체 Light" panose="02020603020101020101"/>
+              <a:rPr lang="en-US" altLang="ko-KR" sz="2008" dirty="0">
+                <a:solidFill>
+                  <a:schemeClr val="tx2">
+                    <a:lumMod val="50000"/>
+                  </a:schemeClr>
+                </a:solidFill>
+                <a:latin typeface="KoPub돋움체 Bold" panose="02020603020101020101" pitchFamily="18" charset="-127"/>
+                <a:ea typeface="KoPub돋움체 Bold" panose="02020603020101020101" pitchFamily="18" charset="-127"/>
               </a:rPr>
               <a:t>-</a:t>
             </a:r>
             <a:r>
-              <a:rPr lang="ko-KR" altLang="en-US" dirty="0">
-                <a:solidFill>
-                  <a:schemeClr val="tx2">
-                    <a:lumMod val="50000"/>
-                  </a:schemeClr>
-                </a:solidFill>
-                <a:latin typeface="KoPub돋움체 Medium" panose="02020603020101020101" pitchFamily="18" charset="-127"/>
-                <a:ea typeface="KoPub돋움체 Light" panose="02020603020101020101"/>
+              <a:rPr lang="ko-KR" altLang="en-US" sz="2008" dirty="0">
+                <a:solidFill>
+                  <a:schemeClr val="tx2">
+                    <a:lumMod val="50000"/>
+                  </a:schemeClr>
+                </a:solidFill>
+                <a:latin typeface="KoPub돋움체 Bold" panose="02020603020101020101" pitchFamily="18" charset="-127"/>
+                <a:ea typeface="KoPub돋움체 Bold" panose="02020603020101020101" pitchFamily="18" charset="-127"/>
               </a:rPr>
               <a:t>성함</a:t>
             </a:r>
             <a:r>
-              <a:rPr lang="en-US" altLang="ko-KR" dirty="0">
-                <a:solidFill>
-                  <a:schemeClr val="tx2">
-                    <a:lumMod val="50000"/>
-                  </a:schemeClr>
-                </a:solidFill>
-                <a:latin typeface="KoPub돋움체 Medium" panose="02020603020101020101" pitchFamily="18" charset="-127"/>
-                <a:ea typeface="KoPub돋움체 Light" panose="02020603020101020101"/>
+              <a:rPr lang="en-US" altLang="ko-KR" sz="2008" dirty="0">
+                <a:solidFill>
+                  <a:schemeClr val="tx2">
+                    <a:lumMod val="50000"/>
+                  </a:schemeClr>
+                </a:solidFill>
+                <a:latin typeface="KoPub돋움체 Bold" panose="02020603020101020101" pitchFamily="18" charset="-127"/>
+                <a:ea typeface="KoPub돋움체 Bold" panose="02020603020101020101" pitchFamily="18" charset="-127"/>
               </a:rPr>
               <a:t>-</a:t>
             </a:r>
             <a:r>
-              <a:rPr lang="ko-KR" altLang="en-US" dirty="0">
-                <a:solidFill>
-                  <a:schemeClr val="tx2">
-                    <a:lumMod val="50000"/>
-                  </a:schemeClr>
-                </a:solidFill>
-                <a:latin typeface="KoPub돋움체 Medium" panose="02020603020101020101" pitchFamily="18" charset="-127"/>
-                <a:ea typeface="KoPub돋움체 Light" panose="02020603020101020101"/>
+              <a:rPr lang="ko-KR" altLang="en-US" sz="2008" dirty="0">
+                <a:solidFill>
+                  <a:schemeClr val="tx2">
+                    <a:lumMod val="50000"/>
+                  </a:schemeClr>
+                </a:solidFill>
+                <a:latin typeface="KoPub돋움체 Bold" panose="02020603020101020101" pitchFamily="18" charset="-127"/>
+                <a:ea typeface="KoPub돋움체 Bold" panose="02020603020101020101" pitchFamily="18" charset="-127"/>
               </a:rPr>
               <a:t>교수</a:t>
             </a:r>
             <a:r>
-              <a:rPr lang="en-US" altLang="ko-KR" dirty="0">
-                <a:solidFill>
-                  <a:schemeClr val="tx2">
-                    <a:lumMod val="50000"/>
-                  </a:schemeClr>
-                </a:solidFill>
-                <a:latin typeface="KoPub돋움체 Medium" panose="02020603020101020101" pitchFamily="18" charset="-127"/>
-                <a:ea typeface="KoPub돋움체 Light" panose="02020603020101020101"/>
+              <a:rPr lang="en-US" altLang="ko-KR" sz="2008" dirty="0">
+                <a:solidFill>
+                  <a:schemeClr val="tx2">
+                    <a:lumMod val="50000"/>
+                  </a:schemeClr>
+                </a:solidFill>
+                <a:latin typeface="KoPub돋움체 Bold" panose="02020603020101020101" pitchFamily="18" charset="-127"/>
+                <a:ea typeface="KoPub돋움체 Bold" panose="02020603020101020101" pitchFamily="18" charset="-127"/>
               </a:rPr>
               <a:t>-</a:t>
             </a:r>
             <a:r>
-              <a:rPr lang="ko-KR" altLang="en-US" dirty="0">
-                <a:solidFill>
-                  <a:schemeClr val="tx2">
-                    <a:lumMod val="50000"/>
-                  </a:schemeClr>
-                </a:solidFill>
-                <a:latin typeface="KoPub돋움체 Medium" panose="02020603020101020101" pitchFamily="18" charset="-127"/>
-                <a:ea typeface="KoPub돋움체 Light" panose="02020603020101020101"/>
+              <a:rPr lang="ko-KR" altLang="en-US" sz="2008" dirty="0">
+                <a:solidFill>
+                  <a:schemeClr val="tx2">
+                    <a:lumMod val="50000"/>
+                  </a:schemeClr>
+                </a:solidFill>
+                <a:latin typeface="KoPub돋움체 Bold" panose="02020603020101020101" pitchFamily="18" charset="-127"/>
+                <a:ea typeface="KoPub돋움체 Bold" panose="02020603020101020101" pitchFamily="18" charset="-127"/>
               </a:rPr>
               <a:t>월일</a:t>
             </a:r>
             <a:r>
-              <a:rPr lang="en-US" altLang="ko-KR" dirty="0">
-                <a:solidFill>
-                  <a:schemeClr val="tx2">
-                    <a:lumMod val="50000"/>
-                  </a:schemeClr>
-                </a:solidFill>
-                <a:latin typeface="KoPub돋움체 Medium" panose="02020603020101020101" pitchFamily="18" charset="-127"/>
-                <a:ea typeface="KoPub돋움체 Light" panose="02020603020101020101"/>
+              <a:rPr lang="en-US" altLang="ko-KR" sz="2008" dirty="0">
+                <a:solidFill>
+                  <a:schemeClr val="tx2">
+                    <a:lumMod val="50000"/>
+                  </a:schemeClr>
+                </a:solidFill>
+                <a:latin typeface="KoPub돋움체 Bold" panose="02020603020101020101" pitchFamily="18" charset="-127"/>
+                <a:ea typeface="KoPub돋움체 Bold" panose="02020603020101020101" pitchFamily="18" charset="-127"/>
               </a:rPr>
               <a:t>-</a:t>
             </a:r>
             <a:r>
-              <a:rPr lang="ko-KR" altLang="en-US" dirty="0">
-                <a:solidFill>
-                  <a:schemeClr val="tx2">
-                    <a:lumMod val="50000"/>
-                  </a:schemeClr>
-                </a:solidFill>
-                <a:latin typeface="KoPub돋움체 Medium" panose="02020603020101020101" pitchFamily="18" charset="-127"/>
-                <a:ea typeface="KoPub돋움체 Light" panose="02020603020101020101"/>
+              <a:rPr lang="ko-KR" altLang="en-US" sz="2008" dirty="0">
+                <a:solidFill>
+                  <a:schemeClr val="tx2">
+                    <a:lumMod val="50000"/>
+                  </a:schemeClr>
+                </a:solidFill>
+                <a:latin typeface="KoPub돋움체 Bold" panose="02020603020101020101" pitchFamily="18" charset="-127"/>
+                <a:ea typeface="KoPub돋움체 Bold" panose="02020603020101020101" pitchFamily="18" charset="-127"/>
               </a:rPr>
               <a:t>시간</a:t>
             </a:r>
-            <a:endParaRPr lang="en-US" altLang="ko-KR" dirty="0">
+            <a:endParaRPr lang="en-US" altLang="ko-KR" sz="2008" dirty="0">
               <a:solidFill>
                 <a:schemeClr val="tx2">
                   <a:lumMod val="50000"/>
                 </a:schemeClr>
               </a:solidFill>
-              <a:latin typeface="KoPub돋움체 Medium" panose="02020603020101020101" pitchFamily="18" charset="-127"/>
-              <a:ea typeface="KoPub돋움체 Light" panose="02020603020101020101"/>
+              <a:latin typeface="KoPub돋움체 Bold" panose="02020603020101020101" pitchFamily="18" charset="-127"/>
+              <a:ea typeface="KoPub돋움체 Bold" panose="02020603020101020101" pitchFamily="18" charset="-127"/>
             </a:endParaRPr>
           </a:p>
         </p:txBody>
@@ -5673,7 +5676,7 @@
           <p:cNvPr id="12" name="TextBox 11">
             <a:extLst>
               <a:ext uri="{FF2B5EF4-FFF2-40B4-BE49-F238E27FC236}">
-                <a16:creationId xmlns:a16="http://schemas.microsoft.com/office/drawing/2014/main" id="{8FA07B63-4519-67D4-9E1C-D241B9FC298D}"/>
+                <a16:creationId xmlns:a16="http://schemas.microsoft.com/office/drawing/2014/main" id="{153F71DA-AE68-998C-F49D-6FDF5039750D}"/>
               </a:ext>
             </a:extLst>
           </p:cNvPr>
@@ -5682,8 +5685,8 @@
         </p:nvSpPr>
         <p:spPr>
           <a:xfrm>
-            <a:off x="310149" y="1339978"/>
-            <a:ext cx="2052165" cy="369332"/>
+            <a:off x="288052" y="1071903"/>
+            <a:ext cx="2107031" cy="401708"/>
           </a:xfrm>
           <a:prstGeom prst="rect">
             <a:avLst/>
@@ -5698,22 +5701,22 @@
           <a:p>
             <a:pPr algn="ctr"/>
             <a:r>
-              <a:rPr lang="en-US" altLang="ko-KR" b="1" dirty="0">
+              <a:rPr lang="en-US" altLang="ko-KR" sz="2008" b="1" dirty="0">
                 <a:solidFill>
                   <a:srgbClr val="000000"/>
                 </a:solidFill>
-                <a:latin typeface="KoPub돋움체 Medium" panose="02020603020101020101" pitchFamily="18" charset="-127"/>
-                <a:ea typeface="KoPub돋움체 Light" panose="02020603020101020101"/>
+                <a:latin typeface="KoPub돋움체 Bold" panose="02020603020101020101" pitchFamily="18" charset="-127"/>
+                <a:ea typeface="KoPub돋움체 Bold" panose="02020603020101020101" pitchFamily="18" charset="-127"/>
               </a:rPr>
               <a:t>[ID] Case ID </a:t>
             </a:r>
             <a:r>
-              <a:rPr lang="ko-KR" altLang="en-US" b="1" dirty="0">
+              <a:rPr lang="ko-KR" altLang="en-US" sz="2008" b="1" dirty="0">
                 <a:solidFill>
                   <a:srgbClr val="000000"/>
                 </a:solidFill>
-                <a:latin typeface="KoPub돋움체 Medium" panose="02020603020101020101" pitchFamily="18" charset="-127"/>
-                <a:ea typeface="KoPub돋움체 Light" panose="02020603020101020101"/>
+                <a:latin typeface="KoPub돋움체 Bold" panose="02020603020101020101" pitchFamily="18" charset="-127"/>
+                <a:ea typeface="KoPub돋움체 Bold" panose="02020603020101020101" pitchFamily="18" charset="-127"/>
               </a:rPr>
               <a:t>표준</a:t>
             </a:r>
@@ -5725,7 +5728,7 @@
           <p:cNvPr id="13" name="사각형: 둥근 모서리 12">
             <a:extLst>
               <a:ext uri="{FF2B5EF4-FFF2-40B4-BE49-F238E27FC236}">
-                <a16:creationId xmlns:a16="http://schemas.microsoft.com/office/drawing/2014/main" id="{C32F48BA-C495-9A9B-C63F-E8A7AEFC92D4}"/>
+                <a16:creationId xmlns:a16="http://schemas.microsoft.com/office/drawing/2014/main" id="{DF7989C0-61B0-3164-9F38-BF8594608ECB}"/>
               </a:ext>
             </a:extLst>
           </p:cNvPr>
@@ -5734,8 +5737,8 @@
         </p:nvSpPr>
         <p:spPr>
           <a:xfrm>
-            <a:off x="3050989" y="1961982"/>
-            <a:ext cx="5779400" cy="1115349"/>
+            <a:off x="3063172" y="1777571"/>
+            <a:ext cx="5802477" cy="1388063"/>
           </a:xfrm>
           <a:prstGeom prst="roundRect">
             <a:avLst>
@@ -5772,9 +5775,9 @@
           <a:lstStyle/>
           <a:p>
             <a:pPr algn="ctr"/>
-            <a:endParaRPr lang="ko-KR" altLang="en-US" sz="5080">
-              <a:latin typeface="KoPub돋움체 Medium" panose="02020603020101020101" pitchFamily="18" charset="-127"/>
-              <a:ea typeface="KoPub돋움체 Light" panose="02020603020101020101"/>
+            <a:endParaRPr lang="ko-KR" altLang="en-US" sz="5422">
+              <a:latin typeface="KoPub돋움체 Bold" panose="02020603020101020101" pitchFamily="18" charset="-127"/>
+              <a:ea typeface="KoPub돋움체 Bold" panose="02020603020101020101" pitchFamily="18" charset="-127"/>
             </a:endParaRPr>
           </a:p>
         </p:txBody>
@@ -5784,7 +5787,7 @@
           <p:cNvPr id="15" name="사각형: 둥근 모서리 14">
             <a:extLst>
               <a:ext uri="{FF2B5EF4-FFF2-40B4-BE49-F238E27FC236}">
-                <a16:creationId xmlns:a16="http://schemas.microsoft.com/office/drawing/2014/main" id="{6B78A99E-9E40-784B-95AB-E8BEFD430BA4}"/>
+                <a16:creationId xmlns:a16="http://schemas.microsoft.com/office/drawing/2014/main" id="{E4916BB0-94D5-1896-9B9C-C075401EF7B1}"/>
               </a:ext>
             </a:extLst>
           </p:cNvPr>
@@ -5793,8 +5796,8 @@
         </p:nvSpPr>
         <p:spPr>
           <a:xfrm>
-            <a:off x="208326" y="1961983"/>
-            <a:ext cx="2788897" cy="1115349"/>
+            <a:off x="209158" y="1777572"/>
+            <a:ext cx="2800033" cy="1388063"/>
           </a:xfrm>
           <a:prstGeom prst="roundRect">
             <a:avLst>
@@ -5829,9 +5832,9 @@
           <a:lstStyle/>
           <a:p>
             <a:pPr algn="ctr"/>
-            <a:endParaRPr lang="ko-KR" altLang="en-US" sz="5080">
-              <a:latin typeface="KoPub돋움체 Medium" panose="02020603020101020101" pitchFamily="18" charset="-127"/>
-              <a:ea typeface="KoPub돋움체 Light" panose="02020603020101020101"/>
+            <a:endParaRPr lang="ko-KR" altLang="en-US" sz="5422">
+              <a:latin typeface="KoPub돋움체 Bold" panose="02020603020101020101" pitchFamily="18" charset="-127"/>
+              <a:ea typeface="KoPub돋움체 Bold" panose="02020603020101020101" pitchFamily="18" charset="-127"/>
             </a:endParaRPr>
           </a:p>
         </p:txBody>
@@ -5841,7 +5844,7 @@
           <p:cNvPr id="20" name="TextBox 19">
             <a:extLst>
               <a:ext uri="{FF2B5EF4-FFF2-40B4-BE49-F238E27FC236}">
-                <a16:creationId xmlns:a16="http://schemas.microsoft.com/office/drawing/2014/main" id="{7905CC26-D0D7-0E58-1BF6-6BB32A2663D4}"/>
+                <a16:creationId xmlns:a16="http://schemas.microsoft.com/office/drawing/2014/main" id="{AD7F031D-8823-1448-5C02-7503F7398F69}"/>
               </a:ext>
             </a:extLst>
           </p:cNvPr>
@@ -5850,8 +5853,8 @@
         </p:nvSpPr>
         <p:spPr>
           <a:xfrm>
-            <a:off x="3161347" y="2057991"/>
-            <a:ext cx="5119836" cy="923330"/>
+            <a:off x="3173970" y="1961743"/>
+            <a:ext cx="5678063" cy="1019719"/>
           </a:xfrm>
           <a:prstGeom prst="rect">
             <a:avLst/>
@@ -5865,270 +5868,270 @@
           <a:lstStyle/>
           <a:p>
             <a:r>
-              <a:rPr lang="en-US" altLang="ko-KR" dirty="0">
-                <a:solidFill>
-                  <a:schemeClr val="tx2">
-                    <a:lumMod val="50000"/>
-                  </a:schemeClr>
-                </a:solidFill>
-                <a:latin typeface="KoPub돋움체 Medium" panose="02020603020101020101" pitchFamily="18" charset="-127"/>
-                <a:ea typeface="KoPub돋움체 Light" panose="02020603020101020101"/>
+              <a:rPr lang="en-US" altLang="ko-KR" sz="2008" dirty="0">
+                <a:solidFill>
+                  <a:schemeClr val="tx2">
+                    <a:lumMod val="50000"/>
+                  </a:schemeClr>
+                </a:solidFill>
+                <a:latin typeface="KoPub돋움체 Bold" panose="02020603020101020101" pitchFamily="18" charset="-127"/>
+                <a:ea typeface="KoPub돋움체 Bold" panose="02020603020101020101" pitchFamily="18" charset="-127"/>
               </a:rPr>
               <a:t>[A] </a:t>
             </a:r>
             <a:r>
-              <a:rPr lang="ko-KR" altLang="en-US" dirty="0">
-                <a:solidFill>
-                  <a:schemeClr val="tx2">
-                    <a:lumMod val="50000"/>
-                  </a:schemeClr>
-                </a:solidFill>
-                <a:latin typeface="KoPub돋움체 Medium" panose="02020603020101020101" pitchFamily="18" charset="-127"/>
-                <a:ea typeface="KoPub돋움체 Light" panose="02020603020101020101"/>
+              <a:rPr lang="ko-KR" altLang="en-US" sz="2008" dirty="0">
+                <a:solidFill>
+                  <a:schemeClr val="tx2">
+                    <a:lumMod val="50000"/>
+                  </a:schemeClr>
+                </a:solidFill>
+                <a:latin typeface="KoPub돋움체 Bold" panose="02020603020101020101" pitchFamily="18" charset="-127"/>
+                <a:ea typeface="KoPub돋움체 Bold" panose="02020603020101020101" pitchFamily="18" charset="-127"/>
               </a:rPr>
               <a:t>보고</a:t>
             </a:r>
             <a:r>
-              <a:rPr lang="en-US" altLang="ko-KR" dirty="0">
-                <a:solidFill>
-                  <a:schemeClr val="tx2">
-                    <a:lumMod val="50000"/>
-                  </a:schemeClr>
-                </a:solidFill>
-                <a:latin typeface="KoPub돋움체 Medium" panose="02020603020101020101" pitchFamily="18" charset="-127"/>
-                <a:ea typeface="KoPub돋움체 Light" panose="02020603020101020101"/>
+              <a:rPr lang="en-US" altLang="ko-KR" sz="2008" dirty="0">
+                <a:solidFill>
+                  <a:schemeClr val="tx2">
+                    <a:lumMod val="50000"/>
+                  </a:schemeClr>
+                </a:solidFill>
+                <a:latin typeface="KoPub돋움체 Bold" panose="02020603020101020101" pitchFamily="18" charset="-127"/>
+                <a:ea typeface="KoPub돋움체 Bold" panose="02020603020101020101" pitchFamily="18" charset="-127"/>
               </a:rPr>
               <a:t>: </a:t>
             </a:r>
             <a:r>
-              <a:rPr lang="ko-KR" altLang="en-US" dirty="0">
-                <a:solidFill>
-                  <a:schemeClr val="tx2">
-                    <a:lumMod val="50000"/>
-                  </a:schemeClr>
-                </a:solidFill>
-                <a:latin typeface="KoPub돋움체 Medium" panose="02020603020101020101" pitchFamily="18" charset="-127"/>
-                <a:ea typeface="KoPub돋움체 Light" panose="02020603020101020101"/>
+              <a:rPr lang="ko-KR" altLang="en-US" sz="2008" dirty="0">
+                <a:solidFill>
+                  <a:schemeClr val="tx2">
+                    <a:lumMod val="50000"/>
+                  </a:schemeClr>
+                </a:solidFill>
+                <a:latin typeface="KoPub돋움체 Bold" panose="02020603020101020101" pitchFamily="18" charset="-127"/>
+                <a:ea typeface="KoPub돋움체 Bold" panose="02020603020101020101" pitchFamily="18" charset="-127"/>
               </a:rPr>
               <a:t>지금 상태 </a:t>
             </a:r>
             <a:r>
-              <a:rPr lang="en-US" altLang="ko-KR" dirty="0">
-                <a:solidFill>
-                  <a:schemeClr val="tx2">
-                    <a:lumMod val="50000"/>
-                  </a:schemeClr>
-                </a:solidFill>
-                <a:latin typeface="KoPub돋움체 Medium" panose="02020603020101020101" pitchFamily="18" charset="-127"/>
-                <a:ea typeface="KoPub돋움체 Light" panose="02020603020101020101"/>
+              <a:rPr lang="en-US" altLang="ko-KR" sz="2008" dirty="0">
+                <a:solidFill>
+                  <a:schemeClr val="tx2">
+                    <a:lumMod val="50000"/>
+                  </a:schemeClr>
+                </a:solidFill>
+                <a:latin typeface="KoPub돋움체 Bold" panose="02020603020101020101" pitchFamily="18" charset="-127"/>
+                <a:ea typeface="KoPub돋움체 Bold" panose="02020603020101020101" pitchFamily="18" charset="-127"/>
               </a:rPr>
               <a:t>/ </a:t>
             </a:r>
             <a:r>
-              <a:rPr lang="ko-KR" altLang="en-US" dirty="0">
-                <a:solidFill>
-                  <a:schemeClr val="tx2">
-                    <a:lumMod val="50000"/>
-                  </a:schemeClr>
-                </a:solidFill>
-                <a:latin typeface="KoPub돋움체 Medium" panose="02020603020101020101" pitchFamily="18" charset="-127"/>
-                <a:ea typeface="KoPub돋움체 Light" panose="02020603020101020101"/>
+              <a:rPr lang="ko-KR" altLang="en-US" sz="2008" dirty="0">
+                <a:solidFill>
+                  <a:schemeClr val="tx2">
+                    <a:lumMod val="50000"/>
+                  </a:schemeClr>
+                </a:solidFill>
+                <a:latin typeface="KoPub돋움체 Bold" panose="02020603020101020101" pitchFamily="18" charset="-127"/>
+                <a:ea typeface="KoPub돋움체 Bold" panose="02020603020101020101" pitchFamily="18" charset="-127"/>
               </a:rPr>
               <a:t>근거 </a:t>
             </a:r>
             <a:r>
-              <a:rPr lang="en-US" altLang="ko-KR" dirty="0">
-                <a:solidFill>
-                  <a:schemeClr val="tx2">
-                    <a:lumMod val="50000"/>
-                  </a:schemeClr>
-                </a:solidFill>
-                <a:latin typeface="KoPub돋움체 Medium" panose="02020603020101020101" pitchFamily="18" charset="-127"/>
-                <a:ea typeface="KoPub돋움체 Light" panose="02020603020101020101"/>
+              <a:rPr lang="en-US" altLang="ko-KR" sz="2008" dirty="0">
+                <a:solidFill>
+                  <a:schemeClr val="tx2">
+                    <a:lumMod val="50000"/>
+                  </a:schemeClr>
+                </a:solidFill>
+                <a:latin typeface="KoPub돋움체 Bold" panose="02020603020101020101" pitchFamily="18" charset="-127"/>
+                <a:ea typeface="KoPub돋움체 Bold" panose="02020603020101020101" pitchFamily="18" charset="-127"/>
               </a:rPr>
               <a:t>/ </a:t>
             </a:r>
             <a:r>
-              <a:rPr lang="ko-KR" altLang="en-US" dirty="0">
-                <a:solidFill>
-                  <a:schemeClr val="tx2">
-                    <a:lumMod val="50000"/>
-                  </a:schemeClr>
-                </a:solidFill>
-                <a:latin typeface="KoPub돋움체 Medium" panose="02020603020101020101" pitchFamily="18" charset="-127"/>
-                <a:ea typeface="KoPub돋움체 Light" panose="02020603020101020101"/>
+              <a:rPr lang="ko-KR" altLang="en-US" sz="2008" dirty="0">
+                <a:solidFill>
+                  <a:schemeClr val="tx2">
+                    <a:lumMod val="50000"/>
+                  </a:schemeClr>
+                </a:solidFill>
+                <a:latin typeface="KoPub돋움체 Bold" panose="02020603020101020101" pitchFamily="18" charset="-127"/>
+                <a:ea typeface="KoPub돋움체 Bold" panose="02020603020101020101" pitchFamily="18" charset="-127"/>
               </a:rPr>
               <a:t>요청사항 </a:t>
             </a:r>
             <a:r>
-              <a:rPr lang="en-US" altLang="ko-KR" dirty="0">
-                <a:solidFill>
-                  <a:schemeClr val="tx2">
-                    <a:lumMod val="50000"/>
-                  </a:schemeClr>
-                </a:solidFill>
-                <a:latin typeface="KoPub돋움체 Medium" panose="02020603020101020101" pitchFamily="18" charset="-127"/>
-                <a:ea typeface="KoPub돋움체 Light" panose="02020603020101020101"/>
+              <a:rPr lang="en-US" altLang="ko-KR" sz="2008" dirty="0">
+                <a:solidFill>
+                  <a:schemeClr val="tx2">
+                    <a:lumMod val="50000"/>
+                  </a:schemeClr>
+                </a:solidFill>
+                <a:latin typeface="KoPub돋움체 Bold" panose="02020603020101020101" pitchFamily="18" charset="-127"/>
+                <a:ea typeface="KoPub돋움체 Bold" panose="02020603020101020101" pitchFamily="18" charset="-127"/>
               </a:rPr>
               <a:t>+ 10·4·12 </a:t>
             </a:r>
           </a:p>
           <a:p>
             <a:r>
-              <a:rPr lang="en-US" altLang="ko-KR" dirty="0">
-                <a:solidFill>
-                  <a:schemeClr val="tx2">
-                    <a:lumMod val="50000"/>
-                  </a:schemeClr>
-                </a:solidFill>
-                <a:latin typeface="KoPub돋움체 Medium" panose="02020603020101020101" pitchFamily="18" charset="-127"/>
-                <a:ea typeface="KoPub돋움체 Light" panose="02020603020101020101"/>
+              <a:rPr lang="en-US" altLang="ko-KR" sz="2008" dirty="0">
+                <a:solidFill>
+                  <a:schemeClr val="tx2">
+                    <a:lumMod val="50000"/>
+                  </a:schemeClr>
+                </a:solidFill>
+                <a:latin typeface="KoPub돋움체 Bold" panose="02020603020101020101" pitchFamily="18" charset="-127"/>
+                <a:ea typeface="KoPub돋움체 Bold" panose="02020603020101020101" pitchFamily="18" charset="-127"/>
               </a:rPr>
               <a:t>[C] </a:t>
             </a:r>
             <a:r>
-              <a:rPr lang="ko-KR" altLang="en-US" dirty="0">
-                <a:solidFill>
-                  <a:schemeClr val="tx2">
-                    <a:lumMod val="50000"/>
-                  </a:schemeClr>
-                </a:solidFill>
-                <a:latin typeface="KoPub돋움체 Medium" panose="02020603020101020101" pitchFamily="18" charset="-127"/>
-                <a:ea typeface="KoPub돋움체 Light" panose="02020603020101020101"/>
+              <a:rPr lang="ko-KR" altLang="en-US" sz="2008" dirty="0">
+                <a:solidFill>
+                  <a:schemeClr val="tx2">
+                    <a:lumMod val="50000"/>
+                  </a:schemeClr>
+                </a:solidFill>
+                <a:latin typeface="KoPub돋움체 Bold" panose="02020603020101020101" pitchFamily="18" charset="-127"/>
+                <a:ea typeface="KoPub돋움체 Bold" panose="02020603020101020101" pitchFamily="18" charset="-127"/>
               </a:rPr>
               <a:t>상황</a:t>
             </a:r>
             <a:r>
-              <a:rPr lang="en-US" altLang="ko-KR" dirty="0">
-                <a:solidFill>
-                  <a:schemeClr val="tx2">
-                    <a:lumMod val="50000"/>
-                  </a:schemeClr>
-                </a:solidFill>
-                <a:latin typeface="KoPub돋움체 Medium" panose="02020603020101020101" pitchFamily="18" charset="-127"/>
-                <a:ea typeface="KoPub돋움체 Light" panose="02020603020101020101"/>
+              <a:rPr lang="en-US" altLang="ko-KR" sz="2008" dirty="0">
+                <a:solidFill>
+                  <a:schemeClr val="tx2">
+                    <a:lumMod val="50000"/>
+                  </a:schemeClr>
+                </a:solidFill>
+                <a:latin typeface="KoPub돋움체 Bold" panose="02020603020101020101" pitchFamily="18" charset="-127"/>
+                <a:ea typeface="KoPub돋움체 Bold" panose="02020603020101020101" pitchFamily="18" charset="-127"/>
               </a:rPr>
               <a:t>: PA </a:t>
             </a:r>
             <a:r>
-              <a:rPr lang="ko-KR" altLang="en-US" dirty="0">
-                <a:solidFill>
-                  <a:schemeClr val="tx2">
-                    <a:lumMod val="50000"/>
-                  </a:schemeClr>
-                </a:solidFill>
-                <a:latin typeface="KoPub돋움체 Medium" panose="02020603020101020101" pitchFamily="18" charset="-127"/>
-                <a:ea typeface="KoPub돋움체 Light" panose="02020603020101020101"/>
+              <a:rPr lang="ko-KR" altLang="en-US" sz="2008" dirty="0">
+                <a:solidFill>
+                  <a:schemeClr val="tx2">
+                    <a:lumMod val="50000"/>
+                  </a:schemeClr>
+                </a:solidFill>
+                <a:latin typeface="KoPub돋움체 Bold" panose="02020603020101020101" pitchFamily="18" charset="-127"/>
+                <a:ea typeface="KoPub돋움체 Bold" panose="02020603020101020101" pitchFamily="18" charset="-127"/>
               </a:rPr>
               <a:t>조치 예정 사유 및 시간 공유 </a:t>
             </a:r>
           </a:p>
           <a:p>
             <a:r>
-              <a:rPr lang="en-US" altLang="ko-KR" dirty="0">
-                <a:solidFill>
-                  <a:schemeClr val="tx2">
-                    <a:lumMod val="50000"/>
-                  </a:schemeClr>
-                </a:solidFill>
-                <a:latin typeface="KoPub돋움체 Medium" panose="02020603020101020101" pitchFamily="18" charset="-127"/>
-                <a:ea typeface="KoPub돋움체 Light" panose="02020603020101020101"/>
+              <a:rPr lang="en-US" altLang="ko-KR" sz="2008" dirty="0">
+                <a:solidFill>
+                  <a:schemeClr val="tx2">
+                    <a:lumMod val="50000"/>
+                  </a:schemeClr>
+                </a:solidFill>
+                <a:latin typeface="KoPub돋움체 Bold" panose="02020603020101020101" pitchFamily="18" charset="-127"/>
+                <a:ea typeface="KoPub돋움체 Bold" panose="02020603020101020101" pitchFamily="18" charset="-127"/>
               </a:rPr>
               <a:t>[D] </a:t>
             </a:r>
             <a:r>
-              <a:rPr lang="ko-KR" altLang="en-US" dirty="0">
-                <a:solidFill>
-                  <a:schemeClr val="tx2">
-                    <a:lumMod val="50000"/>
-                  </a:schemeClr>
-                </a:solidFill>
-                <a:latin typeface="KoPub돋움체 Medium" panose="02020603020101020101" pitchFamily="18" charset="-127"/>
-                <a:ea typeface="KoPub돋움체 Light" panose="02020603020101020101"/>
+              <a:rPr lang="ko-KR" altLang="en-US" sz="2008" dirty="0">
+                <a:solidFill>
+                  <a:schemeClr val="tx2">
+                    <a:lumMod val="50000"/>
+                  </a:schemeClr>
+                </a:solidFill>
+                <a:latin typeface="KoPub돋움체 Bold" panose="02020603020101020101" pitchFamily="18" charset="-127"/>
+                <a:ea typeface="KoPub돋움체 Bold" panose="02020603020101020101" pitchFamily="18" charset="-127"/>
               </a:rPr>
               <a:t>완료</a:t>
             </a:r>
             <a:r>
-              <a:rPr lang="en-US" altLang="ko-KR" dirty="0">
-                <a:solidFill>
-                  <a:schemeClr val="tx2">
-                    <a:lumMod val="50000"/>
-                  </a:schemeClr>
-                </a:solidFill>
-                <a:latin typeface="KoPub돋움체 Medium" panose="02020603020101020101" pitchFamily="18" charset="-127"/>
-                <a:ea typeface="KoPub돋움체 Light" panose="02020603020101020101"/>
+              <a:rPr lang="en-US" altLang="ko-KR" sz="2008" dirty="0">
+                <a:solidFill>
+                  <a:schemeClr val="tx2">
+                    <a:lumMod val="50000"/>
+                  </a:schemeClr>
+                </a:solidFill>
+                <a:latin typeface="KoPub돋움체 Bold" panose="02020603020101020101" pitchFamily="18" charset="-127"/>
+                <a:ea typeface="KoPub돋움체 Bold" panose="02020603020101020101" pitchFamily="18" charset="-127"/>
               </a:rPr>
               <a:t>: </a:t>
             </a:r>
             <a:r>
-              <a:rPr lang="ko-KR" altLang="en-US" dirty="0">
-                <a:solidFill>
-                  <a:schemeClr val="tx2">
-                    <a:lumMod val="50000"/>
-                  </a:schemeClr>
-                </a:solidFill>
-                <a:latin typeface="KoPub돋움체 Medium" panose="02020603020101020101" pitchFamily="18" charset="-127"/>
-                <a:ea typeface="KoPub돋움체 Light" panose="02020603020101020101"/>
+              <a:rPr lang="ko-KR" altLang="en-US" sz="2008" dirty="0">
+                <a:solidFill>
+                  <a:schemeClr val="tx2">
+                    <a:lumMod val="50000"/>
+                  </a:schemeClr>
+                </a:solidFill>
+                <a:latin typeface="KoPub돋움체 Bold" panose="02020603020101020101" pitchFamily="18" charset="-127"/>
+                <a:ea typeface="KoPub돋움체 Bold" panose="02020603020101020101" pitchFamily="18" charset="-127"/>
               </a:rPr>
               <a:t>결과 </a:t>
             </a:r>
             <a:r>
-              <a:rPr lang="en-US" altLang="ko-KR" dirty="0">
-                <a:solidFill>
-                  <a:schemeClr val="tx2">
-                    <a:lumMod val="50000"/>
-                  </a:schemeClr>
-                </a:solidFill>
-                <a:latin typeface="KoPub돋움체 Medium" panose="02020603020101020101" pitchFamily="18" charset="-127"/>
-                <a:ea typeface="KoPub돋움체 Light" panose="02020603020101020101"/>
+              <a:rPr lang="en-US" altLang="ko-KR" sz="2008" dirty="0">
+                <a:solidFill>
+                  <a:schemeClr val="tx2">
+                    <a:lumMod val="50000"/>
+                  </a:schemeClr>
+                </a:solidFill>
+                <a:latin typeface="KoPub돋움체 Bold" panose="02020603020101020101" pitchFamily="18" charset="-127"/>
+                <a:ea typeface="KoPub돋움체 Bold" panose="02020603020101020101" pitchFamily="18" charset="-127"/>
               </a:rPr>
               <a:t>/ </a:t>
             </a:r>
             <a:r>
-              <a:rPr lang="ko-KR" altLang="en-US" dirty="0">
-                <a:solidFill>
-                  <a:schemeClr val="tx2">
-                    <a:lumMod val="50000"/>
-                  </a:schemeClr>
-                </a:solidFill>
-                <a:latin typeface="KoPub돋움체 Medium" panose="02020603020101020101" pitchFamily="18" charset="-127"/>
-                <a:ea typeface="KoPub돋움체 Light" panose="02020603020101020101"/>
+              <a:rPr lang="ko-KR" altLang="en-US" sz="2008" dirty="0">
+                <a:solidFill>
+                  <a:schemeClr val="tx2">
+                    <a:lumMod val="50000"/>
+                  </a:schemeClr>
+                </a:solidFill>
+                <a:latin typeface="KoPub돋움체 Bold" panose="02020603020101020101" pitchFamily="18" charset="-127"/>
+                <a:ea typeface="KoPub돋움체 Bold" panose="02020603020101020101" pitchFamily="18" charset="-127"/>
               </a:rPr>
               <a:t>현재 상태 </a:t>
             </a:r>
             <a:r>
-              <a:rPr lang="en-US" altLang="ko-KR" dirty="0">
-                <a:solidFill>
-                  <a:schemeClr val="tx2">
-                    <a:lumMod val="50000"/>
-                  </a:schemeClr>
-                </a:solidFill>
-                <a:latin typeface="KoPub돋움체 Medium" panose="02020603020101020101" pitchFamily="18" charset="-127"/>
-                <a:ea typeface="KoPub돋움체 Light" panose="02020603020101020101"/>
+              <a:rPr lang="en-US" altLang="ko-KR" sz="2008" dirty="0">
+                <a:solidFill>
+                  <a:schemeClr val="tx2">
+                    <a:lumMod val="50000"/>
+                  </a:schemeClr>
+                </a:solidFill>
+                <a:latin typeface="KoPub돋움체 Bold" panose="02020603020101020101" pitchFamily="18" charset="-127"/>
+                <a:ea typeface="KoPub돋움체 Bold" panose="02020603020101020101" pitchFamily="18" charset="-127"/>
               </a:rPr>
               <a:t>/ </a:t>
             </a:r>
             <a:r>
-              <a:rPr lang="ko-KR" altLang="en-US" dirty="0">
-                <a:solidFill>
-                  <a:schemeClr val="tx2">
-                    <a:lumMod val="50000"/>
-                  </a:schemeClr>
-                </a:solidFill>
-                <a:latin typeface="KoPub돋움체 Medium" panose="02020603020101020101" pitchFamily="18" charset="-127"/>
-                <a:ea typeface="KoPub돋움체 Light" panose="02020603020101020101"/>
+              <a:rPr lang="ko-KR" altLang="en-US" sz="2008" dirty="0">
+                <a:solidFill>
+                  <a:schemeClr val="tx2">
+                    <a:lumMod val="50000"/>
+                  </a:schemeClr>
+                </a:solidFill>
+                <a:latin typeface="KoPub돋움체 Bold" panose="02020603020101020101" pitchFamily="18" charset="-127"/>
+                <a:ea typeface="KoPub돋움체 Bold" panose="02020603020101020101" pitchFamily="18" charset="-127"/>
               </a:rPr>
               <a:t>추후 계획</a:t>
             </a:r>
             <a:r>
-              <a:rPr lang="en-US" altLang="ko-KR" dirty="0">
-                <a:solidFill>
-                  <a:schemeClr val="tx2">
-                    <a:lumMod val="50000"/>
-                  </a:schemeClr>
-                </a:solidFill>
-                <a:latin typeface="KoPub돋움체 Medium" panose="02020603020101020101" pitchFamily="18" charset="-127"/>
-                <a:ea typeface="KoPub돋움체 Light" panose="02020603020101020101"/>
+              <a:rPr lang="en-US" altLang="ko-KR" sz="2008" dirty="0">
+                <a:solidFill>
+                  <a:schemeClr val="tx2">
+                    <a:lumMod val="50000"/>
+                  </a:schemeClr>
+                </a:solidFill>
+                <a:latin typeface="KoPub돋움체 Bold" panose="02020603020101020101" pitchFamily="18" charset="-127"/>
+                <a:ea typeface="KoPub돋움체 Bold" panose="02020603020101020101" pitchFamily="18" charset="-127"/>
               </a:rPr>
               <a:t>(F/U) </a:t>
             </a:r>
@@ -6140,7 +6143,7 @@
           <p:cNvPr id="22" name="TextBox 21">
             <a:extLst>
               <a:ext uri="{FF2B5EF4-FFF2-40B4-BE49-F238E27FC236}">
-                <a16:creationId xmlns:a16="http://schemas.microsoft.com/office/drawing/2014/main" id="{BC57D6DD-C910-2054-C4EB-9D7E67088B09}"/>
+                <a16:creationId xmlns:a16="http://schemas.microsoft.com/office/drawing/2014/main" id="{F71EE094-B5B4-60A8-3CE6-295076AA057C}"/>
               </a:ext>
             </a:extLst>
           </p:cNvPr>
@@ -6149,8 +6152,8 @@
         </p:nvSpPr>
         <p:spPr>
           <a:xfrm>
-            <a:off x="310149" y="2334991"/>
-            <a:ext cx="2458815" cy="369332"/>
+            <a:off x="328480" y="2286199"/>
+            <a:ext cx="2434449" cy="401708"/>
           </a:xfrm>
           <a:prstGeom prst="rect">
             <a:avLst/>
@@ -6165,61 +6168,61 @@
           <a:p>
             <a:pPr algn="ctr"/>
             <a:r>
-              <a:rPr lang="en-US" altLang="ko-KR" b="1" dirty="0">
+              <a:rPr lang="en-US" altLang="ko-KR" sz="2008" b="1" dirty="0">
                 <a:solidFill>
                   <a:srgbClr val="000000"/>
                 </a:solidFill>
-                <a:latin typeface="KoPub돋움체 Medium" panose="02020603020101020101" pitchFamily="18" charset="-127"/>
-                <a:ea typeface="KoPub돋움체 Light" panose="02020603020101020101"/>
+                <a:latin typeface="KoPub돋움체 Bold" panose="02020603020101020101" pitchFamily="18" charset="-127"/>
+                <a:ea typeface="KoPub돋움체 Bold" panose="02020603020101020101" pitchFamily="18" charset="-127"/>
               </a:rPr>
               <a:t>ACD </a:t>
             </a:r>
             <a:r>
-              <a:rPr lang="ko-KR" altLang="en-US" b="1" dirty="0">
+              <a:rPr lang="ko-KR" altLang="en-US" sz="2008" b="1" dirty="0">
                 <a:solidFill>
                   <a:srgbClr val="000000"/>
                 </a:solidFill>
-                <a:latin typeface="KoPub돋움체 Medium" panose="02020603020101020101" pitchFamily="18" charset="-127"/>
-                <a:ea typeface="KoPub돋움체 Light" panose="02020603020101020101"/>
+                <a:latin typeface="KoPub돋움체 Bold" panose="02020603020101020101" pitchFamily="18" charset="-127"/>
+                <a:ea typeface="KoPub돋움체 Bold" panose="02020603020101020101" pitchFamily="18" charset="-127"/>
               </a:rPr>
               <a:t>루프 </a:t>
             </a:r>
             <a:r>
-              <a:rPr lang="en-US" altLang="ko-KR" b="1" dirty="0">
+              <a:rPr lang="en-US" altLang="ko-KR" sz="2008" b="1" dirty="0">
                 <a:solidFill>
                   <a:srgbClr val="000000"/>
                 </a:solidFill>
-                <a:latin typeface="KoPub돋움체 Medium" panose="02020603020101020101" pitchFamily="18" charset="-127"/>
-                <a:ea typeface="KoPub돋움체 Light" panose="02020603020101020101"/>
+                <a:latin typeface="KoPub돋움체 Bold" panose="02020603020101020101" pitchFamily="18" charset="-127"/>
+                <a:ea typeface="KoPub돋움체 Bold" panose="02020603020101020101" pitchFamily="18" charset="-127"/>
               </a:rPr>
               <a:t>(</a:t>
             </a:r>
             <a:r>
-              <a:rPr lang="ko-KR" altLang="en-US" b="1" dirty="0">
+              <a:rPr lang="ko-KR" altLang="en-US" sz="2008" b="1" dirty="0">
                 <a:solidFill>
                   <a:srgbClr val="000000"/>
                 </a:solidFill>
-                <a:latin typeface="KoPub돋움체 Medium" panose="02020603020101020101" pitchFamily="18" charset="-127"/>
-                <a:ea typeface="KoPub돋움체 Light" panose="02020603020101020101"/>
+                <a:latin typeface="KoPub돋움체 Bold" panose="02020603020101020101" pitchFamily="18" charset="-127"/>
+                <a:ea typeface="KoPub돋움체 Bold" panose="02020603020101020101" pitchFamily="18" charset="-127"/>
               </a:rPr>
               <a:t>소통 공식</a:t>
             </a:r>
             <a:r>
-              <a:rPr lang="en-US" altLang="ko-KR" b="1" dirty="0">
+              <a:rPr lang="en-US" altLang="ko-KR" sz="2008" b="1" dirty="0">
                 <a:solidFill>
                   <a:srgbClr val="000000"/>
                 </a:solidFill>
-                <a:latin typeface="KoPub돋움체 Medium" panose="02020603020101020101" pitchFamily="18" charset="-127"/>
-                <a:ea typeface="KoPub돋움체 Light" panose="02020603020101020101"/>
+                <a:latin typeface="KoPub돋움체 Bold" panose="02020603020101020101" pitchFamily="18" charset="-127"/>
+                <a:ea typeface="KoPub돋움체 Bold" panose="02020603020101020101" pitchFamily="18" charset="-127"/>
               </a:rPr>
               <a:t>)</a:t>
             </a:r>
-            <a:endParaRPr lang="ko-KR" altLang="en-US" b="1" dirty="0">
+            <a:endParaRPr lang="ko-KR" altLang="en-US" sz="2008" b="1" dirty="0">
               <a:solidFill>
                 <a:srgbClr val="000000"/>
               </a:solidFill>
-              <a:latin typeface="KoPub돋움체 Medium" panose="02020603020101020101" pitchFamily="18" charset="-127"/>
-              <a:ea typeface="KoPub돋움체 Light" panose="02020603020101020101"/>
+              <a:latin typeface="KoPub돋움체 Bold" panose="02020603020101020101" pitchFamily="18" charset="-127"/>
+              <a:ea typeface="KoPub돋움체 Bold" panose="02020603020101020101" pitchFamily="18" charset="-127"/>
             </a:endParaRPr>
           </a:p>
         </p:txBody>
@@ -6229,7 +6232,7 @@
           <p:cNvPr id="11" name="사각형: 둥근 모서리 10">
             <a:extLst>
               <a:ext uri="{FF2B5EF4-FFF2-40B4-BE49-F238E27FC236}">
-                <a16:creationId xmlns:a16="http://schemas.microsoft.com/office/drawing/2014/main" id="{82DFC436-1063-4EC0-8D98-BDC4799C2F86}"/>
+                <a16:creationId xmlns:a16="http://schemas.microsoft.com/office/drawing/2014/main" id="{63BD895F-AD6F-88B0-21B3-3330D1851749}"/>
               </a:ext>
             </a:extLst>
           </p:cNvPr>
@@ -6238,8 +6241,8 @@
         </p:nvSpPr>
         <p:spPr>
           <a:xfrm>
-            <a:off x="3050989" y="3188946"/>
-            <a:ext cx="5779400" cy="1115349"/>
+            <a:off x="3063172" y="3272851"/>
+            <a:ext cx="5802477" cy="1119803"/>
           </a:xfrm>
           <a:prstGeom prst="roundRect">
             <a:avLst>
@@ -6276,9 +6279,9 @@
           <a:lstStyle/>
           <a:p>
             <a:pPr algn="ctr"/>
-            <a:endParaRPr lang="ko-KR" altLang="en-US" sz="5080">
-              <a:latin typeface="KoPub돋움체 Medium" panose="02020603020101020101" pitchFamily="18" charset="-127"/>
-              <a:ea typeface="KoPub돋움체 Light" panose="02020603020101020101"/>
+            <a:endParaRPr lang="ko-KR" altLang="en-US" sz="5422">
+              <a:latin typeface="KoPub돋움체 Bold" panose="02020603020101020101" pitchFamily="18" charset="-127"/>
+              <a:ea typeface="KoPub돋움체 Bold" panose="02020603020101020101" pitchFamily="18" charset="-127"/>
             </a:endParaRPr>
           </a:p>
         </p:txBody>
@@ -6288,7 +6291,7 @@
           <p:cNvPr id="14" name="사각형: 둥근 모서리 13">
             <a:extLst>
               <a:ext uri="{FF2B5EF4-FFF2-40B4-BE49-F238E27FC236}">
-                <a16:creationId xmlns:a16="http://schemas.microsoft.com/office/drawing/2014/main" id="{8D3E48C3-10D6-461B-92DA-40EFC6B4C91E}"/>
+                <a16:creationId xmlns:a16="http://schemas.microsoft.com/office/drawing/2014/main" id="{7CEB3AB1-8E20-2125-5E79-5711CE662FD4}"/>
               </a:ext>
             </a:extLst>
           </p:cNvPr>
@@ -6297,8 +6300,8 @@
         </p:nvSpPr>
         <p:spPr>
           <a:xfrm>
-            <a:off x="208326" y="3188946"/>
-            <a:ext cx="2788897" cy="1115349"/>
+            <a:off x="209158" y="3272851"/>
+            <a:ext cx="2800033" cy="1119803"/>
           </a:xfrm>
           <a:prstGeom prst="roundRect">
             <a:avLst>
@@ -6333,9 +6336,9 @@
           <a:lstStyle/>
           <a:p>
             <a:pPr algn="ctr"/>
-            <a:endParaRPr lang="ko-KR" altLang="en-US" sz="5080">
-              <a:latin typeface="KoPub돋움체 Medium" panose="02020603020101020101" pitchFamily="18" charset="-127"/>
-              <a:ea typeface="KoPub돋움체 Light" panose="02020603020101020101"/>
+            <a:endParaRPr lang="ko-KR" altLang="en-US" sz="5422">
+              <a:latin typeface="KoPub돋움체 Bold" panose="02020603020101020101" pitchFamily="18" charset="-127"/>
+              <a:ea typeface="KoPub돋움체 Bold" panose="02020603020101020101" pitchFamily="18" charset="-127"/>
             </a:endParaRPr>
           </a:p>
         </p:txBody>
@@ -6345,7 +6348,7 @@
           <p:cNvPr id="16" name="TextBox 15">
             <a:extLst>
               <a:ext uri="{FF2B5EF4-FFF2-40B4-BE49-F238E27FC236}">
-                <a16:creationId xmlns:a16="http://schemas.microsoft.com/office/drawing/2014/main" id="{17C117C8-2C5F-42B0-8015-D651D05B1BD8}"/>
+                <a16:creationId xmlns:a16="http://schemas.microsoft.com/office/drawing/2014/main" id="{39149473-A2C8-E2BA-9B81-E7275B548DA8}"/>
               </a:ext>
             </a:extLst>
           </p:cNvPr>
@@ -6354,8 +6357,8 @@
         </p:nvSpPr>
         <p:spPr>
           <a:xfrm>
-            <a:off x="310149" y="3561954"/>
-            <a:ext cx="2361544" cy="369332"/>
+            <a:off x="385419" y="3647348"/>
+            <a:ext cx="2222910" cy="401708"/>
           </a:xfrm>
           <a:prstGeom prst="rect">
             <a:avLst/>
@@ -6370,51 +6373,51 @@
           <a:p>
             <a:pPr algn="ctr"/>
             <a:r>
-              <a:rPr lang="ko-KR" altLang="en-US" b="1" dirty="0">
+              <a:rPr lang="ko-KR" altLang="en-US" sz="2008" b="1" dirty="0">
                 <a:solidFill>
                   <a:srgbClr val="000000"/>
                 </a:solidFill>
-                <a:latin typeface="KoPub돋움체 Medium" panose="02020603020101020101" pitchFamily="18" charset="-127"/>
-                <a:ea typeface="KoPub돋움체 Light" panose="02020603020101020101"/>
+                <a:latin typeface="KoPub돋움체 Bold" panose="02020603020101020101" pitchFamily="18" charset="-127"/>
+                <a:ea typeface="KoPub돋움체 Bold" panose="02020603020101020101" pitchFamily="18" charset="-127"/>
               </a:rPr>
               <a:t>트리아제 </a:t>
             </a:r>
             <a:r>
-              <a:rPr lang="en-US" altLang="ko-KR" b="1" dirty="0">
+              <a:rPr lang="en-US" altLang="ko-KR" sz="2008" b="1" dirty="0">
                 <a:solidFill>
                   <a:srgbClr val="000000"/>
                 </a:solidFill>
-                <a:latin typeface="KoPub돋움체 Medium" panose="02020603020101020101" pitchFamily="18" charset="-127"/>
-                <a:ea typeface="KoPub돋움체 Light" panose="02020603020101020101"/>
+                <a:latin typeface="KoPub돋움체 Bold" panose="02020603020101020101" pitchFamily="18" charset="-127"/>
+                <a:ea typeface="KoPub돋움체 Bold" panose="02020603020101020101" pitchFamily="18" charset="-127"/>
               </a:rPr>
               <a:t>(</a:t>
             </a:r>
             <a:r>
-              <a:rPr lang="ko-KR" altLang="en-US" b="1" dirty="0" err="1">
+              <a:rPr lang="ko-KR" altLang="en-US" sz="2008" b="1" dirty="0" err="1">
                 <a:solidFill>
                   <a:srgbClr val="000000"/>
                 </a:solidFill>
-                <a:latin typeface="KoPub돋움체 Medium" panose="02020603020101020101" pitchFamily="18" charset="-127"/>
-                <a:ea typeface="KoPub돋움체 Light" panose="02020603020101020101"/>
+                <a:latin typeface="KoPub돋움체 Bold" panose="02020603020101020101" pitchFamily="18" charset="-127"/>
+                <a:ea typeface="KoPub돋움체 Bold" panose="02020603020101020101" pitchFamily="18" charset="-127"/>
               </a:rPr>
               <a:t>골든타임</a:t>
             </a:r>
             <a:r>
-              <a:rPr lang="en-US" altLang="ko-KR" b="1" dirty="0">
+              <a:rPr lang="en-US" altLang="ko-KR" sz="2008" b="1" dirty="0">
                 <a:solidFill>
                   <a:srgbClr val="000000"/>
                 </a:solidFill>
-                <a:latin typeface="KoPub돋움체 Medium" panose="02020603020101020101" pitchFamily="18" charset="-127"/>
-                <a:ea typeface="KoPub돋움체 Light" panose="02020603020101020101"/>
+                <a:latin typeface="KoPub돋움체 Bold" panose="02020603020101020101" pitchFamily="18" charset="-127"/>
+                <a:ea typeface="KoPub돋움체 Bold" panose="02020603020101020101" pitchFamily="18" charset="-127"/>
               </a:rPr>
               <a:t>)</a:t>
             </a:r>
-            <a:endParaRPr lang="ko-KR" altLang="en-US" b="1" dirty="0">
+            <a:endParaRPr lang="ko-KR" altLang="en-US" sz="2008" b="1" dirty="0">
               <a:solidFill>
                 <a:srgbClr val="000000"/>
               </a:solidFill>
-              <a:latin typeface="KoPub돋움체 Medium" panose="02020603020101020101" pitchFamily="18" charset="-127"/>
-              <a:ea typeface="KoPub돋움체 Light" panose="02020603020101020101"/>
+              <a:latin typeface="KoPub돋움체 Bold" panose="02020603020101020101" pitchFamily="18" charset="-127"/>
+              <a:ea typeface="KoPub돋움체 Bold" panose="02020603020101020101" pitchFamily="18" charset="-127"/>
             </a:endParaRPr>
           </a:p>
         </p:txBody>
@@ -6424,7 +6427,7 @@
           <p:cNvPr id="2" name="직사각형 1">
             <a:extLst>
               <a:ext uri="{FF2B5EF4-FFF2-40B4-BE49-F238E27FC236}">
-                <a16:creationId xmlns:a16="http://schemas.microsoft.com/office/drawing/2014/main" id="{CF6CD54F-7897-4496-8903-172CACA01316}"/>
+                <a16:creationId xmlns:a16="http://schemas.microsoft.com/office/drawing/2014/main" id="{C05CB5D4-1AB6-F76D-7DF2-0DB9289A8DFC}"/>
               </a:ext>
             </a:extLst>
           </p:cNvPr>
@@ -6433,8 +6436,8 @@
         </p:nvSpPr>
         <p:spPr>
           <a:xfrm>
-            <a:off x="3161346" y="3284955"/>
-            <a:ext cx="5468122" cy="923330"/>
+            <a:off x="3173969" y="3322893"/>
+            <a:ext cx="5489957" cy="1019719"/>
           </a:xfrm>
           <a:prstGeom prst="rect">
             <a:avLst/>
@@ -6447,24 +6450,27 @@
           <a:lstStyle/>
           <a:p>
             <a:r>
-              <a:rPr lang="ko-KR" altLang="en-US" dirty="0">
-                <a:ea typeface="KoPub돋움체 Light" panose="02020603020101020101"/>
+              <a:rPr lang="ko-KR" altLang="en-US" sz="2008" dirty="0">
+                <a:latin typeface="KoPub돋움체 Bold" panose="02020603020101020101" pitchFamily="18" charset="-127"/>
+                <a:ea typeface="KoPub돋움체 Bold" panose="02020603020101020101" pitchFamily="18" charset="-127"/>
               </a:rPr>
               <a:t>빨강 10분(응급): 환자 안전 직결 (유선 병행)</a:t>
             </a:r>
           </a:p>
           <a:p>
             <a:r>
-              <a:rPr lang="ko-KR" altLang="en-US" dirty="0">
-                <a:ea typeface="KoPub돋움체 Light" panose="02020603020101020101"/>
+              <a:rPr lang="ko-KR" altLang="en-US" sz="2008" dirty="0">
+                <a:latin typeface="KoPub돋움체 Bold" panose="02020603020101020101" pitchFamily="18" charset="-127"/>
+                <a:ea typeface="KoPub돋움체 Bold" panose="02020603020101020101" pitchFamily="18" charset="-127"/>
               </a:rPr>
               <a:t>초록 4시간(우선): 당일 내 우선 처리 필요</a:t>
             </a:r>
           </a:p>
           <a:p>
             <a:r>
-              <a:rPr lang="ko-KR" altLang="en-US" dirty="0">
-                <a:ea typeface="KoPub돋움체 Light" panose="02020603020101020101"/>
+              <a:rPr lang="ko-KR" altLang="en-US" sz="2008" dirty="0">
+                <a:latin typeface="KoPub돋움체 Bold" panose="02020603020101020101" pitchFamily="18" charset="-127"/>
+                <a:ea typeface="KoPub돋움체 Bold" panose="02020603020101020101" pitchFamily="18" charset="-127"/>
               </a:rPr>
               <a:t>노랑 12시간(루틴): 근무 흐름 내 안정적 처리</a:t>
             </a:r>
@@ -6474,7 +6480,7 @@
     </p:spTree>
     <p:extLst>
       <p:ext uri="{BB962C8B-B14F-4D97-AF65-F5344CB8AC3E}">
-        <p14:creationId xmlns:p14="http://schemas.microsoft.com/office/powerpoint/2010/main" val="1021952804"/>
+        <p14:creationId xmlns:p14="http://schemas.microsoft.com/office/powerpoint/2010/main" val="1981570639"/>
       </p:ext>
     </p:extLst>
   </p:cSld>
@@ -6492,7 +6498,7 @@
         <p:cNvPr id="1" name="">
           <a:extLst>
             <a:ext uri="{FF2B5EF4-FFF2-40B4-BE49-F238E27FC236}">
-              <a16:creationId xmlns:a16="http://schemas.microsoft.com/office/drawing/2014/main" id="{DFA44891-DB0B-9038-5B25-629A4C227FFF}"/>
+              <a16:creationId xmlns:a16="http://schemas.microsoft.com/office/drawing/2014/main" id="{E3F2F98F-D826-41F5-5609-03E6F6926998}"/>
             </a:ext>
           </a:extLst>
         </p:cNvPr>
@@ -6512,7 +6518,7 @@
           <p:cNvPr id="3" name="TextBox 2">
             <a:extLst>
               <a:ext uri="{FF2B5EF4-FFF2-40B4-BE49-F238E27FC236}">
-                <a16:creationId xmlns:a16="http://schemas.microsoft.com/office/drawing/2014/main" id="{CEABBF7A-4383-D72B-A05E-B56FEE94992E}"/>
+                <a16:creationId xmlns:a16="http://schemas.microsoft.com/office/drawing/2014/main" id="{2D9E2567-6957-80FD-8C51-58EA48B74A25}"/>
               </a:ext>
             </a:extLst>
           </p:cNvPr>
@@ -6521,8 +6527,8 @@
         </p:nvSpPr>
         <p:spPr>
           <a:xfrm>
-            <a:off x="101992" y="184592"/>
-            <a:ext cx="3494648" cy="309444"/>
+            <a:off x="102399" y="175060"/>
+            <a:ext cx="3508602" cy="310680"/>
           </a:xfrm>
           <a:prstGeom prst="rect">
             <a:avLst/>
@@ -6536,21 +6542,21 @@
           <a:lstStyle/>
           <a:p>
             <a:r>
-              <a:rPr lang="ko-KR" altLang="en-US" sz="1411" spc="-31" dirty="0">
+              <a:rPr lang="ko-KR" altLang="en-US" sz="1417" b="1" spc="-31" dirty="0">
                 <a:latin typeface="KoPub돋움체 Light" panose="02020603020101020101" pitchFamily="18" charset="-127"/>
                 <a:ea typeface="KoPub돋움체 Light" panose="02020603020101020101"/>
               </a:rPr>
               <a:t>순천향대학교 천안병원 </a:t>
             </a:r>
             <a:r>
-              <a:rPr lang="en-US" altLang="ko-KR" sz="1411" spc="-31" dirty="0">
+              <a:rPr lang="en-US" altLang="ko-KR" sz="1417" b="1" spc="-31" dirty="0">
                 <a:latin typeface="KoPub돋움체 Light" panose="02020603020101020101" pitchFamily="18" charset="-127"/>
                 <a:ea typeface="KoPub돋움체 Light" panose="02020603020101020101"/>
               </a:rPr>
               <a:t>| </a:t>
             </a:r>
             <a:r>
-              <a:rPr lang="ko-KR" altLang="en-US" sz="1411" spc="-31" dirty="0">
+              <a:rPr lang="ko-KR" altLang="en-US" sz="1417" b="1" spc="-31" dirty="0">
                 <a:latin typeface="KoPub돋움체 Light" panose="02020603020101020101" pitchFamily="18" charset="-127"/>
                 <a:ea typeface="KoPub돋움체 Light" panose="02020603020101020101"/>
               </a:rPr>
@@ -6564,7 +6570,7 @@
           <p:cNvPr id="6" name="사각형: 둥근 모서리 5">
             <a:extLst>
               <a:ext uri="{FF2B5EF4-FFF2-40B4-BE49-F238E27FC236}">
-                <a16:creationId xmlns:a16="http://schemas.microsoft.com/office/drawing/2014/main" id="{CE2932C1-2A00-0758-2BBA-833E022443FD}"/>
+                <a16:creationId xmlns:a16="http://schemas.microsoft.com/office/drawing/2014/main" id="{EBD3FCFA-8AA2-0423-2FE2-2777EB0D628C}"/>
               </a:ext>
             </a:extLst>
           </p:cNvPr>
@@ -6573,8 +6579,8 @@
         </p:nvSpPr>
         <p:spPr>
           <a:xfrm>
-            <a:off x="3050989" y="1198923"/>
-            <a:ext cx="5779400" cy="651443"/>
+            <a:off x="3063172" y="844256"/>
+            <a:ext cx="5802477" cy="826102"/>
           </a:xfrm>
           <a:prstGeom prst="roundRect">
             <a:avLst>
@@ -6611,9 +6617,9 @@
           <a:lstStyle/>
           <a:p>
             <a:pPr algn="ctr"/>
-            <a:endParaRPr lang="ko-KR" altLang="en-US" sz="5080">
-              <a:latin typeface="KoPub돋움체 Medium" panose="02020603020101020101" pitchFamily="18" charset="-127"/>
-              <a:ea typeface="KoPub돋움체 Light" panose="02020603020101020101"/>
+            <a:endParaRPr lang="ko-KR" altLang="en-US" sz="5422">
+              <a:latin typeface="KoPub돋움체 Bold" panose="02020603020101020101" pitchFamily="18" charset="-127"/>
+              <a:ea typeface="KoPub돋움체 Bold" panose="02020603020101020101" pitchFamily="18" charset="-127"/>
             </a:endParaRPr>
           </a:p>
         </p:txBody>
@@ -6623,7 +6629,7 @@
           <p:cNvPr id="8" name="사각형: 둥근 모서리 7">
             <a:extLst>
               <a:ext uri="{FF2B5EF4-FFF2-40B4-BE49-F238E27FC236}">
-                <a16:creationId xmlns:a16="http://schemas.microsoft.com/office/drawing/2014/main" id="{1548A1BD-8723-9A88-C7D3-66F55BF5E173}"/>
+                <a16:creationId xmlns:a16="http://schemas.microsoft.com/office/drawing/2014/main" id="{44E55108-2DB0-5755-CBC4-8017C68F10BE}"/>
               </a:ext>
             </a:extLst>
           </p:cNvPr>
@@ -6632,8 +6638,8 @@
         </p:nvSpPr>
         <p:spPr>
           <a:xfrm>
-            <a:off x="208326" y="1198923"/>
-            <a:ext cx="2788897" cy="651443"/>
+            <a:off x="209158" y="844256"/>
+            <a:ext cx="2800033" cy="826102"/>
           </a:xfrm>
           <a:prstGeom prst="roundRect">
             <a:avLst>
@@ -6668,9 +6674,9 @@
           <a:lstStyle/>
           <a:p>
             <a:pPr algn="ctr"/>
-            <a:endParaRPr lang="ko-KR" altLang="en-US" sz="5080">
-              <a:latin typeface="KoPub돋움체 Medium" panose="02020603020101020101" pitchFamily="18" charset="-127"/>
-              <a:ea typeface="KoPub돋움체 Light" panose="02020603020101020101"/>
+            <a:endParaRPr lang="ko-KR" altLang="en-US" sz="5422">
+              <a:latin typeface="KoPub돋움체 Bold" panose="02020603020101020101" pitchFamily="18" charset="-127"/>
+              <a:ea typeface="KoPub돋움체 Bold" panose="02020603020101020101" pitchFamily="18" charset="-127"/>
             </a:endParaRPr>
           </a:p>
         </p:txBody>
@@ -6680,7 +6686,7 @@
           <p:cNvPr id="9" name="TextBox 8">
             <a:extLst>
               <a:ext uri="{FF2B5EF4-FFF2-40B4-BE49-F238E27FC236}">
-                <a16:creationId xmlns:a16="http://schemas.microsoft.com/office/drawing/2014/main" id="{790F75E6-5F6B-E96E-73A6-26A5843998CD}"/>
+                <a16:creationId xmlns:a16="http://schemas.microsoft.com/office/drawing/2014/main" id="{DD429BA3-C4D3-8FC0-0A3A-4CA900DB4AF2}"/>
               </a:ext>
             </a:extLst>
           </p:cNvPr>
@@ -6689,8 +6695,8 @@
         </p:nvSpPr>
         <p:spPr>
           <a:xfrm>
-            <a:off x="3161347" y="1339978"/>
-            <a:ext cx="5119836" cy="369332"/>
+            <a:off x="3173970" y="1056452"/>
+            <a:ext cx="5140280" cy="401708"/>
           </a:xfrm>
           <a:prstGeom prst="rect">
             <a:avLst/>
@@ -6704,157 +6710,157 @@
           <a:lstStyle/>
           <a:p>
             <a:r>
-              <a:rPr lang="en-US" altLang="ko-KR" dirty="0">
-                <a:solidFill>
-                  <a:schemeClr val="tx2">
-                    <a:lumMod val="50000"/>
-                  </a:schemeClr>
-                </a:solidFill>
-                <a:latin typeface="KoPub돋움체 Medium" panose="02020603020101020101" pitchFamily="18" charset="-127"/>
-                <a:ea typeface="KoPub돋움체 Light" panose="02020603020101020101"/>
+              <a:rPr lang="en-US" altLang="ko-KR" sz="2008" dirty="0">
+                <a:solidFill>
+                  <a:schemeClr val="tx2">
+                    <a:lumMod val="50000"/>
+                  </a:schemeClr>
+                </a:solidFill>
+                <a:latin typeface="KoPub돋움체 Bold" panose="02020603020101020101" pitchFamily="18" charset="-127"/>
+                <a:ea typeface="KoPub돋움체 Bold" panose="02020603020101020101" pitchFamily="18" charset="-127"/>
               </a:rPr>
               <a:t>Case ID : </a:t>
             </a:r>
             <a:r>
-              <a:rPr lang="ko-KR" altLang="en-US" dirty="0">
-                <a:solidFill>
-                  <a:schemeClr val="tx2">
-                    <a:lumMod val="50000"/>
-                  </a:schemeClr>
-                </a:solidFill>
-                <a:latin typeface="KoPub돋움체 Medium" panose="02020603020101020101" pitchFamily="18" charset="-127"/>
-                <a:ea typeface="KoPub돋움체 Light" panose="02020603020101020101"/>
+              <a:rPr lang="ko-KR" altLang="en-US" sz="2008" dirty="0">
+                <a:solidFill>
+                  <a:schemeClr val="tx2">
+                    <a:lumMod val="50000"/>
+                  </a:schemeClr>
+                </a:solidFill>
+                <a:latin typeface="KoPub돋움체 Bold" panose="02020603020101020101" pitchFamily="18" charset="-127"/>
+                <a:ea typeface="KoPub돋움체 Bold" panose="02020603020101020101" pitchFamily="18" charset="-127"/>
               </a:rPr>
               <a:t>병실</a:t>
             </a:r>
             <a:r>
-              <a:rPr lang="en-US" altLang="ko-KR" dirty="0">
-                <a:solidFill>
-                  <a:schemeClr val="tx2">
-                    <a:lumMod val="50000"/>
-                  </a:schemeClr>
-                </a:solidFill>
-                <a:latin typeface="KoPub돋움체 Medium" panose="02020603020101020101" pitchFamily="18" charset="-127"/>
-                <a:ea typeface="KoPub돋움체 Light" panose="02020603020101020101"/>
+              <a:rPr lang="en-US" altLang="ko-KR" sz="2008" dirty="0">
+                <a:solidFill>
+                  <a:schemeClr val="tx2">
+                    <a:lumMod val="50000"/>
+                  </a:schemeClr>
+                </a:solidFill>
+                <a:latin typeface="KoPub돋움체 Bold" panose="02020603020101020101" pitchFamily="18" charset="-127"/>
+                <a:ea typeface="KoPub돋움체 Bold" panose="02020603020101020101" pitchFamily="18" charset="-127"/>
               </a:rPr>
               <a:t>-</a:t>
             </a:r>
             <a:r>
-              <a:rPr lang="ko-KR" altLang="en-US" dirty="0">
-                <a:solidFill>
-                  <a:schemeClr val="tx2">
-                    <a:lumMod val="50000"/>
-                  </a:schemeClr>
-                </a:solidFill>
-                <a:latin typeface="KoPub돋움체 Medium" panose="02020603020101020101" pitchFamily="18" charset="-127"/>
-                <a:ea typeface="KoPub돋움체 Light" panose="02020603020101020101"/>
+              <a:rPr lang="ko-KR" altLang="en-US" sz="2008" dirty="0">
+                <a:solidFill>
+                  <a:schemeClr val="tx2">
+                    <a:lumMod val="50000"/>
+                  </a:schemeClr>
+                </a:solidFill>
+                <a:latin typeface="KoPub돋움체 Bold" panose="02020603020101020101" pitchFamily="18" charset="-127"/>
+                <a:ea typeface="KoPub돋움체 Bold" panose="02020603020101020101" pitchFamily="18" charset="-127"/>
               </a:rPr>
               <a:t>등록</a:t>
             </a:r>
             <a:r>
-              <a:rPr lang="en-US" altLang="ko-KR" dirty="0">
-                <a:solidFill>
-                  <a:schemeClr val="tx2">
-                    <a:lumMod val="50000"/>
-                  </a:schemeClr>
-                </a:solidFill>
-                <a:latin typeface="KoPub돋움체 Medium" panose="02020603020101020101" pitchFamily="18" charset="-127"/>
-                <a:ea typeface="KoPub돋움체 Light" panose="02020603020101020101"/>
+              <a:rPr lang="en-US" altLang="ko-KR" sz="2008" dirty="0">
+                <a:solidFill>
+                  <a:schemeClr val="tx2">
+                    <a:lumMod val="50000"/>
+                  </a:schemeClr>
+                </a:solidFill>
+                <a:latin typeface="KoPub돋움체 Bold" panose="02020603020101020101" pitchFamily="18" charset="-127"/>
+                <a:ea typeface="KoPub돋움체 Bold" panose="02020603020101020101" pitchFamily="18" charset="-127"/>
               </a:rPr>
               <a:t>-</a:t>
             </a:r>
             <a:r>
-              <a:rPr lang="ko-KR" altLang="en-US" dirty="0">
-                <a:solidFill>
-                  <a:schemeClr val="tx2">
-                    <a:lumMod val="50000"/>
-                  </a:schemeClr>
-                </a:solidFill>
-                <a:latin typeface="KoPub돋움체 Medium" panose="02020603020101020101" pitchFamily="18" charset="-127"/>
-                <a:ea typeface="KoPub돋움체 Light" panose="02020603020101020101"/>
+              <a:rPr lang="ko-KR" altLang="en-US" sz="2008" dirty="0">
+                <a:solidFill>
+                  <a:schemeClr val="tx2">
+                    <a:lumMod val="50000"/>
+                  </a:schemeClr>
+                </a:solidFill>
+                <a:latin typeface="KoPub돋움체 Bold" panose="02020603020101020101" pitchFamily="18" charset="-127"/>
+                <a:ea typeface="KoPub돋움체 Bold" panose="02020603020101020101" pitchFamily="18" charset="-127"/>
               </a:rPr>
               <a:t>성함</a:t>
             </a:r>
             <a:r>
-              <a:rPr lang="en-US" altLang="ko-KR" dirty="0">
-                <a:solidFill>
-                  <a:schemeClr val="tx2">
-                    <a:lumMod val="50000"/>
-                  </a:schemeClr>
-                </a:solidFill>
-                <a:latin typeface="KoPub돋움체 Medium" panose="02020603020101020101" pitchFamily="18" charset="-127"/>
-                <a:ea typeface="KoPub돋움체 Light" panose="02020603020101020101"/>
+              <a:rPr lang="en-US" altLang="ko-KR" sz="2008" dirty="0">
+                <a:solidFill>
+                  <a:schemeClr val="tx2">
+                    <a:lumMod val="50000"/>
+                  </a:schemeClr>
+                </a:solidFill>
+                <a:latin typeface="KoPub돋움체 Bold" panose="02020603020101020101" pitchFamily="18" charset="-127"/>
+                <a:ea typeface="KoPub돋움체 Bold" panose="02020603020101020101" pitchFamily="18" charset="-127"/>
               </a:rPr>
               <a:t>-</a:t>
             </a:r>
             <a:r>
-              <a:rPr lang="ko-KR" altLang="en-US" dirty="0">
-                <a:solidFill>
-                  <a:schemeClr val="tx2">
-                    <a:lumMod val="50000"/>
-                  </a:schemeClr>
-                </a:solidFill>
-                <a:latin typeface="KoPub돋움체 Medium" panose="02020603020101020101" pitchFamily="18" charset="-127"/>
-                <a:ea typeface="KoPub돋움체 Light" panose="02020603020101020101"/>
+              <a:rPr lang="ko-KR" altLang="en-US" sz="2008" dirty="0">
+                <a:solidFill>
+                  <a:schemeClr val="tx2">
+                    <a:lumMod val="50000"/>
+                  </a:schemeClr>
+                </a:solidFill>
+                <a:latin typeface="KoPub돋움체 Bold" panose="02020603020101020101" pitchFamily="18" charset="-127"/>
+                <a:ea typeface="KoPub돋움체 Bold" panose="02020603020101020101" pitchFamily="18" charset="-127"/>
               </a:rPr>
               <a:t>교수</a:t>
             </a:r>
             <a:r>
-              <a:rPr lang="en-US" altLang="ko-KR" dirty="0">
-                <a:solidFill>
-                  <a:schemeClr val="tx2">
-                    <a:lumMod val="50000"/>
-                  </a:schemeClr>
-                </a:solidFill>
-                <a:latin typeface="KoPub돋움체 Medium" panose="02020603020101020101" pitchFamily="18" charset="-127"/>
-                <a:ea typeface="KoPub돋움체 Light" panose="02020603020101020101"/>
+              <a:rPr lang="en-US" altLang="ko-KR" sz="2008" dirty="0">
+                <a:solidFill>
+                  <a:schemeClr val="tx2">
+                    <a:lumMod val="50000"/>
+                  </a:schemeClr>
+                </a:solidFill>
+                <a:latin typeface="KoPub돋움체 Bold" panose="02020603020101020101" pitchFamily="18" charset="-127"/>
+                <a:ea typeface="KoPub돋움체 Bold" panose="02020603020101020101" pitchFamily="18" charset="-127"/>
               </a:rPr>
               <a:t>-</a:t>
             </a:r>
             <a:r>
-              <a:rPr lang="ko-KR" altLang="en-US" dirty="0">
-                <a:solidFill>
-                  <a:schemeClr val="tx2">
-                    <a:lumMod val="50000"/>
-                  </a:schemeClr>
-                </a:solidFill>
-                <a:latin typeface="KoPub돋움체 Medium" panose="02020603020101020101" pitchFamily="18" charset="-127"/>
-                <a:ea typeface="KoPub돋움체 Light" panose="02020603020101020101"/>
+              <a:rPr lang="ko-KR" altLang="en-US" sz="2008" dirty="0">
+                <a:solidFill>
+                  <a:schemeClr val="tx2">
+                    <a:lumMod val="50000"/>
+                  </a:schemeClr>
+                </a:solidFill>
+                <a:latin typeface="KoPub돋움체 Bold" panose="02020603020101020101" pitchFamily="18" charset="-127"/>
+                <a:ea typeface="KoPub돋움체 Bold" panose="02020603020101020101" pitchFamily="18" charset="-127"/>
               </a:rPr>
               <a:t>월일</a:t>
             </a:r>
             <a:r>
-              <a:rPr lang="en-US" altLang="ko-KR" dirty="0">
-                <a:solidFill>
-                  <a:schemeClr val="tx2">
-                    <a:lumMod val="50000"/>
-                  </a:schemeClr>
-                </a:solidFill>
-                <a:latin typeface="KoPub돋움체 Medium" panose="02020603020101020101" pitchFamily="18" charset="-127"/>
-                <a:ea typeface="KoPub돋움체 Light" panose="02020603020101020101"/>
+              <a:rPr lang="en-US" altLang="ko-KR" sz="2008" dirty="0">
+                <a:solidFill>
+                  <a:schemeClr val="tx2">
+                    <a:lumMod val="50000"/>
+                  </a:schemeClr>
+                </a:solidFill>
+                <a:latin typeface="KoPub돋움체 Bold" panose="02020603020101020101" pitchFamily="18" charset="-127"/>
+                <a:ea typeface="KoPub돋움체 Bold" panose="02020603020101020101" pitchFamily="18" charset="-127"/>
               </a:rPr>
               <a:t>-</a:t>
             </a:r>
             <a:r>
-              <a:rPr lang="ko-KR" altLang="en-US" dirty="0">
-                <a:solidFill>
-                  <a:schemeClr val="tx2">
-                    <a:lumMod val="50000"/>
-                  </a:schemeClr>
-                </a:solidFill>
-                <a:latin typeface="KoPub돋움체 Medium" panose="02020603020101020101" pitchFamily="18" charset="-127"/>
-                <a:ea typeface="KoPub돋움체 Light" panose="02020603020101020101"/>
+              <a:rPr lang="ko-KR" altLang="en-US" sz="2008" dirty="0">
+                <a:solidFill>
+                  <a:schemeClr val="tx2">
+                    <a:lumMod val="50000"/>
+                  </a:schemeClr>
+                </a:solidFill>
+                <a:latin typeface="KoPub돋움체 Bold" panose="02020603020101020101" pitchFamily="18" charset="-127"/>
+                <a:ea typeface="KoPub돋움체 Bold" panose="02020603020101020101" pitchFamily="18" charset="-127"/>
               </a:rPr>
               <a:t>시간</a:t>
             </a:r>
-            <a:endParaRPr lang="en-US" altLang="ko-KR" dirty="0">
+            <a:endParaRPr lang="en-US" altLang="ko-KR" sz="2008" dirty="0">
               <a:solidFill>
                 <a:schemeClr val="tx2">
                   <a:lumMod val="50000"/>
                 </a:schemeClr>
               </a:solidFill>
-              <a:latin typeface="KoPub돋움체 Medium" panose="02020603020101020101" pitchFamily="18" charset="-127"/>
-              <a:ea typeface="KoPub돋움체 Light" panose="02020603020101020101"/>
+              <a:latin typeface="KoPub돋움체 Bold" panose="02020603020101020101" pitchFamily="18" charset="-127"/>
+              <a:ea typeface="KoPub돋움체 Bold" panose="02020603020101020101" pitchFamily="18" charset="-127"/>
             </a:endParaRPr>
           </a:p>
         </p:txBody>
@@ -6864,7 +6870,7 @@
           <p:cNvPr id="12" name="TextBox 11">
             <a:extLst>
               <a:ext uri="{FF2B5EF4-FFF2-40B4-BE49-F238E27FC236}">
-                <a16:creationId xmlns:a16="http://schemas.microsoft.com/office/drawing/2014/main" id="{8FA07B63-4519-67D4-9E1C-D241B9FC298D}"/>
+                <a16:creationId xmlns:a16="http://schemas.microsoft.com/office/drawing/2014/main" id="{7D4938C7-76C5-E49D-D993-7DB2772DEF7D}"/>
               </a:ext>
             </a:extLst>
           </p:cNvPr>
@@ -6873,8 +6879,8 @@
         </p:nvSpPr>
         <p:spPr>
           <a:xfrm>
-            <a:off x="310149" y="1339978"/>
-            <a:ext cx="2052165" cy="369332"/>
+            <a:off x="288052" y="1071903"/>
+            <a:ext cx="2107031" cy="401708"/>
           </a:xfrm>
           <a:prstGeom prst="rect">
             <a:avLst/>
@@ -6889,22 +6895,22 @@
           <a:p>
             <a:pPr algn="ctr"/>
             <a:r>
-              <a:rPr lang="en-US" altLang="ko-KR" b="1" dirty="0">
+              <a:rPr lang="en-US" altLang="ko-KR" sz="2008" b="1" dirty="0">
                 <a:solidFill>
                   <a:srgbClr val="000000"/>
                 </a:solidFill>
-                <a:latin typeface="KoPub돋움체 Medium" panose="02020603020101020101" pitchFamily="18" charset="-127"/>
-                <a:ea typeface="KoPub돋움체 Light" panose="02020603020101020101"/>
+                <a:latin typeface="KoPub돋움체 Bold" panose="02020603020101020101" pitchFamily="18" charset="-127"/>
+                <a:ea typeface="KoPub돋움체 Bold" panose="02020603020101020101" pitchFamily="18" charset="-127"/>
               </a:rPr>
               <a:t>[ID] Case ID </a:t>
             </a:r>
             <a:r>
-              <a:rPr lang="ko-KR" altLang="en-US" b="1" dirty="0">
+              <a:rPr lang="ko-KR" altLang="en-US" sz="2008" b="1" dirty="0">
                 <a:solidFill>
                   <a:srgbClr val="000000"/>
                 </a:solidFill>
-                <a:latin typeface="KoPub돋움체 Medium" panose="02020603020101020101" pitchFamily="18" charset="-127"/>
-                <a:ea typeface="KoPub돋움체 Light" panose="02020603020101020101"/>
+                <a:latin typeface="KoPub돋움체 Bold" panose="02020603020101020101" pitchFamily="18" charset="-127"/>
+                <a:ea typeface="KoPub돋움체 Bold" panose="02020603020101020101" pitchFamily="18" charset="-127"/>
               </a:rPr>
               <a:t>표준</a:t>
             </a:r>
@@ -6916,7 +6922,7 @@
           <p:cNvPr id="13" name="사각형: 둥근 모서리 12">
             <a:extLst>
               <a:ext uri="{FF2B5EF4-FFF2-40B4-BE49-F238E27FC236}">
-                <a16:creationId xmlns:a16="http://schemas.microsoft.com/office/drawing/2014/main" id="{C32F48BA-C495-9A9B-C63F-E8A7AEFC92D4}"/>
+                <a16:creationId xmlns:a16="http://schemas.microsoft.com/office/drawing/2014/main" id="{5E9F6AB4-8015-8CCE-E572-04A131E8188F}"/>
               </a:ext>
             </a:extLst>
           </p:cNvPr>
@@ -6925,8 +6931,8 @@
         </p:nvSpPr>
         <p:spPr>
           <a:xfrm>
-            <a:off x="3050989" y="1961982"/>
-            <a:ext cx="5779400" cy="1115349"/>
+            <a:off x="3063172" y="1777571"/>
+            <a:ext cx="5802477" cy="1388063"/>
           </a:xfrm>
           <a:prstGeom prst="roundRect">
             <a:avLst>
@@ -6963,9 +6969,9 @@
           <a:lstStyle/>
           <a:p>
             <a:pPr algn="ctr"/>
-            <a:endParaRPr lang="ko-KR" altLang="en-US" sz="5080">
-              <a:latin typeface="KoPub돋움체 Medium" panose="02020603020101020101" pitchFamily="18" charset="-127"/>
-              <a:ea typeface="KoPub돋움체 Light" panose="02020603020101020101"/>
+            <a:endParaRPr lang="ko-KR" altLang="en-US" sz="5422">
+              <a:latin typeface="KoPub돋움체 Bold" panose="02020603020101020101" pitchFamily="18" charset="-127"/>
+              <a:ea typeface="KoPub돋움체 Bold" panose="02020603020101020101" pitchFamily="18" charset="-127"/>
             </a:endParaRPr>
           </a:p>
         </p:txBody>
@@ -6975,7 +6981,7 @@
           <p:cNvPr id="15" name="사각형: 둥근 모서리 14">
             <a:extLst>
               <a:ext uri="{FF2B5EF4-FFF2-40B4-BE49-F238E27FC236}">
-                <a16:creationId xmlns:a16="http://schemas.microsoft.com/office/drawing/2014/main" id="{6B78A99E-9E40-784B-95AB-E8BEFD430BA4}"/>
+                <a16:creationId xmlns:a16="http://schemas.microsoft.com/office/drawing/2014/main" id="{327E6B87-06D0-0F9E-A0B0-A12087FF02EA}"/>
               </a:ext>
             </a:extLst>
           </p:cNvPr>
@@ -6984,8 +6990,8 @@
         </p:nvSpPr>
         <p:spPr>
           <a:xfrm>
-            <a:off x="208326" y="1961983"/>
-            <a:ext cx="2788897" cy="1115349"/>
+            <a:off x="209158" y="1777572"/>
+            <a:ext cx="2800033" cy="1388063"/>
           </a:xfrm>
           <a:prstGeom prst="roundRect">
             <a:avLst>
@@ -7020,9 +7026,9 @@
           <a:lstStyle/>
           <a:p>
             <a:pPr algn="ctr"/>
-            <a:endParaRPr lang="ko-KR" altLang="en-US" sz="5080">
-              <a:latin typeface="KoPub돋움체 Medium" panose="02020603020101020101" pitchFamily="18" charset="-127"/>
-              <a:ea typeface="KoPub돋움체 Light" panose="02020603020101020101"/>
+            <a:endParaRPr lang="ko-KR" altLang="en-US" sz="5422">
+              <a:latin typeface="KoPub돋움체 Bold" panose="02020603020101020101" pitchFamily="18" charset="-127"/>
+              <a:ea typeface="KoPub돋움체 Bold" panose="02020603020101020101" pitchFamily="18" charset="-127"/>
             </a:endParaRPr>
           </a:p>
         </p:txBody>
@@ -7032,7 +7038,7 @@
           <p:cNvPr id="20" name="TextBox 19">
             <a:extLst>
               <a:ext uri="{FF2B5EF4-FFF2-40B4-BE49-F238E27FC236}">
-                <a16:creationId xmlns:a16="http://schemas.microsoft.com/office/drawing/2014/main" id="{7905CC26-D0D7-0E58-1BF6-6BB32A2663D4}"/>
+                <a16:creationId xmlns:a16="http://schemas.microsoft.com/office/drawing/2014/main" id="{6A01971F-AC99-2004-D6CC-EC87D1F6AF23}"/>
               </a:ext>
             </a:extLst>
           </p:cNvPr>
@@ -7041,8 +7047,8 @@
         </p:nvSpPr>
         <p:spPr>
           <a:xfrm>
-            <a:off x="3161347" y="2057991"/>
-            <a:ext cx="5119836" cy="923330"/>
+            <a:off x="3173970" y="1961743"/>
+            <a:ext cx="5678063" cy="1019719"/>
           </a:xfrm>
           <a:prstGeom prst="rect">
             <a:avLst/>
@@ -7056,270 +7062,270 @@
           <a:lstStyle/>
           <a:p>
             <a:r>
-              <a:rPr lang="en-US" altLang="ko-KR" dirty="0">
-                <a:solidFill>
-                  <a:schemeClr val="tx2">
-                    <a:lumMod val="50000"/>
-                  </a:schemeClr>
-                </a:solidFill>
-                <a:latin typeface="KoPub돋움체 Medium" panose="02020603020101020101" pitchFamily="18" charset="-127"/>
-                <a:ea typeface="KoPub돋움체 Light" panose="02020603020101020101"/>
+              <a:rPr lang="en-US" altLang="ko-KR" sz="2008" dirty="0">
+                <a:solidFill>
+                  <a:schemeClr val="tx2">
+                    <a:lumMod val="50000"/>
+                  </a:schemeClr>
+                </a:solidFill>
+                <a:latin typeface="KoPub돋움체 Bold" panose="02020603020101020101" pitchFamily="18" charset="-127"/>
+                <a:ea typeface="KoPub돋움체 Bold" panose="02020603020101020101" pitchFamily="18" charset="-127"/>
               </a:rPr>
               <a:t>[A] </a:t>
             </a:r>
             <a:r>
-              <a:rPr lang="ko-KR" altLang="en-US" dirty="0">
-                <a:solidFill>
-                  <a:schemeClr val="tx2">
-                    <a:lumMod val="50000"/>
-                  </a:schemeClr>
-                </a:solidFill>
-                <a:latin typeface="KoPub돋움체 Medium" panose="02020603020101020101" pitchFamily="18" charset="-127"/>
-                <a:ea typeface="KoPub돋움체 Light" panose="02020603020101020101"/>
+              <a:rPr lang="ko-KR" altLang="en-US" sz="2008" dirty="0">
+                <a:solidFill>
+                  <a:schemeClr val="tx2">
+                    <a:lumMod val="50000"/>
+                  </a:schemeClr>
+                </a:solidFill>
+                <a:latin typeface="KoPub돋움체 Bold" panose="02020603020101020101" pitchFamily="18" charset="-127"/>
+                <a:ea typeface="KoPub돋움체 Bold" panose="02020603020101020101" pitchFamily="18" charset="-127"/>
               </a:rPr>
               <a:t>보고</a:t>
             </a:r>
             <a:r>
-              <a:rPr lang="en-US" altLang="ko-KR" dirty="0">
-                <a:solidFill>
-                  <a:schemeClr val="tx2">
-                    <a:lumMod val="50000"/>
-                  </a:schemeClr>
-                </a:solidFill>
-                <a:latin typeface="KoPub돋움체 Medium" panose="02020603020101020101" pitchFamily="18" charset="-127"/>
-                <a:ea typeface="KoPub돋움체 Light" panose="02020603020101020101"/>
+              <a:rPr lang="en-US" altLang="ko-KR" sz="2008" dirty="0">
+                <a:solidFill>
+                  <a:schemeClr val="tx2">
+                    <a:lumMod val="50000"/>
+                  </a:schemeClr>
+                </a:solidFill>
+                <a:latin typeface="KoPub돋움체 Bold" panose="02020603020101020101" pitchFamily="18" charset="-127"/>
+                <a:ea typeface="KoPub돋움체 Bold" panose="02020603020101020101" pitchFamily="18" charset="-127"/>
               </a:rPr>
               <a:t>: </a:t>
             </a:r>
             <a:r>
-              <a:rPr lang="ko-KR" altLang="en-US" dirty="0">
-                <a:solidFill>
-                  <a:schemeClr val="tx2">
-                    <a:lumMod val="50000"/>
-                  </a:schemeClr>
-                </a:solidFill>
-                <a:latin typeface="KoPub돋움체 Medium" panose="02020603020101020101" pitchFamily="18" charset="-127"/>
-                <a:ea typeface="KoPub돋움체 Light" panose="02020603020101020101"/>
+              <a:rPr lang="ko-KR" altLang="en-US" sz="2008" dirty="0">
+                <a:solidFill>
+                  <a:schemeClr val="tx2">
+                    <a:lumMod val="50000"/>
+                  </a:schemeClr>
+                </a:solidFill>
+                <a:latin typeface="KoPub돋움체 Bold" panose="02020603020101020101" pitchFamily="18" charset="-127"/>
+                <a:ea typeface="KoPub돋움체 Bold" panose="02020603020101020101" pitchFamily="18" charset="-127"/>
               </a:rPr>
               <a:t>지금 상태 </a:t>
             </a:r>
             <a:r>
-              <a:rPr lang="en-US" altLang="ko-KR" dirty="0">
-                <a:solidFill>
-                  <a:schemeClr val="tx2">
-                    <a:lumMod val="50000"/>
-                  </a:schemeClr>
-                </a:solidFill>
-                <a:latin typeface="KoPub돋움체 Medium" panose="02020603020101020101" pitchFamily="18" charset="-127"/>
-                <a:ea typeface="KoPub돋움체 Light" panose="02020603020101020101"/>
+              <a:rPr lang="en-US" altLang="ko-KR" sz="2008" dirty="0">
+                <a:solidFill>
+                  <a:schemeClr val="tx2">
+                    <a:lumMod val="50000"/>
+                  </a:schemeClr>
+                </a:solidFill>
+                <a:latin typeface="KoPub돋움체 Bold" panose="02020603020101020101" pitchFamily="18" charset="-127"/>
+                <a:ea typeface="KoPub돋움체 Bold" panose="02020603020101020101" pitchFamily="18" charset="-127"/>
               </a:rPr>
               <a:t>/ </a:t>
             </a:r>
             <a:r>
-              <a:rPr lang="ko-KR" altLang="en-US" dirty="0">
-                <a:solidFill>
-                  <a:schemeClr val="tx2">
-                    <a:lumMod val="50000"/>
-                  </a:schemeClr>
-                </a:solidFill>
-                <a:latin typeface="KoPub돋움체 Medium" panose="02020603020101020101" pitchFamily="18" charset="-127"/>
-                <a:ea typeface="KoPub돋움체 Light" panose="02020603020101020101"/>
+              <a:rPr lang="ko-KR" altLang="en-US" sz="2008" dirty="0">
+                <a:solidFill>
+                  <a:schemeClr val="tx2">
+                    <a:lumMod val="50000"/>
+                  </a:schemeClr>
+                </a:solidFill>
+                <a:latin typeface="KoPub돋움체 Bold" panose="02020603020101020101" pitchFamily="18" charset="-127"/>
+                <a:ea typeface="KoPub돋움체 Bold" panose="02020603020101020101" pitchFamily="18" charset="-127"/>
               </a:rPr>
               <a:t>근거 </a:t>
             </a:r>
             <a:r>
-              <a:rPr lang="en-US" altLang="ko-KR" dirty="0">
-                <a:solidFill>
-                  <a:schemeClr val="tx2">
-                    <a:lumMod val="50000"/>
-                  </a:schemeClr>
-                </a:solidFill>
-                <a:latin typeface="KoPub돋움체 Medium" panose="02020603020101020101" pitchFamily="18" charset="-127"/>
-                <a:ea typeface="KoPub돋움체 Light" panose="02020603020101020101"/>
+              <a:rPr lang="en-US" altLang="ko-KR" sz="2008" dirty="0">
+                <a:solidFill>
+                  <a:schemeClr val="tx2">
+                    <a:lumMod val="50000"/>
+                  </a:schemeClr>
+                </a:solidFill>
+                <a:latin typeface="KoPub돋움체 Bold" panose="02020603020101020101" pitchFamily="18" charset="-127"/>
+                <a:ea typeface="KoPub돋움체 Bold" panose="02020603020101020101" pitchFamily="18" charset="-127"/>
               </a:rPr>
               <a:t>/ </a:t>
             </a:r>
             <a:r>
-              <a:rPr lang="ko-KR" altLang="en-US" dirty="0">
-                <a:solidFill>
-                  <a:schemeClr val="tx2">
-                    <a:lumMod val="50000"/>
-                  </a:schemeClr>
-                </a:solidFill>
-                <a:latin typeface="KoPub돋움체 Medium" panose="02020603020101020101" pitchFamily="18" charset="-127"/>
-                <a:ea typeface="KoPub돋움체 Light" panose="02020603020101020101"/>
+              <a:rPr lang="ko-KR" altLang="en-US" sz="2008" dirty="0">
+                <a:solidFill>
+                  <a:schemeClr val="tx2">
+                    <a:lumMod val="50000"/>
+                  </a:schemeClr>
+                </a:solidFill>
+                <a:latin typeface="KoPub돋움체 Bold" panose="02020603020101020101" pitchFamily="18" charset="-127"/>
+                <a:ea typeface="KoPub돋움체 Bold" panose="02020603020101020101" pitchFamily="18" charset="-127"/>
               </a:rPr>
               <a:t>요청사항 </a:t>
             </a:r>
             <a:r>
-              <a:rPr lang="en-US" altLang="ko-KR" dirty="0">
-                <a:solidFill>
-                  <a:schemeClr val="tx2">
-                    <a:lumMod val="50000"/>
-                  </a:schemeClr>
-                </a:solidFill>
-                <a:latin typeface="KoPub돋움체 Medium" panose="02020603020101020101" pitchFamily="18" charset="-127"/>
-                <a:ea typeface="KoPub돋움체 Light" panose="02020603020101020101"/>
+              <a:rPr lang="en-US" altLang="ko-KR" sz="2008" dirty="0">
+                <a:solidFill>
+                  <a:schemeClr val="tx2">
+                    <a:lumMod val="50000"/>
+                  </a:schemeClr>
+                </a:solidFill>
+                <a:latin typeface="KoPub돋움체 Bold" panose="02020603020101020101" pitchFamily="18" charset="-127"/>
+                <a:ea typeface="KoPub돋움체 Bold" panose="02020603020101020101" pitchFamily="18" charset="-127"/>
               </a:rPr>
               <a:t>+ 10·4·12 </a:t>
             </a:r>
           </a:p>
           <a:p>
             <a:r>
-              <a:rPr lang="en-US" altLang="ko-KR" dirty="0">
-                <a:solidFill>
-                  <a:schemeClr val="tx2">
-                    <a:lumMod val="50000"/>
-                  </a:schemeClr>
-                </a:solidFill>
-                <a:latin typeface="KoPub돋움체 Medium" panose="02020603020101020101" pitchFamily="18" charset="-127"/>
-                <a:ea typeface="KoPub돋움체 Light" panose="02020603020101020101"/>
+              <a:rPr lang="en-US" altLang="ko-KR" sz="2008" dirty="0">
+                <a:solidFill>
+                  <a:schemeClr val="tx2">
+                    <a:lumMod val="50000"/>
+                  </a:schemeClr>
+                </a:solidFill>
+                <a:latin typeface="KoPub돋움체 Bold" panose="02020603020101020101" pitchFamily="18" charset="-127"/>
+                <a:ea typeface="KoPub돋움체 Bold" panose="02020603020101020101" pitchFamily="18" charset="-127"/>
               </a:rPr>
               <a:t>[C] </a:t>
             </a:r>
             <a:r>
-              <a:rPr lang="ko-KR" altLang="en-US" dirty="0">
-                <a:solidFill>
-                  <a:schemeClr val="tx2">
-                    <a:lumMod val="50000"/>
-                  </a:schemeClr>
-                </a:solidFill>
-                <a:latin typeface="KoPub돋움체 Medium" panose="02020603020101020101" pitchFamily="18" charset="-127"/>
-                <a:ea typeface="KoPub돋움체 Light" panose="02020603020101020101"/>
+              <a:rPr lang="ko-KR" altLang="en-US" sz="2008" dirty="0">
+                <a:solidFill>
+                  <a:schemeClr val="tx2">
+                    <a:lumMod val="50000"/>
+                  </a:schemeClr>
+                </a:solidFill>
+                <a:latin typeface="KoPub돋움체 Bold" panose="02020603020101020101" pitchFamily="18" charset="-127"/>
+                <a:ea typeface="KoPub돋움체 Bold" panose="02020603020101020101" pitchFamily="18" charset="-127"/>
               </a:rPr>
               <a:t>상황</a:t>
             </a:r>
             <a:r>
-              <a:rPr lang="en-US" altLang="ko-KR" dirty="0">
-                <a:solidFill>
-                  <a:schemeClr val="tx2">
-                    <a:lumMod val="50000"/>
-                  </a:schemeClr>
-                </a:solidFill>
-                <a:latin typeface="KoPub돋움체 Medium" panose="02020603020101020101" pitchFamily="18" charset="-127"/>
-                <a:ea typeface="KoPub돋움체 Light" panose="02020603020101020101"/>
+              <a:rPr lang="en-US" altLang="ko-KR" sz="2008" dirty="0">
+                <a:solidFill>
+                  <a:schemeClr val="tx2">
+                    <a:lumMod val="50000"/>
+                  </a:schemeClr>
+                </a:solidFill>
+                <a:latin typeface="KoPub돋움체 Bold" panose="02020603020101020101" pitchFamily="18" charset="-127"/>
+                <a:ea typeface="KoPub돋움체 Bold" panose="02020603020101020101" pitchFamily="18" charset="-127"/>
               </a:rPr>
               <a:t>: PA </a:t>
             </a:r>
             <a:r>
-              <a:rPr lang="ko-KR" altLang="en-US" dirty="0">
-                <a:solidFill>
-                  <a:schemeClr val="tx2">
-                    <a:lumMod val="50000"/>
-                  </a:schemeClr>
-                </a:solidFill>
-                <a:latin typeface="KoPub돋움체 Medium" panose="02020603020101020101" pitchFamily="18" charset="-127"/>
-                <a:ea typeface="KoPub돋움체 Light" panose="02020603020101020101"/>
+              <a:rPr lang="ko-KR" altLang="en-US" sz="2008" dirty="0">
+                <a:solidFill>
+                  <a:schemeClr val="tx2">
+                    <a:lumMod val="50000"/>
+                  </a:schemeClr>
+                </a:solidFill>
+                <a:latin typeface="KoPub돋움체 Bold" panose="02020603020101020101" pitchFamily="18" charset="-127"/>
+                <a:ea typeface="KoPub돋움체 Bold" panose="02020603020101020101" pitchFamily="18" charset="-127"/>
               </a:rPr>
               <a:t>조치 예정 사유 및 시간 공유 </a:t>
             </a:r>
           </a:p>
           <a:p>
             <a:r>
-              <a:rPr lang="en-US" altLang="ko-KR" dirty="0">
-                <a:solidFill>
-                  <a:schemeClr val="tx2">
-                    <a:lumMod val="50000"/>
-                  </a:schemeClr>
-                </a:solidFill>
-                <a:latin typeface="KoPub돋움체 Medium" panose="02020603020101020101" pitchFamily="18" charset="-127"/>
-                <a:ea typeface="KoPub돋움체 Light" panose="02020603020101020101"/>
+              <a:rPr lang="en-US" altLang="ko-KR" sz="2008" dirty="0">
+                <a:solidFill>
+                  <a:schemeClr val="tx2">
+                    <a:lumMod val="50000"/>
+                  </a:schemeClr>
+                </a:solidFill>
+                <a:latin typeface="KoPub돋움체 Bold" panose="02020603020101020101" pitchFamily="18" charset="-127"/>
+                <a:ea typeface="KoPub돋움체 Bold" panose="02020603020101020101" pitchFamily="18" charset="-127"/>
               </a:rPr>
               <a:t>[D] </a:t>
             </a:r>
             <a:r>
-              <a:rPr lang="ko-KR" altLang="en-US" dirty="0">
-                <a:solidFill>
-                  <a:schemeClr val="tx2">
-                    <a:lumMod val="50000"/>
-                  </a:schemeClr>
-                </a:solidFill>
-                <a:latin typeface="KoPub돋움체 Medium" panose="02020603020101020101" pitchFamily="18" charset="-127"/>
-                <a:ea typeface="KoPub돋움체 Light" panose="02020603020101020101"/>
+              <a:rPr lang="ko-KR" altLang="en-US" sz="2008" dirty="0">
+                <a:solidFill>
+                  <a:schemeClr val="tx2">
+                    <a:lumMod val="50000"/>
+                  </a:schemeClr>
+                </a:solidFill>
+                <a:latin typeface="KoPub돋움체 Bold" panose="02020603020101020101" pitchFamily="18" charset="-127"/>
+                <a:ea typeface="KoPub돋움체 Bold" panose="02020603020101020101" pitchFamily="18" charset="-127"/>
               </a:rPr>
               <a:t>완료</a:t>
             </a:r>
             <a:r>
-              <a:rPr lang="en-US" altLang="ko-KR" dirty="0">
-                <a:solidFill>
-                  <a:schemeClr val="tx2">
-                    <a:lumMod val="50000"/>
-                  </a:schemeClr>
-                </a:solidFill>
-                <a:latin typeface="KoPub돋움체 Medium" panose="02020603020101020101" pitchFamily="18" charset="-127"/>
-                <a:ea typeface="KoPub돋움체 Light" panose="02020603020101020101"/>
+              <a:rPr lang="en-US" altLang="ko-KR" sz="2008" dirty="0">
+                <a:solidFill>
+                  <a:schemeClr val="tx2">
+                    <a:lumMod val="50000"/>
+                  </a:schemeClr>
+                </a:solidFill>
+                <a:latin typeface="KoPub돋움체 Bold" panose="02020603020101020101" pitchFamily="18" charset="-127"/>
+                <a:ea typeface="KoPub돋움체 Bold" panose="02020603020101020101" pitchFamily="18" charset="-127"/>
               </a:rPr>
               <a:t>: </a:t>
             </a:r>
             <a:r>
-              <a:rPr lang="ko-KR" altLang="en-US" dirty="0">
-                <a:solidFill>
-                  <a:schemeClr val="tx2">
-                    <a:lumMod val="50000"/>
-                  </a:schemeClr>
-                </a:solidFill>
-                <a:latin typeface="KoPub돋움체 Medium" panose="02020603020101020101" pitchFamily="18" charset="-127"/>
-                <a:ea typeface="KoPub돋움체 Light" panose="02020603020101020101"/>
+              <a:rPr lang="ko-KR" altLang="en-US" sz="2008" dirty="0">
+                <a:solidFill>
+                  <a:schemeClr val="tx2">
+                    <a:lumMod val="50000"/>
+                  </a:schemeClr>
+                </a:solidFill>
+                <a:latin typeface="KoPub돋움체 Bold" panose="02020603020101020101" pitchFamily="18" charset="-127"/>
+                <a:ea typeface="KoPub돋움체 Bold" panose="02020603020101020101" pitchFamily="18" charset="-127"/>
               </a:rPr>
               <a:t>결과 </a:t>
             </a:r>
             <a:r>
-              <a:rPr lang="en-US" altLang="ko-KR" dirty="0">
-                <a:solidFill>
-                  <a:schemeClr val="tx2">
-                    <a:lumMod val="50000"/>
-                  </a:schemeClr>
-                </a:solidFill>
-                <a:latin typeface="KoPub돋움체 Medium" panose="02020603020101020101" pitchFamily="18" charset="-127"/>
-                <a:ea typeface="KoPub돋움체 Light" panose="02020603020101020101"/>
+              <a:rPr lang="en-US" altLang="ko-KR" sz="2008" dirty="0">
+                <a:solidFill>
+                  <a:schemeClr val="tx2">
+                    <a:lumMod val="50000"/>
+                  </a:schemeClr>
+                </a:solidFill>
+                <a:latin typeface="KoPub돋움체 Bold" panose="02020603020101020101" pitchFamily="18" charset="-127"/>
+                <a:ea typeface="KoPub돋움체 Bold" panose="02020603020101020101" pitchFamily="18" charset="-127"/>
               </a:rPr>
               <a:t>/ </a:t>
             </a:r>
             <a:r>
-              <a:rPr lang="ko-KR" altLang="en-US" dirty="0">
-                <a:solidFill>
-                  <a:schemeClr val="tx2">
-                    <a:lumMod val="50000"/>
-                  </a:schemeClr>
-                </a:solidFill>
-                <a:latin typeface="KoPub돋움체 Medium" panose="02020603020101020101" pitchFamily="18" charset="-127"/>
-                <a:ea typeface="KoPub돋움체 Light" panose="02020603020101020101"/>
+              <a:rPr lang="ko-KR" altLang="en-US" sz="2008" dirty="0">
+                <a:solidFill>
+                  <a:schemeClr val="tx2">
+                    <a:lumMod val="50000"/>
+                  </a:schemeClr>
+                </a:solidFill>
+                <a:latin typeface="KoPub돋움체 Bold" panose="02020603020101020101" pitchFamily="18" charset="-127"/>
+                <a:ea typeface="KoPub돋움체 Bold" panose="02020603020101020101" pitchFamily="18" charset="-127"/>
               </a:rPr>
               <a:t>현재 상태 </a:t>
             </a:r>
             <a:r>
-              <a:rPr lang="en-US" altLang="ko-KR" dirty="0">
-                <a:solidFill>
-                  <a:schemeClr val="tx2">
-                    <a:lumMod val="50000"/>
-                  </a:schemeClr>
-                </a:solidFill>
-                <a:latin typeface="KoPub돋움체 Medium" panose="02020603020101020101" pitchFamily="18" charset="-127"/>
-                <a:ea typeface="KoPub돋움체 Light" panose="02020603020101020101"/>
+              <a:rPr lang="en-US" altLang="ko-KR" sz="2008" dirty="0">
+                <a:solidFill>
+                  <a:schemeClr val="tx2">
+                    <a:lumMod val="50000"/>
+                  </a:schemeClr>
+                </a:solidFill>
+                <a:latin typeface="KoPub돋움체 Bold" panose="02020603020101020101" pitchFamily="18" charset="-127"/>
+                <a:ea typeface="KoPub돋움체 Bold" panose="02020603020101020101" pitchFamily="18" charset="-127"/>
               </a:rPr>
               <a:t>/ </a:t>
             </a:r>
             <a:r>
-              <a:rPr lang="ko-KR" altLang="en-US" dirty="0">
-                <a:solidFill>
-                  <a:schemeClr val="tx2">
-                    <a:lumMod val="50000"/>
-                  </a:schemeClr>
-                </a:solidFill>
-                <a:latin typeface="KoPub돋움체 Medium" panose="02020603020101020101" pitchFamily="18" charset="-127"/>
-                <a:ea typeface="KoPub돋움체 Light" panose="02020603020101020101"/>
+              <a:rPr lang="ko-KR" altLang="en-US" sz="2008" dirty="0">
+                <a:solidFill>
+                  <a:schemeClr val="tx2">
+                    <a:lumMod val="50000"/>
+                  </a:schemeClr>
+                </a:solidFill>
+                <a:latin typeface="KoPub돋움체 Bold" panose="02020603020101020101" pitchFamily="18" charset="-127"/>
+                <a:ea typeface="KoPub돋움체 Bold" panose="02020603020101020101" pitchFamily="18" charset="-127"/>
               </a:rPr>
               <a:t>추후 계획</a:t>
             </a:r>
             <a:r>
-              <a:rPr lang="en-US" altLang="ko-KR" dirty="0">
-                <a:solidFill>
-                  <a:schemeClr val="tx2">
-                    <a:lumMod val="50000"/>
-                  </a:schemeClr>
-                </a:solidFill>
-                <a:latin typeface="KoPub돋움체 Medium" panose="02020603020101020101" pitchFamily="18" charset="-127"/>
-                <a:ea typeface="KoPub돋움체 Light" panose="02020603020101020101"/>
+              <a:rPr lang="en-US" altLang="ko-KR" sz="2008" dirty="0">
+                <a:solidFill>
+                  <a:schemeClr val="tx2">
+                    <a:lumMod val="50000"/>
+                  </a:schemeClr>
+                </a:solidFill>
+                <a:latin typeface="KoPub돋움체 Bold" panose="02020603020101020101" pitchFamily="18" charset="-127"/>
+                <a:ea typeface="KoPub돋움체 Bold" panose="02020603020101020101" pitchFamily="18" charset="-127"/>
               </a:rPr>
               <a:t>(F/U) </a:t>
             </a:r>
@@ -7331,7 +7337,7 @@
           <p:cNvPr id="22" name="TextBox 21">
             <a:extLst>
               <a:ext uri="{FF2B5EF4-FFF2-40B4-BE49-F238E27FC236}">
-                <a16:creationId xmlns:a16="http://schemas.microsoft.com/office/drawing/2014/main" id="{BC57D6DD-C910-2054-C4EB-9D7E67088B09}"/>
+                <a16:creationId xmlns:a16="http://schemas.microsoft.com/office/drawing/2014/main" id="{6B22DDD3-E5C3-59EF-8E4C-081C5A840555}"/>
               </a:ext>
             </a:extLst>
           </p:cNvPr>
@@ -7340,8 +7346,8 @@
         </p:nvSpPr>
         <p:spPr>
           <a:xfrm>
-            <a:off x="310149" y="2334991"/>
-            <a:ext cx="2458815" cy="369332"/>
+            <a:off x="328480" y="2286199"/>
+            <a:ext cx="2434449" cy="401708"/>
           </a:xfrm>
           <a:prstGeom prst="rect">
             <a:avLst/>
@@ -7356,61 +7362,61 @@
           <a:p>
             <a:pPr algn="ctr"/>
             <a:r>
-              <a:rPr lang="en-US" altLang="ko-KR" b="1" dirty="0">
+              <a:rPr lang="en-US" altLang="ko-KR" sz="2008" b="1" dirty="0">
                 <a:solidFill>
                   <a:srgbClr val="000000"/>
                 </a:solidFill>
-                <a:latin typeface="KoPub돋움체 Medium" panose="02020603020101020101" pitchFamily="18" charset="-127"/>
-                <a:ea typeface="KoPub돋움체 Light" panose="02020603020101020101"/>
+                <a:latin typeface="KoPub돋움체 Bold" panose="02020603020101020101" pitchFamily="18" charset="-127"/>
+                <a:ea typeface="KoPub돋움체 Bold" panose="02020603020101020101" pitchFamily="18" charset="-127"/>
               </a:rPr>
               <a:t>ACD </a:t>
             </a:r>
             <a:r>
-              <a:rPr lang="ko-KR" altLang="en-US" b="1" dirty="0">
+              <a:rPr lang="ko-KR" altLang="en-US" sz="2008" b="1" dirty="0">
                 <a:solidFill>
                   <a:srgbClr val="000000"/>
                 </a:solidFill>
-                <a:latin typeface="KoPub돋움체 Medium" panose="02020603020101020101" pitchFamily="18" charset="-127"/>
-                <a:ea typeface="KoPub돋움체 Light" panose="02020603020101020101"/>
+                <a:latin typeface="KoPub돋움체 Bold" panose="02020603020101020101" pitchFamily="18" charset="-127"/>
+                <a:ea typeface="KoPub돋움체 Bold" panose="02020603020101020101" pitchFamily="18" charset="-127"/>
               </a:rPr>
               <a:t>루프 </a:t>
             </a:r>
             <a:r>
-              <a:rPr lang="en-US" altLang="ko-KR" b="1" dirty="0">
+              <a:rPr lang="en-US" altLang="ko-KR" sz="2008" b="1" dirty="0">
                 <a:solidFill>
                   <a:srgbClr val="000000"/>
                 </a:solidFill>
-                <a:latin typeface="KoPub돋움체 Medium" panose="02020603020101020101" pitchFamily="18" charset="-127"/>
-                <a:ea typeface="KoPub돋움체 Light" panose="02020603020101020101"/>
+                <a:latin typeface="KoPub돋움체 Bold" panose="02020603020101020101" pitchFamily="18" charset="-127"/>
+                <a:ea typeface="KoPub돋움체 Bold" panose="02020603020101020101" pitchFamily="18" charset="-127"/>
               </a:rPr>
               <a:t>(</a:t>
             </a:r>
             <a:r>
-              <a:rPr lang="ko-KR" altLang="en-US" b="1" dirty="0">
+              <a:rPr lang="ko-KR" altLang="en-US" sz="2008" b="1" dirty="0">
                 <a:solidFill>
                   <a:srgbClr val="000000"/>
                 </a:solidFill>
-                <a:latin typeface="KoPub돋움체 Medium" panose="02020603020101020101" pitchFamily="18" charset="-127"/>
-                <a:ea typeface="KoPub돋움체 Light" panose="02020603020101020101"/>
+                <a:latin typeface="KoPub돋움체 Bold" panose="02020603020101020101" pitchFamily="18" charset="-127"/>
+                <a:ea typeface="KoPub돋움체 Bold" panose="02020603020101020101" pitchFamily="18" charset="-127"/>
               </a:rPr>
               <a:t>소통 공식</a:t>
             </a:r>
             <a:r>
-              <a:rPr lang="en-US" altLang="ko-KR" b="1" dirty="0">
+              <a:rPr lang="en-US" altLang="ko-KR" sz="2008" b="1" dirty="0">
                 <a:solidFill>
                   <a:srgbClr val="000000"/>
                 </a:solidFill>
-                <a:latin typeface="KoPub돋움체 Medium" panose="02020603020101020101" pitchFamily="18" charset="-127"/>
-                <a:ea typeface="KoPub돋움체 Light" panose="02020603020101020101"/>
+                <a:latin typeface="KoPub돋움체 Bold" panose="02020603020101020101" pitchFamily="18" charset="-127"/>
+                <a:ea typeface="KoPub돋움체 Bold" panose="02020603020101020101" pitchFamily="18" charset="-127"/>
               </a:rPr>
               <a:t>)</a:t>
             </a:r>
-            <a:endParaRPr lang="ko-KR" altLang="en-US" b="1" dirty="0">
+            <a:endParaRPr lang="ko-KR" altLang="en-US" sz="2008" b="1" dirty="0">
               <a:solidFill>
                 <a:srgbClr val="000000"/>
               </a:solidFill>
-              <a:latin typeface="KoPub돋움체 Medium" panose="02020603020101020101" pitchFamily="18" charset="-127"/>
-              <a:ea typeface="KoPub돋움체 Light" panose="02020603020101020101"/>
+              <a:latin typeface="KoPub돋움체 Bold" panose="02020603020101020101" pitchFamily="18" charset="-127"/>
+              <a:ea typeface="KoPub돋움체 Bold" panose="02020603020101020101" pitchFamily="18" charset="-127"/>
             </a:endParaRPr>
           </a:p>
         </p:txBody>
@@ -7420,7 +7426,7 @@
           <p:cNvPr id="11" name="사각형: 둥근 모서리 10">
             <a:extLst>
               <a:ext uri="{FF2B5EF4-FFF2-40B4-BE49-F238E27FC236}">
-                <a16:creationId xmlns:a16="http://schemas.microsoft.com/office/drawing/2014/main" id="{82DFC436-1063-4EC0-8D98-BDC4799C2F86}"/>
+                <a16:creationId xmlns:a16="http://schemas.microsoft.com/office/drawing/2014/main" id="{2D2AC7E3-C944-ECC5-C6E8-42F0AE5340B7}"/>
               </a:ext>
             </a:extLst>
           </p:cNvPr>
@@ -7429,8 +7435,8 @@
         </p:nvSpPr>
         <p:spPr>
           <a:xfrm>
-            <a:off x="3050989" y="3188946"/>
-            <a:ext cx="5779400" cy="1115349"/>
+            <a:off x="3063172" y="3272851"/>
+            <a:ext cx="5802477" cy="1119803"/>
           </a:xfrm>
           <a:prstGeom prst="roundRect">
             <a:avLst>
@@ -7467,9 +7473,9 @@
           <a:lstStyle/>
           <a:p>
             <a:pPr algn="ctr"/>
-            <a:endParaRPr lang="ko-KR" altLang="en-US" sz="5080">
-              <a:latin typeface="KoPub돋움체 Medium" panose="02020603020101020101" pitchFamily="18" charset="-127"/>
-              <a:ea typeface="KoPub돋움체 Light" panose="02020603020101020101"/>
+            <a:endParaRPr lang="ko-KR" altLang="en-US" sz="5422">
+              <a:latin typeface="KoPub돋움체 Bold" panose="02020603020101020101" pitchFamily="18" charset="-127"/>
+              <a:ea typeface="KoPub돋움체 Bold" panose="02020603020101020101" pitchFamily="18" charset="-127"/>
             </a:endParaRPr>
           </a:p>
         </p:txBody>
@@ -7479,7 +7485,7 @@
           <p:cNvPr id="14" name="사각형: 둥근 모서리 13">
             <a:extLst>
               <a:ext uri="{FF2B5EF4-FFF2-40B4-BE49-F238E27FC236}">
-                <a16:creationId xmlns:a16="http://schemas.microsoft.com/office/drawing/2014/main" id="{8D3E48C3-10D6-461B-92DA-40EFC6B4C91E}"/>
+                <a16:creationId xmlns:a16="http://schemas.microsoft.com/office/drawing/2014/main" id="{F61BCAD1-0554-6A15-5313-412596D974D8}"/>
               </a:ext>
             </a:extLst>
           </p:cNvPr>
@@ -7488,8 +7494,8 @@
         </p:nvSpPr>
         <p:spPr>
           <a:xfrm>
-            <a:off x="208326" y="3188946"/>
-            <a:ext cx="2788897" cy="1115349"/>
+            <a:off x="209158" y="3272851"/>
+            <a:ext cx="2800033" cy="1119803"/>
           </a:xfrm>
           <a:prstGeom prst="roundRect">
             <a:avLst>
@@ -7524,9 +7530,9 @@
           <a:lstStyle/>
           <a:p>
             <a:pPr algn="ctr"/>
-            <a:endParaRPr lang="ko-KR" altLang="en-US" sz="5080">
-              <a:latin typeface="KoPub돋움체 Medium" panose="02020603020101020101" pitchFamily="18" charset="-127"/>
-              <a:ea typeface="KoPub돋움체 Light" panose="02020603020101020101"/>
+            <a:endParaRPr lang="ko-KR" altLang="en-US" sz="5422">
+              <a:latin typeface="KoPub돋움체 Bold" panose="02020603020101020101" pitchFamily="18" charset="-127"/>
+              <a:ea typeface="KoPub돋움체 Bold" panose="02020603020101020101" pitchFamily="18" charset="-127"/>
             </a:endParaRPr>
           </a:p>
         </p:txBody>
@@ -7536,7 +7542,7 @@
           <p:cNvPr id="16" name="TextBox 15">
             <a:extLst>
               <a:ext uri="{FF2B5EF4-FFF2-40B4-BE49-F238E27FC236}">
-                <a16:creationId xmlns:a16="http://schemas.microsoft.com/office/drawing/2014/main" id="{17C117C8-2C5F-42B0-8015-D651D05B1BD8}"/>
+                <a16:creationId xmlns:a16="http://schemas.microsoft.com/office/drawing/2014/main" id="{2E21214C-69A6-8799-C3BF-6D26527C2BBF}"/>
               </a:ext>
             </a:extLst>
           </p:cNvPr>
@@ -7545,8 +7551,8 @@
         </p:nvSpPr>
         <p:spPr>
           <a:xfrm>
-            <a:off x="310149" y="3561954"/>
-            <a:ext cx="2361544" cy="369332"/>
+            <a:off x="385419" y="3647348"/>
+            <a:ext cx="2222910" cy="401708"/>
           </a:xfrm>
           <a:prstGeom prst="rect">
             <a:avLst/>
@@ -7561,51 +7567,51 @@
           <a:p>
             <a:pPr algn="ctr"/>
             <a:r>
-              <a:rPr lang="ko-KR" altLang="en-US" b="1" dirty="0">
+              <a:rPr lang="ko-KR" altLang="en-US" sz="2008" b="1" dirty="0">
                 <a:solidFill>
                   <a:srgbClr val="000000"/>
                 </a:solidFill>
-                <a:latin typeface="KoPub돋움체 Medium" panose="02020603020101020101" pitchFamily="18" charset="-127"/>
-                <a:ea typeface="KoPub돋움체 Light" panose="02020603020101020101"/>
+                <a:latin typeface="KoPub돋움체 Bold" panose="02020603020101020101" pitchFamily="18" charset="-127"/>
+                <a:ea typeface="KoPub돋움체 Bold" panose="02020603020101020101" pitchFamily="18" charset="-127"/>
               </a:rPr>
               <a:t>트리아제 </a:t>
             </a:r>
             <a:r>
-              <a:rPr lang="en-US" altLang="ko-KR" b="1" dirty="0">
+              <a:rPr lang="en-US" altLang="ko-KR" sz="2008" b="1" dirty="0">
                 <a:solidFill>
                   <a:srgbClr val="000000"/>
                 </a:solidFill>
-                <a:latin typeface="KoPub돋움체 Medium" panose="02020603020101020101" pitchFamily="18" charset="-127"/>
-                <a:ea typeface="KoPub돋움체 Light" panose="02020603020101020101"/>
+                <a:latin typeface="KoPub돋움체 Bold" panose="02020603020101020101" pitchFamily="18" charset="-127"/>
+                <a:ea typeface="KoPub돋움체 Bold" panose="02020603020101020101" pitchFamily="18" charset="-127"/>
               </a:rPr>
               <a:t>(</a:t>
             </a:r>
             <a:r>
-              <a:rPr lang="ko-KR" altLang="en-US" b="1" dirty="0" err="1">
+              <a:rPr lang="ko-KR" altLang="en-US" sz="2008" b="1" dirty="0" err="1">
                 <a:solidFill>
                   <a:srgbClr val="000000"/>
                 </a:solidFill>
-                <a:latin typeface="KoPub돋움체 Medium" panose="02020603020101020101" pitchFamily="18" charset="-127"/>
-                <a:ea typeface="KoPub돋움체 Light" panose="02020603020101020101"/>
+                <a:latin typeface="KoPub돋움체 Bold" panose="02020603020101020101" pitchFamily="18" charset="-127"/>
+                <a:ea typeface="KoPub돋움체 Bold" panose="02020603020101020101" pitchFamily="18" charset="-127"/>
               </a:rPr>
               <a:t>골든타임</a:t>
             </a:r>
             <a:r>
-              <a:rPr lang="en-US" altLang="ko-KR" b="1" dirty="0">
+              <a:rPr lang="en-US" altLang="ko-KR" sz="2008" b="1" dirty="0">
                 <a:solidFill>
                   <a:srgbClr val="000000"/>
                 </a:solidFill>
-                <a:latin typeface="KoPub돋움체 Medium" panose="02020603020101020101" pitchFamily="18" charset="-127"/>
-                <a:ea typeface="KoPub돋움체 Light" panose="02020603020101020101"/>
+                <a:latin typeface="KoPub돋움체 Bold" panose="02020603020101020101" pitchFamily="18" charset="-127"/>
+                <a:ea typeface="KoPub돋움체 Bold" panose="02020603020101020101" pitchFamily="18" charset="-127"/>
               </a:rPr>
               <a:t>)</a:t>
             </a:r>
-            <a:endParaRPr lang="ko-KR" altLang="en-US" b="1" dirty="0">
+            <a:endParaRPr lang="ko-KR" altLang="en-US" sz="2008" b="1" dirty="0">
               <a:solidFill>
                 <a:srgbClr val="000000"/>
               </a:solidFill>
-              <a:latin typeface="KoPub돋움체 Medium" panose="02020603020101020101" pitchFamily="18" charset="-127"/>
-              <a:ea typeface="KoPub돋움체 Light" panose="02020603020101020101"/>
+              <a:latin typeface="KoPub돋움체 Bold" panose="02020603020101020101" pitchFamily="18" charset="-127"/>
+              <a:ea typeface="KoPub돋움체 Bold" panose="02020603020101020101" pitchFamily="18" charset="-127"/>
             </a:endParaRPr>
           </a:p>
         </p:txBody>
@@ -7615,7 +7621,7 @@
           <p:cNvPr id="2" name="직사각형 1">
             <a:extLst>
               <a:ext uri="{FF2B5EF4-FFF2-40B4-BE49-F238E27FC236}">
-                <a16:creationId xmlns:a16="http://schemas.microsoft.com/office/drawing/2014/main" id="{CF6CD54F-7897-4496-8903-172CACA01316}"/>
+                <a16:creationId xmlns:a16="http://schemas.microsoft.com/office/drawing/2014/main" id="{376127CB-2459-374B-8194-5C519D6F7D62}"/>
               </a:ext>
             </a:extLst>
           </p:cNvPr>
@@ -7624,8 +7630,8 @@
         </p:nvSpPr>
         <p:spPr>
           <a:xfrm>
-            <a:off x="3161346" y="3284955"/>
-            <a:ext cx="5468122" cy="923330"/>
+            <a:off x="3173969" y="3322893"/>
+            <a:ext cx="5489957" cy="1019719"/>
           </a:xfrm>
           <a:prstGeom prst="rect">
             <a:avLst/>
@@ -7638,24 +7644,27 @@
           <a:lstStyle/>
           <a:p>
             <a:r>
-              <a:rPr lang="ko-KR" altLang="en-US" dirty="0">
-                <a:ea typeface="KoPub돋움체 Light" panose="02020603020101020101"/>
+              <a:rPr lang="ko-KR" altLang="en-US" sz="2008" dirty="0">
+                <a:latin typeface="KoPub돋움체 Bold" panose="02020603020101020101" pitchFamily="18" charset="-127"/>
+                <a:ea typeface="KoPub돋움체 Bold" panose="02020603020101020101" pitchFamily="18" charset="-127"/>
               </a:rPr>
               <a:t>빨강 10분(응급): 환자 안전 직결 (유선 병행)</a:t>
             </a:r>
           </a:p>
           <a:p>
             <a:r>
-              <a:rPr lang="ko-KR" altLang="en-US" dirty="0">
-                <a:ea typeface="KoPub돋움체 Light" panose="02020603020101020101"/>
+              <a:rPr lang="ko-KR" altLang="en-US" sz="2008" dirty="0">
+                <a:latin typeface="KoPub돋움체 Bold" panose="02020603020101020101" pitchFamily="18" charset="-127"/>
+                <a:ea typeface="KoPub돋움체 Bold" panose="02020603020101020101" pitchFamily="18" charset="-127"/>
               </a:rPr>
               <a:t>초록 4시간(우선): 당일 내 우선 처리 필요</a:t>
             </a:r>
           </a:p>
           <a:p>
             <a:r>
-              <a:rPr lang="ko-KR" altLang="en-US" dirty="0">
-                <a:ea typeface="KoPub돋움체 Light" panose="02020603020101020101"/>
+              <a:rPr lang="ko-KR" altLang="en-US" sz="2008" dirty="0">
+                <a:latin typeface="KoPub돋움체 Bold" panose="02020603020101020101" pitchFamily="18" charset="-127"/>
+                <a:ea typeface="KoPub돋움체 Bold" panose="02020603020101020101" pitchFamily="18" charset="-127"/>
               </a:rPr>
               <a:t>노랑 12시간(루틴): 근무 흐름 내 안정적 처리</a:t>
             </a:r>
@@ -7665,7 +7674,7 @@
     </p:spTree>
     <p:extLst>
       <p:ext uri="{BB962C8B-B14F-4D97-AF65-F5344CB8AC3E}">
-        <p14:creationId xmlns:p14="http://schemas.microsoft.com/office/powerpoint/2010/main" val="2033245112"/>
+        <p14:creationId xmlns:p14="http://schemas.microsoft.com/office/powerpoint/2010/main" val="946308735"/>
       </p:ext>
     </p:extLst>
   </p:cSld>
@@ -7683,7 +7692,7 @@
         <p:cNvPr id="1" name="">
           <a:extLst>
             <a:ext uri="{FF2B5EF4-FFF2-40B4-BE49-F238E27FC236}">
-              <a16:creationId xmlns:a16="http://schemas.microsoft.com/office/drawing/2014/main" id="{DFA44891-DB0B-9038-5B25-629A4C227FFF}"/>
+              <a16:creationId xmlns:a16="http://schemas.microsoft.com/office/drawing/2014/main" id="{1692EEBF-990D-89E6-C219-0FCF5A454FEB}"/>
             </a:ext>
           </a:extLst>
         </p:cNvPr>
@@ -7703,7 +7712,7 @@
           <p:cNvPr id="3" name="TextBox 2">
             <a:extLst>
               <a:ext uri="{FF2B5EF4-FFF2-40B4-BE49-F238E27FC236}">
-                <a16:creationId xmlns:a16="http://schemas.microsoft.com/office/drawing/2014/main" id="{CEABBF7A-4383-D72B-A05E-B56FEE94992E}"/>
+                <a16:creationId xmlns:a16="http://schemas.microsoft.com/office/drawing/2014/main" id="{6CCA0A50-B707-B9A5-0414-868DD513E7C5}"/>
               </a:ext>
             </a:extLst>
           </p:cNvPr>
@@ -7712,8 +7721,8 @@
         </p:nvSpPr>
         <p:spPr>
           <a:xfrm>
-            <a:off x="101992" y="184592"/>
-            <a:ext cx="3494648" cy="309444"/>
+            <a:off x="102399" y="175060"/>
+            <a:ext cx="3508602" cy="310680"/>
           </a:xfrm>
           <a:prstGeom prst="rect">
             <a:avLst/>
@@ -7727,21 +7736,21 @@
           <a:lstStyle/>
           <a:p>
             <a:r>
-              <a:rPr lang="ko-KR" altLang="en-US" sz="1411" spc="-31" dirty="0">
+              <a:rPr lang="ko-KR" altLang="en-US" sz="1417" b="1" spc="-31" dirty="0">
                 <a:latin typeface="KoPub돋움체 Light" panose="02020603020101020101" pitchFamily="18" charset="-127"/>
                 <a:ea typeface="KoPub돋움체 Light" panose="02020603020101020101"/>
               </a:rPr>
               <a:t>순천향대학교 천안병원 </a:t>
             </a:r>
             <a:r>
-              <a:rPr lang="en-US" altLang="ko-KR" sz="1411" spc="-31" dirty="0">
+              <a:rPr lang="en-US" altLang="ko-KR" sz="1417" b="1" spc="-31" dirty="0">
                 <a:latin typeface="KoPub돋움체 Light" panose="02020603020101020101" pitchFamily="18" charset="-127"/>
                 <a:ea typeface="KoPub돋움체 Light" panose="02020603020101020101"/>
               </a:rPr>
               <a:t>| </a:t>
             </a:r>
             <a:r>
-              <a:rPr lang="ko-KR" altLang="en-US" sz="1411" spc="-31" dirty="0">
+              <a:rPr lang="ko-KR" altLang="en-US" sz="1417" b="1" spc="-31" dirty="0">
                 <a:latin typeface="KoPub돋움체 Light" panose="02020603020101020101" pitchFamily="18" charset="-127"/>
                 <a:ea typeface="KoPub돋움체 Light" panose="02020603020101020101"/>
               </a:rPr>
@@ -7755,7 +7764,7 @@
           <p:cNvPr id="6" name="사각형: 둥근 모서리 5">
             <a:extLst>
               <a:ext uri="{FF2B5EF4-FFF2-40B4-BE49-F238E27FC236}">
-                <a16:creationId xmlns:a16="http://schemas.microsoft.com/office/drawing/2014/main" id="{CE2932C1-2A00-0758-2BBA-833E022443FD}"/>
+                <a16:creationId xmlns:a16="http://schemas.microsoft.com/office/drawing/2014/main" id="{5A74A197-B06B-DD1B-3EEF-84FC79C246FB}"/>
               </a:ext>
             </a:extLst>
           </p:cNvPr>
@@ -7764,8 +7773,8 @@
         </p:nvSpPr>
         <p:spPr>
           <a:xfrm>
-            <a:off x="3050989" y="1198923"/>
-            <a:ext cx="5779400" cy="651443"/>
+            <a:off x="3063172" y="844256"/>
+            <a:ext cx="5802477" cy="826102"/>
           </a:xfrm>
           <a:prstGeom prst="roundRect">
             <a:avLst>
@@ -7802,9 +7811,9 @@
           <a:lstStyle/>
           <a:p>
             <a:pPr algn="ctr"/>
-            <a:endParaRPr lang="ko-KR" altLang="en-US" sz="5080">
-              <a:latin typeface="KoPub돋움체 Medium" panose="02020603020101020101" pitchFamily="18" charset="-127"/>
-              <a:ea typeface="KoPub돋움체 Light" panose="02020603020101020101"/>
+            <a:endParaRPr lang="ko-KR" altLang="en-US" sz="5422">
+              <a:latin typeface="KoPub돋움체 Bold" panose="02020603020101020101" pitchFamily="18" charset="-127"/>
+              <a:ea typeface="KoPub돋움체 Bold" panose="02020603020101020101" pitchFamily="18" charset="-127"/>
             </a:endParaRPr>
           </a:p>
         </p:txBody>
@@ -7814,7 +7823,7 @@
           <p:cNvPr id="8" name="사각형: 둥근 모서리 7">
             <a:extLst>
               <a:ext uri="{FF2B5EF4-FFF2-40B4-BE49-F238E27FC236}">
-                <a16:creationId xmlns:a16="http://schemas.microsoft.com/office/drawing/2014/main" id="{1548A1BD-8723-9A88-C7D3-66F55BF5E173}"/>
+                <a16:creationId xmlns:a16="http://schemas.microsoft.com/office/drawing/2014/main" id="{70989908-51D1-18DF-6199-AC67FDFBBD6A}"/>
               </a:ext>
             </a:extLst>
           </p:cNvPr>
@@ -7823,8 +7832,8 @@
         </p:nvSpPr>
         <p:spPr>
           <a:xfrm>
-            <a:off x="208326" y="1198923"/>
-            <a:ext cx="2788897" cy="651443"/>
+            <a:off x="209158" y="844256"/>
+            <a:ext cx="2800033" cy="826102"/>
           </a:xfrm>
           <a:prstGeom prst="roundRect">
             <a:avLst>
@@ -7859,9 +7868,9 @@
           <a:lstStyle/>
           <a:p>
             <a:pPr algn="ctr"/>
-            <a:endParaRPr lang="ko-KR" altLang="en-US" sz="5080">
-              <a:latin typeface="KoPub돋움체 Medium" panose="02020603020101020101" pitchFamily="18" charset="-127"/>
-              <a:ea typeface="KoPub돋움체 Light" panose="02020603020101020101"/>
+            <a:endParaRPr lang="ko-KR" altLang="en-US" sz="5422">
+              <a:latin typeface="KoPub돋움체 Bold" panose="02020603020101020101" pitchFamily="18" charset="-127"/>
+              <a:ea typeface="KoPub돋움체 Bold" panose="02020603020101020101" pitchFamily="18" charset="-127"/>
             </a:endParaRPr>
           </a:p>
         </p:txBody>
@@ -7871,7 +7880,7 @@
           <p:cNvPr id="9" name="TextBox 8">
             <a:extLst>
               <a:ext uri="{FF2B5EF4-FFF2-40B4-BE49-F238E27FC236}">
-                <a16:creationId xmlns:a16="http://schemas.microsoft.com/office/drawing/2014/main" id="{790F75E6-5F6B-E96E-73A6-26A5843998CD}"/>
+                <a16:creationId xmlns:a16="http://schemas.microsoft.com/office/drawing/2014/main" id="{80FD4ABB-E9A5-4BD6-A0A1-C528CD171BE2}"/>
               </a:ext>
             </a:extLst>
           </p:cNvPr>
@@ -7880,8 +7889,8 @@
         </p:nvSpPr>
         <p:spPr>
           <a:xfrm>
-            <a:off x="3161347" y="1339978"/>
-            <a:ext cx="5119836" cy="369332"/>
+            <a:off x="3173970" y="1056452"/>
+            <a:ext cx="5140280" cy="401708"/>
           </a:xfrm>
           <a:prstGeom prst="rect">
             <a:avLst/>
@@ -7895,157 +7904,157 @@
           <a:lstStyle/>
           <a:p>
             <a:r>
-              <a:rPr lang="en-US" altLang="ko-KR" dirty="0">
-                <a:solidFill>
-                  <a:schemeClr val="tx2">
-                    <a:lumMod val="50000"/>
-                  </a:schemeClr>
-                </a:solidFill>
-                <a:latin typeface="KoPub돋움체 Medium" panose="02020603020101020101" pitchFamily="18" charset="-127"/>
-                <a:ea typeface="KoPub돋움체 Light" panose="02020603020101020101"/>
+              <a:rPr lang="en-US" altLang="ko-KR" sz="2008" dirty="0">
+                <a:solidFill>
+                  <a:schemeClr val="tx2">
+                    <a:lumMod val="50000"/>
+                  </a:schemeClr>
+                </a:solidFill>
+                <a:latin typeface="KoPub돋움체 Bold" panose="02020603020101020101" pitchFamily="18" charset="-127"/>
+                <a:ea typeface="KoPub돋움체 Bold" panose="02020603020101020101" pitchFamily="18" charset="-127"/>
               </a:rPr>
               <a:t>Case ID : </a:t>
             </a:r>
             <a:r>
-              <a:rPr lang="ko-KR" altLang="en-US" dirty="0">
-                <a:solidFill>
-                  <a:schemeClr val="tx2">
-                    <a:lumMod val="50000"/>
-                  </a:schemeClr>
-                </a:solidFill>
-                <a:latin typeface="KoPub돋움체 Medium" panose="02020603020101020101" pitchFamily="18" charset="-127"/>
-                <a:ea typeface="KoPub돋움체 Light" panose="02020603020101020101"/>
+              <a:rPr lang="ko-KR" altLang="en-US" sz="2008" dirty="0">
+                <a:solidFill>
+                  <a:schemeClr val="tx2">
+                    <a:lumMod val="50000"/>
+                  </a:schemeClr>
+                </a:solidFill>
+                <a:latin typeface="KoPub돋움체 Bold" panose="02020603020101020101" pitchFamily="18" charset="-127"/>
+                <a:ea typeface="KoPub돋움체 Bold" panose="02020603020101020101" pitchFamily="18" charset="-127"/>
               </a:rPr>
               <a:t>병실</a:t>
             </a:r>
             <a:r>
-              <a:rPr lang="en-US" altLang="ko-KR" dirty="0">
-                <a:solidFill>
-                  <a:schemeClr val="tx2">
-                    <a:lumMod val="50000"/>
-                  </a:schemeClr>
-                </a:solidFill>
-                <a:latin typeface="KoPub돋움체 Medium" panose="02020603020101020101" pitchFamily="18" charset="-127"/>
-                <a:ea typeface="KoPub돋움체 Light" panose="02020603020101020101"/>
+              <a:rPr lang="en-US" altLang="ko-KR" sz="2008" dirty="0">
+                <a:solidFill>
+                  <a:schemeClr val="tx2">
+                    <a:lumMod val="50000"/>
+                  </a:schemeClr>
+                </a:solidFill>
+                <a:latin typeface="KoPub돋움체 Bold" panose="02020603020101020101" pitchFamily="18" charset="-127"/>
+                <a:ea typeface="KoPub돋움체 Bold" panose="02020603020101020101" pitchFamily="18" charset="-127"/>
               </a:rPr>
               <a:t>-</a:t>
             </a:r>
             <a:r>
-              <a:rPr lang="ko-KR" altLang="en-US" dirty="0">
-                <a:solidFill>
-                  <a:schemeClr val="tx2">
-                    <a:lumMod val="50000"/>
-                  </a:schemeClr>
-                </a:solidFill>
-                <a:latin typeface="KoPub돋움체 Medium" panose="02020603020101020101" pitchFamily="18" charset="-127"/>
-                <a:ea typeface="KoPub돋움체 Light" panose="02020603020101020101"/>
+              <a:rPr lang="ko-KR" altLang="en-US" sz="2008" dirty="0">
+                <a:solidFill>
+                  <a:schemeClr val="tx2">
+                    <a:lumMod val="50000"/>
+                  </a:schemeClr>
+                </a:solidFill>
+                <a:latin typeface="KoPub돋움체 Bold" panose="02020603020101020101" pitchFamily="18" charset="-127"/>
+                <a:ea typeface="KoPub돋움체 Bold" panose="02020603020101020101" pitchFamily="18" charset="-127"/>
               </a:rPr>
               <a:t>등록</a:t>
             </a:r>
             <a:r>
-              <a:rPr lang="en-US" altLang="ko-KR" dirty="0">
-                <a:solidFill>
-                  <a:schemeClr val="tx2">
-                    <a:lumMod val="50000"/>
-                  </a:schemeClr>
-                </a:solidFill>
-                <a:latin typeface="KoPub돋움체 Medium" panose="02020603020101020101" pitchFamily="18" charset="-127"/>
-                <a:ea typeface="KoPub돋움체 Light" panose="02020603020101020101"/>
+              <a:rPr lang="en-US" altLang="ko-KR" sz="2008" dirty="0">
+                <a:solidFill>
+                  <a:schemeClr val="tx2">
+                    <a:lumMod val="50000"/>
+                  </a:schemeClr>
+                </a:solidFill>
+                <a:latin typeface="KoPub돋움체 Bold" panose="02020603020101020101" pitchFamily="18" charset="-127"/>
+                <a:ea typeface="KoPub돋움체 Bold" panose="02020603020101020101" pitchFamily="18" charset="-127"/>
               </a:rPr>
               <a:t>-</a:t>
             </a:r>
             <a:r>
-              <a:rPr lang="ko-KR" altLang="en-US" dirty="0">
-                <a:solidFill>
-                  <a:schemeClr val="tx2">
-                    <a:lumMod val="50000"/>
-                  </a:schemeClr>
-                </a:solidFill>
-                <a:latin typeface="KoPub돋움체 Medium" panose="02020603020101020101" pitchFamily="18" charset="-127"/>
-                <a:ea typeface="KoPub돋움체 Light" panose="02020603020101020101"/>
+              <a:rPr lang="ko-KR" altLang="en-US" sz="2008" dirty="0">
+                <a:solidFill>
+                  <a:schemeClr val="tx2">
+                    <a:lumMod val="50000"/>
+                  </a:schemeClr>
+                </a:solidFill>
+                <a:latin typeface="KoPub돋움체 Bold" panose="02020603020101020101" pitchFamily="18" charset="-127"/>
+                <a:ea typeface="KoPub돋움체 Bold" panose="02020603020101020101" pitchFamily="18" charset="-127"/>
               </a:rPr>
               <a:t>성함</a:t>
             </a:r>
             <a:r>
-              <a:rPr lang="en-US" altLang="ko-KR" dirty="0">
-                <a:solidFill>
-                  <a:schemeClr val="tx2">
-                    <a:lumMod val="50000"/>
-                  </a:schemeClr>
-                </a:solidFill>
-                <a:latin typeface="KoPub돋움체 Medium" panose="02020603020101020101" pitchFamily="18" charset="-127"/>
-                <a:ea typeface="KoPub돋움체 Light" panose="02020603020101020101"/>
+              <a:rPr lang="en-US" altLang="ko-KR" sz="2008" dirty="0">
+                <a:solidFill>
+                  <a:schemeClr val="tx2">
+                    <a:lumMod val="50000"/>
+                  </a:schemeClr>
+                </a:solidFill>
+                <a:latin typeface="KoPub돋움체 Bold" panose="02020603020101020101" pitchFamily="18" charset="-127"/>
+                <a:ea typeface="KoPub돋움체 Bold" panose="02020603020101020101" pitchFamily="18" charset="-127"/>
               </a:rPr>
               <a:t>-</a:t>
             </a:r>
             <a:r>
-              <a:rPr lang="ko-KR" altLang="en-US" dirty="0">
-                <a:solidFill>
-                  <a:schemeClr val="tx2">
-                    <a:lumMod val="50000"/>
-                  </a:schemeClr>
-                </a:solidFill>
-                <a:latin typeface="KoPub돋움체 Medium" panose="02020603020101020101" pitchFamily="18" charset="-127"/>
-                <a:ea typeface="KoPub돋움체 Light" panose="02020603020101020101"/>
+              <a:rPr lang="ko-KR" altLang="en-US" sz="2008" dirty="0">
+                <a:solidFill>
+                  <a:schemeClr val="tx2">
+                    <a:lumMod val="50000"/>
+                  </a:schemeClr>
+                </a:solidFill>
+                <a:latin typeface="KoPub돋움체 Bold" panose="02020603020101020101" pitchFamily="18" charset="-127"/>
+                <a:ea typeface="KoPub돋움체 Bold" panose="02020603020101020101" pitchFamily="18" charset="-127"/>
               </a:rPr>
               <a:t>교수</a:t>
             </a:r>
             <a:r>
-              <a:rPr lang="en-US" altLang="ko-KR" dirty="0">
-                <a:solidFill>
-                  <a:schemeClr val="tx2">
-                    <a:lumMod val="50000"/>
-                  </a:schemeClr>
-                </a:solidFill>
-                <a:latin typeface="KoPub돋움체 Medium" panose="02020603020101020101" pitchFamily="18" charset="-127"/>
-                <a:ea typeface="KoPub돋움체 Light" panose="02020603020101020101"/>
+              <a:rPr lang="en-US" altLang="ko-KR" sz="2008" dirty="0">
+                <a:solidFill>
+                  <a:schemeClr val="tx2">
+                    <a:lumMod val="50000"/>
+                  </a:schemeClr>
+                </a:solidFill>
+                <a:latin typeface="KoPub돋움체 Bold" panose="02020603020101020101" pitchFamily="18" charset="-127"/>
+                <a:ea typeface="KoPub돋움체 Bold" panose="02020603020101020101" pitchFamily="18" charset="-127"/>
               </a:rPr>
               <a:t>-</a:t>
             </a:r>
             <a:r>
-              <a:rPr lang="ko-KR" altLang="en-US" dirty="0">
-                <a:solidFill>
-                  <a:schemeClr val="tx2">
-                    <a:lumMod val="50000"/>
-                  </a:schemeClr>
-                </a:solidFill>
-                <a:latin typeface="KoPub돋움체 Medium" panose="02020603020101020101" pitchFamily="18" charset="-127"/>
-                <a:ea typeface="KoPub돋움체 Light" panose="02020603020101020101"/>
+              <a:rPr lang="ko-KR" altLang="en-US" sz="2008" dirty="0">
+                <a:solidFill>
+                  <a:schemeClr val="tx2">
+                    <a:lumMod val="50000"/>
+                  </a:schemeClr>
+                </a:solidFill>
+                <a:latin typeface="KoPub돋움체 Bold" panose="02020603020101020101" pitchFamily="18" charset="-127"/>
+                <a:ea typeface="KoPub돋움체 Bold" panose="02020603020101020101" pitchFamily="18" charset="-127"/>
               </a:rPr>
               <a:t>월일</a:t>
             </a:r>
             <a:r>
-              <a:rPr lang="en-US" altLang="ko-KR" dirty="0">
-                <a:solidFill>
-                  <a:schemeClr val="tx2">
-                    <a:lumMod val="50000"/>
-                  </a:schemeClr>
-                </a:solidFill>
-                <a:latin typeface="KoPub돋움체 Medium" panose="02020603020101020101" pitchFamily="18" charset="-127"/>
-                <a:ea typeface="KoPub돋움체 Light" panose="02020603020101020101"/>
+              <a:rPr lang="en-US" altLang="ko-KR" sz="2008" dirty="0">
+                <a:solidFill>
+                  <a:schemeClr val="tx2">
+                    <a:lumMod val="50000"/>
+                  </a:schemeClr>
+                </a:solidFill>
+                <a:latin typeface="KoPub돋움체 Bold" panose="02020603020101020101" pitchFamily="18" charset="-127"/>
+                <a:ea typeface="KoPub돋움체 Bold" panose="02020603020101020101" pitchFamily="18" charset="-127"/>
               </a:rPr>
               <a:t>-</a:t>
             </a:r>
             <a:r>
-              <a:rPr lang="ko-KR" altLang="en-US" dirty="0">
-                <a:solidFill>
-                  <a:schemeClr val="tx2">
-                    <a:lumMod val="50000"/>
-                  </a:schemeClr>
-                </a:solidFill>
-                <a:latin typeface="KoPub돋움체 Medium" panose="02020603020101020101" pitchFamily="18" charset="-127"/>
-                <a:ea typeface="KoPub돋움체 Light" panose="02020603020101020101"/>
+              <a:rPr lang="ko-KR" altLang="en-US" sz="2008" dirty="0">
+                <a:solidFill>
+                  <a:schemeClr val="tx2">
+                    <a:lumMod val="50000"/>
+                  </a:schemeClr>
+                </a:solidFill>
+                <a:latin typeface="KoPub돋움체 Bold" panose="02020603020101020101" pitchFamily="18" charset="-127"/>
+                <a:ea typeface="KoPub돋움체 Bold" panose="02020603020101020101" pitchFamily="18" charset="-127"/>
               </a:rPr>
               <a:t>시간</a:t>
             </a:r>
-            <a:endParaRPr lang="en-US" altLang="ko-KR" dirty="0">
+            <a:endParaRPr lang="en-US" altLang="ko-KR" sz="2008" dirty="0">
               <a:solidFill>
                 <a:schemeClr val="tx2">
                   <a:lumMod val="50000"/>
                 </a:schemeClr>
               </a:solidFill>
-              <a:latin typeface="KoPub돋움체 Medium" panose="02020603020101020101" pitchFamily="18" charset="-127"/>
-              <a:ea typeface="KoPub돋움체 Light" panose="02020603020101020101"/>
+              <a:latin typeface="KoPub돋움체 Bold" panose="02020603020101020101" pitchFamily="18" charset="-127"/>
+              <a:ea typeface="KoPub돋움체 Bold" panose="02020603020101020101" pitchFamily="18" charset="-127"/>
             </a:endParaRPr>
           </a:p>
         </p:txBody>
@@ -8055,7 +8064,7 @@
           <p:cNvPr id="12" name="TextBox 11">
             <a:extLst>
               <a:ext uri="{FF2B5EF4-FFF2-40B4-BE49-F238E27FC236}">
-                <a16:creationId xmlns:a16="http://schemas.microsoft.com/office/drawing/2014/main" id="{8FA07B63-4519-67D4-9E1C-D241B9FC298D}"/>
+                <a16:creationId xmlns:a16="http://schemas.microsoft.com/office/drawing/2014/main" id="{22BCD312-C238-8943-9EC2-2CC5D0B44FAC}"/>
               </a:ext>
             </a:extLst>
           </p:cNvPr>
@@ -8064,8 +8073,8 @@
         </p:nvSpPr>
         <p:spPr>
           <a:xfrm>
-            <a:off x="310149" y="1339978"/>
-            <a:ext cx="2052165" cy="369332"/>
+            <a:off x="288052" y="1071903"/>
+            <a:ext cx="2107031" cy="401708"/>
           </a:xfrm>
           <a:prstGeom prst="rect">
             <a:avLst/>
@@ -8080,22 +8089,22 @@
           <a:p>
             <a:pPr algn="ctr"/>
             <a:r>
-              <a:rPr lang="en-US" altLang="ko-KR" b="1" dirty="0">
+              <a:rPr lang="en-US" altLang="ko-KR" sz="2008" b="1" dirty="0">
                 <a:solidFill>
                   <a:srgbClr val="000000"/>
                 </a:solidFill>
-                <a:latin typeface="KoPub돋움체 Medium" panose="02020603020101020101" pitchFamily="18" charset="-127"/>
-                <a:ea typeface="KoPub돋움체 Light" panose="02020603020101020101"/>
+                <a:latin typeface="KoPub돋움체 Bold" panose="02020603020101020101" pitchFamily="18" charset="-127"/>
+                <a:ea typeface="KoPub돋움체 Bold" panose="02020603020101020101" pitchFamily="18" charset="-127"/>
               </a:rPr>
               <a:t>[ID] Case ID </a:t>
             </a:r>
             <a:r>
-              <a:rPr lang="ko-KR" altLang="en-US" b="1" dirty="0">
+              <a:rPr lang="ko-KR" altLang="en-US" sz="2008" b="1" dirty="0">
                 <a:solidFill>
                   <a:srgbClr val="000000"/>
                 </a:solidFill>
-                <a:latin typeface="KoPub돋움체 Medium" panose="02020603020101020101" pitchFamily="18" charset="-127"/>
-                <a:ea typeface="KoPub돋움체 Light" panose="02020603020101020101"/>
+                <a:latin typeface="KoPub돋움체 Bold" panose="02020603020101020101" pitchFamily="18" charset="-127"/>
+                <a:ea typeface="KoPub돋움체 Bold" panose="02020603020101020101" pitchFamily="18" charset="-127"/>
               </a:rPr>
               <a:t>표준</a:t>
             </a:r>
@@ -8107,7 +8116,7 @@
           <p:cNvPr id="13" name="사각형: 둥근 모서리 12">
             <a:extLst>
               <a:ext uri="{FF2B5EF4-FFF2-40B4-BE49-F238E27FC236}">
-                <a16:creationId xmlns:a16="http://schemas.microsoft.com/office/drawing/2014/main" id="{C32F48BA-C495-9A9B-C63F-E8A7AEFC92D4}"/>
+                <a16:creationId xmlns:a16="http://schemas.microsoft.com/office/drawing/2014/main" id="{45CD00F7-3125-23F8-9A78-D2989C54FE01}"/>
               </a:ext>
             </a:extLst>
           </p:cNvPr>
@@ -8116,8 +8125,8 @@
         </p:nvSpPr>
         <p:spPr>
           <a:xfrm>
-            <a:off x="3050989" y="1961982"/>
-            <a:ext cx="5779400" cy="1115349"/>
+            <a:off x="3063172" y="1777571"/>
+            <a:ext cx="5802477" cy="1388063"/>
           </a:xfrm>
           <a:prstGeom prst="roundRect">
             <a:avLst>
@@ -8154,9 +8163,9 @@
           <a:lstStyle/>
           <a:p>
             <a:pPr algn="ctr"/>
-            <a:endParaRPr lang="ko-KR" altLang="en-US" sz="5080">
-              <a:latin typeface="KoPub돋움체 Medium" panose="02020603020101020101" pitchFamily="18" charset="-127"/>
-              <a:ea typeface="KoPub돋움체 Light" panose="02020603020101020101"/>
+            <a:endParaRPr lang="ko-KR" altLang="en-US" sz="5422">
+              <a:latin typeface="KoPub돋움체 Bold" panose="02020603020101020101" pitchFamily="18" charset="-127"/>
+              <a:ea typeface="KoPub돋움체 Bold" panose="02020603020101020101" pitchFamily="18" charset="-127"/>
             </a:endParaRPr>
           </a:p>
         </p:txBody>
@@ -8166,7 +8175,7 @@
           <p:cNvPr id="15" name="사각형: 둥근 모서리 14">
             <a:extLst>
               <a:ext uri="{FF2B5EF4-FFF2-40B4-BE49-F238E27FC236}">
-                <a16:creationId xmlns:a16="http://schemas.microsoft.com/office/drawing/2014/main" id="{6B78A99E-9E40-784B-95AB-E8BEFD430BA4}"/>
+                <a16:creationId xmlns:a16="http://schemas.microsoft.com/office/drawing/2014/main" id="{F8D43D4A-CB1B-75B4-F498-FF6AB0DF1D47}"/>
               </a:ext>
             </a:extLst>
           </p:cNvPr>
@@ -8175,8 +8184,8 @@
         </p:nvSpPr>
         <p:spPr>
           <a:xfrm>
-            <a:off x="208326" y="1961983"/>
-            <a:ext cx="2788897" cy="1115349"/>
+            <a:off x="209158" y="1777572"/>
+            <a:ext cx="2800033" cy="1388063"/>
           </a:xfrm>
           <a:prstGeom prst="roundRect">
             <a:avLst>
@@ -8211,9 +8220,9 @@
           <a:lstStyle/>
           <a:p>
             <a:pPr algn="ctr"/>
-            <a:endParaRPr lang="ko-KR" altLang="en-US" sz="5080">
-              <a:latin typeface="KoPub돋움체 Medium" panose="02020603020101020101" pitchFamily="18" charset="-127"/>
-              <a:ea typeface="KoPub돋움체 Light" panose="02020603020101020101"/>
+            <a:endParaRPr lang="ko-KR" altLang="en-US" sz="5422">
+              <a:latin typeface="KoPub돋움체 Bold" panose="02020603020101020101" pitchFamily="18" charset="-127"/>
+              <a:ea typeface="KoPub돋움체 Bold" panose="02020603020101020101" pitchFamily="18" charset="-127"/>
             </a:endParaRPr>
           </a:p>
         </p:txBody>
@@ -8223,7 +8232,7 @@
           <p:cNvPr id="20" name="TextBox 19">
             <a:extLst>
               <a:ext uri="{FF2B5EF4-FFF2-40B4-BE49-F238E27FC236}">
-                <a16:creationId xmlns:a16="http://schemas.microsoft.com/office/drawing/2014/main" id="{7905CC26-D0D7-0E58-1BF6-6BB32A2663D4}"/>
+                <a16:creationId xmlns:a16="http://schemas.microsoft.com/office/drawing/2014/main" id="{F6969304-AFAB-F77D-7ABC-69C22274B771}"/>
               </a:ext>
             </a:extLst>
           </p:cNvPr>
@@ -8232,8 +8241,8 @@
         </p:nvSpPr>
         <p:spPr>
           <a:xfrm>
-            <a:off x="3161347" y="2057991"/>
-            <a:ext cx="5119836" cy="923330"/>
+            <a:off x="3173970" y="1961743"/>
+            <a:ext cx="5678063" cy="1019719"/>
           </a:xfrm>
           <a:prstGeom prst="rect">
             <a:avLst/>
@@ -8247,270 +8256,270 @@
           <a:lstStyle/>
           <a:p>
             <a:r>
-              <a:rPr lang="en-US" altLang="ko-KR" dirty="0">
-                <a:solidFill>
-                  <a:schemeClr val="tx2">
-                    <a:lumMod val="50000"/>
-                  </a:schemeClr>
-                </a:solidFill>
-                <a:latin typeface="KoPub돋움체 Medium" panose="02020603020101020101" pitchFamily="18" charset="-127"/>
-                <a:ea typeface="KoPub돋움체 Light" panose="02020603020101020101"/>
+              <a:rPr lang="en-US" altLang="ko-KR" sz="2008" dirty="0">
+                <a:solidFill>
+                  <a:schemeClr val="tx2">
+                    <a:lumMod val="50000"/>
+                  </a:schemeClr>
+                </a:solidFill>
+                <a:latin typeface="KoPub돋움체 Bold" panose="02020603020101020101" pitchFamily="18" charset="-127"/>
+                <a:ea typeface="KoPub돋움체 Bold" panose="02020603020101020101" pitchFamily="18" charset="-127"/>
               </a:rPr>
               <a:t>[A] </a:t>
             </a:r>
             <a:r>
-              <a:rPr lang="ko-KR" altLang="en-US" dirty="0">
-                <a:solidFill>
-                  <a:schemeClr val="tx2">
-                    <a:lumMod val="50000"/>
-                  </a:schemeClr>
-                </a:solidFill>
-                <a:latin typeface="KoPub돋움체 Medium" panose="02020603020101020101" pitchFamily="18" charset="-127"/>
-                <a:ea typeface="KoPub돋움체 Light" panose="02020603020101020101"/>
+              <a:rPr lang="ko-KR" altLang="en-US" sz="2008" dirty="0">
+                <a:solidFill>
+                  <a:schemeClr val="tx2">
+                    <a:lumMod val="50000"/>
+                  </a:schemeClr>
+                </a:solidFill>
+                <a:latin typeface="KoPub돋움체 Bold" panose="02020603020101020101" pitchFamily="18" charset="-127"/>
+                <a:ea typeface="KoPub돋움체 Bold" panose="02020603020101020101" pitchFamily="18" charset="-127"/>
               </a:rPr>
               <a:t>보고</a:t>
             </a:r>
             <a:r>
-              <a:rPr lang="en-US" altLang="ko-KR" dirty="0">
-                <a:solidFill>
-                  <a:schemeClr val="tx2">
-                    <a:lumMod val="50000"/>
-                  </a:schemeClr>
-                </a:solidFill>
-                <a:latin typeface="KoPub돋움체 Medium" panose="02020603020101020101" pitchFamily="18" charset="-127"/>
-                <a:ea typeface="KoPub돋움체 Light" panose="02020603020101020101"/>
+              <a:rPr lang="en-US" altLang="ko-KR" sz="2008" dirty="0">
+                <a:solidFill>
+                  <a:schemeClr val="tx2">
+                    <a:lumMod val="50000"/>
+                  </a:schemeClr>
+                </a:solidFill>
+                <a:latin typeface="KoPub돋움체 Bold" panose="02020603020101020101" pitchFamily="18" charset="-127"/>
+                <a:ea typeface="KoPub돋움체 Bold" panose="02020603020101020101" pitchFamily="18" charset="-127"/>
               </a:rPr>
               <a:t>: </a:t>
             </a:r>
             <a:r>
-              <a:rPr lang="ko-KR" altLang="en-US" dirty="0">
-                <a:solidFill>
-                  <a:schemeClr val="tx2">
-                    <a:lumMod val="50000"/>
-                  </a:schemeClr>
-                </a:solidFill>
-                <a:latin typeface="KoPub돋움체 Medium" panose="02020603020101020101" pitchFamily="18" charset="-127"/>
-                <a:ea typeface="KoPub돋움체 Light" panose="02020603020101020101"/>
+              <a:rPr lang="ko-KR" altLang="en-US" sz="2008" dirty="0">
+                <a:solidFill>
+                  <a:schemeClr val="tx2">
+                    <a:lumMod val="50000"/>
+                  </a:schemeClr>
+                </a:solidFill>
+                <a:latin typeface="KoPub돋움체 Bold" panose="02020603020101020101" pitchFamily="18" charset="-127"/>
+                <a:ea typeface="KoPub돋움체 Bold" panose="02020603020101020101" pitchFamily="18" charset="-127"/>
               </a:rPr>
               <a:t>지금 상태 </a:t>
             </a:r>
             <a:r>
-              <a:rPr lang="en-US" altLang="ko-KR" dirty="0">
-                <a:solidFill>
-                  <a:schemeClr val="tx2">
-                    <a:lumMod val="50000"/>
-                  </a:schemeClr>
-                </a:solidFill>
-                <a:latin typeface="KoPub돋움체 Medium" panose="02020603020101020101" pitchFamily="18" charset="-127"/>
-                <a:ea typeface="KoPub돋움체 Light" panose="02020603020101020101"/>
+              <a:rPr lang="en-US" altLang="ko-KR" sz="2008" dirty="0">
+                <a:solidFill>
+                  <a:schemeClr val="tx2">
+                    <a:lumMod val="50000"/>
+                  </a:schemeClr>
+                </a:solidFill>
+                <a:latin typeface="KoPub돋움체 Bold" panose="02020603020101020101" pitchFamily="18" charset="-127"/>
+                <a:ea typeface="KoPub돋움체 Bold" panose="02020603020101020101" pitchFamily="18" charset="-127"/>
               </a:rPr>
               <a:t>/ </a:t>
             </a:r>
             <a:r>
-              <a:rPr lang="ko-KR" altLang="en-US" dirty="0">
-                <a:solidFill>
-                  <a:schemeClr val="tx2">
-                    <a:lumMod val="50000"/>
-                  </a:schemeClr>
-                </a:solidFill>
-                <a:latin typeface="KoPub돋움체 Medium" panose="02020603020101020101" pitchFamily="18" charset="-127"/>
-                <a:ea typeface="KoPub돋움체 Light" panose="02020603020101020101"/>
+              <a:rPr lang="ko-KR" altLang="en-US" sz="2008" dirty="0">
+                <a:solidFill>
+                  <a:schemeClr val="tx2">
+                    <a:lumMod val="50000"/>
+                  </a:schemeClr>
+                </a:solidFill>
+                <a:latin typeface="KoPub돋움체 Bold" panose="02020603020101020101" pitchFamily="18" charset="-127"/>
+                <a:ea typeface="KoPub돋움체 Bold" panose="02020603020101020101" pitchFamily="18" charset="-127"/>
               </a:rPr>
               <a:t>근거 </a:t>
             </a:r>
             <a:r>
-              <a:rPr lang="en-US" altLang="ko-KR" dirty="0">
-                <a:solidFill>
-                  <a:schemeClr val="tx2">
-                    <a:lumMod val="50000"/>
-                  </a:schemeClr>
-                </a:solidFill>
-                <a:latin typeface="KoPub돋움체 Medium" panose="02020603020101020101" pitchFamily="18" charset="-127"/>
-                <a:ea typeface="KoPub돋움체 Light" panose="02020603020101020101"/>
+              <a:rPr lang="en-US" altLang="ko-KR" sz="2008" dirty="0">
+                <a:solidFill>
+                  <a:schemeClr val="tx2">
+                    <a:lumMod val="50000"/>
+                  </a:schemeClr>
+                </a:solidFill>
+                <a:latin typeface="KoPub돋움체 Bold" panose="02020603020101020101" pitchFamily="18" charset="-127"/>
+                <a:ea typeface="KoPub돋움체 Bold" panose="02020603020101020101" pitchFamily="18" charset="-127"/>
               </a:rPr>
               <a:t>/ </a:t>
             </a:r>
             <a:r>
-              <a:rPr lang="ko-KR" altLang="en-US" dirty="0">
-                <a:solidFill>
-                  <a:schemeClr val="tx2">
-                    <a:lumMod val="50000"/>
-                  </a:schemeClr>
-                </a:solidFill>
-                <a:latin typeface="KoPub돋움체 Medium" panose="02020603020101020101" pitchFamily="18" charset="-127"/>
-                <a:ea typeface="KoPub돋움체 Light" panose="02020603020101020101"/>
+              <a:rPr lang="ko-KR" altLang="en-US" sz="2008" dirty="0">
+                <a:solidFill>
+                  <a:schemeClr val="tx2">
+                    <a:lumMod val="50000"/>
+                  </a:schemeClr>
+                </a:solidFill>
+                <a:latin typeface="KoPub돋움체 Bold" panose="02020603020101020101" pitchFamily="18" charset="-127"/>
+                <a:ea typeface="KoPub돋움체 Bold" panose="02020603020101020101" pitchFamily="18" charset="-127"/>
               </a:rPr>
               <a:t>요청사항 </a:t>
             </a:r>
             <a:r>
-              <a:rPr lang="en-US" altLang="ko-KR" dirty="0">
-                <a:solidFill>
-                  <a:schemeClr val="tx2">
-                    <a:lumMod val="50000"/>
-                  </a:schemeClr>
-                </a:solidFill>
-                <a:latin typeface="KoPub돋움체 Medium" panose="02020603020101020101" pitchFamily="18" charset="-127"/>
-                <a:ea typeface="KoPub돋움체 Light" panose="02020603020101020101"/>
+              <a:rPr lang="en-US" altLang="ko-KR" sz="2008" dirty="0">
+                <a:solidFill>
+                  <a:schemeClr val="tx2">
+                    <a:lumMod val="50000"/>
+                  </a:schemeClr>
+                </a:solidFill>
+                <a:latin typeface="KoPub돋움체 Bold" panose="02020603020101020101" pitchFamily="18" charset="-127"/>
+                <a:ea typeface="KoPub돋움체 Bold" panose="02020603020101020101" pitchFamily="18" charset="-127"/>
               </a:rPr>
               <a:t>+ 10·4·12 </a:t>
             </a:r>
           </a:p>
           <a:p>
             <a:r>
-              <a:rPr lang="en-US" altLang="ko-KR" dirty="0">
-                <a:solidFill>
-                  <a:schemeClr val="tx2">
-                    <a:lumMod val="50000"/>
-                  </a:schemeClr>
-                </a:solidFill>
-                <a:latin typeface="KoPub돋움체 Medium" panose="02020603020101020101" pitchFamily="18" charset="-127"/>
-                <a:ea typeface="KoPub돋움체 Light" panose="02020603020101020101"/>
+              <a:rPr lang="en-US" altLang="ko-KR" sz="2008" dirty="0">
+                <a:solidFill>
+                  <a:schemeClr val="tx2">
+                    <a:lumMod val="50000"/>
+                  </a:schemeClr>
+                </a:solidFill>
+                <a:latin typeface="KoPub돋움체 Bold" panose="02020603020101020101" pitchFamily="18" charset="-127"/>
+                <a:ea typeface="KoPub돋움체 Bold" panose="02020603020101020101" pitchFamily="18" charset="-127"/>
               </a:rPr>
               <a:t>[C] </a:t>
             </a:r>
             <a:r>
-              <a:rPr lang="ko-KR" altLang="en-US" dirty="0">
-                <a:solidFill>
-                  <a:schemeClr val="tx2">
-                    <a:lumMod val="50000"/>
-                  </a:schemeClr>
-                </a:solidFill>
-                <a:latin typeface="KoPub돋움체 Medium" panose="02020603020101020101" pitchFamily="18" charset="-127"/>
-                <a:ea typeface="KoPub돋움체 Light" panose="02020603020101020101"/>
+              <a:rPr lang="ko-KR" altLang="en-US" sz="2008" dirty="0">
+                <a:solidFill>
+                  <a:schemeClr val="tx2">
+                    <a:lumMod val="50000"/>
+                  </a:schemeClr>
+                </a:solidFill>
+                <a:latin typeface="KoPub돋움체 Bold" panose="02020603020101020101" pitchFamily="18" charset="-127"/>
+                <a:ea typeface="KoPub돋움체 Bold" panose="02020603020101020101" pitchFamily="18" charset="-127"/>
               </a:rPr>
               <a:t>상황</a:t>
             </a:r>
             <a:r>
-              <a:rPr lang="en-US" altLang="ko-KR" dirty="0">
-                <a:solidFill>
-                  <a:schemeClr val="tx2">
-                    <a:lumMod val="50000"/>
-                  </a:schemeClr>
-                </a:solidFill>
-                <a:latin typeface="KoPub돋움체 Medium" panose="02020603020101020101" pitchFamily="18" charset="-127"/>
-                <a:ea typeface="KoPub돋움체 Light" panose="02020603020101020101"/>
+              <a:rPr lang="en-US" altLang="ko-KR" sz="2008" dirty="0">
+                <a:solidFill>
+                  <a:schemeClr val="tx2">
+                    <a:lumMod val="50000"/>
+                  </a:schemeClr>
+                </a:solidFill>
+                <a:latin typeface="KoPub돋움체 Bold" panose="02020603020101020101" pitchFamily="18" charset="-127"/>
+                <a:ea typeface="KoPub돋움체 Bold" panose="02020603020101020101" pitchFamily="18" charset="-127"/>
               </a:rPr>
               <a:t>: PA </a:t>
             </a:r>
             <a:r>
-              <a:rPr lang="ko-KR" altLang="en-US" dirty="0">
-                <a:solidFill>
-                  <a:schemeClr val="tx2">
-                    <a:lumMod val="50000"/>
-                  </a:schemeClr>
-                </a:solidFill>
-                <a:latin typeface="KoPub돋움체 Medium" panose="02020603020101020101" pitchFamily="18" charset="-127"/>
-                <a:ea typeface="KoPub돋움체 Light" panose="02020603020101020101"/>
+              <a:rPr lang="ko-KR" altLang="en-US" sz="2008" dirty="0">
+                <a:solidFill>
+                  <a:schemeClr val="tx2">
+                    <a:lumMod val="50000"/>
+                  </a:schemeClr>
+                </a:solidFill>
+                <a:latin typeface="KoPub돋움체 Bold" panose="02020603020101020101" pitchFamily="18" charset="-127"/>
+                <a:ea typeface="KoPub돋움체 Bold" panose="02020603020101020101" pitchFamily="18" charset="-127"/>
               </a:rPr>
               <a:t>조치 예정 사유 및 시간 공유 </a:t>
             </a:r>
           </a:p>
           <a:p>
             <a:r>
-              <a:rPr lang="en-US" altLang="ko-KR" dirty="0">
-                <a:solidFill>
-                  <a:schemeClr val="tx2">
-                    <a:lumMod val="50000"/>
-                  </a:schemeClr>
-                </a:solidFill>
-                <a:latin typeface="KoPub돋움체 Medium" panose="02020603020101020101" pitchFamily="18" charset="-127"/>
-                <a:ea typeface="KoPub돋움체 Light" panose="02020603020101020101"/>
+              <a:rPr lang="en-US" altLang="ko-KR" sz="2008" dirty="0">
+                <a:solidFill>
+                  <a:schemeClr val="tx2">
+                    <a:lumMod val="50000"/>
+                  </a:schemeClr>
+                </a:solidFill>
+                <a:latin typeface="KoPub돋움체 Bold" panose="02020603020101020101" pitchFamily="18" charset="-127"/>
+                <a:ea typeface="KoPub돋움체 Bold" panose="02020603020101020101" pitchFamily="18" charset="-127"/>
               </a:rPr>
               <a:t>[D] </a:t>
             </a:r>
             <a:r>
-              <a:rPr lang="ko-KR" altLang="en-US" dirty="0">
-                <a:solidFill>
-                  <a:schemeClr val="tx2">
-                    <a:lumMod val="50000"/>
-                  </a:schemeClr>
-                </a:solidFill>
-                <a:latin typeface="KoPub돋움체 Medium" panose="02020603020101020101" pitchFamily="18" charset="-127"/>
-                <a:ea typeface="KoPub돋움체 Light" panose="02020603020101020101"/>
+              <a:rPr lang="ko-KR" altLang="en-US" sz="2008" dirty="0">
+                <a:solidFill>
+                  <a:schemeClr val="tx2">
+                    <a:lumMod val="50000"/>
+                  </a:schemeClr>
+                </a:solidFill>
+                <a:latin typeface="KoPub돋움체 Bold" panose="02020603020101020101" pitchFamily="18" charset="-127"/>
+                <a:ea typeface="KoPub돋움체 Bold" panose="02020603020101020101" pitchFamily="18" charset="-127"/>
               </a:rPr>
               <a:t>완료</a:t>
             </a:r>
             <a:r>
-              <a:rPr lang="en-US" altLang="ko-KR" dirty="0">
-                <a:solidFill>
-                  <a:schemeClr val="tx2">
-                    <a:lumMod val="50000"/>
-                  </a:schemeClr>
-                </a:solidFill>
-                <a:latin typeface="KoPub돋움체 Medium" panose="02020603020101020101" pitchFamily="18" charset="-127"/>
-                <a:ea typeface="KoPub돋움체 Light" panose="02020603020101020101"/>
+              <a:rPr lang="en-US" altLang="ko-KR" sz="2008" dirty="0">
+                <a:solidFill>
+                  <a:schemeClr val="tx2">
+                    <a:lumMod val="50000"/>
+                  </a:schemeClr>
+                </a:solidFill>
+                <a:latin typeface="KoPub돋움체 Bold" panose="02020603020101020101" pitchFamily="18" charset="-127"/>
+                <a:ea typeface="KoPub돋움체 Bold" panose="02020603020101020101" pitchFamily="18" charset="-127"/>
               </a:rPr>
               <a:t>: </a:t>
             </a:r>
             <a:r>
-              <a:rPr lang="ko-KR" altLang="en-US" dirty="0">
-                <a:solidFill>
-                  <a:schemeClr val="tx2">
-                    <a:lumMod val="50000"/>
-                  </a:schemeClr>
-                </a:solidFill>
-                <a:latin typeface="KoPub돋움체 Medium" panose="02020603020101020101" pitchFamily="18" charset="-127"/>
-                <a:ea typeface="KoPub돋움체 Light" panose="02020603020101020101"/>
+              <a:rPr lang="ko-KR" altLang="en-US" sz="2008" dirty="0">
+                <a:solidFill>
+                  <a:schemeClr val="tx2">
+                    <a:lumMod val="50000"/>
+                  </a:schemeClr>
+                </a:solidFill>
+                <a:latin typeface="KoPub돋움체 Bold" panose="02020603020101020101" pitchFamily="18" charset="-127"/>
+                <a:ea typeface="KoPub돋움체 Bold" panose="02020603020101020101" pitchFamily="18" charset="-127"/>
               </a:rPr>
               <a:t>결과 </a:t>
             </a:r>
             <a:r>
-              <a:rPr lang="en-US" altLang="ko-KR" dirty="0">
-                <a:solidFill>
-                  <a:schemeClr val="tx2">
-                    <a:lumMod val="50000"/>
-                  </a:schemeClr>
-                </a:solidFill>
-                <a:latin typeface="KoPub돋움체 Medium" panose="02020603020101020101" pitchFamily="18" charset="-127"/>
-                <a:ea typeface="KoPub돋움체 Light" panose="02020603020101020101"/>
+              <a:rPr lang="en-US" altLang="ko-KR" sz="2008" dirty="0">
+                <a:solidFill>
+                  <a:schemeClr val="tx2">
+                    <a:lumMod val="50000"/>
+                  </a:schemeClr>
+                </a:solidFill>
+                <a:latin typeface="KoPub돋움체 Bold" panose="02020603020101020101" pitchFamily="18" charset="-127"/>
+                <a:ea typeface="KoPub돋움체 Bold" panose="02020603020101020101" pitchFamily="18" charset="-127"/>
               </a:rPr>
               <a:t>/ </a:t>
             </a:r>
             <a:r>
-              <a:rPr lang="ko-KR" altLang="en-US" dirty="0">
-                <a:solidFill>
-                  <a:schemeClr val="tx2">
-                    <a:lumMod val="50000"/>
-                  </a:schemeClr>
-                </a:solidFill>
-                <a:latin typeface="KoPub돋움체 Medium" panose="02020603020101020101" pitchFamily="18" charset="-127"/>
-                <a:ea typeface="KoPub돋움체 Light" panose="02020603020101020101"/>
+              <a:rPr lang="ko-KR" altLang="en-US" sz="2008" dirty="0">
+                <a:solidFill>
+                  <a:schemeClr val="tx2">
+                    <a:lumMod val="50000"/>
+                  </a:schemeClr>
+                </a:solidFill>
+                <a:latin typeface="KoPub돋움체 Bold" panose="02020603020101020101" pitchFamily="18" charset="-127"/>
+                <a:ea typeface="KoPub돋움체 Bold" panose="02020603020101020101" pitchFamily="18" charset="-127"/>
               </a:rPr>
               <a:t>현재 상태 </a:t>
             </a:r>
             <a:r>
-              <a:rPr lang="en-US" altLang="ko-KR" dirty="0">
-                <a:solidFill>
-                  <a:schemeClr val="tx2">
-                    <a:lumMod val="50000"/>
-                  </a:schemeClr>
-                </a:solidFill>
-                <a:latin typeface="KoPub돋움체 Medium" panose="02020603020101020101" pitchFamily="18" charset="-127"/>
-                <a:ea typeface="KoPub돋움체 Light" panose="02020603020101020101"/>
+              <a:rPr lang="en-US" altLang="ko-KR" sz="2008" dirty="0">
+                <a:solidFill>
+                  <a:schemeClr val="tx2">
+                    <a:lumMod val="50000"/>
+                  </a:schemeClr>
+                </a:solidFill>
+                <a:latin typeface="KoPub돋움체 Bold" panose="02020603020101020101" pitchFamily="18" charset="-127"/>
+                <a:ea typeface="KoPub돋움체 Bold" panose="02020603020101020101" pitchFamily="18" charset="-127"/>
               </a:rPr>
               <a:t>/ </a:t>
             </a:r>
             <a:r>
-              <a:rPr lang="ko-KR" altLang="en-US" dirty="0">
-                <a:solidFill>
-                  <a:schemeClr val="tx2">
-                    <a:lumMod val="50000"/>
-                  </a:schemeClr>
-                </a:solidFill>
-                <a:latin typeface="KoPub돋움체 Medium" panose="02020603020101020101" pitchFamily="18" charset="-127"/>
-                <a:ea typeface="KoPub돋움체 Light" panose="02020603020101020101"/>
+              <a:rPr lang="ko-KR" altLang="en-US" sz="2008" dirty="0">
+                <a:solidFill>
+                  <a:schemeClr val="tx2">
+                    <a:lumMod val="50000"/>
+                  </a:schemeClr>
+                </a:solidFill>
+                <a:latin typeface="KoPub돋움체 Bold" panose="02020603020101020101" pitchFamily="18" charset="-127"/>
+                <a:ea typeface="KoPub돋움체 Bold" panose="02020603020101020101" pitchFamily="18" charset="-127"/>
               </a:rPr>
               <a:t>추후 계획</a:t>
             </a:r>
             <a:r>
-              <a:rPr lang="en-US" altLang="ko-KR" dirty="0">
-                <a:solidFill>
-                  <a:schemeClr val="tx2">
-                    <a:lumMod val="50000"/>
-                  </a:schemeClr>
-                </a:solidFill>
-                <a:latin typeface="KoPub돋움체 Medium" panose="02020603020101020101" pitchFamily="18" charset="-127"/>
-                <a:ea typeface="KoPub돋움체 Light" panose="02020603020101020101"/>
+              <a:rPr lang="en-US" altLang="ko-KR" sz="2008" dirty="0">
+                <a:solidFill>
+                  <a:schemeClr val="tx2">
+                    <a:lumMod val="50000"/>
+                  </a:schemeClr>
+                </a:solidFill>
+                <a:latin typeface="KoPub돋움체 Bold" panose="02020603020101020101" pitchFamily="18" charset="-127"/>
+                <a:ea typeface="KoPub돋움체 Bold" panose="02020603020101020101" pitchFamily="18" charset="-127"/>
               </a:rPr>
               <a:t>(F/U) </a:t>
             </a:r>
@@ -8522,7 +8531,7 @@
           <p:cNvPr id="22" name="TextBox 21">
             <a:extLst>
               <a:ext uri="{FF2B5EF4-FFF2-40B4-BE49-F238E27FC236}">
-                <a16:creationId xmlns:a16="http://schemas.microsoft.com/office/drawing/2014/main" id="{BC57D6DD-C910-2054-C4EB-9D7E67088B09}"/>
+                <a16:creationId xmlns:a16="http://schemas.microsoft.com/office/drawing/2014/main" id="{A4A13204-A193-A5DC-EC2A-1EBAA4B1A21A}"/>
               </a:ext>
             </a:extLst>
           </p:cNvPr>
@@ -8531,8 +8540,8 @@
         </p:nvSpPr>
         <p:spPr>
           <a:xfrm>
-            <a:off x="310149" y="2334991"/>
-            <a:ext cx="2458815" cy="369332"/>
+            <a:off x="328480" y="2286199"/>
+            <a:ext cx="2434449" cy="401708"/>
           </a:xfrm>
           <a:prstGeom prst="rect">
             <a:avLst/>
@@ -8547,61 +8556,61 @@
           <a:p>
             <a:pPr algn="ctr"/>
             <a:r>
-              <a:rPr lang="en-US" altLang="ko-KR" b="1" dirty="0">
+              <a:rPr lang="en-US" altLang="ko-KR" sz="2008" b="1" dirty="0">
                 <a:solidFill>
                   <a:srgbClr val="000000"/>
                 </a:solidFill>
-                <a:latin typeface="KoPub돋움체 Medium" panose="02020603020101020101" pitchFamily="18" charset="-127"/>
-                <a:ea typeface="KoPub돋움체 Light" panose="02020603020101020101"/>
+                <a:latin typeface="KoPub돋움체 Bold" panose="02020603020101020101" pitchFamily="18" charset="-127"/>
+                <a:ea typeface="KoPub돋움체 Bold" panose="02020603020101020101" pitchFamily="18" charset="-127"/>
               </a:rPr>
               <a:t>ACD </a:t>
             </a:r>
             <a:r>
-              <a:rPr lang="ko-KR" altLang="en-US" b="1" dirty="0">
+              <a:rPr lang="ko-KR" altLang="en-US" sz="2008" b="1" dirty="0">
                 <a:solidFill>
                   <a:srgbClr val="000000"/>
                 </a:solidFill>
-                <a:latin typeface="KoPub돋움체 Medium" panose="02020603020101020101" pitchFamily="18" charset="-127"/>
-                <a:ea typeface="KoPub돋움체 Light" panose="02020603020101020101"/>
+                <a:latin typeface="KoPub돋움체 Bold" panose="02020603020101020101" pitchFamily="18" charset="-127"/>
+                <a:ea typeface="KoPub돋움체 Bold" panose="02020603020101020101" pitchFamily="18" charset="-127"/>
               </a:rPr>
               <a:t>루프 </a:t>
             </a:r>
             <a:r>
-              <a:rPr lang="en-US" altLang="ko-KR" b="1" dirty="0">
+              <a:rPr lang="en-US" altLang="ko-KR" sz="2008" b="1" dirty="0">
                 <a:solidFill>
                   <a:srgbClr val="000000"/>
                 </a:solidFill>
-                <a:latin typeface="KoPub돋움체 Medium" panose="02020603020101020101" pitchFamily="18" charset="-127"/>
-                <a:ea typeface="KoPub돋움체 Light" panose="02020603020101020101"/>
+                <a:latin typeface="KoPub돋움체 Bold" panose="02020603020101020101" pitchFamily="18" charset="-127"/>
+                <a:ea typeface="KoPub돋움체 Bold" panose="02020603020101020101" pitchFamily="18" charset="-127"/>
               </a:rPr>
               <a:t>(</a:t>
             </a:r>
             <a:r>
-              <a:rPr lang="ko-KR" altLang="en-US" b="1" dirty="0">
+              <a:rPr lang="ko-KR" altLang="en-US" sz="2008" b="1" dirty="0">
                 <a:solidFill>
                   <a:srgbClr val="000000"/>
                 </a:solidFill>
-                <a:latin typeface="KoPub돋움체 Medium" panose="02020603020101020101" pitchFamily="18" charset="-127"/>
-                <a:ea typeface="KoPub돋움체 Light" panose="02020603020101020101"/>
+                <a:latin typeface="KoPub돋움체 Bold" panose="02020603020101020101" pitchFamily="18" charset="-127"/>
+                <a:ea typeface="KoPub돋움체 Bold" panose="02020603020101020101" pitchFamily="18" charset="-127"/>
               </a:rPr>
               <a:t>소통 공식</a:t>
             </a:r>
             <a:r>
-              <a:rPr lang="en-US" altLang="ko-KR" b="1" dirty="0">
+              <a:rPr lang="en-US" altLang="ko-KR" sz="2008" b="1" dirty="0">
                 <a:solidFill>
                   <a:srgbClr val="000000"/>
                 </a:solidFill>
-                <a:latin typeface="KoPub돋움체 Medium" panose="02020603020101020101" pitchFamily="18" charset="-127"/>
-                <a:ea typeface="KoPub돋움체 Light" panose="02020603020101020101"/>
+                <a:latin typeface="KoPub돋움체 Bold" panose="02020603020101020101" pitchFamily="18" charset="-127"/>
+                <a:ea typeface="KoPub돋움체 Bold" panose="02020603020101020101" pitchFamily="18" charset="-127"/>
               </a:rPr>
               <a:t>)</a:t>
             </a:r>
-            <a:endParaRPr lang="ko-KR" altLang="en-US" b="1" dirty="0">
+            <a:endParaRPr lang="ko-KR" altLang="en-US" sz="2008" b="1" dirty="0">
               <a:solidFill>
                 <a:srgbClr val="000000"/>
               </a:solidFill>
-              <a:latin typeface="KoPub돋움체 Medium" panose="02020603020101020101" pitchFamily="18" charset="-127"/>
-              <a:ea typeface="KoPub돋움체 Light" panose="02020603020101020101"/>
+              <a:latin typeface="KoPub돋움체 Bold" panose="02020603020101020101" pitchFamily="18" charset="-127"/>
+              <a:ea typeface="KoPub돋움체 Bold" panose="02020603020101020101" pitchFamily="18" charset="-127"/>
             </a:endParaRPr>
           </a:p>
         </p:txBody>
@@ -8611,7 +8620,7 @@
           <p:cNvPr id="11" name="사각형: 둥근 모서리 10">
             <a:extLst>
               <a:ext uri="{FF2B5EF4-FFF2-40B4-BE49-F238E27FC236}">
-                <a16:creationId xmlns:a16="http://schemas.microsoft.com/office/drawing/2014/main" id="{82DFC436-1063-4EC0-8D98-BDC4799C2F86}"/>
+                <a16:creationId xmlns:a16="http://schemas.microsoft.com/office/drawing/2014/main" id="{87279F38-C816-9D79-0FA0-58A333EF22DA}"/>
               </a:ext>
             </a:extLst>
           </p:cNvPr>
@@ -8620,8 +8629,8 @@
         </p:nvSpPr>
         <p:spPr>
           <a:xfrm>
-            <a:off x="3050989" y="3188946"/>
-            <a:ext cx="5779400" cy="1115349"/>
+            <a:off x="3063172" y="3272851"/>
+            <a:ext cx="5802477" cy="1119803"/>
           </a:xfrm>
           <a:prstGeom prst="roundRect">
             <a:avLst>
@@ -8658,9 +8667,9 @@
           <a:lstStyle/>
           <a:p>
             <a:pPr algn="ctr"/>
-            <a:endParaRPr lang="ko-KR" altLang="en-US" sz="5080">
-              <a:latin typeface="KoPub돋움체 Medium" panose="02020603020101020101" pitchFamily="18" charset="-127"/>
-              <a:ea typeface="KoPub돋움체 Light" panose="02020603020101020101"/>
+            <a:endParaRPr lang="ko-KR" altLang="en-US" sz="5422">
+              <a:latin typeface="KoPub돋움체 Bold" panose="02020603020101020101" pitchFamily="18" charset="-127"/>
+              <a:ea typeface="KoPub돋움체 Bold" panose="02020603020101020101" pitchFamily="18" charset="-127"/>
             </a:endParaRPr>
           </a:p>
         </p:txBody>
@@ -8670,7 +8679,7 @@
           <p:cNvPr id="14" name="사각형: 둥근 모서리 13">
             <a:extLst>
               <a:ext uri="{FF2B5EF4-FFF2-40B4-BE49-F238E27FC236}">
-                <a16:creationId xmlns:a16="http://schemas.microsoft.com/office/drawing/2014/main" id="{8D3E48C3-10D6-461B-92DA-40EFC6B4C91E}"/>
+                <a16:creationId xmlns:a16="http://schemas.microsoft.com/office/drawing/2014/main" id="{EF50C946-D81A-C95C-C32D-0FEEDFBD288F}"/>
               </a:ext>
             </a:extLst>
           </p:cNvPr>
@@ -8679,8 +8688,8 @@
         </p:nvSpPr>
         <p:spPr>
           <a:xfrm>
-            <a:off x="208326" y="3188946"/>
-            <a:ext cx="2788897" cy="1115349"/>
+            <a:off x="209158" y="3272851"/>
+            <a:ext cx="2800033" cy="1119803"/>
           </a:xfrm>
           <a:prstGeom prst="roundRect">
             <a:avLst>
@@ -8715,9 +8724,9 @@
           <a:lstStyle/>
           <a:p>
             <a:pPr algn="ctr"/>
-            <a:endParaRPr lang="ko-KR" altLang="en-US" sz="5080">
-              <a:latin typeface="KoPub돋움체 Medium" panose="02020603020101020101" pitchFamily="18" charset="-127"/>
-              <a:ea typeface="KoPub돋움체 Light" panose="02020603020101020101"/>
+            <a:endParaRPr lang="ko-KR" altLang="en-US" sz="5422">
+              <a:latin typeface="KoPub돋움체 Bold" panose="02020603020101020101" pitchFamily="18" charset="-127"/>
+              <a:ea typeface="KoPub돋움체 Bold" panose="02020603020101020101" pitchFamily="18" charset="-127"/>
             </a:endParaRPr>
           </a:p>
         </p:txBody>
@@ -8727,7 +8736,7 @@
           <p:cNvPr id="16" name="TextBox 15">
             <a:extLst>
               <a:ext uri="{FF2B5EF4-FFF2-40B4-BE49-F238E27FC236}">
-                <a16:creationId xmlns:a16="http://schemas.microsoft.com/office/drawing/2014/main" id="{17C117C8-2C5F-42B0-8015-D651D05B1BD8}"/>
+                <a16:creationId xmlns:a16="http://schemas.microsoft.com/office/drawing/2014/main" id="{3B0A40B7-649B-9456-DB83-79AD110D9E70}"/>
               </a:ext>
             </a:extLst>
           </p:cNvPr>
@@ -8736,8 +8745,8 @@
         </p:nvSpPr>
         <p:spPr>
           <a:xfrm>
-            <a:off x="310149" y="3561954"/>
-            <a:ext cx="2361544" cy="369332"/>
+            <a:off x="385419" y="3647348"/>
+            <a:ext cx="2222910" cy="401708"/>
           </a:xfrm>
           <a:prstGeom prst="rect">
             <a:avLst/>
@@ -8752,51 +8761,51 @@
           <a:p>
             <a:pPr algn="ctr"/>
             <a:r>
-              <a:rPr lang="ko-KR" altLang="en-US" b="1" dirty="0">
+              <a:rPr lang="ko-KR" altLang="en-US" sz="2008" b="1" dirty="0">
                 <a:solidFill>
                   <a:srgbClr val="000000"/>
                 </a:solidFill>
-                <a:latin typeface="KoPub돋움체 Medium" panose="02020603020101020101" pitchFamily="18" charset="-127"/>
-                <a:ea typeface="KoPub돋움체 Light" panose="02020603020101020101"/>
+                <a:latin typeface="KoPub돋움체 Bold" panose="02020603020101020101" pitchFamily="18" charset="-127"/>
+                <a:ea typeface="KoPub돋움체 Bold" panose="02020603020101020101" pitchFamily="18" charset="-127"/>
               </a:rPr>
               <a:t>트리아제 </a:t>
             </a:r>
             <a:r>
-              <a:rPr lang="en-US" altLang="ko-KR" b="1" dirty="0">
+              <a:rPr lang="en-US" altLang="ko-KR" sz="2008" b="1" dirty="0">
                 <a:solidFill>
                   <a:srgbClr val="000000"/>
                 </a:solidFill>
-                <a:latin typeface="KoPub돋움체 Medium" panose="02020603020101020101" pitchFamily="18" charset="-127"/>
-                <a:ea typeface="KoPub돋움체 Light" panose="02020603020101020101"/>
+                <a:latin typeface="KoPub돋움체 Bold" panose="02020603020101020101" pitchFamily="18" charset="-127"/>
+                <a:ea typeface="KoPub돋움체 Bold" panose="02020603020101020101" pitchFamily="18" charset="-127"/>
               </a:rPr>
               <a:t>(</a:t>
             </a:r>
             <a:r>
-              <a:rPr lang="ko-KR" altLang="en-US" b="1" dirty="0" err="1">
+              <a:rPr lang="ko-KR" altLang="en-US" sz="2008" b="1" dirty="0" err="1">
                 <a:solidFill>
                   <a:srgbClr val="000000"/>
                 </a:solidFill>
-                <a:latin typeface="KoPub돋움체 Medium" panose="02020603020101020101" pitchFamily="18" charset="-127"/>
-                <a:ea typeface="KoPub돋움체 Light" panose="02020603020101020101"/>
+                <a:latin typeface="KoPub돋움체 Bold" panose="02020603020101020101" pitchFamily="18" charset="-127"/>
+                <a:ea typeface="KoPub돋움체 Bold" panose="02020603020101020101" pitchFamily="18" charset="-127"/>
               </a:rPr>
               <a:t>골든타임</a:t>
             </a:r>
             <a:r>
-              <a:rPr lang="en-US" altLang="ko-KR" b="1" dirty="0">
+              <a:rPr lang="en-US" altLang="ko-KR" sz="2008" b="1" dirty="0">
                 <a:solidFill>
                   <a:srgbClr val="000000"/>
                 </a:solidFill>
-                <a:latin typeface="KoPub돋움체 Medium" panose="02020603020101020101" pitchFamily="18" charset="-127"/>
-                <a:ea typeface="KoPub돋움체 Light" panose="02020603020101020101"/>
+                <a:latin typeface="KoPub돋움체 Bold" panose="02020603020101020101" pitchFamily="18" charset="-127"/>
+                <a:ea typeface="KoPub돋움체 Bold" panose="02020603020101020101" pitchFamily="18" charset="-127"/>
               </a:rPr>
               <a:t>)</a:t>
             </a:r>
-            <a:endParaRPr lang="ko-KR" altLang="en-US" b="1" dirty="0">
+            <a:endParaRPr lang="ko-KR" altLang="en-US" sz="2008" b="1" dirty="0">
               <a:solidFill>
                 <a:srgbClr val="000000"/>
               </a:solidFill>
-              <a:latin typeface="KoPub돋움체 Medium" panose="02020603020101020101" pitchFamily="18" charset="-127"/>
-              <a:ea typeface="KoPub돋움체 Light" panose="02020603020101020101"/>
+              <a:latin typeface="KoPub돋움체 Bold" panose="02020603020101020101" pitchFamily="18" charset="-127"/>
+              <a:ea typeface="KoPub돋움체 Bold" panose="02020603020101020101" pitchFamily="18" charset="-127"/>
             </a:endParaRPr>
           </a:p>
         </p:txBody>
@@ -8806,7 +8815,7 @@
           <p:cNvPr id="2" name="직사각형 1">
             <a:extLst>
               <a:ext uri="{FF2B5EF4-FFF2-40B4-BE49-F238E27FC236}">
-                <a16:creationId xmlns:a16="http://schemas.microsoft.com/office/drawing/2014/main" id="{CF6CD54F-7897-4496-8903-172CACA01316}"/>
+                <a16:creationId xmlns:a16="http://schemas.microsoft.com/office/drawing/2014/main" id="{6A60492E-2CAA-2CEA-0F9F-6A0E871BCF82}"/>
               </a:ext>
             </a:extLst>
           </p:cNvPr>
@@ -8815,8 +8824,8 @@
         </p:nvSpPr>
         <p:spPr>
           <a:xfrm>
-            <a:off x="3161346" y="3284955"/>
-            <a:ext cx="5468122" cy="923330"/>
+            <a:off x="3173969" y="3322893"/>
+            <a:ext cx="5489957" cy="1019719"/>
           </a:xfrm>
           <a:prstGeom prst="rect">
             <a:avLst/>
@@ -8829,24 +8838,27 @@
           <a:lstStyle/>
           <a:p>
             <a:r>
-              <a:rPr lang="ko-KR" altLang="en-US" dirty="0">
-                <a:ea typeface="KoPub돋움체 Light" panose="02020603020101020101"/>
+              <a:rPr lang="ko-KR" altLang="en-US" sz="2008" dirty="0">
+                <a:latin typeface="KoPub돋움체 Bold" panose="02020603020101020101" pitchFamily="18" charset="-127"/>
+                <a:ea typeface="KoPub돋움체 Bold" panose="02020603020101020101" pitchFamily="18" charset="-127"/>
               </a:rPr>
               <a:t>빨강 10분(응급): 환자 안전 직결 (유선 병행)</a:t>
             </a:r>
           </a:p>
           <a:p>
             <a:r>
-              <a:rPr lang="ko-KR" altLang="en-US" dirty="0">
-                <a:ea typeface="KoPub돋움체 Light" panose="02020603020101020101"/>
+              <a:rPr lang="ko-KR" altLang="en-US" sz="2008" dirty="0">
+                <a:latin typeface="KoPub돋움체 Bold" panose="02020603020101020101" pitchFamily="18" charset="-127"/>
+                <a:ea typeface="KoPub돋움체 Bold" panose="02020603020101020101" pitchFamily="18" charset="-127"/>
               </a:rPr>
               <a:t>초록 4시간(우선): 당일 내 우선 처리 필요</a:t>
             </a:r>
           </a:p>
           <a:p>
             <a:r>
-              <a:rPr lang="ko-KR" altLang="en-US" dirty="0">
-                <a:ea typeface="KoPub돋움체 Light" panose="02020603020101020101"/>
+              <a:rPr lang="ko-KR" altLang="en-US" sz="2008" dirty="0">
+                <a:latin typeface="KoPub돋움체 Bold" panose="02020603020101020101" pitchFamily="18" charset="-127"/>
+                <a:ea typeface="KoPub돋움체 Bold" panose="02020603020101020101" pitchFamily="18" charset="-127"/>
               </a:rPr>
               <a:t>노랑 12시간(루틴): 근무 흐름 내 안정적 처리</a:t>
             </a:r>
@@ -8856,7 +8868,7 @@
     </p:spTree>
     <p:extLst>
       <p:ext uri="{BB962C8B-B14F-4D97-AF65-F5344CB8AC3E}">
-        <p14:creationId xmlns:p14="http://schemas.microsoft.com/office/powerpoint/2010/main" val="43619267"/>
+        <p14:creationId xmlns:p14="http://schemas.microsoft.com/office/powerpoint/2010/main" val="3027655305"/>
       </p:ext>
     </p:extLst>
   </p:cSld>
@@ -8874,7 +8886,7 @@
         <p:cNvPr id="1" name="">
           <a:extLst>
             <a:ext uri="{FF2B5EF4-FFF2-40B4-BE49-F238E27FC236}">
-              <a16:creationId xmlns:a16="http://schemas.microsoft.com/office/drawing/2014/main" id="{DFA44891-DB0B-9038-5B25-629A4C227FFF}"/>
+              <a16:creationId xmlns:a16="http://schemas.microsoft.com/office/drawing/2014/main" id="{5DB74D8D-035E-BA30-B848-D58E8B353B0C}"/>
             </a:ext>
           </a:extLst>
         </p:cNvPr>
@@ -8894,7 +8906,7 @@
           <p:cNvPr id="3" name="TextBox 2">
             <a:extLst>
               <a:ext uri="{FF2B5EF4-FFF2-40B4-BE49-F238E27FC236}">
-                <a16:creationId xmlns:a16="http://schemas.microsoft.com/office/drawing/2014/main" id="{CEABBF7A-4383-D72B-A05E-B56FEE94992E}"/>
+                <a16:creationId xmlns:a16="http://schemas.microsoft.com/office/drawing/2014/main" id="{679BBEB5-41B8-764B-1737-47D94EE051C8}"/>
               </a:ext>
             </a:extLst>
           </p:cNvPr>
@@ -8903,8 +8915,8 @@
         </p:nvSpPr>
         <p:spPr>
           <a:xfrm>
-            <a:off x="101992" y="184592"/>
-            <a:ext cx="3494648" cy="309444"/>
+            <a:off x="102399" y="175060"/>
+            <a:ext cx="3508602" cy="310680"/>
           </a:xfrm>
           <a:prstGeom prst="rect">
             <a:avLst/>
@@ -8918,21 +8930,21 @@
           <a:lstStyle/>
           <a:p>
             <a:r>
-              <a:rPr lang="ko-KR" altLang="en-US" sz="1411" spc="-31" dirty="0">
+              <a:rPr lang="ko-KR" altLang="en-US" sz="1417" b="1" spc="-31" dirty="0">
                 <a:latin typeface="KoPub돋움체 Light" panose="02020603020101020101" pitchFamily="18" charset="-127"/>
                 <a:ea typeface="KoPub돋움체 Light" panose="02020603020101020101"/>
               </a:rPr>
               <a:t>순천향대학교 천안병원 </a:t>
             </a:r>
             <a:r>
-              <a:rPr lang="en-US" altLang="ko-KR" sz="1411" spc="-31" dirty="0">
+              <a:rPr lang="en-US" altLang="ko-KR" sz="1417" b="1" spc="-31" dirty="0">
                 <a:latin typeface="KoPub돋움체 Light" panose="02020603020101020101" pitchFamily="18" charset="-127"/>
                 <a:ea typeface="KoPub돋움체 Light" panose="02020603020101020101"/>
               </a:rPr>
               <a:t>| </a:t>
             </a:r>
             <a:r>
-              <a:rPr lang="ko-KR" altLang="en-US" sz="1411" spc="-31" dirty="0">
+              <a:rPr lang="ko-KR" altLang="en-US" sz="1417" b="1" spc="-31" dirty="0">
                 <a:latin typeface="KoPub돋움체 Light" panose="02020603020101020101" pitchFamily="18" charset="-127"/>
                 <a:ea typeface="KoPub돋움체 Light" panose="02020603020101020101"/>
               </a:rPr>
@@ -8946,7 +8958,7 @@
           <p:cNvPr id="6" name="사각형: 둥근 모서리 5">
             <a:extLst>
               <a:ext uri="{FF2B5EF4-FFF2-40B4-BE49-F238E27FC236}">
-                <a16:creationId xmlns:a16="http://schemas.microsoft.com/office/drawing/2014/main" id="{CE2932C1-2A00-0758-2BBA-833E022443FD}"/>
+                <a16:creationId xmlns:a16="http://schemas.microsoft.com/office/drawing/2014/main" id="{4D6727A4-6D55-685E-00FF-8BC803B1A2DC}"/>
               </a:ext>
             </a:extLst>
           </p:cNvPr>
@@ -8955,8 +8967,8 @@
         </p:nvSpPr>
         <p:spPr>
           <a:xfrm>
-            <a:off x="3050989" y="1198923"/>
-            <a:ext cx="5779400" cy="651443"/>
+            <a:off x="3063172" y="844256"/>
+            <a:ext cx="5802477" cy="826102"/>
           </a:xfrm>
           <a:prstGeom prst="roundRect">
             <a:avLst>
@@ -8993,9 +9005,9 @@
           <a:lstStyle/>
           <a:p>
             <a:pPr algn="ctr"/>
-            <a:endParaRPr lang="ko-KR" altLang="en-US" sz="5080">
-              <a:latin typeface="KoPub돋움체 Medium" panose="02020603020101020101" pitchFamily="18" charset="-127"/>
-              <a:ea typeface="KoPub돋움체 Light" panose="02020603020101020101"/>
+            <a:endParaRPr lang="ko-KR" altLang="en-US" sz="5422">
+              <a:latin typeface="KoPub돋움체 Bold" panose="02020603020101020101" pitchFamily="18" charset="-127"/>
+              <a:ea typeface="KoPub돋움체 Bold" panose="02020603020101020101" pitchFamily="18" charset="-127"/>
             </a:endParaRPr>
           </a:p>
         </p:txBody>
@@ -9005,7 +9017,7 @@
           <p:cNvPr id="8" name="사각형: 둥근 모서리 7">
             <a:extLst>
               <a:ext uri="{FF2B5EF4-FFF2-40B4-BE49-F238E27FC236}">
-                <a16:creationId xmlns:a16="http://schemas.microsoft.com/office/drawing/2014/main" id="{1548A1BD-8723-9A88-C7D3-66F55BF5E173}"/>
+                <a16:creationId xmlns:a16="http://schemas.microsoft.com/office/drawing/2014/main" id="{74238D9D-1397-2DAC-CBAA-1A9A01222468}"/>
               </a:ext>
             </a:extLst>
           </p:cNvPr>
@@ -9014,8 +9026,8 @@
         </p:nvSpPr>
         <p:spPr>
           <a:xfrm>
-            <a:off x="208326" y="1198923"/>
-            <a:ext cx="2788897" cy="651443"/>
+            <a:off x="209158" y="844256"/>
+            <a:ext cx="2800033" cy="826102"/>
           </a:xfrm>
           <a:prstGeom prst="roundRect">
             <a:avLst>
@@ -9050,9 +9062,9 @@
           <a:lstStyle/>
           <a:p>
             <a:pPr algn="ctr"/>
-            <a:endParaRPr lang="ko-KR" altLang="en-US" sz="5080">
-              <a:latin typeface="KoPub돋움체 Medium" panose="02020603020101020101" pitchFamily="18" charset="-127"/>
-              <a:ea typeface="KoPub돋움체 Light" panose="02020603020101020101"/>
+            <a:endParaRPr lang="ko-KR" altLang="en-US" sz="5422">
+              <a:latin typeface="KoPub돋움체 Bold" panose="02020603020101020101" pitchFamily="18" charset="-127"/>
+              <a:ea typeface="KoPub돋움체 Bold" panose="02020603020101020101" pitchFamily="18" charset="-127"/>
             </a:endParaRPr>
           </a:p>
         </p:txBody>
@@ -9062,7 +9074,7 @@
           <p:cNvPr id="9" name="TextBox 8">
             <a:extLst>
               <a:ext uri="{FF2B5EF4-FFF2-40B4-BE49-F238E27FC236}">
-                <a16:creationId xmlns:a16="http://schemas.microsoft.com/office/drawing/2014/main" id="{790F75E6-5F6B-E96E-73A6-26A5843998CD}"/>
+                <a16:creationId xmlns:a16="http://schemas.microsoft.com/office/drawing/2014/main" id="{55E09FBB-AC8E-B11E-C081-F8FC4C0BBDDA}"/>
               </a:ext>
             </a:extLst>
           </p:cNvPr>
@@ -9071,8 +9083,8 @@
         </p:nvSpPr>
         <p:spPr>
           <a:xfrm>
-            <a:off x="3161347" y="1339978"/>
-            <a:ext cx="5119836" cy="369332"/>
+            <a:off x="3173970" y="1056452"/>
+            <a:ext cx="5140280" cy="401708"/>
           </a:xfrm>
           <a:prstGeom prst="rect">
             <a:avLst/>
@@ -9086,157 +9098,157 @@
           <a:lstStyle/>
           <a:p>
             <a:r>
-              <a:rPr lang="en-US" altLang="ko-KR" dirty="0">
-                <a:solidFill>
-                  <a:schemeClr val="tx2">
-                    <a:lumMod val="50000"/>
-                  </a:schemeClr>
-                </a:solidFill>
-                <a:latin typeface="KoPub돋움체 Medium" panose="02020603020101020101" pitchFamily="18" charset="-127"/>
-                <a:ea typeface="KoPub돋움체 Light" panose="02020603020101020101"/>
+              <a:rPr lang="en-US" altLang="ko-KR" sz="2008" dirty="0">
+                <a:solidFill>
+                  <a:schemeClr val="tx2">
+                    <a:lumMod val="50000"/>
+                  </a:schemeClr>
+                </a:solidFill>
+                <a:latin typeface="KoPub돋움체 Bold" panose="02020603020101020101" pitchFamily="18" charset="-127"/>
+                <a:ea typeface="KoPub돋움체 Bold" panose="02020603020101020101" pitchFamily="18" charset="-127"/>
               </a:rPr>
               <a:t>Case ID : </a:t>
             </a:r>
             <a:r>
-              <a:rPr lang="ko-KR" altLang="en-US" dirty="0">
-                <a:solidFill>
-                  <a:schemeClr val="tx2">
-                    <a:lumMod val="50000"/>
-                  </a:schemeClr>
-                </a:solidFill>
-                <a:latin typeface="KoPub돋움체 Medium" panose="02020603020101020101" pitchFamily="18" charset="-127"/>
-                <a:ea typeface="KoPub돋움체 Light" panose="02020603020101020101"/>
+              <a:rPr lang="ko-KR" altLang="en-US" sz="2008" dirty="0">
+                <a:solidFill>
+                  <a:schemeClr val="tx2">
+                    <a:lumMod val="50000"/>
+                  </a:schemeClr>
+                </a:solidFill>
+                <a:latin typeface="KoPub돋움체 Bold" panose="02020603020101020101" pitchFamily="18" charset="-127"/>
+                <a:ea typeface="KoPub돋움체 Bold" panose="02020603020101020101" pitchFamily="18" charset="-127"/>
               </a:rPr>
               <a:t>병실</a:t>
             </a:r>
             <a:r>
-              <a:rPr lang="en-US" altLang="ko-KR" dirty="0">
-                <a:solidFill>
-                  <a:schemeClr val="tx2">
-                    <a:lumMod val="50000"/>
-                  </a:schemeClr>
-                </a:solidFill>
-                <a:latin typeface="KoPub돋움체 Medium" panose="02020603020101020101" pitchFamily="18" charset="-127"/>
-                <a:ea typeface="KoPub돋움체 Light" panose="02020603020101020101"/>
+              <a:rPr lang="en-US" altLang="ko-KR" sz="2008" dirty="0">
+                <a:solidFill>
+                  <a:schemeClr val="tx2">
+                    <a:lumMod val="50000"/>
+                  </a:schemeClr>
+                </a:solidFill>
+                <a:latin typeface="KoPub돋움체 Bold" panose="02020603020101020101" pitchFamily="18" charset="-127"/>
+                <a:ea typeface="KoPub돋움체 Bold" panose="02020603020101020101" pitchFamily="18" charset="-127"/>
               </a:rPr>
               <a:t>-</a:t>
             </a:r>
             <a:r>
-              <a:rPr lang="ko-KR" altLang="en-US" dirty="0">
-                <a:solidFill>
-                  <a:schemeClr val="tx2">
-                    <a:lumMod val="50000"/>
-                  </a:schemeClr>
-                </a:solidFill>
-                <a:latin typeface="KoPub돋움체 Medium" panose="02020603020101020101" pitchFamily="18" charset="-127"/>
-                <a:ea typeface="KoPub돋움체 Light" panose="02020603020101020101"/>
+              <a:rPr lang="ko-KR" altLang="en-US" sz="2008" dirty="0">
+                <a:solidFill>
+                  <a:schemeClr val="tx2">
+                    <a:lumMod val="50000"/>
+                  </a:schemeClr>
+                </a:solidFill>
+                <a:latin typeface="KoPub돋움체 Bold" panose="02020603020101020101" pitchFamily="18" charset="-127"/>
+                <a:ea typeface="KoPub돋움체 Bold" panose="02020603020101020101" pitchFamily="18" charset="-127"/>
               </a:rPr>
               <a:t>등록</a:t>
             </a:r>
             <a:r>
-              <a:rPr lang="en-US" altLang="ko-KR" dirty="0">
-                <a:solidFill>
-                  <a:schemeClr val="tx2">
-                    <a:lumMod val="50000"/>
-                  </a:schemeClr>
-                </a:solidFill>
-                <a:latin typeface="KoPub돋움체 Medium" panose="02020603020101020101" pitchFamily="18" charset="-127"/>
-                <a:ea typeface="KoPub돋움체 Light" panose="02020603020101020101"/>
+              <a:rPr lang="en-US" altLang="ko-KR" sz="2008" dirty="0">
+                <a:solidFill>
+                  <a:schemeClr val="tx2">
+                    <a:lumMod val="50000"/>
+                  </a:schemeClr>
+                </a:solidFill>
+                <a:latin typeface="KoPub돋움체 Bold" panose="02020603020101020101" pitchFamily="18" charset="-127"/>
+                <a:ea typeface="KoPub돋움체 Bold" panose="02020603020101020101" pitchFamily="18" charset="-127"/>
               </a:rPr>
               <a:t>-</a:t>
             </a:r>
             <a:r>
-              <a:rPr lang="ko-KR" altLang="en-US" dirty="0">
-                <a:solidFill>
-                  <a:schemeClr val="tx2">
-                    <a:lumMod val="50000"/>
-                  </a:schemeClr>
-                </a:solidFill>
-                <a:latin typeface="KoPub돋움체 Medium" panose="02020603020101020101" pitchFamily="18" charset="-127"/>
-                <a:ea typeface="KoPub돋움체 Light" panose="02020603020101020101"/>
+              <a:rPr lang="ko-KR" altLang="en-US" sz="2008" dirty="0">
+                <a:solidFill>
+                  <a:schemeClr val="tx2">
+                    <a:lumMod val="50000"/>
+                  </a:schemeClr>
+                </a:solidFill>
+                <a:latin typeface="KoPub돋움체 Bold" panose="02020603020101020101" pitchFamily="18" charset="-127"/>
+                <a:ea typeface="KoPub돋움체 Bold" panose="02020603020101020101" pitchFamily="18" charset="-127"/>
               </a:rPr>
               <a:t>성함</a:t>
             </a:r>
             <a:r>
-              <a:rPr lang="en-US" altLang="ko-KR" dirty="0">
-                <a:solidFill>
-                  <a:schemeClr val="tx2">
-                    <a:lumMod val="50000"/>
-                  </a:schemeClr>
-                </a:solidFill>
-                <a:latin typeface="KoPub돋움체 Medium" panose="02020603020101020101" pitchFamily="18" charset="-127"/>
-                <a:ea typeface="KoPub돋움체 Light" panose="02020603020101020101"/>
+              <a:rPr lang="en-US" altLang="ko-KR" sz="2008" dirty="0">
+                <a:solidFill>
+                  <a:schemeClr val="tx2">
+                    <a:lumMod val="50000"/>
+                  </a:schemeClr>
+                </a:solidFill>
+                <a:latin typeface="KoPub돋움체 Bold" panose="02020603020101020101" pitchFamily="18" charset="-127"/>
+                <a:ea typeface="KoPub돋움체 Bold" panose="02020603020101020101" pitchFamily="18" charset="-127"/>
               </a:rPr>
               <a:t>-</a:t>
             </a:r>
             <a:r>
-              <a:rPr lang="ko-KR" altLang="en-US" dirty="0">
-                <a:solidFill>
-                  <a:schemeClr val="tx2">
-                    <a:lumMod val="50000"/>
-                  </a:schemeClr>
-                </a:solidFill>
-                <a:latin typeface="KoPub돋움체 Medium" panose="02020603020101020101" pitchFamily="18" charset="-127"/>
-                <a:ea typeface="KoPub돋움체 Light" panose="02020603020101020101"/>
+              <a:rPr lang="ko-KR" altLang="en-US" sz="2008" dirty="0">
+                <a:solidFill>
+                  <a:schemeClr val="tx2">
+                    <a:lumMod val="50000"/>
+                  </a:schemeClr>
+                </a:solidFill>
+                <a:latin typeface="KoPub돋움체 Bold" panose="02020603020101020101" pitchFamily="18" charset="-127"/>
+                <a:ea typeface="KoPub돋움체 Bold" panose="02020603020101020101" pitchFamily="18" charset="-127"/>
               </a:rPr>
               <a:t>교수</a:t>
             </a:r>
             <a:r>
-              <a:rPr lang="en-US" altLang="ko-KR" dirty="0">
-                <a:solidFill>
-                  <a:schemeClr val="tx2">
-                    <a:lumMod val="50000"/>
-                  </a:schemeClr>
-                </a:solidFill>
-                <a:latin typeface="KoPub돋움체 Medium" panose="02020603020101020101" pitchFamily="18" charset="-127"/>
-                <a:ea typeface="KoPub돋움체 Light" panose="02020603020101020101"/>
+              <a:rPr lang="en-US" altLang="ko-KR" sz="2008" dirty="0">
+                <a:solidFill>
+                  <a:schemeClr val="tx2">
+                    <a:lumMod val="50000"/>
+                  </a:schemeClr>
+                </a:solidFill>
+                <a:latin typeface="KoPub돋움체 Bold" panose="02020603020101020101" pitchFamily="18" charset="-127"/>
+                <a:ea typeface="KoPub돋움체 Bold" panose="02020603020101020101" pitchFamily="18" charset="-127"/>
               </a:rPr>
               <a:t>-</a:t>
             </a:r>
             <a:r>
-              <a:rPr lang="ko-KR" altLang="en-US" dirty="0">
-                <a:solidFill>
-                  <a:schemeClr val="tx2">
-                    <a:lumMod val="50000"/>
-                  </a:schemeClr>
-                </a:solidFill>
-                <a:latin typeface="KoPub돋움체 Medium" panose="02020603020101020101" pitchFamily="18" charset="-127"/>
-                <a:ea typeface="KoPub돋움체 Light" panose="02020603020101020101"/>
+              <a:rPr lang="ko-KR" altLang="en-US" sz="2008" dirty="0">
+                <a:solidFill>
+                  <a:schemeClr val="tx2">
+                    <a:lumMod val="50000"/>
+                  </a:schemeClr>
+                </a:solidFill>
+                <a:latin typeface="KoPub돋움체 Bold" panose="02020603020101020101" pitchFamily="18" charset="-127"/>
+                <a:ea typeface="KoPub돋움체 Bold" panose="02020603020101020101" pitchFamily="18" charset="-127"/>
               </a:rPr>
               <a:t>월일</a:t>
             </a:r>
             <a:r>
-              <a:rPr lang="en-US" altLang="ko-KR" dirty="0">
-                <a:solidFill>
-                  <a:schemeClr val="tx2">
-                    <a:lumMod val="50000"/>
-                  </a:schemeClr>
-                </a:solidFill>
-                <a:latin typeface="KoPub돋움체 Medium" panose="02020603020101020101" pitchFamily="18" charset="-127"/>
-                <a:ea typeface="KoPub돋움체 Light" panose="02020603020101020101"/>
+              <a:rPr lang="en-US" altLang="ko-KR" sz="2008" dirty="0">
+                <a:solidFill>
+                  <a:schemeClr val="tx2">
+                    <a:lumMod val="50000"/>
+                  </a:schemeClr>
+                </a:solidFill>
+                <a:latin typeface="KoPub돋움체 Bold" panose="02020603020101020101" pitchFamily="18" charset="-127"/>
+                <a:ea typeface="KoPub돋움체 Bold" panose="02020603020101020101" pitchFamily="18" charset="-127"/>
               </a:rPr>
               <a:t>-</a:t>
             </a:r>
             <a:r>
-              <a:rPr lang="ko-KR" altLang="en-US" dirty="0">
-                <a:solidFill>
-                  <a:schemeClr val="tx2">
-                    <a:lumMod val="50000"/>
-                  </a:schemeClr>
-                </a:solidFill>
-                <a:latin typeface="KoPub돋움체 Medium" panose="02020603020101020101" pitchFamily="18" charset="-127"/>
-                <a:ea typeface="KoPub돋움체 Light" panose="02020603020101020101"/>
+              <a:rPr lang="ko-KR" altLang="en-US" sz="2008" dirty="0">
+                <a:solidFill>
+                  <a:schemeClr val="tx2">
+                    <a:lumMod val="50000"/>
+                  </a:schemeClr>
+                </a:solidFill>
+                <a:latin typeface="KoPub돋움체 Bold" panose="02020603020101020101" pitchFamily="18" charset="-127"/>
+                <a:ea typeface="KoPub돋움체 Bold" panose="02020603020101020101" pitchFamily="18" charset="-127"/>
               </a:rPr>
               <a:t>시간</a:t>
             </a:r>
-            <a:endParaRPr lang="en-US" altLang="ko-KR" dirty="0">
+            <a:endParaRPr lang="en-US" altLang="ko-KR" sz="2008" dirty="0">
               <a:solidFill>
                 <a:schemeClr val="tx2">
                   <a:lumMod val="50000"/>
                 </a:schemeClr>
               </a:solidFill>
-              <a:latin typeface="KoPub돋움체 Medium" panose="02020603020101020101" pitchFamily="18" charset="-127"/>
-              <a:ea typeface="KoPub돋움체 Light" panose="02020603020101020101"/>
+              <a:latin typeface="KoPub돋움체 Bold" panose="02020603020101020101" pitchFamily="18" charset="-127"/>
+              <a:ea typeface="KoPub돋움체 Bold" panose="02020603020101020101" pitchFamily="18" charset="-127"/>
             </a:endParaRPr>
           </a:p>
         </p:txBody>
@@ -9246,7 +9258,7 @@
           <p:cNvPr id="12" name="TextBox 11">
             <a:extLst>
               <a:ext uri="{FF2B5EF4-FFF2-40B4-BE49-F238E27FC236}">
-                <a16:creationId xmlns:a16="http://schemas.microsoft.com/office/drawing/2014/main" id="{8FA07B63-4519-67D4-9E1C-D241B9FC298D}"/>
+                <a16:creationId xmlns:a16="http://schemas.microsoft.com/office/drawing/2014/main" id="{0AD7D40E-04A8-841A-D44C-53867795FBDD}"/>
               </a:ext>
             </a:extLst>
           </p:cNvPr>
@@ -9255,8 +9267,8 @@
         </p:nvSpPr>
         <p:spPr>
           <a:xfrm>
-            <a:off x="310149" y="1339978"/>
-            <a:ext cx="2052165" cy="369332"/>
+            <a:off x="288052" y="1071903"/>
+            <a:ext cx="2107031" cy="401708"/>
           </a:xfrm>
           <a:prstGeom prst="rect">
             <a:avLst/>
@@ -9271,22 +9283,22 @@
           <a:p>
             <a:pPr algn="ctr"/>
             <a:r>
-              <a:rPr lang="en-US" altLang="ko-KR" b="1" dirty="0">
+              <a:rPr lang="en-US" altLang="ko-KR" sz="2008" b="1" dirty="0">
                 <a:solidFill>
                   <a:srgbClr val="000000"/>
                 </a:solidFill>
-                <a:latin typeface="KoPub돋움체 Medium" panose="02020603020101020101" pitchFamily="18" charset="-127"/>
-                <a:ea typeface="KoPub돋움체 Light" panose="02020603020101020101"/>
+                <a:latin typeface="KoPub돋움체 Bold" panose="02020603020101020101" pitchFamily="18" charset="-127"/>
+                <a:ea typeface="KoPub돋움체 Bold" panose="02020603020101020101" pitchFamily="18" charset="-127"/>
               </a:rPr>
               <a:t>[ID] Case ID </a:t>
             </a:r>
             <a:r>
-              <a:rPr lang="ko-KR" altLang="en-US" b="1" dirty="0">
+              <a:rPr lang="ko-KR" altLang="en-US" sz="2008" b="1" dirty="0">
                 <a:solidFill>
                   <a:srgbClr val="000000"/>
                 </a:solidFill>
-                <a:latin typeface="KoPub돋움체 Medium" panose="02020603020101020101" pitchFamily="18" charset="-127"/>
-                <a:ea typeface="KoPub돋움체 Light" panose="02020603020101020101"/>
+                <a:latin typeface="KoPub돋움체 Bold" panose="02020603020101020101" pitchFamily="18" charset="-127"/>
+                <a:ea typeface="KoPub돋움체 Bold" panose="02020603020101020101" pitchFamily="18" charset="-127"/>
               </a:rPr>
               <a:t>표준</a:t>
             </a:r>
@@ -9298,7 +9310,7 @@
           <p:cNvPr id="13" name="사각형: 둥근 모서리 12">
             <a:extLst>
               <a:ext uri="{FF2B5EF4-FFF2-40B4-BE49-F238E27FC236}">
-                <a16:creationId xmlns:a16="http://schemas.microsoft.com/office/drawing/2014/main" id="{C32F48BA-C495-9A9B-C63F-E8A7AEFC92D4}"/>
+                <a16:creationId xmlns:a16="http://schemas.microsoft.com/office/drawing/2014/main" id="{717EB569-FCE7-75FC-8383-A174D48EDC60}"/>
               </a:ext>
             </a:extLst>
           </p:cNvPr>
@@ -9307,8 +9319,8 @@
         </p:nvSpPr>
         <p:spPr>
           <a:xfrm>
-            <a:off x="3050989" y="1961982"/>
-            <a:ext cx="5779400" cy="1115349"/>
+            <a:off x="3063172" y="1777571"/>
+            <a:ext cx="5802477" cy="1388063"/>
           </a:xfrm>
           <a:prstGeom prst="roundRect">
             <a:avLst>
@@ -9345,9 +9357,9 @@
           <a:lstStyle/>
           <a:p>
             <a:pPr algn="ctr"/>
-            <a:endParaRPr lang="ko-KR" altLang="en-US" sz="5080">
-              <a:latin typeface="KoPub돋움체 Medium" panose="02020603020101020101" pitchFamily="18" charset="-127"/>
-              <a:ea typeface="KoPub돋움체 Light" panose="02020603020101020101"/>
+            <a:endParaRPr lang="ko-KR" altLang="en-US" sz="5422">
+              <a:latin typeface="KoPub돋움체 Bold" panose="02020603020101020101" pitchFamily="18" charset="-127"/>
+              <a:ea typeface="KoPub돋움체 Bold" panose="02020603020101020101" pitchFamily="18" charset="-127"/>
             </a:endParaRPr>
           </a:p>
         </p:txBody>
@@ -9357,7 +9369,7 @@
           <p:cNvPr id="15" name="사각형: 둥근 모서리 14">
             <a:extLst>
               <a:ext uri="{FF2B5EF4-FFF2-40B4-BE49-F238E27FC236}">
-                <a16:creationId xmlns:a16="http://schemas.microsoft.com/office/drawing/2014/main" id="{6B78A99E-9E40-784B-95AB-E8BEFD430BA4}"/>
+                <a16:creationId xmlns:a16="http://schemas.microsoft.com/office/drawing/2014/main" id="{6573DA53-307F-F20B-6317-5D3EC8647526}"/>
               </a:ext>
             </a:extLst>
           </p:cNvPr>
@@ -9366,8 +9378,8 @@
         </p:nvSpPr>
         <p:spPr>
           <a:xfrm>
-            <a:off x="208326" y="1961983"/>
-            <a:ext cx="2788897" cy="1115349"/>
+            <a:off x="209158" y="1777572"/>
+            <a:ext cx="2800033" cy="1388063"/>
           </a:xfrm>
           <a:prstGeom prst="roundRect">
             <a:avLst>
@@ -9402,9 +9414,9 @@
           <a:lstStyle/>
           <a:p>
             <a:pPr algn="ctr"/>
-            <a:endParaRPr lang="ko-KR" altLang="en-US" sz="5080">
-              <a:latin typeface="KoPub돋움체 Medium" panose="02020603020101020101" pitchFamily="18" charset="-127"/>
-              <a:ea typeface="KoPub돋움체 Light" panose="02020603020101020101"/>
+            <a:endParaRPr lang="ko-KR" altLang="en-US" sz="5422">
+              <a:latin typeface="KoPub돋움체 Bold" panose="02020603020101020101" pitchFamily="18" charset="-127"/>
+              <a:ea typeface="KoPub돋움체 Bold" panose="02020603020101020101" pitchFamily="18" charset="-127"/>
             </a:endParaRPr>
           </a:p>
         </p:txBody>
@@ -9414,7 +9426,7 @@
           <p:cNvPr id="20" name="TextBox 19">
             <a:extLst>
               <a:ext uri="{FF2B5EF4-FFF2-40B4-BE49-F238E27FC236}">
-                <a16:creationId xmlns:a16="http://schemas.microsoft.com/office/drawing/2014/main" id="{7905CC26-D0D7-0E58-1BF6-6BB32A2663D4}"/>
+                <a16:creationId xmlns:a16="http://schemas.microsoft.com/office/drawing/2014/main" id="{74405F9C-37DD-B6EF-8D4C-B6C282CE4605}"/>
               </a:ext>
             </a:extLst>
           </p:cNvPr>
@@ -9423,8 +9435,8 @@
         </p:nvSpPr>
         <p:spPr>
           <a:xfrm>
-            <a:off x="3161347" y="2057991"/>
-            <a:ext cx="5119836" cy="923330"/>
+            <a:off x="3173970" y="1961743"/>
+            <a:ext cx="5678063" cy="1019719"/>
           </a:xfrm>
           <a:prstGeom prst="rect">
             <a:avLst/>
@@ -9438,270 +9450,270 @@
           <a:lstStyle/>
           <a:p>
             <a:r>
-              <a:rPr lang="en-US" altLang="ko-KR" dirty="0">
-                <a:solidFill>
-                  <a:schemeClr val="tx2">
-                    <a:lumMod val="50000"/>
-                  </a:schemeClr>
-                </a:solidFill>
-                <a:latin typeface="KoPub돋움체 Medium" panose="02020603020101020101" pitchFamily="18" charset="-127"/>
-                <a:ea typeface="KoPub돋움체 Light" panose="02020603020101020101"/>
+              <a:rPr lang="en-US" altLang="ko-KR" sz="2008" dirty="0">
+                <a:solidFill>
+                  <a:schemeClr val="tx2">
+                    <a:lumMod val="50000"/>
+                  </a:schemeClr>
+                </a:solidFill>
+                <a:latin typeface="KoPub돋움체 Bold" panose="02020603020101020101" pitchFamily="18" charset="-127"/>
+                <a:ea typeface="KoPub돋움체 Bold" panose="02020603020101020101" pitchFamily="18" charset="-127"/>
               </a:rPr>
               <a:t>[A] </a:t>
             </a:r>
             <a:r>
-              <a:rPr lang="ko-KR" altLang="en-US" dirty="0">
-                <a:solidFill>
-                  <a:schemeClr val="tx2">
-                    <a:lumMod val="50000"/>
-                  </a:schemeClr>
-                </a:solidFill>
-                <a:latin typeface="KoPub돋움체 Medium" panose="02020603020101020101" pitchFamily="18" charset="-127"/>
-                <a:ea typeface="KoPub돋움체 Light" panose="02020603020101020101"/>
+              <a:rPr lang="ko-KR" altLang="en-US" sz="2008" dirty="0">
+                <a:solidFill>
+                  <a:schemeClr val="tx2">
+                    <a:lumMod val="50000"/>
+                  </a:schemeClr>
+                </a:solidFill>
+                <a:latin typeface="KoPub돋움체 Bold" panose="02020603020101020101" pitchFamily="18" charset="-127"/>
+                <a:ea typeface="KoPub돋움체 Bold" panose="02020603020101020101" pitchFamily="18" charset="-127"/>
               </a:rPr>
               <a:t>보고</a:t>
             </a:r>
             <a:r>
-              <a:rPr lang="en-US" altLang="ko-KR" dirty="0">
-                <a:solidFill>
-                  <a:schemeClr val="tx2">
-                    <a:lumMod val="50000"/>
-                  </a:schemeClr>
-                </a:solidFill>
-                <a:latin typeface="KoPub돋움체 Medium" panose="02020603020101020101" pitchFamily="18" charset="-127"/>
-                <a:ea typeface="KoPub돋움체 Light" panose="02020603020101020101"/>
+              <a:rPr lang="en-US" altLang="ko-KR" sz="2008" dirty="0">
+                <a:solidFill>
+                  <a:schemeClr val="tx2">
+                    <a:lumMod val="50000"/>
+                  </a:schemeClr>
+                </a:solidFill>
+                <a:latin typeface="KoPub돋움체 Bold" panose="02020603020101020101" pitchFamily="18" charset="-127"/>
+                <a:ea typeface="KoPub돋움체 Bold" panose="02020603020101020101" pitchFamily="18" charset="-127"/>
               </a:rPr>
               <a:t>: </a:t>
             </a:r>
             <a:r>
-              <a:rPr lang="ko-KR" altLang="en-US" dirty="0">
-                <a:solidFill>
-                  <a:schemeClr val="tx2">
-                    <a:lumMod val="50000"/>
-                  </a:schemeClr>
-                </a:solidFill>
-                <a:latin typeface="KoPub돋움체 Medium" panose="02020603020101020101" pitchFamily="18" charset="-127"/>
-                <a:ea typeface="KoPub돋움체 Light" panose="02020603020101020101"/>
+              <a:rPr lang="ko-KR" altLang="en-US" sz="2008" dirty="0">
+                <a:solidFill>
+                  <a:schemeClr val="tx2">
+                    <a:lumMod val="50000"/>
+                  </a:schemeClr>
+                </a:solidFill>
+                <a:latin typeface="KoPub돋움체 Bold" panose="02020603020101020101" pitchFamily="18" charset="-127"/>
+                <a:ea typeface="KoPub돋움체 Bold" panose="02020603020101020101" pitchFamily="18" charset="-127"/>
               </a:rPr>
               <a:t>지금 상태 </a:t>
             </a:r>
             <a:r>
-              <a:rPr lang="en-US" altLang="ko-KR" dirty="0">
-                <a:solidFill>
-                  <a:schemeClr val="tx2">
-                    <a:lumMod val="50000"/>
-                  </a:schemeClr>
-                </a:solidFill>
-                <a:latin typeface="KoPub돋움체 Medium" panose="02020603020101020101" pitchFamily="18" charset="-127"/>
-                <a:ea typeface="KoPub돋움체 Light" panose="02020603020101020101"/>
+              <a:rPr lang="en-US" altLang="ko-KR" sz="2008" dirty="0">
+                <a:solidFill>
+                  <a:schemeClr val="tx2">
+                    <a:lumMod val="50000"/>
+                  </a:schemeClr>
+                </a:solidFill>
+                <a:latin typeface="KoPub돋움체 Bold" panose="02020603020101020101" pitchFamily="18" charset="-127"/>
+                <a:ea typeface="KoPub돋움체 Bold" panose="02020603020101020101" pitchFamily="18" charset="-127"/>
               </a:rPr>
               <a:t>/ </a:t>
             </a:r>
             <a:r>
-              <a:rPr lang="ko-KR" altLang="en-US" dirty="0">
-                <a:solidFill>
-                  <a:schemeClr val="tx2">
-                    <a:lumMod val="50000"/>
-                  </a:schemeClr>
-                </a:solidFill>
-                <a:latin typeface="KoPub돋움체 Medium" panose="02020603020101020101" pitchFamily="18" charset="-127"/>
-                <a:ea typeface="KoPub돋움체 Light" panose="02020603020101020101"/>
+              <a:rPr lang="ko-KR" altLang="en-US" sz="2008" dirty="0">
+                <a:solidFill>
+                  <a:schemeClr val="tx2">
+                    <a:lumMod val="50000"/>
+                  </a:schemeClr>
+                </a:solidFill>
+                <a:latin typeface="KoPub돋움체 Bold" panose="02020603020101020101" pitchFamily="18" charset="-127"/>
+                <a:ea typeface="KoPub돋움체 Bold" panose="02020603020101020101" pitchFamily="18" charset="-127"/>
               </a:rPr>
               <a:t>근거 </a:t>
             </a:r>
             <a:r>
-              <a:rPr lang="en-US" altLang="ko-KR" dirty="0">
-                <a:solidFill>
-                  <a:schemeClr val="tx2">
-                    <a:lumMod val="50000"/>
-                  </a:schemeClr>
-                </a:solidFill>
-                <a:latin typeface="KoPub돋움체 Medium" panose="02020603020101020101" pitchFamily="18" charset="-127"/>
-                <a:ea typeface="KoPub돋움체 Light" panose="02020603020101020101"/>
+              <a:rPr lang="en-US" altLang="ko-KR" sz="2008" dirty="0">
+                <a:solidFill>
+                  <a:schemeClr val="tx2">
+                    <a:lumMod val="50000"/>
+                  </a:schemeClr>
+                </a:solidFill>
+                <a:latin typeface="KoPub돋움체 Bold" panose="02020603020101020101" pitchFamily="18" charset="-127"/>
+                <a:ea typeface="KoPub돋움체 Bold" panose="02020603020101020101" pitchFamily="18" charset="-127"/>
               </a:rPr>
               <a:t>/ </a:t>
             </a:r>
             <a:r>
-              <a:rPr lang="ko-KR" altLang="en-US" dirty="0">
-                <a:solidFill>
-                  <a:schemeClr val="tx2">
-                    <a:lumMod val="50000"/>
-                  </a:schemeClr>
-                </a:solidFill>
-                <a:latin typeface="KoPub돋움체 Medium" panose="02020603020101020101" pitchFamily="18" charset="-127"/>
-                <a:ea typeface="KoPub돋움체 Light" panose="02020603020101020101"/>
+              <a:rPr lang="ko-KR" altLang="en-US" sz="2008" dirty="0">
+                <a:solidFill>
+                  <a:schemeClr val="tx2">
+                    <a:lumMod val="50000"/>
+                  </a:schemeClr>
+                </a:solidFill>
+                <a:latin typeface="KoPub돋움체 Bold" panose="02020603020101020101" pitchFamily="18" charset="-127"/>
+                <a:ea typeface="KoPub돋움체 Bold" panose="02020603020101020101" pitchFamily="18" charset="-127"/>
               </a:rPr>
               <a:t>요청사항 </a:t>
             </a:r>
             <a:r>
-              <a:rPr lang="en-US" altLang="ko-KR" dirty="0">
-                <a:solidFill>
-                  <a:schemeClr val="tx2">
-                    <a:lumMod val="50000"/>
-                  </a:schemeClr>
-                </a:solidFill>
-                <a:latin typeface="KoPub돋움체 Medium" panose="02020603020101020101" pitchFamily="18" charset="-127"/>
-                <a:ea typeface="KoPub돋움체 Light" panose="02020603020101020101"/>
+              <a:rPr lang="en-US" altLang="ko-KR" sz="2008" dirty="0">
+                <a:solidFill>
+                  <a:schemeClr val="tx2">
+                    <a:lumMod val="50000"/>
+                  </a:schemeClr>
+                </a:solidFill>
+                <a:latin typeface="KoPub돋움체 Bold" panose="02020603020101020101" pitchFamily="18" charset="-127"/>
+                <a:ea typeface="KoPub돋움체 Bold" panose="02020603020101020101" pitchFamily="18" charset="-127"/>
               </a:rPr>
               <a:t>+ 10·4·12 </a:t>
             </a:r>
           </a:p>
           <a:p>
             <a:r>
-              <a:rPr lang="en-US" altLang="ko-KR" dirty="0">
-                <a:solidFill>
-                  <a:schemeClr val="tx2">
-                    <a:lumMod val="50000"/>
-                  </a:schemeClr>
-                </a:solidFill>
-                <a:latin typeface="KoPub돋움체 Medium" panose="02020603020101020101" pitchFamily="18" charset="-127"/>
-                <a:ea typeface="KoPub돋움체 Light" panose="02020603020101020101"/>
+              <a:rPr lang="en-US" altLang="ko-KR" sz="2008" dirty="0">
+                <a:solidFill>
+                  <a:schemeClr val="tx2">
+                    <a:lumMod val="50000"/>
+                  </a:schemeClr>
+                </a:solidFill>
+                <a:latin typeface="KoPub돋움체 Bold" panose="02020603020101020101" pitchFamily="18" charset="-127"/>
+                <a:ea typeface="KoPub돋움체 Bold" panose="02020603020101020101" pitchFamily="18" charset="-127"/>
               </a:rPr>
               <a:t>[C] </a:t>
             </a:r>
             <a:r>
-              <a:rPr lang="ko-KR" altLang="en-US" dirty="0">
-                <a:solidFill>
-                  <a:schemeClr val="tx2">
-                    <a:lumMod val="50000"/>
-                  </a:schemeClr>
-                </a:solidFill>
-                <a:latin typeface="KoPub돋움체 Medium" panose="02020603020101020101" pitchFamily="18" charset="-127"/>
-                <a:ea typeface="KoPub돋움체 Light" panose="02020603020101020101"/>
+              <a:rPr lang="ko-KR" altLang="en-US" sz="2008" dirty="0">
+                <a:solidFill>
+                  <a:schemeClr val="tx2">
+                    <a:lumMod val="50000"/>
+                  </a:schemeClr>
+                </a:solidFill>
+                <a:latin typeface="KoPub돋움체 Bold" panose="02020603020101020101" pitchFamily="18" charset="-127"/>
+                <a:ea typeface="KoPub돋움체 Bold" panose="02020603020101020101" pitchFamily="18" charset="-127"/>
               </a:rPr>
               <a:t>상황</a:t>
             </a:r>
             <a:r>
-              <a:rPr lang="en-US" altLang="ko-KR" dirty="0">
-                <a:solidFill>
-                  <a:schemeClr val="tx2">
-                    <a:lumMod val="50000"/>
-                  </a:schemeClr>
-                </a:solidFill>
-                <a:latin typeface="KoPub돋움체 Medium" panose="02020603020101020101" pitchFamily="18" charset="-127"/>
-                <a:ea typeface="KoPub돋움체 Light" panose="02020603020101020101"/>
+              <a:rPr lang="en-US" altLang="ko-KR" sz="2008" dirty="0">
+                <a:solidFill>
+                  <a:schemeClr val="tx2">
+                    <a:lumMod val="50000"/>
+                  </a:schemeClr>
+                </a:solidFill>
+                <a:latin typeface="KoPub돋움체 Bold" panose="02020603020101020101" pitchFamily="18" charset="-127"/>
+                <a:ea typeface="KoPub돋움체 Bold" panose="02020603020101020101" pitchFamily="18" charset="-127"/>
               </a:rPr>
               <a:t>: PA </a:t>
             </a:r>
             <a:r>
-              <a:rPr lang="ko-KR" altLang="en-US" dirty="0">
-                <a:solidFill>
-                  <a:schemeClr val="tx2">
-                    <a:lumMod val="50000"/>
-                  </a:schemeClr>
-                </a:solidFill>
-                <a:latin typeface="KoPub돋움체 Medium" panose="02020603020101020101" pitchFamily="18" charset="-127"/>
-                <a:ea typeface="KoPub돋움체 Light" panose="02020603020101020101"/>
+              <a:rPr lang="ko-KR" altLang="en-US" sz="2008" dirty="0">
+                <a:solidFill>
+                  <a:schemeClr val="tx2">
+                    <a:lumMod val="50000"/>
+                  </a:schemeClr>
+                </a:solidFill>
+                <a:latin typeface="KoPub돋움체 Bold" panose="02020603020101020101" pitchFamily="18" charset="-127"/>
+                <a:ea typeface="KoPub돋움체 Bold" panose="02020603020101020101" pitchFamily="18" charset="-127"/>
               </a:rPr>
               <a:t>조치 예정 사유 및 시간 공유 </a:t>
             </a:r>
           </a:p>
           <a:p>
             <a:r>
-              <a:rPr lang="en-US" altLang="ko-KR" dirty="0">
-                <a:solidFill>
-                  <a:schemeClr val="tx2">
-                    <a:lumMod val="50000"/>
-                  </a:schemeClr>
-                </a:solidFill>
-                <a:latin typeface="KoPub돋움체 Medium" panose="02020603020101020101" pitchFamily="18" charset="-127"/>
-                <a:ea typeface="KoPub돋움체 Light" panose="02020603020101020101"/>
+              <a:rPr lang="en-US" altLang="ko-KR" sz="2008" dirty="0">
+                <a:solidFill>
+                  <a:schemeClr val="tx2">
+                    <a:lumMod val="50000"/>
+                  </a:schemeClr>
+                </a:solidFill>
+                <a:latin typeface="KoPub돋움체 Bold" panose="02020603020101020101" pitchFamily="18" charset="-127"/>
+                <a:ea typeface="KoPub돋움체 Bold" panose="02020603020101020101" pitchFamily="18" charset="-127"/>
               </a:rPr>
               <a:t>[D] </a:t>
             </a:r>
             <a:r>
-              <a:rPr lang="ko-KR" altLang="en-US" dirty="0">
-                <a:solidFill>
-                  <a:schemeClr val="tx2">
-                    <a:lumMod val="50000"/>
-                  </a:schemeClr>
-                </a:solidFill>
-                <a:latin typeface="KoPub돋움체 Medium" panose="02020603020101020101" pitchFamily="18" charset="-127"/>
-                <a:ea typeface="KoPub돋움체 Light" panose="02020603020101020101"/>
+              <a:rPr lang="ko-KR" altLang="en-US" sz="2008" dirty="0">
+                <a:solidFill>
+                  <a:schemeClr val="tx2">
+                    <a:lumMod val="50000"/>
+                  </a:schemeClr>
+                </a:solidFill>
+                <a:latin typeface="KoPub돋움체 Bold" panose="02020603020101020101" pitchFamily="18" charset="-127"/>
+                <a:ea typeface="KoPub돋움체 Bold" panose="02020603020101020101" pitchFamily="18" charset="-127"/>
               </a:rPr>
               <a:t>완료</a:t>
             </a:r>
             <a:r>
-              <a:rPr lang="en-US" altLang="ko-KR" dirty="0">
-                <a:solidFill>
-                  <a:schemeClr val="tx2">
-                    <a:lumMod val="50000"/>
-                  </a:schemeClr>
-                </a:solidFill>
-                <a:latin typeface="KoPub돋움체 Medium" panose="02020603020101020101" pitchFamily="18" charset="-127"/>
-                <a:ea typeface="KoPub돋움체 Light" panose="02020603020101020101"/>
+              <a:rPr lang="en-US" altLang="ko-KR" sz="2008" dirty="0">
+                <a:solidFill>
+                  <a:schemeClr val="tx2">
+                    <a:lumMod val="50000"/>
+                  </a:schemeClr>
+                </a:solidFill>
+                <a:latin typeface="KoPub돋움체 Bold" panose="02020603020101020101" pitchFamily="18" charset="-127"/>
+                <a:ea typeface="KoPub돋움체 Bold" panose="02020603020101020101" pitchFamily="18" charset="-127"/>
               </a:rPr>
               <a:t>: </a:t>
             </a:r>
             <a:r>
-              <a:rPr lang="ko-KR" altLang="en-US" dirty="0">
-                <a:solidFill>
-                  <a:schemeClr val="tx2">
-                    <a:lumMod val="50000"/>
-                  </a:schemeClr>
-                </a:solidFill>
-                <a:latin typeface="KoPub돋움체 Medium" panose="02020603020101020101" pitchFamily="18" charset="-127"/>
-                <a:ea typeface="KoPub돋움체 Light" panose="02020603020101020101"/>
+              <a:rPr lang="ko-KR" altLang="en-US" sz="2008" dirty="0">
+                <a:solidFill>
+                  <a:schemeClr val="tx2">
+                    <a:lumMod val="50000"/>
+                  </a:schemeClr>
+                </a:solidFill>
+                <a:latin typeface="KoPub돋움체 Bold" panose="02020603020101020101" pitchFamily="18" charset="-127"/>
+                <a:ea typeface="KoPub돋움체 Bold" panose="02020603020101020101" pitchFamily="18" charset="-127"/>
               </a:rPr>
               <a:t>결과 </a:t>
             </a:r>
             <a:r>
-              <a:rPr lang="en-US" altLang="ko-KR" dirty="0">
-                <a:solidFill>
-                  <a:schemeClr val="tx2">
-                    <a:lumMod val="50000"/>
-                  </a:schemeClr>
-                </a:solidFill>
-                <a:latin typeface="KoPub돋움체 Medium" panose="02020603020101020101" pitchFamily="18" charset="-127"/>
-                <a:ea typeface="KoPub돋움체 Light" panose="02020603020101020101"/>
+              <a:rPr lang="en-US" altLang="ko-KR" sz="2008" dirty="0">
+                <a:solidFill>
+                  <a:schemeClr val="tx2">
+                    <a:lumMod val="50000"/>
+                  </a:schemeClr>
+                </a:solidFill>
+                <a:latin typeface="KoPub돋움체 Bold" panose="02020603020101020101" pitchFamily="18" charset="-127"/>
+                <a:ea typeface="KoPub돋움체 Bold" panose="02020603020101020101" pitchFamily="18" charset="-127"/>
               </a:rPr>
               <a:t>/ </a:t>
             </a:r>
             <a:r>
-              <a:rPr lang="ko-KR" altLang="en-US" dirty="0">
-                <a:solidFill>
-                  <a:schemeClr val="tx2">
-                    <a:lumMod val="50000"/>
-                  </a:schemeClr>
-                </a:solidFill>
-                <a:latin typeface="KoPub돋움체 Medium" panose="02020603020101020101" pitchFamily="18" charset="-127"/>
-                <a:ea typeface="KoPub돋움체 Light" panose="02020603020101020101"/>
+              <a:rPr lang="ko-KR" altLang="en-US" sz="2008" dirty="0">
+                <a:solidFill>
+                  <a:schemeClr val="tx2">
+                    <a:lumMod val="50000"/>
+                  </a:schemeClr>
+                </a:solidFill>
+                <a:latin typeface="KoPub돋움체 Bold" panose="02020603020101020101" pitchFamily="18" charset="-127"/>
+                <a:ea typeface="KoPub돋움체 Bold" panose="02020603020101020101" pitchFamily="18" charset="-127"/>
               </a:rPr>
               <a:t>현재 상태 </a:t>
             </a:r>
             <a:r>
-              <a:rPr lang="en-US" altLang="ko-KR" dirty="0">
-                <a:solidFill>
-                  <a:schemeClr val="tx2">
-                    <a:lumMod val="50000"/>
-                  </a:schemeClr>
-                </a:solidFill>
-                <a:latin typeface="KoPub돋움체 Medium" panose="02020603020101020101" pitchFamily="18" charset="-127"/>
-                <a:ea typeface="KoPub돋움체 Light" panose="02020603020101020101"/>
+              <a:rPr lang="en-US" altLang="ko-KR" sz="2008" dirty="0">
+                <a:solidFill>
+                  <a:schemeClr val="tx2">
+                    <a:lumMod val="50000"/>
+                  </a:schemeClr>
+                </a:solidFill>
+                <a:latin typeface="KoPub돋움체 Bold" panose="02020603020101020101" pitchFamily="18" charset="-127"/>
+                <a:ea typeface="KoPub돋움체 Bold" panose="02020603020101020101" pitchFamily="18" charset="-127"/>
               </a:rPr>
               <a:t>/ </a:t>
             </a:r>
             <a:r>
-              <a:rPr lang="ko-KR" altLang="en-US" dirty="0">
-                <a:solidFill>
-                  <a:schemeClr val="tx2">
-                    <a:lumMod val="50000"/>
-                  </a:schemeClr>
-                </a:solidFill>
-                <a:latin typeface="KoPub돋움체 Medium" panose="02020603020101020101" pitchFamily="18" charset="-127"/>
-                <a:ea typeface="KoPub돋움체 Light" panose="02020603020101020101"/>
+              <a:rPr lang="ko-KR" altLang="en-US" sz="2008" dirty="0">
+                <a:solidFill>
+                  <a:schemeClr val="tx2">
+                    <a:lumMod val="50000"/>
+                  </a:schemeClr>
+                </a:solidFill>
+                <a:latin typeface="KoPub돋움체 Bold" panose="02020603020101020101" pitchFamily="18" charset="-127"/>
+                <a:ea typeface="KoPub돋움체 Bold" panose="02020603020101020101" pitchFamily="18" charset="-127"/>
               </a:rPr>
               <a:t>추후 계획</a:t>
             </a:r>
             <a:r>
-              <a:rPr lang="en-US" altLang="ko-KR" dirty="0">
-                <a:solidFill>
-                  <a:schemeClr val="tx2">
-                    <a:lumMod val="50000"/>
-                  </a:schemeClr>
-                </a:solidFill>
-                <a:latin typeface="KoPub돋움체 Medium" panose="02020603020101020101" pitchFamily="18" charset="-127"/>
-                <a:ea typeface="KoPub돋움체 Light" panose="02020603020101020101"/>
+              <a:rPr lang="en-US" altLang="ko-KR" sz="2008" dirty="0">
+                <a:solidFill>
+                  <a:schemeClr val="tx2">
+                    <a:lumMod val="50000"/>
+                  </a:schemeClr>
+                </a:solidFill>
+                <a:latin typeface="KoPub돋움체 Bold" panose="02020603020101020101" pitchFamily="18" charset="-127"/>
+                <a:ea typeface="KoPub돋움체 Bold" panose="02020603020101020101" pitchFamily="18" charset="-127"/>
               </a:rPr>
               <a:t>(F/U) </a:t>
             </a:r>
@@ -9713,7 +9725,7 @@
           <p:cNvPr id="22" name="TextBox 21">
             <a:extLst>
               <a:ext uri="{FF2B5EF4-FFF2-40B4-BE49-F238E27FC236}">
-                <a16:creationId xmlns:a16="http://schemas.microsoft.com/office/drawing/2014/main" id="{BC57D6DD-C910-2054-C4EB-9D7E67088B09}"/>
+                <a16:creationId xmlns:a16="http://schemas.microsoft.com/office/drawing/2014/main" id="{414EF717-4675-CE86-C31E-D52B8B36062A}"/>
               </a:ext>
             </a:extLst>
           </p:cNvPr>
@@ -9722,8 +9734,8 @@
         </p:nvSpPr>
         <p:spPr>
           <a:xfrm>
-            <a:off x="310149" y="2334991"/>
-            <a:ext cx="2458815" cy="369332"/>
+            <a:off x="328480" y="2286199"/>
+            <a:ext cx="2434449" cy="401708"/>
           </a:xfrm>
           <a:prstGeom prst="rect">
             <a:avLst/>
@@ -9738,61 +9750,61 @@
           <a:p>
             <a:pPr algn="ctr"/>
             <a:r>
-              <a:rPr lang="en-US" altLang="ko-KR" b="1" dirty="0">
+              <a:rPr lang="en-US" altLang="ko-KR" sz="2008" b="1" dirty="0">
                 <a:solidFill>
                   <a:srgbClr val="000000"/>
                 </a:solidFill>
-                <a:latin typeface="KoPub돋움체 Medium" panose="02020603020101020101" pitchFamily="18" charset="-127"/>
-                <a:ea typeface="KoPub돋움체 Light" panose="02020603020101020101"/>
+                <a:latin typeface="KoPub돋움체 Bold" panose="02020603020101020101" pitchFamily="18" charset="-127"/>
+                <a:ea typeface="KoPub돋움체 Bold" panose="02020603020101020101" pitchFamily="18" charset="-127"/>
               </a:rPr>
               <a:t>ACD </a:t>
             </a:r>
             <a:r>
-              <a:rPr lang="ko-KR" altLang="en-US" b="1" dirty="0">
+              <a:rPr lang="ko-KR" altLang="en-US" sz="2008" b="1" dirty="0">
                 <a:solidFill>
                   <a:srgbClr val="000000"/>
                 </a:solidFill>
-                <a:latin typeface="KoPub돋움체 Medium" panose="02020603020101020101" pitchFamily="18" charset="-127"/>
-                <a:ea typeface="KoPub돋움체 Light" panose="02020603020101020101"/>
+                <a:latin typeface="KoPub돋움체 Bold" panose="02020603020101020101" pitchFamily="18" charset="-127"/>
+                <a:ea typeface="KoPub돋움체 Bold" panose="02020603020101020101" pitchFamily="18" charset="-127"/>
               </a:rPr>
               <a:t>루프 </a:t>
             </a:r>
             <a:r>
-              <a:rPr lang="en-US" altLang="ko-KR" b="1" dirty="0">
+              <a:rPr lang="en-US" altLang="ko-KR" sz="2008" b="1" dirty="0">
                 <a:solidFill>
                   <a:srgbClr val="000000"/>
                 </a:solidFill>
-                <a:latin typeface="KoPub돋움체 Medium" panose="02020603020101020101" pitchFamily="18" charset="-127"/>
-                <a:ea typeface="KoPub돋움체 Light" panose="02020603020101020101"/>
+                <a:latin typeface="KoPub돋움체 Bold" panose="02020603020101020101" pitchFamily="18" charset="-127"/>
+                <a:ea typeface="KoPub돋움체 Bold" panose="02020603020101020101" pitchFamily="18" charset="-127"/>
               </a:rPr>
               <a:t>(</a:t>
             </a:r>
             <a:r>
-              <a:rPr lang="ko-KR" altLang="en-US" b="1" dirty="0">
+              <a:rPr lang="ko-KR" altLang="en-US" sz="2008" b="1" dirty="0">
                 <a:solidFill>
                   <a:srgbClr val="000000"/>
                 </a:solidFill>
-                <a:latin typeface="KoPub돋움체 Medium" panose="02020603020101020101" pitchFamily="18" charset="-127"/>
-                <a:ea typeface="KoPub돋움체 Light" panose="02020603020101020101"/>
+                <a:latin typeface="KoPub돋움체 Bold" panose="02020603020101020101" pitchFamily="18" charset="-127"/>
+                <a:ea typeface="KoPub돋움체 Bold" panose="02020603020101020101" pitchFamily="18" charset="-127"/>
               </a:rPr>
               <a:t>소통 공식</a:t>
             </a:r>
             <a:r>
-              <a:rPr lang="en-US" altLang="ko-KR" b="1" dirty="0">
+              <a:rPr lang="en-US" altLang="ko-KR" sz="2008" b="1" dirty="0">
                 <a:solidFill>
                   <a:srgbClr val="000000"/>
                 </a:solidFill>
-                <a:latin typeface="KoPub돋움체 Medium" panose="02020603020101020101" pitchFamily="18" charset="-127"/>
-                <a:ea typeface="KoPub돋움체 Light" panose="02020603020101020101"/>
+                <a:latin typeface="KoPub돋움체 Bold" panose="02020603020101020101" pitchFamily="18" charset="-127"/>
+                <a:ea typeface="KoPub돋움체 Bold" panose="02020603020101020101" pitchFamily="18" charset="-127"/>
               </a:rPr>
               <a:t>)</a:t>
             </a:r>
-            <a:endParaRPr lang="ko-KR" altLang="en-US" b="1" dirty="0">
+            <a:endParaRPr lang="ko-KR" altLang="en-US" sz="2008" b="1" dirty="0">
               <a:solidFill>
                 <a:srgbClr val="000000"/>
               </a:solidFill>
-              <a:latin typeface="KoPub돋움체 Medium" panose="02020603020101020101" pitchFamily="18" charset="-127"/>
-              <a:ea typeface="KoPub돋움체 Light" panose="02020603020101020101"/>
+              <a:latin typeface="KoPub돋움체 Bold" panose="02020603020101020101" pitchFamily="18" charset="-127"/>
+              <a:ea typeface="KoPub돋움체 Bold" panose="02020603020101020101" pitchFamily="18" charset="-127"/>
             </a:endParaRPr>
           </a:p>
         </p:txBody>
@@ -9802,7 +9814,7 @@
           <p:cNvPr id="11" name="사각형: 둥근 모서리 10">
             <a:extLst>
               <a:ext uri="{FF2B5EF4-FFF2-40B4-BE49-F238E27FC236}">
-                <a16:creationId xmlns:a16="http://schemas.microsoft.com/office/drawing/2014/main" id="{82DFC436-1063-4EC0-8D98-BDC4799C2F86}"/>
+                <a16:creationId xmlns:a16="http://schemas.microsoft.com/office/drawing/2014/main" id="{AB286B42-C47F-19F0-7220-AB50E630A158}"/>
               </a:ext>
             </a:extLst>
           </p:cNvPr>
@@ -9811,8 +9823,8 @@
         </p:nvSpPr>
         <p:spPr>
           <a:xfrm>
-            <a:off x="3050989" y="3188946"/>
-            <a:ext cx="5779400" cy="1115349"/>
+            <a:off x="3063172" y="3272851"/>
+            <a:ext cx="5802477" cy="1119803"/>
           </a:xfrm>
           <a:prstGeom prst="roundRect">
             <a:avLst>
@@ -9849,9 +9861,9 @@
           <a:lstStyle/>
           <a:p>
             <a:pPr algn="ctr"/>
-            <a:endParaRPr lang="ko-KR" altLang="en-US" sz="5080">
-              <a:latin typeface="KoPub돋움체 Medium" panose="02020603020101020101" pitchFamily="18" charset="-127"/>
-              <a:ea typeface="KoPub돋움체 Light" panose="02020603020101020101"/>
+            <a:endParaRPr lang="ko-KR" altLang="en-US" sz="5422">
+              <a:latin typeface="KoPub돋움체 Bold" panose="02020603020101020101" pitchFamily="18" charset="-127"/>
+              <a:ea typeface="KoPub돋움체 Bold" panose="02020603020101020101" pitchFamily="18" charset="-127"/>
             </a:endParaRPr>
           </a:p>
         </p:txBody>
@@ -9861,7 +9873,7 @@
           <p:cNvPr id="14" name="사각형: 둥근 모서리 13">
             <a:extLst>
               <a:ext uri="{FF2B5EF4-FFF2-40B4-BE49-F238E27FC236}">
-                <a16:creationId xmlns:a16="http://schemas.microsoft.com/office/drawing/2014/main" id="{8D3E48C3-10D6-461B-92DA-40EFC6B4C91E}"/>
+                <a16:creationId xmlns:a16="http://schemas.microsoft.com/office/drawing/2014/main" id="{92F748ED-162D-6D89-AB91-73D139506D62}"/>
               </a:ext>
             </a:extLst>
           </p:cNvPr>
@@ -9870,8 +9882,8 @@
         </p:nvSpPr>
         <p:spPr>
           <a:xfrm>
-            <a:off x="208326" y="3188946"/>
-            <a:ext cx="2788897" cy="1115349"/>
+            <a:off x="209158" y="3272851"/>
+            <a:ext cx="2800033" cy="1119803"/>
           </a:xfrm>
           <a:prstGeom prst="roundRect">
             <a:avLst>
@@ -9906,9 +9918,9 @@
           <a:lstStyle/>
           <a:p>
             <a:pPr algn="ctr"/>
-            <a:endParaRPr lang="ko-KR" altLang="en-US" sz="5080">
-              <a:latin typeface="KoPub돋움체 Medium" panose="02020603020101020101" pitchFamily="18" charset="-127"/>
-              <a:ea typeface="KoPub돋움체 Light" panose="02020603020101020101"/>
+            <a:endParaRPr lang="ko-KR" altLang="en-US" sz="5422">
+              <a:latin typeface="KoPub돋움체 Bold" panose="02020603020101020101" pitchFamily="18" charset="-127"/>
+              <a:ea typeface="KoPub돋움체 Bold" panose="02020603020101020101" pitchFamily="18" charset="-127"/>
             </a:endParaRPr>
           </a:p>
         </p:txBody>
@@ -9918,7 +9930,7 @@
           <p:cNvPr id="16" name="TextBox 15">
             <a:extLst>
               <a:ext uri="{FF2B5EF4-FFF2-40B4-BE49-F238E27FC236}">
-                <a16:creationId xmlns:a16="http://schemas.microsoft.com/office/drawing/2014/main" id="{17C117C8-2C5F-42B0-8015-D651D05B1BD8}"/>
+                <a16:creationId xmlns:a16="http://schemas.microsoft.com/office/drawing/2014/main" id="{82982FCD-AC3B-0A25-9F6B-553E635960E3}"/>
               </a:ext>
             </a:extLst>
           </p:cNvPr>
@@ -9927,8 +9939,8 @@
         </p:nvSpPr>
         <p:spPr>
           <a:xfrm>
-            <a:off x="310149" y="3561954"/>
-            <a:ext cx="2361544" cy="369332"/>
+            <a:off x="385419" y="3647348"/>
+            <a:ext cx="2222910" cy="401708"/>
           </a:xfrm>
           <a:prstGeom prst="rect">
             <a:avLst/>
@@ -9943,51 +9955,51 @@
           <a:p>
             <a:pPr algn="ctr"/>
             <a:r>
-              <a:rPr lang="ko-KR" altLang="en-US" b="1" dirty="0">
+              <a:rPr lang="ko-KR" altLang="en-US" sz="2008" b="1" dirty="0">
                 <a:solidFill>
                   <a:srgbClr val="000000"/>
                 </a:solidFill>
-                <a:latin typeface="KoPub돋움체 Medium" panose="02020603020101020101" pitchFamily="18" charset="-127"/>
-                <a:ea typeface="KoPub돋움체 Light" panose="02020603020101020101"/>
+                <a:latin typeface="KoPub돋움체 Bold" panose="02020603020101020101" pitchFamily="18" charset="-127"/>
+                <a:ea typeface="KoPub돋움체 Bold" panose="02020603020101020101" pitchFamily="18" charset="-127"/>
               </a:rPr>
               <a:t>트리아제 </a:t>
             </a:r>
             <a:r>
-              <a:rPr lang="en-US" altLang="ko-KR" b="1" dirty="0">
+              <a:rPr lang="en-US" altLang="ko-KR" sz="2008" b="1" dirty="0">
                 <a:solidFill>
                   <a:srgbClr val="000000"/>
                 </a:solidFill>
-                <a:latin typeface="KoPub돋움체 Medium" panose="02020603020101020101" pitchFamily="18" charset="-127"/>
-                <a:ea typeface="KoPub돋움체 Light" panose="02020603020101020101"/>
+                <a:latin typeface="KoPub돋움체 Bold" panose="02020603020101020101" pitchFamily="18" charset="-127"/>
+                <a:ea typeface="KoPub돋움체 Bold" panose="02020603020101020101" pitchFamily="18" charset="-127"/>
               </a:rPr>
               <a:t>(</a:t>
             </a:r>
             <a:r>
-              <a:rPr lang="ko-KR" altLang="en-US" b="1" dirty="0" err="1">
+              <a:rPr lang="ko-KR" altLang="en-US" sz="2008" b="1" dirty="0" err="1">
                 <a:solidFill>
                   <a:srgbClr val="000000"/>
                 </a:solidFill>
-                <a:latin typeface="KoPub돋움체 Medium" panose="02020603020101020101" pitchFamily="18" charset="-127"/>
-                <a:ea typeface="KoPub돋움체 Light" panose="02020603020101020101"/>
+                <a:latin typeface="KoPub돋움체 Bold" panose="02020603020101020101" pitchFamily="18" charset="-127"/>
+                <a:ea typeface="KoPub돋움체 Bold" panose="02020603020101020101" pitchFamily="18" charset="-127"/>
               </a:rPr>
               <a:t>골든타임</a:t>
             </a:r>
             <a:r>
-              <a:rPr lang="en-US" altLang="ko-KR" b="1" dirty="0">
+              <a:rPr lang="en-US" altLang="ko-KR" sz="2008" b="1" dirty="0">
                 <a:solidFill>
                   <a:srgbClr val="000000"/>
                 </a:solidFill>
-                <a:latin typeface="KoPub돋움체 Medium" panose="02020603020101020101" pitchFamily="18" charset="-127"/>
-                <a:ea typeface="KoPub돋움체 Light" panose="02020603020101020101"/>
+                <a:latin typeface="KoPub돋움체 Bold" panose="02020603020101020101" pitchFamily="18" charset="-127"/>
+                <a:ea typeface="KoPub돋움체 Bold" panose="02020603020101020101" pitchFamily="18" charset="-127"/>
               </a:rPr>
               <a:t>)</a:t>
             </a:r>
-            <a:endParaRPr lang="ko-KR" altLang="en-US" b="1" dirty="0">
+            <a:endParaRPr lang="ko-KR" altLang="en-US" sz="2008" b="1" dirty="0">
               <a:solidFill>
                 <a:srgbClr val="000000"/>
               </a:solidFill>
-              <a:latin typeface="KoPub돋움체 Medium" panose="02020603020101020101" pitchFamily="18" charset="-127"/>
-              <a:ea typeface="KoPub돋움체 Light" panose="02020603020101020101"/>
+              <a:latin typeface="KoPub돋움체 Bold" panose="02020603020101020101" pitchFamily="18" charset="-127"/>
+              <a:ea typeface="KoPub돋움체 Bold" panose="02020603020101020101" pitchFamily="18" charset="-127"/>
             </a:endParaRPr>
           </a:p>
         </p:txBody>
@@ -9997,7 +10009,7 @@
           <p:cNvPr id="2" name="직사각형 1">
             <a:extLst>
               <a:ext uri="{FF2B5EF4-FFF2-40B4-BE49-F238E27FC236}">
-                <a16:creationId xmlns:a16="http://schemas.microsoft.com/office/drawing/2014/main" id="{CF6CD54F-7897-4496-8903-172CACA01316}"/>
+                <a16:creationId xmlns:a16="http://schemas.microsoft.com/office/drawing/2014/main" id="{8B805B44-4228-6E67-4A95-70A7815E638C}"/>
               </a:ext>
             </a:extLst>
           </p:cNvPr>
@@ -10006,8 +10018,8 @@
         </p:nvSpPr>
         <p:spPr>
           <a:xfrm>
-            <a:off x="3161346" y="3284955"/>
-            <a:ext cx="5468122" cy="923330"/>
+            <a:off x="3173969" y="3322893"/>
+            <a:ext cx="5489957" cy="1019719"/>
           </a:xfrm>
           <a:prstGeom prst="rect">
             <a:avLst/>
@@ -10020,24 +10032,27 @@
           <a:lstStyle/>
           <a:p>
             <a:r>
-              <a:rPr lang="ko-KR" altLang="en-US" dirty="0">
-                <a:ea typeface="KoPub돋움체 Light" panose="02020603020101020101"/>
+              <a:rPr lang="ko-KR" altLang="en-US" sz="2008" dirty="0">
+                <a:latin typeface="KoPub돋움체 Bold" panose="02020603020101020101" pitchFamily="18" charset="-127"/>
+                <a:ea typeface="KoPub돋움체 Bold" panose="02020603020101020101" pitchFamily="18" charset="-127"/>
               </a:rPr>
               <a:t>빨강 10분(응급): 환자 안전 직결 (유선 병행)</a:t>
             </a:r>
           </a:p>
           <a:p>
             <a:r>
-              <a:rPr lang="ko-KR" altLang="en-US" dirty="0">
-                <a:ea typeface="KoPub돋움체 Light" panose="02020603020101020101"/>
+              <a:rPr lang="ko-KR" altLang="en-US" sz="2008" dirty="0">
+                <a:latin typeface="KoPub돋움체 Bold" panose="02020603020101020101" pitchFamily="18" charset="-127"/>
+                <a:ea typeface="KoPub돋움체 Bold" panose="02020603020101020101" pitchFamily="18" charset="-127"/>
               </a:rPr>
               <a:t>초록 4시간(우선): 당일 내 우선 처리 필요</a:t>
             </a:r>
           </a:p>
           <a:p>
             <a:r>
-              <a:rPr lang="ko-KR" altLang="en-US" dirty="0">
-                <a:ea typeface="KoPub돋움체 Light" panose="02020603020101020101"/>
+              <a:rPr lang="ko-KR" altLang="en-US" sz="2008" dirty="0">
+                <a:latin typeface="KoPub돋움체 Bold" panose="02020603020101020101" pitchFamily="18" charset="-127"/>
+                <a:ea typeface="KoPub돋움체 Bold" panose="02020603020101020101" pitchFamily="18" charset="-127"/>
               </a:rPr>
               <a:t>노랑 12시간(루틴): 근무 흐름 내 안정적 처리</a:t>
             </a:r>
@@ -10047,7 +10062,7 @@
     </p:spTree>
     <p:extLst>
       <p:ext uri="{BB962C8B-B14F-4D97-AF65-F5344CB8AC3E}">
-        <p14:creationId xmlns:p14="http://schemas.microsoft.com/office/powerpoint/2010/main" val="2058323378"/>
+        <p14:creationId xmlns:p14="http://schemas.microsoft.com/office/powerpoint/2010/main" val="3808875083"/>
       </p:ext>
     </p:extLst>
   </p:cSld>
@@ -10065,7 +10080,7 @@
         <p:cNvPr id="1" name="">
           <a:extLst>
             <a:ext uri="{FF2B5EF4-FFF2-40B4-BE49-F238E27FC236}">
-              <a16:creationId xmlns:a16="http://schemas.microsoft.com/office/drawing/2014/main" id="{DFA44891-DB0B-9038-5B25-629A4C227FFF}"/>
+              <a16:creationId xmlns:a16="http://schemas.microsoft.com/office/drawing/2014/main" id="{38FB84D5-1DEC-9852-ACBF-72E4D297192C}"/>
             </a:ext>
           </a:extLst>
         </p:cNvPr>
@@ -10085,7 +10100,7 @@
           <p:cNvPr id="3" name="TextBox 2">
             <a:extLst>
               <a:ext uri="{FF2B5EF4-FFF2-40B4-BE49-F238E27FC236}">
-                <a16:creationId xmlns:a16="http://schemas.microsoft.com/office/drawing/2014/main" id="{CEABBF7A-4383-D72B-A05E-B56FEE94992E}"/>
+                <a16:creationId xmlns:a16="http://schemas.microsoft.com/office/drawing/2014/main" id="{86C62A8F-824C-4DEB-FD06-EBA04FED6234}"/>
               </a:ext>
             </a:extLst>
           </p:cNvPr>
@@ -10094,8 +10109,8 @@
         </p:nvSpPr>
         <p:spPr>
           <a:xfrm>
-            <a:off x="101992" y="184592"/>
-            <a:ext cx="3494648" cy="309444"/>
+            <a:off x="102399" y="175060"/>
+            <a:ext cx="3508602" cy="310680"/>
           </a:xfrm>
           <a:prstGeom prst="rect">
             <a:avLst/>
@@ -10109,21 +10124,21 @@
           <a:lstStyle/>
           <a:p>
             <a:r>
-              <a:rPr lang="ko-KR" altLang="en-US" sz="1411" spc="-31" dirty="0">
+              <a:rPr lang="ko-KR" altLang="en-US" sz="1417" b="1" spc="-31" dirty="0">
                 <a:latin typeface="KoPub돋움체 Light" panose="02020603020101020101" pitchFamily="18" charset="-127"/>
                 <a:ea typeface="KoPub돋움체 Light" panose="02020603020101020101"/>
               </a:rPr>
               <a:t>순천향대학교 천안병원 </a:t>
             </a:r>
             <a:r>
-              <a:rPr lang="en-US" altLang="ko-KR" sz="1411" spc="-31" dirty="0">
+              <a:rPr lang="en-US" altLang="ko-KR" sz="1417" b="1" spc="-31" dirty="0">
                 <a:latin typeface="KoPub돋움체 Light" panose="02020603020101020101" pitchFamily="18" charset="-127"/>
                 <a:ea typeface="KoPub돋움체 Light" panose="02020603020101020101"/>
               </a:rPr>
               <a:t>| </a:t>
             </a:r>
             <a:r>
-              <a:rPr lang="ko-KR" altLang="en-US" sz="1411" spc="-31" dirty="0">
+              <a:rPr lang="ko-KR" altLang="en-US" sz="1417" b="1" spc="-31" dirty="0">
                 <a:latin typeface="KoPub돋움체 Light" panose="02020603020101020101" pitchFamily="18" charset="-127"/>
                 <a:ea typeface="KoPub돋움체 Light" panose="02020603020101020101"/>
               </a:rPr>
@@ -10137,7 +10152,7 @@
           <p:cNvPr id="6" name="사각형: 둥근 모서리 5">
             <a:extLst>
               <a:ext uri="{FF2B5EF4-FFF2-40B4-BE49-F238E27FC236}">
-                <a16:creationId xmlns:a16="http://schemas.microsoft.com/office/drawing/2014/main" id="{CE2932C1-2A00-0758-2BBA-833E022443FD}"/>
+                <a16:creationId xmlns:a16="http://schemas.microsoft.com/office/drawing/2014/main" id="{C18DBBAE-AA3D-50B6-B506-3C41BF06DAE2}"/>
               </a:ext>
             </a:extLst>
           </p:cNvPr>
@@ -10146,8 +10161,8 @@
         </p:nvSpPr>
         <p:spPr>
           <a:xfrm>
-            <a:off x="3050989" y="1198923"/>
-            <a:ext cx="5779400" cy="651443"/>
+            <a:off x="3063172" y="844256"/>
+            <a:ext cx="5802477" cy="826102"/>
           </a:xfrm>
           <a:prstGeom prst="roundRect">
             <a:avLst>
@@ -10184,9 +10199,9 @@
           <a:lstStyle/>
           <a:p>
             <a:pPr algn="ctr"/>
-            <a:endParaRPr lang="ko-KR" altLang="en-US" sz="5080">
-              <a:latin typeface="KoPub돋움체 Medium" panose="02020603020101020101" pitchFamily="18" charset="-127"/>
-              <a:ea typeface="KoPub돋움체 Light" panose="02020603020101020101"/>
+            <a:endParaRPr lang="ko-KR" altLang="en-US" sz="5422">
+              <a:latin typeface="KoPub돋움체 Bold" panose="02020603020101020101" pitchFamily="18" charset="-127"/>
+              <a:ea typeface="KoPub돋움체 Bold" panose="02020603020101020101" pitchFamily="18" charset="-127"/>
             </a:endParaRPr>
           </a:p>
         </p:txBody>
@@ -10196,7 +10211,7 @@
           <p:cNvPr id="8" name="사각형: 둥근 모서리 7">
             <a:extLst>
               <a:ext uri="{FF2B5EF4-FFF2-40B4-BE49-F238E27FC236}">
-                <a16:creationId xmlns:a16="http://schemas.microsoft.com/office/drawing/2014/main" id="{1548A1BD-8723-9A88-C7D3-66F55BF5E173}"/>
+                <a16:creationId xmlns:a16="http://schemas.microsoft.com/office/drawing/2014/main" id="{3077FF07-4144-C028-7025-75BDFB15594F}"/>
               </a:ext>
             </a:extLst>
           </p:cNvPr>
@@ -10205,8 +10220,8 @@
         </p:nvSpPr>
         <p:spPr>
           <a:xfrm>
-            <a:off x="208326" y="1198923"/>
-            <a:ext cx="2788897" cy="651443"/>
+            <a:off x="209158" y="844256"/>
+            <a:ext cx="2800033" cy="826102"/>
           </a:xfrm>
           <a:prstGeom prst="roundRect">
             <a:avLst>
@@ -10241,9 +10256,9 @@
           <a:lstStyle/>
           <a:p>
             <a:pPr algn="ctr"/>
-            <a:endParaRPr lang="ko-KR" altLang="en-US" sz="5080">
-              <a:latin typeface="KoPub돋움체 Medium" panose="02020603020101020101" pitchFamily="18" charset="-127"/>
-              <a:ea typeface="KoPub돋움체 Light" panose="02020603020101020101"/>
+            <a:endParaRPr lang="ko-KR" altLang="en-US" sz="5422">
+              <a:latin typeface="KoPub돋움체 Bold" panose="02020603020101020101" pitchFamily="18" charset="-127"/>
+              <a:ea typeface="KoPub돋움체 Bold" panose="02020603020101020101" pitchFamily="18" charset="-127"/>
             </a:endParaRPr>
           </a:p>
         </p:txBody>
@@ -10253,7 +10268,7 @@
           <p:cNvPr id="9" name="TextBox 8">
             <a:extLst>
               <a:ext uri="{FF2B5EF4-FFF2-40B4-BE49-F238E27FC236}">
-                <a16:creationId xmlns:a16="http://schemas.microsoft.com/office/drawing/2014/main" id="{790F75E6-5F6B-E96E-73A6-26A5843998CD}"/>
+                <a16:creationId xmlns:a16="http://schemas.microsoft.com/office/drawing/2014/main" id="{C3A87FF9-8B93-FFA7-9413-380BF4ADCDA2}"/>
               </a:ext>
             </a:extLst>
           </p:cNvPr>
@@ -10262,8 +10277,8 @@
         </p:nvSpPr>
         <p:spPr>
           <a:xfrm>
-            <a:off x="3161347" y="1339978"/>
-            <a:ext cx="5119836" cy="369332"/>
+            <a:off x="3173970" y="1056452"/>
+            <a:ext cx="5140280" cy="401708"/>
           </a:xfrm>
           <a:prstGeom prst="rect">
             <a:avLst/>
@@ -10277,157 +10292,157 @@
           <a:lstStyle/>
           <a:p>
             <a:r>
-              <a:rPr lang="en-US" altLang="ko-KR" dirty="0">
-                <a:solidFill>
-                  <a:schemeClr val="tx2">
-                    <a:lumMod val="50000"/>
-                  </a:schemeClr>
-                </a:solidFill>
-                <a:latin typeface="KoPub돋움체 Medium" panose="02020603020101020101" pitchFamily="18" charset="-127"/>
-                <a:ea typeface="KoPub돋움체 Light" panose="02020603020101020101"/>
+              <a:rPr lang="en-US" altLang="ko-KR" sz="2008" dirty="0">
+                <a:solidFill>
+                  <a:schemeClr val="tx2">
+                    <a:lumMod val="50000"/>
+                  </a:schemeClr>
+                </a:solidFill>
+                <a:latin typeface="KoPub돋움체 Bold" panose="02020603020101020101" pitchFamily="18" charset="-127"/>
+                <a:ea typeface="KoPub돋움체 Bold" panose="02020603020101020101" pitchFamily="18" charset="-127"/>
               </a:rPr>
               <a:t>Case ID : </a:t>
             </a:r>
             <a:r>
-              <a:rPr lang="ko-KR" altLang="en-US" dirty="0">
-                <a:solidFill>
-                  <a:schemeClr val="tx2">
-                    <a:lumMod val="50000"/>
-                  </a:schemeClr>
-                </a:solidFill>
-                <a:latin typeface="KoPub돋움체 Medium" panose="02020603020101020101" pitchFamily="18" charset="-127"/>
-                <a:ea typeface="KoPub돋움체 Light" panose="02020603020101020101"/>
+              <a:rPr lang="ko-KR" altLang="en-US" sz="2008" dirty="0">
+                <a:solidFill>
+                  <a:schemeClr val="tx2">
+                    <a:lumMod val="50000"/>
+                  </a:schemeClr>
+                </a:solidFill>
+                <a:latin typeface="KoPub돋움체 Bold" panose="02020603020101020101" pitchFamily="18" charset="-127"/>
+                <a:ea typeface="KoPub돋움체 Bold" panose="02020603020101020101" pitchFamily="18" charset="-127"/>
               </a:rPr>
               <a:t>병실</a:t>
             </a:r>
             <a:r>
-              <a:rPr lang="en-US" altLang="ko-KR" dirty="0">
-                <a:solidFill>
-                  <a:schemeClr val="tx2">
-                    <a:lumMod val="50000"/>
-                  </a:schemeClr>
-                </a:solidFill>
-                <a:latin typeface="KoPub돋움체 Medium" panose="02020603020101020101" pitchFamily="18" charset="-127"/>
-                <a:ea typeface="KoPub돋움체 Light" panose="02020603020101020101"/>
+              <a:rPr lang="en-US" altLang="ko-KR" sz="2008" dirty="0">
+                <a:solidFill>
+                  <a:schemeClr val="tx2">
+                    <a:lumMod val="50000"/>
+                  </a:schemeClr>
+                </a:solidFill>
+                <a:latin typeface="KoPub돋움체 Bold" panose="02020603020101020101" pitchFamily="18" charset="-127"/>
+                <a:ea typeface="KoPub돋움체 Bold" panose="02020603020101020101" pitchFamily="18" charset="-127"/>
               </a:rPr>
               <a:t>-</a:t>
             </a:r>
             <a:r>
-              <a:rPr lang="ko-KR" altLang="en-US" dirty="0">
-                <a:solidFill>
-                  <a:schemeClr val="tx2">
-                    <a:lumMod val="50000"/>
-                  </a:schemeClr>
-                </a:solidFill>
-                <a:latin typeface="KoPub돋움체 Medium" panose="02020603020101020101" pitchFamily="18" charset="-127"/>
-                <a:ea typeface="KoPub돋움체 Light" panose="02020603020101020101"/>
+              <a:rPr lang="ko-KR" altLang="en-US" sz="2008" dirty="0">
+                <a:solidFill>
+                  <a:schemeClr val="tx2">
+                    <a:lumMod val="50000"/>
+                  </a:schemeClr>
+                </a:solidFill>
+                <a:latin typeface="KoPub돋움체 Bold" panose="02020603020101020101" pitchFamily="18" charset="-127"/>
+                <a:ea typeface="KoPub돋움체 Bold" panose="02020603020101020101" pitchFamily="18" charset="-127"/>
               </a:rPr>
               <a:t>등록</a:t>
             </a:r>
             <a:r>
-              <a:rPr lang="en-US" altLang="ko-KR" dirty="0">
-                <a:solidFill>
-                  <a:schemeClr val="tx2">
-                    <a:lumMod val="50000"/>
-                  </a:schemeClr>
-                </a:solidFill>
-                <a:latin typeface="KoPub돋움체 Medium" panose="02020603020101020101" pitchFamily="18" charset="-127"/>
-                <a:ea typeface="KoPub돋움체 Light" panose="02020603020101020101"/>
+              <a:rPr lang="en-US" altLang="ko-KR" sz="2008" dirty="0">
+                <a:solidFill>
+                  <a:schemeClr val="tx2">
+                    <a:lumMod val="50000"/>
+                  </a:schemeClr>
+                </a:solidFill>
+                <a:latin typeface="KoPub돋움체 Bold" panose="02020603020101020101" pitchFamily="18" charset="-127"/>
+                <a:ea typeface="KoPub돋움체 Bold" panose="02020603020101020101" pitchFamily="18" charset="-127"/>
               </a:rPr>
               <a:t>-</a:t>
             </a:r>
             <a:r>
-              <a:rPr lang="ko-KR" altLang="en-US" dirty="0">
-                <a:solidFill>
-                  <a:schemeClr val="tx2">
-                    <a:lumMod val="50000"/>
-                  </a:schemeClr>
-                </a:solidFill>
-                <a:latin typeface="KoPub돋움체 Medium" panose="02020603020101020101" pitchFamily="18" charset="-127"/>
-                <a:ea typeface="KoPub돋움체 Light" panose="02020603020101020101"/>
+              <a:rPr lang="ko-KR" altLang="en-US" sz="2008" dirty="0">
+                <a:solidFill>
+                  <a:schemeClr val="tx2">
+                    <a:lumMod val="50000"/>
+                  </a:schemeClr>
+                </a:solidFill>
+                <a:latin typeface="KoPub돋움체 Bold" panose="02020603020101020101" pitchFamily="18" charset="-127"/>
+                <a:ea typeface="KoPub돋움체 Bold" panose="02020603020101020101" pitchFamily="18" charset="-127"/>
               </a:rPr>
               <a:t>성함</a:t>
             </a:r>
             <a:r>
-              <a:rPr lang="en-US" altLang="ko-KR" dirty="0">
-                <a:solidFill>
-                  <a:schemeClr val="tx2">
-                    <a:lumMod val="50000"/>
-                  </a:schemeClr>
-                </a:solidFill>
-                <a:latin typeface="KoPub돋움체 Medium" panose="02020603020101020101" pitchFamily="18" charset="-127"/>
-                <a:ea typeface="KoPub돋움체 Light" panose="02020603020101020101"/>
+              <a:rPr lang="en-US" altLang="ko-KR" sz="2008" dirty="0">
+                <a:solidFill>
+                  <a:schemeClr val="tx2">
+                    <a:lumMod val="50000"/>
+                  </a:schemeClr>
+                </a:solidFill>
+                <a:latin typeface="KoPub돋움체 Bold" panose="02020603020101020101" pitchFamily="18" charset="-127"/>
+                <a:ea typeface="KoPub돋움체 Bold" panose="02020603020101020101" pitchFamily="18" charset="-127"/>
               </a:rPr>
               <a:t>-</a:t>
             </a:r>
             <a:r>
-              <a:rPr lang="ko-KR" altLang="en-US" dirty="0">
-                <a:solidFill>
-                  <a:schemeClr val="tx2">
-                    <a:lumMod val="50000"/>
-                  </a:schemeClr>
-                </a:solidFill>
-                <a:latin typeface="KoPub돋움체 Medium" panose="02020603020101020101" pitchFamily="18" charset="-127"/>
-                <a:ea typeface="KoPub돋움체 Light" panose="02020603020101020101"/>
+              <a:rPr lang="ko-KR" altLang="en-US" sz="2008" dirty="0">
+                <a:solidFill>
+                  <a:schemeClr val="tx2">
+                    <a:lumMod val="50000"/>
+                  </a:schemeClr>
+                </a:solidFill>
+                <a:latin typeface="KoPub돋움체 Bold" panose="02020603020101020101" pitchFamily="18" charset="-127"/>
+                <a:ea typeface="KoPub돋움체 Bold" panose="02020603020101020101" pitchFamily="18" charset="-127"/>
               </a:rPr>
               <a:t>교수</a:t>
             </a:r>
             <a:r>
-              <a:rPr lang="en-US" altLang="ko-KR" dirty="0">
-                <a:solidFill>
-                  <a:schemeClr val="tx2">
-                    <a:lumMod val="50000"/>
-                  </a:schemeClr>
-                </a:solidFill>
-                <a:latin typeface="KoPub돋움체 Medium" panose="02020603020101020101" pitchFamily="18" charset="-127"/>
-                <a:ea typeface="KoPub돋움체 Light" panose="02020603020101020101"/>
+              <a:rPr lang="en-US" altLang="ko-KR" sz="2008" dirty="0">
+                <a:solidFill>
+                  <a:schemeClr val="tx2">
+                    <a:lumMod val="50000"/>
+                  </a:schemeClr>
+                </a:solidFill>
+                <a:latin typeface="KoPub돋움체 Bold" panose="02020603020101020101" pitchFamily="18" charset="-127"/>
+                <a:ea typeface="KoPub돋움체 Bold" panose="02020603020101020101" pitchFamily="18" charset="-127"/>
               </a:rPr>
               <a:t>-</a:t>
             </a:r>
             <a:r>
-              <a:rPr lang="ko-KR" altLang="en-US" dirty="0">
-                <a:solidFill>
-                  <a:schemeClr val="tx2">
-                    <a:lumMod val="50000"/>
-                  </a:schemeClr>
-                </a:solidFill>
-                <a:latin typeface="KoPub돋움체 Medium" panose="02020603020101020101" pitchFamily="18" charset="-127"/>
-                <a:ea typeface="KoPub돋움체 Light" panose="02020603020101020101"/>
+              <a:rPr lang="ko-KR" altLang="en-US" sz="2008" dirty="0">
+                <a:solidFill>
+                  <a:schemeClr val="tx2">
+                    <a:lumMod val="50000"/>
+                  </a:schemeClr>
+                </a:solidFill>
+                <a:latin typeface="KoPub돋움체 Bold" panose="02020603020101020101" pitchFamily="18" charset="-127"/>
+                <a:ea typeface="KoPub돋움체 Bold" panose="02020603020101020101" pitchFamily="18" charset="-127"/>
               </a:rPr>
               <a:t>월일</a:t>
             </a:r>
             <a:r>
-              <a:rPr lang="en-US" altLang="ko-KR" dirty="0">
-                <a:solidFill>
-                  <a:schemeClr val="tx2">
-                    <a:lumMod val="50000"/>
-                  </a:schemeClr>
-                </a:solidFill>
-                <a:latin typeface="KoPub돋움체 Medium" panose="02020603020101020101" pitchFamily="18" charset="-127"/>
-                <a:ea typeface="KoPub돋움체 Light" panose="02020603020101020101"/>
+              <a:rPr lang="en-US" altLang="ko-KR" sz="2008" dirty="0">
+                <a:solidFill>
+                  <a:schemeClr val="tx2">
+                    <a:lumMod val="50000"/>
+                  </a:schemeClr>
+                </a:solidFill>
+                <a:latin typeface="KoPub돋움체 Bold" panose="02020603020101020101" pitchFamily="18" charset="-127"/>
+                <a:ea typeface="KoPub돋움체 Bold" panose="02020603020101020101" pitchFamily="18" charset="-127"/>
               </a:rPr>
               <a:t>-</a:t>
             </a:r>
             <a:r>
-              <a:rPr lang="ko-KR" altLang="en-US" dirty="0">
-                <a:solidFill>
-                  <a:schemeClr val="tx2">
-                    <a:lumMod val="50000"/>
-                  </a:schemeClr>
-                </a:solidFill>
-                <a:latin typeface="KoPub돋움체 Medium" panose="02020603020101020101" pitchFamily="18" charset="-127"/>
-                <a:ea typeface="KoPub돋움체 Light" panose="02020603020101020101"/>
+              <a:rPr lang="ko-KR" altLang="en-US" sz="2008" dirty="0">
+                <a:solidFill>
+                  <a:schemeClr val="tx2">
+                    <a:lumMod val="50000"/>
+                  </a:schemeClr>
+                </a:solidFill>
+                <a:latin typeface="KoPub돋움체 Bold" panose="02020603020101020101" pitchFamily="18" charset="-127"/>
+                <a:ea typeface="KoPub돋움체 Bold" panose="02020603020101020101" pitchFamily="18" charset="-127"/>
               </a:rPr>
               <a:t>시간</a:t>
             </a:r>
-            <a:endParaRPr lang="en-US" altLang="ko-KR" dirty="0">
+            <a:endParaRPr lang="en-US" altLang="ko-KR" sz="2008" dirty="0">
               <a:solidFill>
                 <a:schemeClr val="tx2">
                   <a:lumMod val="50000"/>
                 </a:schemeClr>
               </a:solidFill>
-              <a:latin typeface="KoPub돋움체 Medium" panose="02020603020101020101" pitchFamily="18" charset="-127"/>
-              <a:ea typeface="KoPub돋움체 Light" panose="02020603020101020101"/>
+              <a:latin typeface="KoPub돋움체 Bold" panose="02020603020101020101" pitchFamily="18" charset="-127"/>
+              <a:ea typeface="KoPub돋움체 Bold" panose="02020603020101020101" pitchFamily="18" charset="-127"/>
             </a:endParaRPr>
           </a:p>
         </p:txBody>
@@ -10437,7 +10452,7 @@
           <p:cNvPr id="12" name="TextBox 11">
             <a:extLst>
               <a:ext uri="{FF2B5EF4-FFF2-40B4-BE49-F238E27FC236}">
-                <a16:creationId xmlns:a16="http://schemas.microsoft.com/office/drawing/2014/main" id="{8FA07B63-4519-67D4-9E1C-D241B9FC298D}"/>
+                <a16:creationId xmlns:a16="http://schemas.microsoft.com/office/drawing/2014/main" id="{5BC5BAD9-D603-0A63-C2F8-D3EC18E71F2B}"/>
               </a:ext>
             </a:extLst>
           </p:cNvPr>
@@ -10446,8 +10461,8 @@
         </p:nvSpPr>
         <p:spPr>
           <a:xfrm>
-            <a:off x="310149" y="1339978"/>
-            <a:ext cx="2052165" cy="369332"/>
+            <a:off x="288052" y="1071903"/>
+            <a:ext cx="2107031" cy="401708"/>
           </a:xfrm>
           <a:prstGeom prst="rect">
             <a:avLst/>
@@ -10462,22 +10477,22 @@
           <a:p>
             <a:pPr algn="ctr"/>
             <a:r>
-              <a:rPr lang="en-US" altLang="ko-KR" b="1" dirty="0">
+              <a:rPr lang="en-US" altLang="ko-KR" sz="2008" b="1" dirty="0">
                 <a:solidFill>
                   <a:srgbClr val="000000"/>
                 </a:solidFill>
-                <a:latin typeface="KoPub돋움체 Medium" panose="02020603020101020101" pitchFamily="18" charset="-127"/>
-                <a:ea typeface="KoPub돋움체 Light" panose="02020603020101020101"/>
+                <a:latin typeface="KoPub돋움체 Bold" panose="02020603020101020101" pitchFamily="18" charset="-127"/>
+                <a:ea typeface="KoPub돋움체 Bold" panose="02020603020101020101" pitchFamily="18" charset="-127"/>
               </a:rPr>
               <a:t>[ID] Case ID </a:t>
             </a:r>
             <a:r>
-              <a:rPr lang="ko-KR" altLang="en-US" b="1" dirty="0">
+              <a:rPr lang="ko-KR" altLang="en-US" sz="2008" b="1" dirty="0">
                 <a:solidFill>
                   <a:srgbClr val="000000"/>
                 </a:solidFill>
-                <a:latin typeface="KoPub돋움체 Medium" panose="02020603020101020101" pitchFamily="18" charset="-127"/>
-                <a:ea typeface="KoPub돋움체 Light" panose="02020603020101020101"/>
+                <a:latin typeface="KoPub돋움체 Bold" panose="02020603020101020101" pitchFamily="18" charset="-127"/>
+                <a:ea typeface="KoPub돋움체 Bold" panose="02020603020101020101" pitchFamily="18" charset="-127"/>
               </a:rPr>
               <a:t>표준</a:t>
             </a:r>
@@ -10489,7 +10504,7 @@
           <p:cNvPr id="13" name="사각형: 둥근 모서리 12">
             <a:extLst>
               <a:ext uri="{FF2B5EF4-FFF2-40B4-BE49-F238E27FC236}">
-                <a16:creationId xmlns:a16="http://schemas.microsoft.com/office/drawing/2014/main" id="{C32F48BA-C495-9A9B-C63F-E8A7AEFC92D4}"/>
+                <a16:creationId xmlns:a16="http://schemas.microsoft.com/office/drawing/2014/main" id="{85A8864F-1972-9911-35B6-7C9273FF94AB}"/>
               </a:ext>
             </a:extLst>
           </p:cNvPr>
@@ -10498,8 +10513,8 @@
         </p:nvSpPr>
         <p:spPr>
           <a:xfrm>
-            <a:off x="3050989" y="1961982"/>
-            <a:ext cx="5779400" cy="1115349"/>
+            <a:off x="3063172" y="1777571"/>
+            <a:ext cx="5802477" cy="1388063"/>
           </a:xfrm>
           <a:prstGeom prst="roundRect">
             <a:avLst>
@@ -10536,9 +10551,9 @@
           <a:lstStyle/>
           <a:p>
             <a:pPr algn="ctr"/>
-            <a:endParaRPr lang="ko-KR" altLang="en-US" sz="5080">
-              <a:latin typeface="KoPub돋움체 Medium" panose="02020603020101020101" pitchFamily="18" charset="-127"/>
-              <a:ea typeface="KoPub돋움체 Light" panose="02020603020101020101"/>
+            <a:endParaRPr lang="ko-KR" altLang="en-US" sz="5422">
+              <a:latin typeface="KoPub돋움체 Bold" panose="02020603020101020101" pitchFamily="18" charset="-127"/>
+              <a:ea typeface="KoPub돋움체 Bold" panose="02020603020101020101" pitchFamily="18" charset="-127"/>
             </a:endParaRPr>
           </a:p>
         </p:txBody>
@@ -10548,7 +10563,7 @@
           <p:cNvPr id="15" name="사각형: 둥근 모서리 14">
             <a:extLst>
               <a:ext uri="{FF2B5EF4-FFF2-40B4-BE49-F238E27FC236}">
-                <a16:creationId xmlns:a16="http://schemas.microsoft.com/office/drawing/2014/main" id="{6B78A99E-9E40-784B-95AB-E8BEFD430BA4}"/>
+                <a16:creationId xmlns:a16="http://schemas.microsoft.com/office/drawing/2014/main" id="{C0F26EED-5C67-FFA9-25C5-0D33D222D2F2}"/>
               </a:ext>
             </a:extLst>
           </p:cNvPr>
@@ -10557,8 +10572,8 @@
         </p:nvSpPr>
         <p:spPr>
           <a:xfrm>
-            <a:off x="208326" y="1961983"/>
-            <a:ext cx="2788897" cy="1115349"/>
+            <a:off x="209158" y="1777572"/>
+            <a:ext cx="2800033" cy="1388063"/>
           </a:xfrm>
           <a:prstGeom prst="roundRect">
             <a:avLst>
@@ -10593,9 +10608,9 @@
           <a:lstStyle/>
           <a:p>
             <a:pPr algn="ctr"/>
-            <a:endParaRPr lang="ko-KR" altLang="en-US" sz="5080">
-              <a:latin typeface="KoPub돋움체 Medium" panose="02020603020101020101" pitchFamily="18" charset="-127"/>
-              <a:ea typeface="KoPub돋움체 Light" panose="02020603020101020101"/>
+            <a:endParaRPr lang="ko-KR" altLang="en-US" sz="5422">
+              <a:latin typeface="KoPub돋움체 Bold" panose="02020603020101020101" pitchFamily="18" charset="-127"/>
+              <a:ea typeface="KoPub돋움체 Bold" panose="02020603020101020101" pitchFamily="18" charset="-127"/>
             </a:endParaRPr>
           </a:p>
         </p:txBody>
@@ -10605,7 +10620,7 @@
           <p:cNvPr id="20" name="TextBox 19">
             <a:extLst>
               <a:ext uri="{FF2B5EF4-FFF2-40B4-BE49-F238E27FC236}">
-                <a16:creationId xmlns:a16="http://schemas.microsoft.com/office/drawing/2014/main" id="{7905CC26-D0D7-0E58-1BF6-6BB32A2663D4}"/>
+                <a16:creationId xmlns:a16="http://schemas.microsoft.com/office/drawing/2014/main" id="{F89390A0-01BC-41B1-80F2-B89DECB58566}"/>
               </a:ext>
             </a:extLst>
           </p:cNvPr>
@@ -10614,8 +10629,8 @@
         </p:nvSpPr>
         <p:spPr>
           <a:xfrm>
-            <a:off x="3161347" y="2057991"/>
-            <a:ext cx="5119836" cy="923330"/>
+            <a:off x="3173970" y="1961743"/>
+            <a:ext cx="5678063" cy="1019719"/>
           </a:xfrm>
           <a:prstGeom prst="rect">
             <a:avLst/>
@@ -10629,270 +10644,270 @@
           <a:lstStyle/>
           <a:p>
             <a:r>
-              <a:rPr lang="en-US" altLang="ko-KR" dirty="0">
-                <a:solidFill>
-                  <a:schemeClr val="tx2">
-                    <a:lumMod val="50000"/>
-                  </a:schemeClr>
-                </a:solidFill>
-                <a:latin typeface="KoPub돋움체 Medium" panose="02020603020101020101" pitchFamily="18" charset="-127"/>
-                <a:ea typeface="KoPub돋움체 Light" panose="02020603020101020101"/>
+              <a:rPr lang="en-US" altLang="ko-KR" sz="2008" dirty="0">
+                <a:solidFill>
+                  <a:schemeClr val="tx2">
+                    <a:lumMod val="50000"/>
+                  </a:schemeClr>
+                </a:solidFill>
+                <a:latin typeface="KoPub돋움체 Bold" panose="02020603020101020101" pitchFamily="18" charset="-127"/>
+                <a:ea typeface="KoPub돋움체 Bold" panose="02020603020101020101" pitchFamily="18" charset="-127"/>
               </a:rPr>
               <a:t>[A] </a:t>
             </a:r>
             <a:r>
-              <a:rPr lang="ko-KR" altLang="en-US" dirty="0">
-                <a:solidFill>
-                  <a:schemeClr val="tx2">
-                    <a:lumMod val="50000"/>
-                  </a:schemeClr>
-                </a:solidFill>
-                <a:latin typeface="KoPub돋움체 Medium" panose="02020603020101020101" pitchFamily="18" charset="-127"/>
-                <a:ea typeface="KoPub돋움체 Light" panose="02020603020101020101"/>
+              <a:rPr lang="ko-KR" altLang="en-US" sz="2008" dirty="0">
+                <a:solidFill>
+                  <a:schemeClr val="tx2">
+                    <a:lumMod val="50000"/>
+                  </a:schemeClr>
+                </a:solidFill>
+                <a:latin typeface="KoPub돋움체 Bold" panose="02020603020101020101" pitchFamily="18" charset="-127"/>
+                <a:ea typeface="KoPub돋움체 Bold" panose="02020603020101020101" pitchFamily="18" charset="-127"/>
               </a:rPr>
               <a:t>보고</a:t>
             </a:r>
             <a:r>
-              <a:rPr lang="en-US" altLang="ko-KR" dirty="0">
-                <a:solidFill>
-                  <a:schemeClr val="tx2">
-                    <a:lumMod val="50000"/>
-                  </a:schemeClr>
-                </a:solidFill>
-                <a:latin typeface="KoPub돋움체 Medium" panose="02020603020101020101" pitchFamily="18" charset="-127"/>
-                <a:ea typeface="KoPub돋움체 Light" panose="02020603020101020101"/>
+              <a:rPr lang="en-US" altLang="ko-KR" sz="2008" dirty="0">
+                <a:solidFill>
+                  <a:schemeClr val="tx2">
+                    <a:lumMod val="50000"/>
+                  </a:schemeClr>
+                </a:solidFill>
+                <a:latin typeface="KoPub돋움체 Bold" panose="02020603020101020101" pitchFamily="18" charset="-127"/>
+                <a:ea typeface="KoPub돋움체 Bold" panose="02020603020101020101" pitchFamily="18" charset="-127"/>
               </a:rPr>
               <a:t>: </a:t>
             </a:r>
             <a:r>
-              <a:rPr lang="ko-KR" altLang="en-US" dirty="0">
-                <a:solidFill>
-                  <a:schemeClr val="tx2">
-                    <a:lumMod val="50000"/>
-                  </a:schemeClr>
-                </a:solidFill>
-                <a:latin typeface="KoPub돋움체 Medium" panose="02020603020101020101" pitchFamily="18" charset="-127"/>
-                <a:ea typeface="KoPub돋움체 Light" panose="02020603020101020101"/>
+              <a:rPr lang="ko-KR" altLang="en-US" sz="2008" dirty="0">
+                <a:solidFill>
+                  <a:schemeClr val="tx2">
+                    <a:lumMod val="50000"/>
+                  </a:schemeClr>
+                </a:solidFill>
+                <a:latin typeface="KoPub돋움체 Bold" panose="02020603020101020101" pitchFamily="18" charset="-127"/>
+                <a:ea typeface="KoPub돋움체 Bold" panose="02020603020101020101" pitchFamily="18" charset="-127"/>
               </a:rPr>
               <a:t>지금 상태 </a:t>
             </a:r>
             <a:r>
-              <a:rPr lang="en-US" altLang="ko-KR" dirty="0">
-                <a:solidFill>
-                  <a:schemeClr val="tx2">
-                    <a:lumMod val="50000"/>
-                  </a:schemeClr>
-                </a:solidFill>
-                <a:latin typeface="KoPub돋움체 Medium" panose="02020603020101020101" pitchFamily="18" charset="-127"/>
-                <a:ea typeface="KoPub돋움체 Light" panose="02020603020101020101"/>
+              <a:rPr lang="en-US" altLang="ko-KR" sz="2008" dirty="0">
+                <a:solidFill>
+                  <a:schemeClr val="tx2">
+                    <a:lumMod val="50000"/>
+                  </a:schemeClr>
+                </a:solidFill>
+                <a:latin typeface="KoPub돋움체 Bold" panose="02020603020101020101" pitchFamily="18" charset="-127"/>
+                <a:ea typeface="KoPub돋움체 Bold" panose="02020603020101020101" pitchFamily="18" charset="-127"/>
               </a:rPr>
               <a:t>/ </a:t>
             </a:r>
             <a:r>
-              <a:rPr lang="ko-KR" altLang="en-US" dirty="0">
-                <a:solidFill>
-                  <a:schemeClr val="tx2">
-                    <a:lumMod val="50000"/>
-                  </a:schemeClr>
-                </a:solidFill>
-                <a:latin typeface="KoPub돋움체 Medium" panose="02020603020101020101" pitchFamily="18" charset="-127"/>
-                <a:ea typeface="KoPub돋움체 Light" panose="02020603020101020101"/>
+              <a:rPr lang="ko-KR" altLang="en-US" sz="2008" dirty="0">
+                <a:solidFill>
+                  <a:schemeClr val="tx2">
+                    <a:lumMod val="50000"/>
+                  </a:schemeClr>
+                </a:solidFill>
+                <a:latin typeface="KoPub돋움체 Bold" panose="02020603020101020101" pitchFamily="18" charset="-127"/>
+                <a:ea typeface="KoPub돋움체 Bold" panose="02020603020101020101" pitchFamily="18" charset="-127"/>
               </a:rPr>
               <a:t>근거 </a:t>
             </a:r>
             <a:r>
-              <a:rPr lang="en-US" altLang="ko-KR" dirty="0">
-                <a:solidFill>
-                  <a:schemeClr val="tx2">
-                    <a:lumMod val="50000"/>
-                  </a:schemeClr>
-                </a:solidFill>
-                <a:latin typeface="KoPub돋움체 Medium" panose="02020603020101020101" pitchFamily="18" charset="-127"/>
-                <a:ea typeface="KoPub돋움체 Light" panose="02020603020101020101"/>
+              <a:rPr lang="en-US" altLang="ko-KR" sz="2008" dirty="0">
+                <a:solidFill>
+                  <a:schemeClr val="tx2">
+                    <a:lumMod val="50000"/>
+                  </a:schemeClr>
+                </a:solidFill>
+                <a:latin typeface="KoPub돋움체 Bold" panose="02020603020101020101" pitchFamily="18" charset="-127"/>
+                <a:ea typeface="KoPub돋움체 Bold" panose="02020603020101020101" pitchFamily="18" charset="-127"/>
               </a:rPr>
               <a:t>/ </a:t>
             </a:r>
             <a:r>
-              <a:rPr lang="ko-KR" altLang="en-US" dirty="0">
-                <a:solidFill>
-                  <a:schemeClr val="tx2">
-                    <a:lumMod val="50000"/>
-                  </a:schemeClr>
-                </a:solidFill>
-                <a:latin typeface="KoPub돋움체 Medium" panose="02020603020101020101" pitchFamily="18" charset="-127"/>
-                <a:ea typeface="KoPub돋움체 Light" panose="02020603020101020101"/>
+              <a:rPr lang="ko-KR" altLang="en-US" sz="2008" dirty="0">
+                <a:solidFill>
+                  <a:schemeClr val="tx2">
+                    <a:lumMod val="50000"/>
+                  </a:schemeClr>
+                </a:solidFill>
+                <a:latin typeface="KoPub돋움체 Bold" panose="02020603020101020101" pitchFamily="18" charset="-127"/>
+                <a:ea typeface="KoPub돋움체 Bold" panose="02020603020101020101" pitchFamily="18" charset="-127"/>
               </a:rPr>
               <a:t>요청사항 </a:t>
             </a:r>
             <a:r>
-              <a:rPr lang="en-US" altLang="ko-KR" dirty="0">
-                <a:solidFill>
-                  <a:schemeClr val="tx2">
-                    <a:lumMod val="50000"/>
-                  </a:schemeClr>
-                </a:solidFill>
-                <a:latin typeface="KoPub돋움체 Medium" panose="02020603020101020101" pitchFamily="18" charset="-127"/>
-                <a:ea typeface="KoPub돋움체 Light" panose="02020603020101020101"/>
+              <a:rPr lang="en-US" altLang="ko-KR" sz="2008" dirty="0">
+                <a:solidFill>
+                  <a:schemeClr val="tx2">
+                    <a:lumMod val="50000"/>
+                  </a:schemeClr>
+                </a:solidFill>
+                <a:latin typeface="KoPub돋움체 Bold" panose="02020603020101020101" pitchFamily="18" charset="-127"/>
+                <a:ea typeface="KoPub돋움체 Bold" panose="02020603020101020101" pitchFamily="18" charset="-127"/>
               </a:rPr>
               <a:t>+ 10·4·12 </a:t>
             </a:r>
           </a:p>
           <a:p>
             <a:r>
-              <a:rPr lang="en-US" altLang="ko-KR" dirty="0">
-                <a:solidFill>
-                  <a:schemeClr val="tx2">
-                    <a:lumMod val="50000"/>
-                  </a:schemeClr>
-                </a:solidFill>
-                <a:latin typeface="KoPub돋움체 Medium" panose="02020603020101020101" pitchFamily="18" charset="-127"/>
-                <a:ea typeface="KoPub돋움체 Light" panose="02020603020101020101"/>
+              <a:rPr lang="en-US" altLang="ko-KR" sz="2008" dirty="0">
+                <a:solidFill>
+                  <a:schemeClr val="tx2">
+                    <a:lumMod val="50000"/>
+                  </a:schemeClr>
+                </a:solidFill>
+                <a:latin typeface="KoPub돋움체 Bold" panose="02020603020101020101" pitchFamily="18" charset="-127"/>
+                <a:ea typeface="KoPub돋움체 Bold" panose="02020603020101020101" pitchFamily="18" charset="-127"/>
               </a:rPr>
               <a:t>[C] </a:t>
             </a:r>
             <a:r>
-              <a:rPr lang="ko-KR" altLang="en-US" dirty="0">
-                <a:solidFill>
-                  <a:schemeClr val="tx2">
-                    <a:lumMod val="50000"/>
-                  </a:schemeClr>
-                </a:solidFill>
-                <a:latin typeface="KoPub돋움체 Medium" panose="02020603020101020101" pitchFamily="18" charset="-127"/>
-                <a:ea typeface="KoPub돋움체 Light" panose="02020603020101020101"/>
+              <a:rPr lang="ko-KR" altLang="en-US" sz="2008" dirty="0">
+                <a:solidFill>
+                  <a:schemeClr val="tx2">
+                    <a:lumMod val="50000"/>
+                  </a:schemeClr>
+                </a:solidFill>
+                <a:latin typeface="KoPub돋움체 Bold" panose="02020603020101020101" pitchFamily="18" charset="-127"/>
+                <a:ea typeface="KoPub돋움체 Bold" panose="02020603020101020101" pitchFamily="18" charset="-127"/>
               </a:rPr>
               <a:t>상황</a:t>
             </a:r>
             <a:r>
-              <a:rPr lang="en-US" altLang="ko-KR" dirty="0">
-                <a:solidFill>
-                  <a:schemeClr val="tx2">
-                    <a:lumMod val="50000"/>
-                  </a:schemeClr>
-                </a:solidFill>
-                <a:latin typeface="KoPub돋움체 Medium" panose="02020603020101020101" pitchFamily="18" charset="-127"/>
-                <a:ea typeface="KoPub돋움체 Light" panose="02020603020101020101"/>
+              <a:rPr lang="en-US" altLang="ko-KR" sz="2008" dirty="0">
+                <a:solidFill>
+                  <a:schemeClr val="tx2">
+                    <a:lumMod val="50000"/>
+                  </a:schemeClr>
+                </a:solidFill>
+                <a:latin typeface="KoPub돋움체 Bold" panose="02020603020101020101" pitchFamily="18" charset="-127"/>
+                <a:ea typeface="KoPub돋움체 Bold" panose="02020603020101020101" pitchFamily="18" charset="-127"/>
               </a:rPr>
               <a:t>: PA </a:t>
             </a:r>
             <a:r>
-              <a:rPr lang="ko-KR" altLang="en-US" dirty="0">
-                <a:solidFill>
-                  <a:schemeClr val="tx2">
-                    <a:lumMod val="50000"/>
-                  </a:schemeClr>
-                </a:solidFill>
-                <a:latin typeface="KoPub돋움체 Medium" panose="02020603020101020101" pitchFamily="18" charset="-127"/>
-                <a:ea typeface="KoPub돋움체 Light" panose="02020603020101020101"/>
+              <a:rPr lang="ko-KR" altLang="en-US" sz="2008" dirty="0">
+                <a:solidFill>
+                  <a:schemeClr val="tx2">
+                    <a:lumMod val="50000"/>
+                  </a:schemeClr>
+                </a:solidFill>
+                <a:latin typeface="KoPub돋움체 Bold" panose="02020603020101020101" pitchFamily="18" charset="-127"/>
+                <a:ea typeface="KoPub돋움체 Bold" panose="02020603020101020101" pitchFamily="18" charset="-127"/>
               </a:rPr>
               <a:t>조치 예정 사유 및 시간 공유 </a:t>
             </a:r>
           </a:p>
           <a:p>
             <a:r>
-              <a:rPr lang="en-US" altLang="ko-KR" dirty="0">
-                <a:solidFill>
-                  <a:schemeClr val="tx2">
-                    <a:lumMod val="50000"/>
-                  </a:schemeClr>
-                </a:solidFill>
-                <a:latin typeface="KoPub돋움체 Medium" panose="02020603020101020101" pitchFamily="18" charset="-127"/>
-                <a:ea typeface="KoPub돋움체 Light" panose="02020603020101020101"/>
+              <a:rPr lang="en-US" altLang="ko-KR" sz="2008" dirty="0">
+                <a:solidFill>
+                  <a:schemeClr val="tx2">
+                    <a:lumMod val="50000"/>
+                  </a:schemeClr>
+                </a:solidFill>
+                <a:latin typeface="KoPub돋움체 Bold" panose="02020603020101020101" pitchFamily="18" charset="-127"/>
+                <a:ea typeface="KoPub돋움체 Bold" panose="02020603020101020101" pitchFamily="18" charset="-127"/>
               </a:rPr>
               <a:t>[D] </a:t>
             </a:r>
             <a:r>
-              <a:rPr lang="ko-KR" altLang="en-US" dirty="0">
-                <a:solidFill>
-                  <a:schemeClr val="tx2">
-                    <a:lumMod val="50000"/>
-                  </a:schemeClr>
-                </a:solidFill>
-                <a:latin typeface="KoPub돋움체 Medium" panose="02020603020101020101" pitchFamily="18" charset="-127"/>
-                <a:ea typeface="KoPub돋움체 Light" panose="02020603020101020101"/>
+              <a:rPr lang="ko-KR" altLang="en-US" sz="2008" dirty="0">
+                <a:solidFill>
+                  <a:schemeClr val="tx2">
+                    <a:lumMod val="50000"/>
+                  </a:schemeClr>
+                </a:solidFill>
+                <a:latin typeface="KoPub돋움체 Bold" panose="02020603020101020101" pitchFamily="18" charset="-127"/>
+                <a:ea typeface="KoPub돋움체 Bold" panose="02020603020101020101" pitchFamily="18" charset="-127"/>
               </a:rPr>
               <a:t>완료</a:t>
             </a:r>
             <a:r>
-              <a:rPr lang="en-US" altLang="ko-KR" dirty="0">
-                <a:solidFill>
-                  <a:schemeClr val="tx2">
-                    <a:lumMod val="50000"/>
-                  </a:schemeClr>
-                </a:solidFill>
-                <a:latin typeface="KoPub돋움체 Medium" panose="02020603020101020101" pitchFamily="18" charset="-127"/>
-                <a:ea typeface="KoPub돋움체 Light" panose="02020603020101020101"/>
+              <a:rPr lang="en-US" altLang="ko-KR" sz="2008" dirty="0">
+                <a:solidFill>
+                  <a:schemeClr val="tx2">
+                    <a:lumMod val="50000"/>
+                  </a:schemeClr>
+                </a:solidFill>
+                <a:latin typeface="KoPub돋움체 Bold" panose="02020603020101020101" pitchFamily="18" charset="-127"/>
+                <a:ea typeface="KoPub돋움체 Bold" panose="02020603020101020101" pitchFamily="18" charset="-127"/>
               </a:rPr>
               <a:t>: </a:t>
             </a:r>
             <a:r>
-              <a:rPr lang="ko-KR" altLang="en-US" dirty="0">
-                <a:solidFill>
-                  <a:schemeClr val="tx2">
-                    <a:lumMod val="50000"/>
-                  </a:schemeClr>
-                </a:solidFill>
-                <a:latin typeface="KoPub돋움체 Medium" panose="02020603020101020101" pitchFamily="18" charset="-127"/>
-                <a:ea typeface="KoPub돋움체 Light" panose="02020603020101020101"/>
+              <a:rPr lang="ko-KR" altLang="en-US" sz="2008" dirty="0">
+                <a:solidFill>
+                  <a:schemeClr val="tx2">
+                    <a:lumMod val="50000"/>
+                  </a:schemeClr>
+                </a:solidFill>
+                <a:latin typeface="KoPub돋움체 Bold" panose="02020603020101020101" pitchFamily="18" charset="-127"/>
+                <a:ea typeface="KoPub돋움체 Bold" panose="02020603020101020101" pitchFamily="18" charset="-127"/>
               </a:rPr>
               <a:t>결과 </a:t>
             </a:r>
             <a:r>
-              <a:rPr lang="en-US" altLang="ko-KR" dirty="0">
-                <a:solidFill>
-                  <a:schemeClr val="tx2">
-                    <a:lumMod val="50000"/>
-                  </a:schemeClr>
-                </a:solidFill>
-                <a:latin typeface="KoPub돋움체 Medium" panose="02020603020101020101" pitchFamily="18" charset="-127"/>
-                <a:ea typeface="KoPub돋움체 Light" panose="02020603020101020101"/>
+              <a:rPr lang="en-US" altLang="ko-KR" sz="2008" dirty="0">
+                <a:solidFill>
+                  <a:schemeClr val="tx2">
+                    <a:lumMod val="50000"/>
+                  </a:schemeClr>
+                </a:solidFill>
+                <a:latin typeface="KoPub돋움체 Bold" panose="02020603020101020101" pitchFamily="18" charset="-127"/>
+                <a:ea typeface="KoPub돋움체 Bold" panose="02020603020101020101" pitchFamily="18" charset="-127"/>
               </a:rPr>
               <a:t>/ </a:t>
             </a:r>
             <a:r>
-              <a:rPr lang="ko-KR" altLang="en-US" dirty="0">
-                <a:solidFill>
-                  <a:schemeClr val="tx2">
-                    <a:lumMod val="50000"/>
-                  </a:schemeClr>
-                </a:solidFill>
-                <a:latin typeface="KoPub돋움체 Medium" panose="02020603020101020101" pitchFamily="18" charset="-127"/>
-                <a:ea typeface="KoPub돋움체 Light" panose="02020603020101020101"/>
+              <a:rPr lang="ko-KR" altLang="en-US" sz="2008" dirty="0">
+                <a:solidFill>
+                  <a:schemeClr val="tx2">
+                    <a:lumMod val="50000"/>
+                  </a:schemeClr>
+                </a:solidFill>
+                <a:latin typeface="KoPub돋움체 Bold" panose="02020603020101020101" pitchFamily="18" charset="-127"/>
+                <a:ea typeface="KoPub돋움체 Bold" panose="02020603020101020101" pitchFamily="18" charset="-127"/>
               </a:rPr>
               <a:t>현재 상태 </a:t>
             </a:r>
             <a:r>
-              <a:rPr lang="en-US" altLang="ko-KR" dirty="0">
-                <a:solidFill>
-                  <a:schemeClr val="tx2">
-                    <a:lumMod val="50000"/>
-                  </a:schemeClr>
-                </a:solidFill>
-                <a:latin typeface="KoPub돋움체 Medium" panose="02020603020101020101" pitchFamily="18" charset="-127"/>
-                <a:ea typeface="KoPub돋움체 Light" panose="02020603020101020101"/>
+              <a:rPr lang="en-US" altLang="ko-KR" sz="2008" dirty="0">
+                <a:solidFill>
+                  <a:schemeClr val="tx2">
+                    <a:lumMod val="50000"/>
+                  </a:schemeClr>
+                </a:solidFill>
+                <a:latin typeface="KoPub돋움체 Bold" panose="02020603020101020101" pitchFamily="18" charset="-127"/>
+                <a:ea typeface="KoPub돋움체 Bold" panose="02020603020101020101" pitchFamily="18" charset="-127"/>
               </a:rPr>
               <a:t>/ </a:t>
             </a:r>
             <a:r>
-              <a:rPr lang="ko-KR" altLang="en-US" dirty="0">
-                <a:solidFill>
-                  <a:schemeClr val="tx2">
-                    <a:lumMod val="50000"/>
-                  </a:schemeClr>
-                </a:solidFill>
-                <a:latin typeface="KoPub돋움체 Medium" panose="02020603020101020101" pitchFamily="18" charset="-127"/>
-                <a:ea typeface="KoPub돋움체 Light" panose="02020603020101020101"/>
+              <a:rPr lang="ko-KR" altLang="en-US" sz="2008" dirty="0">
+                <a:solidFill>
+                  <a:schemeClr val="tx2">
+                    <a:lumMod val="50000"/>
+                  </a:schemeClr>
+                </a:solidFill>
+                <a:latin typeface="KoPub돋움체 Bold" panose="02020603020101020101" pitchFamily="18" charset="-127"/>
+                <a:ea typeface="KoPub돋움체 Bold" panose="02020603020101020101" pitchFamily="18" charset="-127"/>
               </a:rPr>
               <a:t>추후 계획</a:t>
             </a:r>
             <a:r>
-              <a:rPr lang="en-US" altLang="ko-KR" dirty="0">
-                <a:solidFill>
-                  <a:schemeClr val="tx2">
-                    <a:lumMod val="50000"/>
-                  </a:schemeClr>
-                </a:solidFill>
-                <a:latin typeface="KoPub돋움체 Medium" panose="02020603020101020101" pitchFamily="18" charset="-127"/>
-                <a:ea typeface="KoPub돋움체 Light" panose="02020603020101020101"/>
+              <a:rPr lang="en-US" altLang="ko-KR" sz="2008" dirty="0">
+                <a:solidFill>
+                  <a:schemeClr val="tx2">
+                    <a:lumMod val="50000"/>
+                  </a:schemeClr>
+                </a:solidFill>
+                <a:latin typeface="KoPub돋움체 Bold" panose="02020603020101020101" pitchFamily="18" charset="-127"/>
+                <a:ea typeface="KoPub돋움체 Bold" panose="02020603020101020101" pitchFamily="18" charset="-127"/>
               </a:rPr>
               <a:t>(F/U) </a:t>
             </a:r>
@@ -10904,7 +10919,7 @@
           <p:cNvPr id="22" name="TextBox 21">
             <a:extLst>
               <a:ext uri="{FF2B5EF4-FFF2-40B4-BE49-F238E27FC236}">
-                <a16:creationId xmlns:a16="http://schemas.microsoft.com/office/drawing/2014/main" id="{BC57D6DD-C910-2054-C4EB-9D7E67088B09}"/>
+                <a16:creationId xmlns:a16="http://schemas.microsoft.com/office/drawing/2014/main" id="{E548FB6B-5102-E93B-047C-D702BA8B358D}"/>
               </a:ext>
             </a:extLst>
           </p:cNvPr>
@@ -10913,8 +10928,8 @@
         </p:nvSpPr>
         <p:spPr>
           <a:xfrm>
-            <a:off x="310149" y="2334991"/>
-            <a:ext cx="2458815" cy="369332"/>
+            <a:off x="328480" y="2286199"/>
+            <a:ext cx="2434449" cy="401708"/>
           </a:xfrm>
           <a:prstGeom prst="rect">
             <a:avLst/>
@@ -10929,61 +10944,61 @@
           <a:p>
             <a:pPr algn="ctr"/>
             <a:r>
-              <a:rPr lang="en-US" altLang="ko-KR" b="1" dirty="0">
+              <a:rPr lang="en-US" altLang="ko-KR" sz="2008" b="1" dirty="0">
                 <a:solidFill>
                   <a:srgbClr val="000000"/>
                 </a:solidFill>
-                <a:latin typeface="KoPub돋움체 Medium" panose="02020603020101020101" pitchFamily="18" charset="-127"/>
-                <a:ea typeface="KoPub돋움체 Light" panose="02020603020101020101"/>
+                <a:latin typeface="KoPub돋움체 Bold" panose="02020603020101020101" pitchFamily="18" charset="-127"/>
+                <a:ea typeface="KoPub돋움체 Bold" panose="02020603020101020101" pitchFamily="18" charset="-127"/>
               </a:rPr>
               <a:t>ACD </a:t>
             </a:r>
             <a:r>
-              <a:rPr lang="ko-KR" altLang="en-US" b="1" dirty="0">
+              <a:rPr lang="ko-KR" altLang="en-US" sz="2008" b="1" dirty="0">
                 <a:solidFill>
                   <a:srgbClr val="000000"/>
                 </a:solidFill>
-                <a:latin typeface="KoPub돋움체 Medium" panose="02020603020101020101" pitchFamily="18" charset="-127"/>
-                <a:ea typeface="KoPub돋움체 Light" panose="02020603020101020101"/>
+                <a:latin typeface="KoPub돋움체 Bold" panose="02020603020101020101" pitchFamily="18" charset="-127"/>
+                <a:ea typeface="KoPub돋움체 Bold" panose="02020603020101020101" pitchFamily="18" charset="-127"/>
               </a:rPr>
               <a:t>루프 </a:t>
             </a:r>
             <a:r>
-              <a:rPr lang="en-US" altLang="ko-KR" b="1" dirty="0">
+              <a:rPr lang="en-US" altLang="ko-KR" sz="2008" b="1" dirty="0">
                 <a:solidFill>
                   <a:srgbClr val="000000"/>
                 </a:solidFill>
-                <a:latin typeface="KoPub돋움체 Medium" panose="02020603020101020101" pitchFamily="18" charset="-127"/>
-                <a:ea typeface="KoPub돋움체 Light" panose="02020603020101020101"/>
+                <a:latin typeface="KoPub돋움체 Bold" panose="02020603020101020101" pitchFamily="18" charset="-127"/>
+                <a:ea typeface="KoPub돋움체 Bold" panose="02020603020101020101" pitchFamily="18" charset="-127"/>
               </a:rPr>
               <a:t>(</a:t>
             </a:r>
             <a:r>
-              <a:rPr lang="ko-KR" altLang="en-US" b="1" dirty="0">
+              <a:rPr lang="ko-KR" altLang="en-US" sz="2008" b="1" dirty="0">
                 <a:solidFill>
                   <a:srgbClr val="000000"/>
                 </a:solidFill>
-                <a:latin typeface="KoPub돋움체 Medium" panose="02020603020101020101" pitchFamily="18" charset="-127"/>
-                <a:ea typeface="KoPub돋움체 Light" panose="02020603020101020101"/>
+                <a:latin typeface="KoPub돋움체 Bold" panose="02020603020101020101" pitchFamily="18" charset="-127"/>
+                <a:ea typeface="KoPub돋움체 Bold" panose="02020603020101020101" pitchFamily="18" charset="-127"/>
               </a:rPr>
               <a:t>소통 공식</a:t>
             </a:r>
             <a:r>
-              <a:rPr lang="en-US" altLang="ko-KR" b="1" dirty="0">
+              <a:rPr lang="en-US" altLang="ko-KR" sz="2008" b="1" dirty="0">
                 <a:solidFill>
                   <a:srgbClr val="000000"/>
                 </a:solidFill>
-                <a:latin typeface="KoPub돋움체 Medium" panose="02020603020101020101" pitchFamily="18" charset="-127"/>
-                <a:ea typeface="KoPub돋움체 Light" panose="02020603020101020101"/>
+                <a:latin typeface="KoPub돋움체 Bold" panose="02020603020101020101" pitchFamily="18" charset="-127"/>
+                <a:ea typeface="KoPub돋움체 Bold" panose="02020603020101020101" pitchFamily="18" charset="-127"/>
               </a:rPr>
               <a:t>)</a:t>
             </a:r>
-            <a:endParaRPr lang="ko-KR" altLang="en-US" b="1" dirty="0">
+            <a:endParaRPr lang="ko-KR" altLang="en-US" sz="2008" b="1" dirty="0">
               <a:solidFill>
                 <a:srgbClr val="000000"/>
               </a:solidFill>
-              <a:latin typeface="KoPub돋움체 Medium" panose="02020603020101020101" pitchFamily="18" charset="-127"/>
-              <a:ea typeface="KoPub돋움체 Light" panose="02020603020101020101"/>
+              <a:latin typeface="KoPub돋움체 Bold" panose="02020603020101020101" pitchFamily="18" charset="-127"/>
+              <a:ea typeface="KoPub돋움체 Bold" panose="02020603020101020101" pitchFamily="18" charset="-127"/>
             </a:endParaRPr>
           </a:p>
         </p:txBody>
@@ -10993,7 +11008,7 @@
           <p:cNvPr id="11" name="사각형: 둥근 모서리 10">
             <a:extLst>
               <a:ext uri="{FF2B5EF4-FFF2-40B4-BE49-F238E27FC236}">
-                <a16:creationId xmlns:a16="http://schemas.microsoft.com/office/drawing/2014/main" id="{82DFC436-1063-4EC0-8D98-BDC4799C2F86}"/>
+                <a16:creationId xmlns:a16="http://schemas.microsoft.com/office/drawing/2014/main" id="{04C94E8E-849A-F14B-A439-09C29D27CC0B}"/>
               </a:ext>
             </a:extLst>
           </p:cNvPr>
@@ -11002,8 +11017,8 @@
         </p:nvSpPr>
         <p:spPr>
           <a:xfrm>
-            <a:off x="3050989" y="3188946"/>
-            <a:ext cx="5779400" cy="1115349"/>
+            <a:off x="3063172" y="3272851"/>
+            <a:ext cx="5802477" cy="1119803"/>
           </a:xfrm>
           <a:prstGeom prst="roundRect">
             <a:avLst>
@@ -11040,9 +11055,9 @@
           <a:lstStyle/>
           <a:p>
             <a:pPr algn="ctr"/>
-            <a:endParaRPr lang="ko-KR" altLang="en-US" sz="5080">
-              <a:latin typeface="KoPub돋움체 Medium" panose="02020603020101020101" pitchFamily="18" charset="-127"/>
-              <a:ea typeface="KoPub돋움체 Light" panose="02020603020101020101"/>
+            <a:endParaRPr lang="ko-KR" altLang="en-US" sz="5422">
+              <a:latin typeface="KoPub돋움체 Bold" panose="02020603020101020101" pitchFamily="18" charset="-127"/>
+              <a:ea typeface="KoPub돋움체 Bold" panose="02020603020101020101" pitchFamily="18" charset="-127"/>
             </a:endParaRPr>
           </a:p>
         </p:txBody>
@@ -11052,7 +11067,7 @@
           <p:cNvPr id="14" name="사각형: 둥근 모서리 13">
             <a:extLst>
               <a:ext uri="{FF2B5EF4-FFF2-40B4-BE49-F238E27FC236}">
-                <a16:creationId xmlns:a16="http://schemas.microsoft.com/office/drawing/2014/main" id="{8D3E48C3-10D6-461B-92DA-40EFC6B4C91E}"/>
+                <a16:creationId xmlns:a16="http://schemas.microsoft.com/office/drawing/2014/main" id="{7CD1227C-3E6D-A365-61B6-38763380BAA8}"/>
               </a:ext>
             </a:extLst>
           </p:cNvPr>
@@ -11061,8 +11076,8 @@
         </p:nvSpPr>
         <p:spPr>
           <a:xfrm>
-            <a:off x="208326" y="3188946"/>
-            <a:ext cx="2788897" cy="1115349"/>
+            <a:off x="209158" y="3272851"/>
+            <a:ext cx="2800033" cy="1119803"/>
           </a:xfrm>
           <a:prstGeom prst="roundRect">
             <a:avLst>
@@ -11097,9 +11112,9 @@
           <a:lstStyle/>
           <a:p>
             <a:pPr algn="ctr"/>
-            <a:endParaRPr lang="ko-KR" altLang="en-US" sz="5080">
-              <a:latin typeface="KoPub돋움체 Medium" panose="02020603020101020101" pitchFamily="18" charset="-127"/>
-              <a:ea typeface="KoPub돋움체 Light" panose="02020603020101020101"/>
+            <a:endParaRPr lang="ko-KR" altLang="en-US" sz="5422">
+              <a:latin typeface="KoPub돋움체 Bold" panose="02020603020101020101" pitchFamily="18" charset="-127"/>
+              <a:ea typeface="KoPub돋움체 Bold" panose="02020603020101020101" pitchFamily="18" charset="-127"/>
             </a:endParaRPr>
           </a:p>
         </p:txBody>
@@ -11109,7 +11124,7 @@
           <p:cNvPr id="16" name="TextBox 15">
             <a:extLst>
               <a:ext uri="{FF2B5EF4-FFF2-40B4-BE49-F238E27FC236}">
-                <a16:creationId xmlns:a16="http://schemas.microsoft.com/office/drawing/2014/main" id="{17C117C8-2C5F-42B0-8015-D651D05B1BD8}"/>
+                <a16:creationId xmlns:a16="http://schemas.microsoft.com/office/drawing/2014/main" id="{6523A4D5-A947-1DDF-AB93-612F7504A88B}"/>
               </a:ext>
             </a:extLst>
           </p:cNvPr>
@@ -11118,8 +11133,8 @@
         </p:nvSpPr>
         <p:spPr>
           <a:xfrm>
-            <a:off x="310149" y="3561954"/>
-            <a:ext cx="2361544" cy="369332"/>
+            <a:off x="385419" y="3647348"/>
+            <a:ext cx="2222910" cy="401708"/>
           </a:xfrm>
           <a:prstGeom prst="rect">
             <a:avLst/>
@@ -11134,51 +11149,51 @@
           <a:p>
             <a:pPr algn="ctr"/>
             <a:r>
-              <a:rPr lang="ko-KR" altLang="en-US" b="1" dirty="0">
+              <a:rPr lang="ko-KR" altLang="en-US" sz="2008" b="1" dirty="0">
                 <a:solidFill>
                   <a:srgbClr val="000000"/>
                 </a:solidFill>
-                <a:latin typeface="KoPub돋움체 Medium" panose="02020603020101020101" pitchFamily="18" charset="-127"/>
-                <a:ea typeface="KoPub돋움체 Light" panose="02020603020101020101"/>
+                <a:latin typeface="KoPub돋움체 Bold" panose="02020603020101020101" pitchFamily="18" charset="-127"/>
+                <a:ea typeface="KoPub돋움체 Bold" panose="02020603020101020101" pitchFamily="18" charset="-127"/>
               </a:rPr>
               <a:t>트리아제 </a:t>
             </a:r>
             <a:r>
-              <a:rPr lang="en-US" altLang="ko-KR" b="1" dirty="0">
+              <a:rPr lang="en-US" altLang="ko-KR" sz="2008" b="1" dirty="0">
                 <a:solidFill>
                   <a:srgbClr val="000000"/>
                 </a:solidFill>
-                <a:latin typeface="KoPub돋움체 Medium" panose="02020603020101020101" pitchFamily="18" charset="-127"/>
-                <a:ea typeface="KoPub돋움체 Light" panose="02020603020101020101"/>
+                <a:latin typeface="KoPub돋움체 Bold" panose="02020603020101020101" pitchFamily="18" charset="-127"/>
+                <a:ea typeface="KoPub돋움체 Bold" panose="02020603020101020101" pitchFamily="18" charset="-127"/>
               </a:rPr>
               <a:t>(</a:t>
             </a:r>
             <a:r>
-              <a:rPr lang="ko-KR" altLang="en-US" b="1" dirty="0" err="1">
+              <a:rPr lang="ko-KR" altLang="en-US" sz="2008" b="1" dirty="0" err="1">
                 <a:solidFill>
                   <a:srgbClr val="000000"/>
                 </a:solidFill>
-                <a:latin typeface="KoPub돋움체 Medium" panose="02020603020101020101" pitchFamily="18" charset="-127"/>
-                <a:ea typeface="KoPub돋움체 Light" panose="02020603020101020101"/>
+                <a:latin typeface="KoPub돋움체 Bold" panose="02020603020101020101" pitchFamily="18" charset="-127"/>
+                <a:ea typeface="KoPub돋움체 Bold" panose="02020603020101020101" pitchFamily="18" charset="-127"/>
               </a:rPr>
               <a:t>골든타임</a:t>
             </a:r>
             <a:r>
-              <a:rPr lang="en-US" altLang="ko-KR" b="1" dirty="0">
+              <a:rPr lang="en-US" altLang="ko-KR" sz="2008" b="1" dirty="0">
                 <a:solidFill>
                   <a:srgbClr val="000000"/>
                 </a:solidFill>
-                <a:latin typeface="KoPub돋움체 Medium" panose="02020603020101020101" pitchFamily="18" charset="-127"/>
-                <a:ea typeface="KoPub돋움체 Light" panose="02020603020101020101"/>
+                <a:latin typeface="KoPub돋움체 Bold" panose="02020603020101020101" pitchFamily="18" charset="-127"/>
+                <a:ea typeface="KoPub돋움체 Bold" panose="02020603020101020101" pitchFamily="18" charset="-127"/>
               </a:rPr>
               <a:t>)</a:t>
             </a:r>
-            <a:endParaRPr lang="ko-KR" altLang="en-US" b="1" dirty="0">
+            <a:endParaRPr lang="ko-KR" altLang="en-US" sz="2008" b="1" dirty="0">
               <a:solidFill>
                 <a:srgbClr val="000000"/>
               </a:solidFill>
-              <a:latin typeface="KoPub돋움체 Medium" panose="02020603020101020101" pitchFamily="18" charset="-127"/>
-              <a:ea typeface="KoPub돋움체 Light" panose="02020603020101020101"/>
+              <a:latin typeface="KoPub돋움체 Bold" panose="02020603020101020101" pitchFamily="18" charset="-127"/>
+              <a:ea typeface="KoPub돋움체 Bold" panose="02020603020101020101" pitchFamily="18" charset="-127"/>
             </a:endParaRPr>
           </a:p>
         </p:txBody>
@@ -11188,7 +11203,7 @@
           <p:cNvPr id="2" name="직사각형 1">
             <a:extLst>
               <a:ext uri="{FF2B5EF4-FFF2-40B4-BE49-F238E27FC236}">
-                <a16:creationId xmlns:a16="http://schemas.microsoft.com/office/drawing/2014/main" id="{CF6CD54F-7897-4496-8903-172CACA01316}"/>
+                <a16:creationId xmlns:a16="http://schemas.microsoft.com/office/drawing/2014/main" id="{264445BD-2635-1631-7591-3E13D5D3AD4F}"/>
               </a:ext>
             </a:extLst>
           </p:cNvPr>
@@ -11197,8 +11212,8 @@
         </p:nvSpPr>
         <p:spPr>
           <a:xfrm>
-            <a:off x="3161346" y="3284955"/>
-            <a:ext cx="5468122" cy="923330"/>
+            <a:off x="3173969" y="3322893"/>
+            <a:ext cx="5489957" cy="1019719"/>
           </a:xfrm>
           <a:prstGeom prst="rect">
             <a:avLst/>
@@ -11211,24 +11226,27 @@
           <a:lstStyle/>
           <a:p>
             <a:r>
-              <a:rPr lang="ko-KR" altLang="en-US" dirty="0">
-                <a:ea typeface="KoPub돋움체 Light" panose="02020603020101020101"/>
+              <a:rPr lang="ko-KR" altLang="en-US" sz="2008" dirty="0">
+                <a:latin typeface="KoPub돋움체 Bold" panose="02020603020101020101" pitchFamily="18" charset="-127"/>
+                <a:ea typeface="KoPub돋움체 Bold" panose="02020603020101020101" pitchFamily="18" charset="-127"/>
               </a:rPr>
               <a:t>빨강 10분(응급): 환자 안전 직결 (유선 병행)</a:t>
             </a:r>
           </a:p>
           <a:p>
             <a:r>
-              <a:rPr lang="ko-KR" altLang="en-US" dirty="0">
-                <a:ea typeface="KoPub돋움체 Light" panose="02020603020101020101"/>
+              <a:rPr lang="ko-KR" altLang="en-US" sz="2008" dirty="0">
+                <a:latin typeface="KoPub돋움체 Bold" panose="02020603020101020101" pitchFamily="18" charset="-127"/>
+                <a:ea typeface="KoPub돋움체 Bold" panose="02020603020101020101" pitchFamily="18" charset="-127"/>
               </a:rPr>
               <a:t>초록 4시간(우선): 당일 내 우선 처리 필요</a:t>
             </a:r>
           </a:p>
           <a:p>
             <a:r>
-              <a:rPr lang="ko-KR" altLang="en-US" dirty="0">
-                <a:ea typeface="KoPub돋움체 Light" panose="02020603020101020101"/>
+              <a:rPr lang="ko-KR" altLang="en-US" sz="2008" dirty="0">
+                <a:latin typeface="KoPub돋움체 Bold" panose="02020603020101020101" pitchFamily="18" charset="-127"/>
+                <a:ea typeface="KoPub돋움체 Bold" panose="02020603020101020101" pitchFamily="18" charset="-127"/>
               </a:rPr>
               <a:t>노랑 12시간(루틴): 근무 흐름 내 안정적 처리</a:t>
             </a:r>
@@ -11238,7 +11256,7 @@
     </p:spTree>
     <p:extLst>
       <p:ext uri="{BB962C8B-B14F-4D97-AF65-F5344CB8AC3E}">
-        <p14:creationId xmlns:p14="http://schemas.microsoft.com/office/powerpoint/2010/main" val="3993457661"/>
+        <p14:creationId xmlns:p14="http://schemas.microsoft.com/office/powerpoint/2010/main" val="3327635194"/>
       </p:ext>
     </p:extLst>
   </p:cSld>
@@ -11503,7 +11521,7 @@
   <a:extraClrSchemeLst/>
   <a:extLst>
     <a:ext uri="{05A4C25C-085E-4340-85A3-A5531E510DB2}">
-      <thm15:themeFamily xmlns:thm15="http://schemas.microsoft.com/office/thememl/2012/main" name="Office Theme" id="{62F939B6-93AF-4DB8-9C6B-D6C7DFDC589F}" vid="{4A3C46E8-61CC-4603-A589-7422A47A8E4A}"/>
+      <thm15:themeFamily xmlns:thm15="http://schemas.microsoft.com/office/thememl/2012/main" name="Office 2013 - 2022 Theme" id="{62F939B6-93AF-4DB8-9C6B-D6C7DFDC589F}" vid="{4A3C46E8-61CC-4603-A589-7422A47A8E4A}"/>
     </a:ext>
   </a:extLst>
 </a:theme>
